--- a/wechat/curriculum/智能通识课.pptx
+++ b/wechat/curriculum/智能通识课.pptx
@@ -51,6 +51,12 @@
     <p:sldId id="299" r:id="rId51"/>
     <p:sldId id="300" r:id="rId52"/>
     <p:sldId id="301" r:id="rId53"/>
+    <p:sldId id="302" r:id="rId54"/>
+    <p:sldId id="303" r:id="rId55"/>
+    <p:sldId id="304" r:id="rId56"/>
+    <p:sldId id="305" r:id="rId57"/>
+    <p:sldId id="306" r:id="rId58"/>
+    <p:sldId id="307" r:id="rId59"/>
   </p:sldIdLst>
   <p:sldSz cx="12191695" cy="6858000" type="screen4x3"/>
   <p:notesSz cx="6858000" cy="9144000"/>
@@ -1717,7 +1723,7 @@
           <a:lstStyle/>
           <a:p>
             <a:r>
-              <a:t>这是提示词的全部秘密。</a:t>
+              <a:t>下面用三家厂商的官方指南和几篇论文说明这不是我的个人经验。</a:t>
             </a:r>
           </a:p>
         </p:txBody>
@@ -1787,17 +1793,12 @@
           <a:lstStyle/>
           <a:p>
             <a:r>
-              <a:t>复现的模型：GPT-3.5、GPT-4o、Gemini、Claude、Llama。变差的包括当时最强的 GPT-4（80.75→78.96）。</a:t>
-            </a:r>
-          </a:p>
-          <a:p>
-            <a:r>
-              <a:t>⚠️ 别跟 1.3 ① 混：①是往内部注入向量，硬证据；这里否掉的是「随口加句话就能提分」。</a:t>
-            </a:r>
-          </a:p>
-          <a:p>
-            <a:r>
-              <a:t>时间紧就跳过这页。</a:t>
+              <a:t>OpenAI: Six strategies。Anthropic: Be clear and direct / Add context / Use examples / XML tags / Give a role / Control format / Chain prompts。Google: Prompt design strategies。</a:t>
+            </a:r>
+          </a:p>
+          <a:p>
+            <a:r>
+              <a:t>41% 出自 ACL 2026 Findings《What Prompts Don't Say》，同一篇还测到：说不清的提示词换个模型变差的概率是两倍。</a:t>
             </a:r>
           </a:p>
         </p:txBody>
@@ -1867,7 +1868,22 @@
           <a:lstStyle/>
           <a:p>
             <a:r>
-              <a:t>各种指标全对，唯一不对的是最终画面。之后 AI 自己从第 0 层重做，要求每一层和原版一个数都不差，一天推完六十块。</a:t>
+              <a:t>角色设定：162 个角色 × 2410 道题 × 4 个模型族，加了跟不加没区别，哪个角色好基本随机；另一组在 MMLU 上测到 71.6% 掉到 66.3%。</a:t>
+            </a:r>
+          </a:p>
+          <a:p>
+            <a:r>
+              <a:t>⚠️ 但要说句公道话：角色设定对语气和格式确实有效——想让它说得像老师讲课可以用，想让它算得更对没用。</a:t>
+            </a:r>
+          </a:p>
+          <a:p>
+            <a:r>
+              <a:t>深呼吸：Google 用程序自动搜索出的字符串，在那个模型那个数据集上 80.2% vs 71.8%。论文讲的是「自动优化提示词有效」，不是这句话有魔力。</a:t>
+            </a:r>
+          </a:p>
+          <a:p>
+            <a:r>
+              <a:t>这对我很重要：宾大 Wharton 用 GPT-4o 每题重复 100 次，单题上能摆动 60 个百分点，但整个数据集上互相抵消。</a:t>
             </a:r>
           </a:p>
         </p:txBody>
@@ -1937,12 +1953,17 @@
           <a:lstStyle/>
           <a:p>
             <a:r>
-              <a:t>两年后所有人都是「管 AI 的经理人」，差别只在指挥和验收的能力。</a:t>
-            </a:r>
-          </a:p>
-          <a:p>
-            <a:r>
-              <a:t>★ 若老师问「学生用 AI 写作业怎么办」，可答：让他当堂讲一遍。但别主动讲这条。</a:t>
+              <a:t>Wei et al. 2022, arXiv:2201.11903，PaLM 540B 在 GSM8K 上 17.9%→56.9%。</a:t>
+            </a:r>
+          </a:p>
+          <a:p>
+            <a:r>
+              <a:t>原论文：约 100B 参数以下无效甚至有害，会产出「流畅但不合逻辑」的推理链。</a:t>
+            </a:r>
+          </a:p>
+          <a:p>
+            <a:r>
+              <a:t>老化的证据：arXiv:2608.24641，测了五种技巧跨三组新老模型，GPT 线上新版本的边际收益递减甚至为负。</a:t>
             </a:r>
           </a:p>
         </p:txBody>
@@ -2012,7 +2033,12 @@
           <a:lstStyle/>
           <a:p>
             <a:r>
-              <a:t>教这件事没被替代，只是对象多了一个。跟带新班一样，第一节课定调。</a:t>
+              <a:t>「这对我的职业生涯很重要」：2023 年一篇论文宣称提升 115%，2024 年系统复现发现几乎没有统计显著效果。那个 115% 是挑每个任务最好的一句算的，取平均只有 2%；原论文自己的表格里六个模型有三个反而变差，包括当时最强的 GPT-4。</a:t>
+            </a:r>
+          </a:p>
+          <a:p>
+            <a:r>
+              <a:t>⚠️ 别跟 1.3 ① 混：①是往模型内部注入向量，硬证据；这里否掉的是「随口加句话就能可靠提分」。</a:t>
             </a:r>
           </a:p>
         </p:txBody>
@@ -2082,7 +2108,7 @@
           <a:lstStyle/>
           <a:p>
             <a:r>
-              <a:t>那些叠衣服、递水杯的演示视频：训练集里密度最高的几个动作，换个杯子形状就要重采一批数据。</a:t>
+              <a:t>各种指标全对，唯一不对的是最终画面。之后 AI 自己从第 0 层重做，要求每一层和原版一个数都不差，一天推完六十块。</a:t>
             </a:r>
           </a:p>
         </p:txBody>
@@ -2222,7 +2248,12 @@
           <a:lstStyle/>
           <a:p>
             <a:r>
-              <a:t>这个悖论给上一页那个立场提供了学界公认的说法。</a:t>
+              <a:t>两年后所有人都是「管 AI 的经理人」，差别只在指挥和验收的能力。</a:t>
+            </a:r>
+          </a:p>
+          <a:p>
+            <a:r>
+              <a:t>★ 若老师问「学生用 AI 写作业怎么办」，可答：让他当堂讲一遍。但别主动讲这条。</a:t>
             </a:r>
           </a:p>
         </p:txBody>
@@ -2292,17 +2323,7 @@
           <a:lstStyle/>
           <a:p>
             <a:r>
-              <a:t>原话大意：让计算机在智力测验或下棋上达到成人水平相对容易，但要让它有一岁小孩的感知和行动能力，极难甚至做不到。</a:t>
-            </a:r>
-          </a:p>
-          <a:p>
-            <a:r>
-              <a:t>为什么：感知运动能力被打磨了几亿年，用起来不费力所以显得「简单」；抽象推理是最近几万年才有的，还很生涩，反而显得「高级」。</a:t>
-            </a:r>
-          </a:p>
-          <a:p>
-            <a:r>
-              <a:t>**我们对难易的判断，是被自己的内省骗了。**</a:t>
+              <a:t>教这件事没被替代，只是对象多了一个。跟带新班一样，第一节课定调。</a:t>
             </a:r>
           </a:p>
         </p:txBody>
@@ -2372,12 +2393,7 @@
           <a:lstStyle/>
           <a:p>
             <a:r>
-              <a:t>⚠️ 三个版本别混：OSWorld 原版 / OSWorld-Verified（现在的通用口径）/ OSWorld 2.0（另一套协议）。</a:t>
-            </a:r>
-          </a:p>
-          <a:p>
-            <a:r>
-              <a:t>86% 是 Verified，72.6% 是 2.0。</a:t>
+              <a:t>那些叠衣服、递水杯的演示视频：训练集里密度最高的几个动作，换个杯子形状就要重采一批数据。</a:t>
             </a:r>
           </a:p>
         </p:txBody>
@@ -2447,7 +2463,7 @@
           <a:lstStyle/>
           <a:p>
             <a:r>
-              <a:t>老师听到这里会放心：AI 在屏幕里很强，出屏幕很弱。</a:t>
+              <a:t>这个悖论给上一页那个立场提供了学界公认的说法。</a:t>
             </a:r>
           </a:p>
         </p:txBody>
@@ -2517,12 +2533,17 @@
           <a:lstStyle/>
           <a:p>
             <a:r>
-              <a:t>老师日常备课，DeepSeek、豆包、Kimi 都够，不用追最新。</a:t>
-            </a:r>
-          </a:p>
-          <a:p>
-            <a:r>
-              <a:t>★ 看气氛：国产模型不防「AI 有想法」、防政治敏感词；美国模型反过来。不合适就跳。</a:t>
+              <a:t>原话大意：让计算机在智力测验或下棋上达到成人水平相对容易，但要让它有一岁小孩的感知和行动能力，极难甚至做不到。</a:t>
+            </a:r>
+          </a:p>
+          <a:p>
+            <a:r>
+              <a:t>为什么：感知运动能力被打磨了几亿年，用起来不费力所以显得「简单」；抽象推理是最近几万年才有的，还很生涩，反而显得「高级」。</a:t>
+            </a:r>
+          </a:p>
+          <a:p>
+            <a:r>
+              <a:t>**我们对难易的判断，是被自己的内省骗了。**</a:t>
             </a:r>
           </a:p>
         </p:txBody>
@@ -2592,7 +2613,22 @@
           <a:lstStyle/>
           <a:p>
             <a:r>
-              <a:t>回到开场老师的那两三个回答，用讲过的机制各解释一句。</a:t>
+              <a:t>当场指着屏幕说「你们现在看的这个就是」。这是全场唯一一个不用截图、不用联网的活证据。</a:t>
+            </a:r>
+          </a:p>
+          <a:p>
+            <a:r>
+              <a:t>好处不只是快：改一个数字所有相关页面一起更新不会漏；排版规则写在程序里，不会这页字大那页字小。昨晚改了七八处，每次重跑十秒。</a:t>
+            </a:r>
+          </a:p>
+          <a:p>
+            <a:r>
+              <a:t>翻译成能用的：与其让 AI 帮你在软件里一步步操作，不如让它直接生成一个能用的文件——教案、试卷、成绩统计表都一样。</a:t>
+            </a:r>
+          </a:p>
+          <a:p>
+            <a:r>
+              <a:t>下一页就是它「用鼠标」有多差的数据。</a:t>
             </a:r>
           </a:p>
         </p:txBody>
@@ -2662,7 +2698,247 @@
           <a:lstStyle/>
           <a:p>
             <a:r>
-              <a:t>说完就停，不加「对学生也一样」——在座的都想得到。</a:t>
+              <a:t>⚠️ 三个版本别混：OSWorld 原版 / OSWorld-Verified（现在的通用口径）/ OSWorld 2.0（另一套协议）。</a:t>
+            </a:r>
+          </a:p>
+          <a:p>
+            <a:r>
+              <a:t>86% 是 Verified，72.6% 是 2.0。</a:t>
+            </a:r>
+          </a:p>
+        </p:txBody>
+      </p:sp>
+      <p:sp>
+        <p:nvSpPr>
+          <p:cNvPr id="4" name="Slide Number Placeholder 3"/>
+          <p:cNvSpPr>
+            <a:spLocks noGrp="1"/>
+          </p:cNvSpPr>
+          <p:nvPr>
+            <p:ph type="sldNum" idx="5" sz="quarter"/>
+          </p:nvPr>
+        </p:nvSpPr>
+        <p:spPr/>
+      </p:sp>
+    </p:spTree>
+  </p:cSld>
+  <p:clrMapOvr>
+    <a:masterClrMapping/>
+  </p:clrMapOvr>
+</p:notes>
+</file>
+
+<file path=ppt/notesSlides/notesSlide37.xml><?xml version="1.0" encoding="utf-8"?>
+<p:notes xmlns:a="http://schemas.openxmlformats.org/drawingml/2006/main" xmlns:p="http://schemas.openxmlformats.org/presentationml/2006/main" xmlns:r="http://schemas.openxmlformats.org/officeDocument/2006/relationships">
+  <p:cSld>
+    <p:spTree>
+      <p:nvGrpSpPr>
+        <p:cNvPr id="1" name=""/>
+        <p:cNvGrpSpPr/>
+        <p:nvPr/>
+      </p:nvGrpSpPr>
+      <p:grpSpPr>
+        <a:xfrm>
+          <a:off x="0" y="0"/>
+          <a:ext cx="0" cy="0"/>
+          <a:chOff x="0" y="0"/>
+          <a:chExt cx="0" cy="0"/>
+        </a:xfrm>
+      </p:grpSpPr>
+      <p:sp>
+        <p:nvSpPr>
+          <p:cNvPr id="2" name="Slide Image Placeholder 1"/>
+          <p:cNvSpPr>
+            <a:spLocks noGrp="1"/>
+          </p:cNvSpPr>
+          <p:nvPr>
+            <p:ph type="sldImg" idx="2"/>
+          </p:nvPr>
+        </p:nvSpPr>
+        <p:spPr/>
+      </p:sp>
+      <p:sp>
+        <p:nvSpPr>
+          <p:cNvPr id="3" name="Notes Placeholder 2"/>
+          <p:cNvSpPr>
+            <a:spLocks noGrp="1"/>
+          </p:cNvSpPr>
+          <p:nvPr>
+            <p:ph type="body" idx="3" sz="quarter"/>
+          </p:nvPr>
+        </p:nvSpPr>
+        <p:spPr/>
+        <p:txBody>
+          <a:bodyPr/>
+          <a:lstStyle/>
+          <a:p>
+            <a:r>
+              <a:t>少一次听上去微不足道，但这是全世界数学家找了半个世纪没找到的那一次。</a:t>
+            </a:r>
+          </a:p>
+          <a:p>
+            <a:r>
+              <a:t>⚠️ 说准：是复数矩阵这个特定设定，而且是「找到一个更好的构造」不是「证明了一个定理」。矩阵乘法的指数仍是开放问题。</a:t>
+            </a:r>
+          </a:p>
+        </p:txBody>
+      </p:sp>
+      <p:sp>
+        <p:nvSpPr>
+          <p:cNvPr id="4" name="Slide Number Placeholder 3"/>
+          <p:cNvSpPr>
+            <a:spLocks noGrp="1"/>
+          </p:cNvSpPr>
+          <p:nvPr>
+            <p:ph type="sldNum" idx="5" sz="quarter"/>
+          </p:nvPr>
+        </p:nvSpPr>
+        <p:spPr/>
+      </p:sp>
+    </p:spTree>
+  </p:cSld>
+  <p:clrMapOvr>
+    <a:masterClrMapping/>
+  </p:clrMapOvr>
+</p:notes>
+</file>
+
+<file path=ppt/notesSlides/notesSlide38.xml><?xml version="1.0" encoding="utf-8"?>
+<p:notes xmlns:a="http://schemas.openxmlformats.org/drawingml/2006/main" xmlns:p="http://schemas.openxmlformats.org/presentationml/2006/main" xmlns:r="http://schemas.openxmlformats.org/officeDocument/2006/relationships">
+  <p:cSld>
+    <p:spTree>
+      <p:nvGrpSpPr>
+        <p:cNvPr id="1" name=""/>
+        <p:cNvGrpSpPr/>
+        <p:nvPr/>
+      </p:nvGrpSpPr>
+      <p:grpSpPr>
+        <a:xfrm>
+          <a:off x="0" y="0"/>
+          <a:ext cx="0" cy="0"/>
+          <a:chOff x="0" y="0"/>
+          <a:chExt cx="0" cy="0"/>
+        </a:xfrm>
+      </p:grpSpPr>
+      <p:sp>
+        <p:nvSpPr>
+          <p:cNvPr id="2" name="Slide Image Placeholder 1"/>
+          <p:cNvSpPr>
+            <a:spLocks noGrp="1"/>
+          </p:cNvSpPr>
+          <p:nvPr>
+            <p:ph type="sldImg" idx="2"/>
+          </p:nvPr>
+        </p:nvSpPr>
+        <p:spPr/>
+      </p:sp>
+      <p:sp>
+        <p:nvSpPr>
+          <p:cNvPr id="3" name="Notes Placeholder 2"/>
+          <p:cNvSpPr>
+            <a:spLocks noGrp="1"/>
+          </p:cNvSpPr>
+          <p:nvPr>
+            <p:ph type="body" idx="3" sz="quarter"/>
+          </p:nvPr>
+        </p:nvSpPr>
+        <p:spPr/>
+        <p:txBody>
+          <a:bodyPr/>
+          <a:lstStyle/>
+          <a:p>
+            <a:r>
+              <a:t>这就是莫拉维克悖论的当代版本。</a:t>
+            </a:r>
+          </a:p>
+          <a:p>
+            <a:r>
+              <a:t>⚠️ 顺带说成功率：那 50 多个问题里约 75% 只是复现了已知最好解，20% 才是真正改进。八成情况它做的是追平，不是超越。</a:t>
+            </a:r>
+          </a:p>
+          <a:p>
+            <a:r>
+              <a:t>⚠️ 陶哲轩还指出 AlphaEvolve 可靠的原因：LLM 只负责提出变异，验证器是人写的代码，不会产生幻觉。AI 负责猜，人写的程序负责判。</a:t>
+            </a:r>
+          </a:p>
+        </p:txBody>
+      </p:sp>
+      <p:sp>
+        <p:nvSpPr>
+          <p:cNvPr id="4" name="Slide Number Placeholder 3"/>
+          <p:cNvSpPr>
+            <a:spLocks noGrp="1"/>
+          </p:cNvSpPr>
+          <p:nvPr>
+            <p:ph type="sldNum" idx="5" sz="quarter"/>
+          </p:nvPr>
+        </p:nvSpPr>
+        <p:spPr/>
+      </p:sp>
+    </p:spTree>
+  </p:cSld>
+  <p:clrMapOvr>
+    <a:masterClrMapping/>
+  </p:clrMapOvr>
+</p:notes>
+</file>
+
+<file path=ppt/notesSlides/notesSlide39.xml><?xml version="1.0" encoding="utf-8"?>
+<p:notes xmlns:a="http://schemas.openxmlformats.org/drawingml/2006/main" xmlns:p="http://schemas.openxmlformats.org/presentationml/2006/main" xmlns:r="http://schemas.openxmlformats.org/officeDocument/2006/relationships">
+  <p:cSld>
+    <p:spTree>
+      <p:nvGrpSpPr>
+        <p:cNvPr id="1" name=""/>
+        <p:cNvGrpSpPr/>
+        <p:nvPr/>
+      </p:nvGrpSpPr>
+      <p:grpSpPr>
+        <a:xfrm>
+          <a:off x="0" y="0"/>
+          <a:ext cx="0" cy="0"/>
+          <a:chOff x="0" y="0"/>
+          <a:chExt cx="0" cy="0"/>
+        </a:xfrm>
+      </p:grpSpPr>
+      <p:sp>
+        <p:nvSpPr>
+          <p:cNvPr id="2" name="Slide Image Placeholder 1"/>
+          <p:cNvSpPr>
+            <a:spLocks noGrp="1"/>
+          </p:cNvSpPr>
+          <p:nvPr>
+            <p:ph type="sldImg" idx="2"/>
+          </p:nvPr>
+        </p:nvSpPr>
+        <p:spPr/>
+      </p:sp>
+      <p:sp>
+        <p:nvSpPr>
+          <p:cNvPr id="3" name="Notes Placeholder 2"/>
+          <p:cNvSpPr>
+            <a:spLocks noGrp="1"/>
+          </p:cNvSpPr>
+          <p:nvPr>
+            <p:ph type="body" idx="3" sz="quarter"/>
+          </p:nvPr>
+        </p:nvSpPr>
+        <p:spPr/>
+        <p:txBody>
+          <a:bodyPr/>
+          <a:lstStyle/>
+          <a:p>
+            <a:r>
+              <a:t>OpenAI 研究员随后删帖道歉。回复「This is embarrassing」的是 DeepMind 的 Demis Hassabis。</a:t>
+            </a:r>
+          </a:p>
+          <a:p>
+            <a:r>
+              <a:t>给老师的一句：看到「AI 解决了 X」的标题，先问一句——**它是证明了，还是搜到了？**</a:t>
+            </a:r>
+          </a:p>
+          <a:p>
+            <a:r>
+              <a:t>时间紧可跳过这页。</a:t>
             </a:r>
           </a:p>
         </p:txBody>
@@ -2733,6 +3009,291 @@
           <a:p>
             <a:r>
               <a:t>2023 年 ChatGPT 那一波。老师熟悉的类比：背课文接龙。</a:t>
+            </a:r>
+          </a:p>
+        </p:txBody>
+      </p:sp>
+      <p:sp>
+        <p:nvSpPr>
+          <p:cNvPr id="4" name="Slide Number Placeholder 3"/>
+          <p:cNvSpPr>
+            <a:spLocks noGrp="1"/>
+          </p:cNvSpPr>
+          <p:nvPr>
+            <p:ph type="sldNum" idx="5" sz="quarter"/>
+          </p:nvPr>
+        </p:nvSpPr>
+        <p:spPr/>
+      </p:sp>
+    </p:spTree>
+  </p:cSld>
+  <p:clrMapOvr>
+    <a:masterClrMapping/>
+  </p:clrMapOvr>
+</p:notes>
+</file>
+
+<file path=ppt/notesSlides/notesSlide40.xml><?xml version="1.0" encoding="utf-8"?>
+<p:notes xmlns:a="http://schemas.openxmlformats.org/drawingml/2006/main" xmlns:p="http://schemas.openxmlformats.org/presentationml/2006/main" xmlns:r="http://schemas.openxmlformats.org/officeDocument/2006/relationships">
+  <p:cSld>
+    <p:spTree>
+      <p:nvGrpSpPr>
+        <p:cNvPr id="1" name=""/>
+        <p:cNvGrpSpPr/>
+        <p:nvPr/>
+      </p:nvGrpSpPr>
+      <p:grpSpPr>
+        <a:xfrm>
+          <a:off x="0" y="0"/>
+          <a:ext cx="0" cy="0"/>
+          <a:chOff x="0" y="0"/>
+          <a:chExt cx="0" cy="0"/>
+        </a:xfrm>
+      </p:grpSpPr>
+      <p:sp>
+        <p:nvSpPr>
+          <p:cNvPr id="2" name="Slide Image Placeholder 1"/>
+          <p:cNvSpPr>
+            <a:spLocks noGrp="1"/>
+          </p:cNvSpPr>
+          <p:nvPr>
+            <p:ph type="sldImg" idx="2"/>
+          </p:nvPr>
+        </p:nvSpPr>
+        <p:spPr/>
+      </p:sp>
+      <p:sp>
+        <p:nvSpPr>
+          <p:cNvPr id="3" name="Notes Placeholder 2"/>
+          <p:cNvSpPr>
+            <a:spLocks noGrp="1"/>
+          </p:cNvSpPr>
+          <p:nvPr>
+            <p:ph type="body" idx="3" sz="quarter"/>
+          </p:nvPr>
+        </p:nvSpPr>
+        <p:spPr/>
+        <p:txBody>
+          <a:bodyPr/>
+          <a:lstStyle/>
+          <a:p>
+            <a:r>
+              <a:t>老师听到这里会放心：AI 在屏幕里很强，出屏幕很弱。</a:t>
+            </a:r>
+          </a:p>
+        </p:txBody>
+      </p:sp>
+      <p:sp>
+        <p:nvSpPr>
+          <p:cNvPr id="4" name="Slide Number Placeholder 3"/>
+          <p:cNvSpPr>
+            <a:spLocks noGrp="1"/>
+          </p:cNvSpPr>
+          <p:nvPr>
+            <p:ph type="sldNum" idx="5" sz="quarter"/>
+          </p:nvPr>
+        </p:nvSpPr>
+        <p:spPr/>
+      </p:sp>
+    </p:spTree>
+  </p:cSld>
+  <p:clrMapOvr>
+    <a:masterClrMapping/>
+  </p:clrMapOvr>
+</p:notes>
+</file>
+
+<file path=ppt/notesSlides/notesSlide41.xml><?xml version="1.0" encoding="utf-8"?>
+<p:notes xmlns:a="http://schemas.openxmlformats.org/drawingml/2006/main" xmlns:p="http://schemas.openxmlformats.org/presentationml/2006/main" xmlns:r="http://schemas.openxmlformats.org/officeDocument/2006/relationships">
+  <p:cSld>
+    <p:spTree>
+      <p:nvGrpSpPr>
+        <p:cNvPr id="1" name=""/>
+        <p:cNvGrpSpPr/>
+        <p:nvPr/>
+      </p:nvGrpSpPr>
+      <p:grpSpPr>
+        <a:xfrm>
+          <a:off x="0" y="0"/>
+          <a:ext cx="0" cy="0"/>
+          <a:chOff x="0" y="0"/>
+          <a:chExt cx="0" cy="0"/>
+        </a:xfrm>
+      </p:grpSpPr>
+      <p:sp>
+        <p:nvSpPr>
+          <p:cNvPr id="2" name="Slide Image Placeholder 1"/>
+          <p:cNvSpPr>
+            <a:spLocks noGrp="1"/>
+          </p:cNvSpPr>
+          <p:nvPr>
+            <p:ph type="sldImg" idx="2"/>
+          </p:nvPr>
+        </p:nvSpPr>
+        <p:spPr/>
+      </p:sp>
+      <p:sp>
+        <p:nvSpPr>
+          <p:cNvPr id="3" name="Notes Placeholder 2"/>
+          <p:cNvSpPr>
+            <a:spLocks noGrp="1"/>
+          </p:cNvSpPr>
+          <p:nvPr>
+            <p:ph type="body" idx="3" sz="quarter"/>
+          </p:nvPr>
+        </p:nvSpPr>
+        <p:spPr/>
+        <p:txBody>
+          <a:bodyPr/>
+          <a:lstStyle/>
+          <a:p>
+            <a:r>
+              <a:t>老师日常备课，DeepSeek、豆包、Kimi 都够，不用追最新。</a:t>
+            </a:r>
+          </a:p>
+          <a:p>
+            <a:r>
+              <a:t>★ 看气氛：国产模型不防「AI 有想法」、防政治敏感词；美国模型反过来。不合适就跳。</a:t>
+            </a:r>
+          </a:p>
+        </p:txBody>
+      </p:sp>
+      <p:sp>
+        <p:nvSpPr>
+          <p:cNvPr id="4" name="Slide Number Placeholder 3"/>
+          <p:cNvSpPr>
+            <a:spLocks noGrp="1"/>
+          </p:cNvSpPr>
+          <p:nvPr>
+            <p:ph type="sldNum" idx="5" sz="quarter"/>
+          </p:nvPr>
+        </p:nvSpPr>
+        <p:spPr/>
+      </p:sp>
+    </p:spTree>
+  </p:cSld>
+  <p:clrMapOvr>
+    <a:masterClrMapping/>
+  </p:clrMapOvr>
+</p:notes>
+</file>
+
+<file path=ppt/notesSlides/notesSlide42.xml><?xml version="1.0" encoding="utf-8"?>
+<p:notes xmlns:a="http://schemas.openxmlformats.org/drawingml/2006/main" xmlns:p="http://schemas.openxmlformats.org/presentationml/2006/main" xmlns:r="http://schemas.openxmlformats.org/officeDocument/2006/relationships">
+  <p:cSld>
+    <p:spTree>
+      <p:nvGrpSpPr>
+        <p:cNvPr id="1" name=""/>
+        <p:cNvGrpSpPr/>
+        <p:nvPr/>
+      </p:nvGrpSpPr>
+      <p:grpSpPr>
+        <a:xfrm>
+          <a:off x="0" y="0"/>
+          <a:ext cx="0" cy="0"/>
+          <a:chOff x="0" y="0"/>
+          <a:chExt cx="0" cy="0"/>
+        </a:xfrm>
+      </p:grpSpPr>
+      <p:sp>
+        <p:nvSpPr>
+          <p:cNvPr id="2" name="Slide Image Placeholder 1"/>
+          <p:cNvSpPr>
+            <a:spLocks noGrp="1"/>
+          </p:cNvSpPr>
+          <p:nvPr>
+            <p:ph type="sldImg" idx="2"/>
+          </p:nvPr>
+        </p:nvSpPr>
+        <p:spPr/>
+      </p:sp>
+      <p:sp>
+        <p:nvSpPr>
+          <p:cNvPr id="3" name="Notes Placeholder 2"/>
+          <p:cNvSpPr>
+            <a:spLocks noGrp="1"/>
+          </p:cNvSpPr>
+          <p:nvPr>
+            <p:ph type="body" idx="3" sz="quarter"/>
+          </p:nvPr>
+        </p:nvSpPr>
+        <p:spPr/>
+        <p:txBody>
+          <a:bodyPr/>
+          <a:lstStyle/>
+          <a:p>
+            <a:r>
+              <a:t>回到开场老师的那两三个回答，用讲过的机制各解释一句。</a:t>
+            </a:r>
+          </a:p>
+        </p:txBody>
+      </p:sp>
+      <p:sp>
+        <p:nvSpPr>
+          <p:cNvPr id="4" name="Slide Number Placeholder 3"/>
+          <p:cNvSpPr>
+            <a:spLocks noGrp="1"/>
+          </p:cNvSpPr>
+          <p:nvPr>
+            <p:ph type="sldNum" idx="5" sz="quarter"/>
+          </p:nvPr>
+        </p:nvSpPr>
+        <p:spPr/>
+      </p:sp>
+    </p:spTree>
+  </p:cSld>
+  <p:clrMapOvr>
+    <a:masterClrMapping/>
+  </p:clrMapOvr>
+</p:notes>
+</file>
+
+<file path=ppt/notesSlides/notesSlide43.xml><?xml version="1.0" encoding="utf-8"?>
+<p:notes xmlns:a="http://schemas.openxmlformats.org/drawingml/2006/main" xmlns:p="http://schemas.openxmlformats.org/presentationml/2006/main" xmlns:r="http://schemas.openxmlformats.org/officeDocument/2006/relationships">
+  <p:cSld>
+    <p:spTree>
+      <p:nvGrpSpPr>
+        <p:cNvPr id="1" name=""/>
+        <p:cNvGrpSpPr/>
+        <p:nvPr/>
+      </p:nvGrpSpPr>
+      <p:grpSpPr>
+        <a:xfrm>
+          <a:off x="0" y="0"/>
+          <a:ext cx="0" cy="0"/>
+          <a:chOff x="0" y="0"/>
+          <a:chExt cx="0" cy="0"/>
+        </a:xfrm>
+      </p:grpSpPr>
+      <p:sp>
+        <p:nvSpPr>
+          <p:cNvPr id="2" name="Slide Image Placeholder 1"/>
+          <p:cNvSpPr>
+            <a:spLocks noGrp="1"/>
+          </p:cNvSpPr>
+          <p:nvPr>
+            <p:ph type="sldImg" idx="2"/>
+          </p:nvPr>
+        </p:nvSpPr>
+        <p:spPr/>
+      </p:sp>
+      <p:sp>
+        <p:nvSpPr>
+          <p:cNvPr id="3" name="Notes Placeholder 2"/>
+          <p:cNvSpPr>
+            <a:spLocks noGrp="1"/>
+          </p:cNvSpPr>
+          <p:nvPr>
+            <p:ph type="body" idx="3" sz="quarter"/>
+          </p:nvPr>
+        </p:nvSpPr>
+        <p:spPr/>
+        <p:txBody>
+          <a:bodyPr/>
+          <a:lstStyle/>
+          <a:p>
+            <a:r>
+              <a:t>说完就停，不加「对学生也一样」——在座的都想得到。</a:t>
             </a:r>
           </a:p>
         </p:txBody>
@@ -11938,45 +12499,6 @@
           </a:p>
         </p:txBody>
       </p:sp>
-      <p:sp>
-        <p:nvSpPr>
-          <p:cNvPr id="3" name="TextBox 2"/>
-          <p:cNvSpPr txBox="1"/>
-          <p:nvPr/>
-        </p:nvSpPr>
-        <p:spPr>
-          <a:xfrm>
-            <a:off x="914400" y="4480560"/>
-            <a:ext cx="10332720" cy="914400"/>
-          </a:xfrm>
-          <a:prstGeom prst="rect">
-            <a:avLst/>
-          </a:prstGeom>
-          <a:noFill/>
-        </p:spPr>
-        <p:txBody>
-          <a:bodyPr wrap="square" anchor="t">
-            <a:spAutoFit/>
-          </a:bodyPr>
-          <a:lstStyle/>
-          <a:p>
-            <a:pPr algn="ctr">
-              <a:lnSpc>
-                <a:spcPct val="115000"/>
-              </a:lnSpc>
-            </a:pPr>
-            <a:r>
-              <a:rPr sz="2000" b="0">
-                <a:solidFill>
-                  <a:srgbClr val="94A3B8"/>
-                </a:solidFill>
-                <a:latin typeface="Microsoft YaHei"/>
-              </a:rPr>
-              <a:t>网上那些「7 种提示词模板」，都是这一句的变体</a:t>
-            </a:r>
-          </a:p>
-        </p:txBody>
-      </p:sp>
     </p:spTree>
   </p:cSld>
   <p:clrMapOvr>
@@ -12157,7 +12679,7 @@
                 </a:solidFill>
                 <a:latin typeface="Microsoft YaHei"/>
               </a:rPr>
-              <a:t>★ 顺带破一个流传很广的说法</a:t>
+              <a:t>这不是我的个人经验：三家官方指南的交集</a:t>
             </a:r>
           </a:p>
         </p:txBody>
@@ -12234,22 +12756,13 @@
               </a:lnSpc>
             </a:pPr>
             <a:r>
-              <a:rPr sz="2400" b="0">
+              <a:rPr sz="2200" b="0">
                 <a:solidFill>
                   <a:srgbClr val="F8FAFC"/>
                 </a:solidFill>
                 <a:latin typeface="Microsoft YaHei"/>
               </a:rPr>
-              <a:t>有个提示词咒语很火：加一句</a:t>
-            </a:r>
-            <a:r>
-              <a:rPr sz="2400" b="1">
-                <a:solidFill>
-                  <a:srgbClr val="F8FAFC"/>
-                </a:solidFill>
-                <a:latin typeface="Microsoft YaHei"/>
-              </a:rPr>
-              <a:t>「这对我的职业生涯很重要」</a:t>
+              <a:t>OpenAI 列了六条，Anthropic 七条，Google 七条</a:t>
             </a:r>
           </a:p>
         </p:txBody>
@@ -12282,22 +12795,22 @@
               </a:lnSpc>
             </a:pPr>
             <a:r>
-              <a:rPr sz="2400" b="0">
+              <a:rPr sz="2200" b="1">
                 <a:solidFill>
                   <a:srgbClr val="F8FAFC"/>
                 </a:solidFill>
                 <a:latin typeface="Microsoft YaHei"/>
               </a:rPr>
-              <a:t>出处是 2023 年一篇论文，宣称某个测试上</a:t>
-            </a:r>
-            <a:r>
-              <a:rPr sz="2400" b="1">
+              <a:t>三家都有的只有四条</a:t>
+            </a:r>
+            <a:r>
+              <a:rPr sz="2200" b="0">
                 <a:solidFill>
                   <a:srgbClr val="F8FAFC"/>
                 </a:solidFill>
                 <a:latin typeface="Microsoft YaHei"/>
               </a:rPr>
-              <a:t>提升 115%</a:t>
+              <a:t>：</a:t>
             </a:r>
           </a:p>
         </p:txBody>
@@ -12330,13 +12843,13 @@
               </a:lnSpc>
             </a:pPr>
             <a:r>
-              <a:rPr sz="2400" b="1">
+              <a:rPr sz="2200" b="0">
                 <a:solidFill>
                   <a:srgbClr val="F8FAFC"/>
                 </a:solidFill>
                 <a:latin typeface="Microsoft YaHei"/>
               </a:rPr>
-              <a:t>2024 年有人系统复现：几乎没有统计显著的效果</a:t>
+              <a:t>　把指令说清楚　·　给示例　·　补上下文　·　拆分复杂任务</a:t>
             </a:r>
           </a:p>
         </p:txBody>
@@ -12369,61 +12882,22 @@
               </a:lnSpc>
             </a:pPr>
             <a:r>
-              <a:rPr sz="2400" b="0">
+              <a:rPr sz="2200" b="0">
                 <a:solidFill>
                   <a:srgbClr val="F8FAFC"/>
                 </a:solidFill>
                 <a:latin typeface="Microsoft YaHei"/>
               </a:rPr>
-              <a:t>那个 115% 是挑每个任务最好的一句算的，取平均只有 2%</a:t>
-            </a:r>
-          </a:p>
-        </p:txBody>
-      </p:sp>
-      <p:sp>
-        <p:nvSpPr>
-          <p:cNvPr id="8" name="TextBox 7"/>
-          <p:cNvSpPr txBox="1"/>
-          <p:nvPr/>
-        </p:nvSpPr>
-        <p:spPr>
-          <a:xfrm>
-            <a:off x="914400" y="5303520"/>
-            <a:ext cx="10332720" cy="914400"/>
-          </a:xfrm>
-          <a:prstGeom prst="rect">
-            <a:avLst/>
-          </a:prstGeom>
-          <a:noFill/>
-        </p:spPr>
-        <p:txBody>
-          <a:bodyPr wrap="square" anchor="t">
-            <a:spAutoFit/>
-          </a:bodyPr>
-          <a:lstStyle/>
-          <a:p>
-            <a:pPr algn="l">
-              <a:lnSpc>
-                <a:spcPct val="115000"/>
-              </a:lnSpc>
-            </a:pPr>
-            <a:r>
-              <a:rPr sz="2400" b="0">
+              <a:t>有研究量过：</a:t>
+            </a:r>
+            <a:r>
+              <a:rPr sz="2200" b="1">
                 <a:solidFill>
                   <a:srgbClr val="F8FAFC"/>
                 </a:solidFill>
                 <a:latin typeface="Microsoft YaHei"/>
               </a:rPr>
-              <a:t>原论文自己的表格里，六个模型有三个</a:t>
-            </a:r>
-            <a:r>
-              <a:rPr sz="2400" b="1">
-                <a:solidFill>
-                  <a:srgbClr val="F8FAFC"/>
-                </a:solidFill>
-                <a:latin typeface="Microsoft YaHei"/>
-              </a:rPr>
-              <a:t>反而变差</a:t>
+              <a:t>模型默认只能猜中你没说出口的需求的 41%</a:t>
             </a:r>
           </a:p>
         </p:txBody>
@@ -12442,7 +12916,7 @@
     <p:bg>
       <p:bgPr>
         <a:solidFill>
-          <a:srgbClr val="0A1A1A"/>
+          <a:srgbClr val="0E1428"/>
         </a:solidFill>
         <a:effectLst/>
       </p:bgPr>
@@ -12462,49 +12936,221 @@
         </p:nvSpPr>
         <p:spPr>
           <a:xfrm>
-            <a:off x="914400" y="2286000"/>
-            <a:ext cx="10332720" cy="1828800"/>
-          </a:xfrm>
-          <a:prstGeom prst="rect">
-            <a:avLst/>
-          </a:prstGeom>
-          <a:noFill/>
-        </p:spPr>
-        <p:txBody>
-          <a:bodyPr wrap="square" anchor="ctr">
-            <a:spAutoFit/>
-          </a:bodyPr>
-          <a:lstStyle/>
-          <a:p>
-            <a:pPr algn="ctr">
-              <a:lnSpc>
-                <a:spcPct val="115000"/>
-              </a:lnSpc>
-            </a:pPr>
-            <a:r>
-              <a:rPr sz="4000" b="1">
-                <a:solidFill>
-                  <a:srgbClr val="FDE047"/>
-                </a:solidFill>
-                <a:latin typeface="Microsoft YaHei"/>
-              </a:rPr>
-              <a:t>管用的是把要求说清楚</a:t>
-            </a:r>
-          </a:p>
-          <a:p>
-            <a:pPr algn="ctr">
-              <a:lnSpc>
-                <a:spcPct val="115000"/>
-              </a:lnSpc>
-            </a:pPr>
-            <a:r>
-              <a:rPr sz="4000" b="1">
-                <a:solidFill>
-                  <a:srgbClr val="FDE047"/>
-                </a:solidFill>
-                <a:latin typeface="Microsoft YaHei"/>
-              </a:rPr>
-              <a:t>不是加咒语</a:t>
+            <a:off x="777240" y="457200"/>
+            <a:ext cx="10607040" cy="868680"/>
+          </a:xfrm>
+          <a:prstGeom prst="rect">
+            <a:avLst/>
+          </a:prstGeom>
+          <a:noFill/>
+        </p:spPr>
+        <p:txBody>
+          <a:bodyPr wrap="square" anchor="t">
+            <a:spAutoFit/>
+          </a:bodyPr>
+          <a:lstStyle/>
+          <a:p>
+            <a:pPr algn="l">
+              <a:lnSpc>
+                <a:spcPct val="115000"/>
+              </a:lnSpc>
+            </a:pPr>
+            <a:r>
+              <a:rPr sz="3200" b="1">
+                <a:solidFill>
+                  <a:srgbClr val="F8FAFC"/>
+                </a:solidFill>
+                <a:latin typeface="Microsoft YaHei"/>
+              </a:rPr>
+              <a:t>★ 三个流传很广、但靠不住的说法</a:t>
+            </a:r>
+          </a:p>
+        </p:txBody>
+      </p:sp>
+      <p:sp>
+        <p:nvSpPr>
+          <p:cNvPr id="3" name="Rectangle 2"/>
+          <p:cNvSpPr/>
+          <p:nvPr/>
+        </p:nvSpPr>
+        <p:spPr>
+          <a:xfrm>
+            <a:off x="0" y="1444752"/>
+            <a:ext cx="12191695" cy="27432"/>
+          </a:xfrm>
+          <a:prstGeom prst="rect">
+            <a:avLst/>
+          </a:prstGeom>
+          <a:solidFill>
+            <a:srgbClr val="F59E0B"/>
+          </a:solidFill>
+          <a:ln>
+            <a:noFill/>
+          </a:ln>
+          <a:effectLst/>
+        </p:spPr>
+        <p:style>
+          <a:lnRef idx="1">
+            <a:schemeClr val="accent1"/>
+          </a:lnRef>
+          <a:fillRef idx="3">
+            <a:schemeClr val="accent1"/>
+          </a:fillRef>
+          <a:effectRef idx="2">
+            <a:schemeClr val="accent1"/>
+          </a:effectRef>
+          <a:fontRef idx="minor">
+            <a:schemeClr val="lt1"/>
+          </a:fontRef>
+        </p:style>
+        <p:txBody>
+          <a:bodyPr rtlCol="0" anchor="ctr"/>
+          <a:lstStyle/>
+          <a:p>
+            <a:pPr algn="ctr"/>
+          </a:p>
+        </p:txBody>
+      </p:sp>
+      <p:sp>
+        <p:nvSpPr>
+          <p:cNvPr id="4" name="TextBox 3"/>
+          <p:cNvSpPr txBox="1"/>
+          <p:nvPr/>
+        </p:nvSpPr>
+        <p:spPr>
+          <a:xfrm>
+            <a:off x="914400" y="1828800"/>
+            <a:ext cx="10332720" cy="914400"/>
+          </a:xfrm>
+          <a:prstGeom prst="rect">
+            <a:avLst/>
+          </a:prstGeom>
+          <a:noFill/>
+        </p:spPr>
+        <p:txBody>
+          <a:bodyPr wrap="square" anchor="t">
+            <a:spAutoFit/>
+          </a:bodyPr>
+          <a:lstStyle/>
+          <a:p>
+            <a:pPr algn="l">
+              <a:lnSpc>
+                <a:spcPct val="115000"/>
+              </a:lnSpc>
+            </a:pPr>
+            <a:r>
+              <a:rPr sz="2200" b="1">
+                <a:solidFill>
+                  <a:srgbClr val="F8FAFC"/>
+                </a:solidFill>
+                <a:latin typeface="Microsoft YaHei"/>
+              </a:rPr>
+              <a:t>「你是一位资深××专家」</a:t>
+            </a:r>
+            <a:r>
+              <a:rPr sz="2200" b="0">
+                <a:solidFill>
+                  <a:srgbClr val="F8FAFC"/>
+                </a:solidFill>
+                <a:latin typeface="Microsoft YaHei"/>
+              </a:rPr>
+              <a:t> —— 对准确率没用，可能还有害</a:t>
+            </a:r>
+          </a:p>
+        </p:txBody>
+      </p:sp>
+      <p:sp>
+        <p:nvSpPr>
+          <p:cNvPr id="5" name="TextBox 4"/>
+          <p:cNvSpPr txBox="1"/>
+          <p:nvPr/>
+        </p:nvSpPr>
+        <p:spPr>
+          <a:xfrm>
+            <a:off x="914400" y="2697480"/>
+            <a:ext cx="10332720" cy="914400"/>
+          </a:xfrm>
+          <a:prstGeom prst="rect">
+            <a:avLst/>
+          </a:prstGeom>
+          <a:noFill/>
+        </p:spPr>
+        <p:txBody>
+          <a:bodyPr wrap="square" anchor="t">
+            <a:spAutoFit/>
+          </a:bodyPr>
+          <a:lstStyle/>
+          <a:p>
+            <a:pPr algn="l">
+              <a:lnSpc>
+                <a:spcPct val="115000"/>
+              </a:lnSpc>
+            </a:pPr>
+            <a:r>
+              <a:rPr sz="2200" b="1">
+                <a:solidFill>
+                  <a:srgbClr val="F8FAFC"/>
+                </a:solidFill>
+                <a:latin typeface="Microsoft YaHei"/>
+              </a:rPr>
+              <a:t>「深呼吸，一步一步想」</a:t>
+            </a:r>
+            <a:r>
+              <a:rPr sz="2200" b="0">
+                <a:solidFill>
+                  <a:srgbClr val="F8FAFC"/>
+                </a:solidFill>
+                <a:latin typeface="Microsoft YaHei"/>
+              </a:rPr>
+              <a:t> —— 是程序在一个模型上搜出来的，换个模型就不灵</a:t>
+            </a:r>
+          </a:p>
+        </p:txBody>
+      </p:sp>
+      <p:sp>
+        <p:nvSpPr>
+          <p:cNvPr id="6" name="TextBox 5"/>
+          <p:cNvSpPr txBox="1"/>
+          <p:nvPr/>
+        </p:nvSpPr>
+        <p:spPr>
+          <a:xfrm>
+            <a:off x="914400" y="3566160"/>
+            <a:ext cx="10332720" cy="914400"/>
+          </a:xfrm>
+          <a:prstGeom prst="rect">
+            <a:avLst/>
+          </a:prstGeom>
+          <a:noFill/>
+        </p:spPr>
+        <p:txBody>
+          <a:bodyPr wrap="square" anchor="t">
+            <a:spAutoFit/>
+          </a:bodyPr>
+          <a:lstStyle/>
+          <a:p>
+            <a:pPr algn="l">
+              <a:lnSpc>
+                <a:spcPct val="115000"/>
+              </a:lnSpc>
+            </a:pPr>
+            <a:r>
+              <a:rPr sz="2200" b="1">
+                <a:solidFill>
+                  <a:srgbClr val="F8FAFC"/>
+                </a:solidFill>
+                <a:latin typeface="Microsoft YaHei"/>
+              </a:rPr>
+              <a:t>「这对我很重要」</a:t>
+            </a:r>
+            <a:r>
+              <a:rPr sz="2200" b="0">
+                <a:solidFill>
+                  <a:srgbClr val="F8FAFC"/>
+                </a:solidFill>
+                <a:latin typeface="Microsoft YaHei"/>
+              </a:rPr>
+              <a:t> —— 大规模重复实验里效果互相抵消</a:t>
             </a:r>
           </a:p>
         </p:txBody>
@@ -12569,7 +13215,7 @@
                 </a:solidFill>
                 <a:latin typeface="Microsoft YaHei"/>
               </a:rPr>
-              <a:t>2.3　上周的真事</a:t>
+              <a:t>★ 唯一有硬证据的那条：让它一步一步想</a:t>
             </a:r>
           </a:p>
         </p:txBody>
@@ -12620,14 +13266,101 @@
       </p:sp>
       <p:sp>
         <p:nvSpPr>
-          <p:cNvPr id="4" name="TextBox 3"/>
-          <p:cNvSpPr txBox="1"/>
-          <p:nvPr/>
-        </p:nvSpPr>
-        <p:spPr>
-          <a:xfrm>
-            <a:off x="914400" y="1828800"/>
-            <a:ext cx="10332720" cy="914400"/>
+          <p:cNvPr id="4" name="Rounded Rectangle 3"/>
+          <p:cNvSpPr/>
+          <p:nvPr/>
+        </p:nvSpPr>
+        <p:spPr>
+          <a:xfrm>
+            <a:off x="777240" y="1783080"/>
+            <a:ext cx="5120640" cy="3566159"/>
+          </a:xfrm>
+          <a:prstGeom prst="roundRect">
+            <a:avLst>
+              <a:gd name="adj" fmla="val 6000"/>
+            </a:avLst>
+          </a:prstGeom>
+          <a:solidFill>
+            <a:srgbClr val="162038"/>
+          </a:solidFill>
+          <a:ln w="19050">
+            <a:solidFill>
+              <a:srgbClr val="A3E635"/>
+            </a:solidFill>
+          </a:ln>
+          <a:effectLst/>
+        </p:spPr>
+        <p:style>
+          <a:lnRef idx="1">
+            <a:schemeClr val="accent1"/>
+          </a:lnRef>
+          <a:fillRef idx="3">
+            <a:schemeClr val="accent1"/>
+          </a:fillRef>
+          <a:effectRef idx="2">
+            <a:schemeClr val="accent1"/>
+          </a:effectRef>
+          <a:fontRef idx="minor">
+            <a:schemeClr val="lt1"/>
+          </a:fontRef>
+        </p:style>
+        <p:txBody>
+          <a:bodyPr rtlCol="0" anchor="ctr"/>
+          <a:lstStyle/>
+          <a:p>
+            <a:pPr algn="ctr"/>
+          </a:p>
+        </p:txBody>
+      </p:sp>
+      <p:sp>
+        <p:nvSpPr>
+          <p:cNvPr id="5" name="TextBox 4"/>
+          <p:cNvSpPr txBox="1"/>
+          <p:nvPr/>
+        </p:nvSpPr>
+        <p:spPr>
+          <a:xfrm>
+            <a:off x="1051560" y="1947672"/>
+            <a:ext cx="4572000" cy="457200"/>
+          </a:xfrm>
+          <a:prstGeom prst="rect">
+            <a:avLst/>
+          </a:prstGeom>
+          <a:noFill/>
+        </p:spPr>
+        <p:txBody>
+          <a:bodyPr wrap="square" anchor="t">
+            <a:spAutoFit/>
+          </a:bodyPr>
+          <a:lstStyle/>
+          <a:p>
+            <a:pPr algn="ctr">
+              <a:lnSpc>
+                <a:spcPct val="115000"/>
+              </a:lnSpc>
+            </a:pPr>
+            <a:r>
+              <a:rPr sz="2100" b="1">
+                <a:solidFill>
+                  <a:srgbClr val="A3E635"/>
+                </a:solidFill>
+                <a:latin typeface="Microsoft YaHei"/>
+              </a:rPr>
+              <a:t>2022 年的实验</a:t>
+            </a:r>
+          </a:p>
+        </p:txBody>
+      </p:sp>
+      <p:sp>
+        <p:nvSpPr>
+          <p:cNvPr id="6" name="TextBox 5"/>
+          <p:cNvSpPr txBox="1"/>
+          <p:nvPr/>
+        </p:nvSpPr>
+        <p:spPr>
+          <a:xfrm>
+            <a:off x="1051560" y="2560320"/>
+            <a:ext cx="4572000" cy="422147"/>
           </a:xfrm>
           <a:prstGeom prst="rect">
             <a:avLst/>
@@ -12646,27 +13379,27 @@
               </a:lnSpc>
             </a:pPr>
             <a:r>
-              <a:rPr sz="2400" b="0">
+              <a:rPr sz="1400" b="0">
                 <a:solidFill>
                   <a:srgbClr val="F8FAFC"/>
                 </a:solidFill>
                 <a:latin typeface="Microsoft YaHei"/>
               </a:rPr>
-              <a:t>让 AI 把一个显卡的神经网络移植到另一家显卡上</a:t>
-            </a:r>
-          </a:p>
-        </p:txBody>
-      </p:sp>
-      <p:sp>
-        <p:nvSpPr>
-          <p:cNvPr id="5" name="TextBox 4"/>
-          <p:cNvSpPr txBox="1"/>
-          <p:nvPr/>
-        </p:nvSpPr>
-        <p:spPr>
-          <a:xfrm>
-            <a:off x="914400" y="2697480"/>
-            <a:ext cx="10332720" cy="914400"/>
+              <a:t>数学应用题上</a:t>
+            </a:r>
+          </a:p>
+        </p:txBody>
+      </p:sp>
+      <p:sp>
+        <p:nvSpPr>
+          <p:cNvPr id="7" name="TextBox 6"/>
+          <p:cNvSpPr txBox="1"/>
+          <p:nvPr/>
+        </p:nvSpPr>
+        <p:spPr>
+          <a:xfrm>
+            <a:off x="1051560" y="2982467"/>
+            <a:ext cx="4572000" cy="422147"/>
           </a:xfrm>
           <a:prstGeom prst="rect">
             <a:avLst/>
@@ -12684,37 +13417,67 @@
                 <a:spcPct val="115000"/>
               </a:lnSpc>
             </a:pPr>
-            <a:r>
-              <a:rPr sz="2400" b="0">
+          </a:p>
+        </p:txBody>
+      </p:sp>
+      <p:sp>
+        <p:nvSpPr>
+          <p:cNvPr id="8" name="TextBox 7"/>
+          <p:cNvSpPr txBox="1"/>
+          <p:nvPr/>
+        </p:nvSpPr>
+        <p:spPr>
+          <a:xfrm>
+            <a:off x="1051560" y="3404615"/>
+            <a:ext cx="4572000" cy="422147"/>
+          </a:xfrm>
+          <a:prstGeom prst="rect">
+            <a:avLst/>
+          </a:prstGeom>
+          <a:noFill/>
+        </p:spPr>
+        <p:txBody>
+          <a:bodyPr wrap="square" anchor="t">
+            <a:spAutoFit/>
+          </a:bodyPr>
+          <a:lstStyle/>
+          <a:p>
+            <a:pPr algn="l">
+              <a:lnSpc>
+                <a:spcPct val="115000"/>
+              </a:lnSpc>
+            </a:pPr>
+            <a:r>
+              <a:rPr sz="1400" b="0">
                 <a:solidFill>
                   <a:srgbClr val="F8FAFC"/>
                 </a:solidFill>
                 <a:latin typeface="Microsoft YaHei"/>
               </a:rPr>
-              <a:t>AI 干了三天，写了三千行工作日志，周五说</a:t>
-            </a:r>
-            <a:r>
-              <a:rPr sz="2400" b="1">
+              <a:t>直接问：</a:t>
+            </a:r>
+            <a:r>
+              <a:rPr sz="1400" b="1">
                 <a:solidFill>
                   <a:srgbClr val="F8FAFC"/>
                 </a:solidFill>
                 <a:latin typeface="Microsoft YaHei"/>
               </a:rPr>
-              <a:t>「跑通了」</a:t>
-            </a:r>
-          </a:p>
-        </p:txBody>
-      </p:sp>
-      <p:sp>
-        <p:nvSpPr>
-          <p:cNvPr id="6" name="TextBox 5"/>
-          <p:cNvSpPr txBox="1"/>
-          <p:nvPr/>
-        </p:nvSpPr>
-        <p:spPr>
-          <a:xfrm>
-            <a:off x="914400" y="3566160"/>
-            <a:ext cx="10332720" cy="914400"/>
+              <a:t>17.9%</a:t>
+            </a:r>
+          </a:p>
+        </p:txBody>
+      </p:sp>
+      <p:sp>
+        <p:nvSpPr>
+          <p:cNvPr id="9" name="TextBox 8"/>
+          <p:cNvSpPr txBox="1"/>
+          <p:nvPr/>
+        </p:nvSpPr>
+        <p:spPr>
+          <a:xfrm>
+            <a:off x="1051560" y="3826763"/>
+            <a:ext cx="4572000" cy="422147"/>
           </a:xfrm>
           <a:prstGeom prst="rect">
             <a:avLst/>
@@ -12733,36 +13496,36 @@
               </a:lnSpc>
             </a:pPr>
             <a:r>
-              <a:rPr sz="2400" b="0">
+              <a:rPr sz="1400" b="0">
                 <a:solidFill>
                   <a:srgbClr val="F8FAFC"/>
                 </a:solidFill>
                 <a:latin typeface="Microsoft YaHei"/>
               </a:rPr>
-              <a:t>周日凌晨我进游戏一看——</a:t>
-            </a:r>
-            <a:r>
-              <a:rPr sz="2400" b="1">
+              <a:t>加「一步一步想」：</a:t>
+            </a:r>
+            <a:r>
+              <a:rPr sz="1400" b="1">
                 <a:solidFill>
                   <a:srgbClr val="F8FAFC"/>
                 </a:solidFill>
                 <a:latin typeface="Microsoft YaHei"/>
               </a:rPr>
-              <a:t>画面根本没变</a:t>
-            </a:r>
-          </a:p>
-        </p:txBody>
-      </p:sp>
-      <p:sp>
-        <p:nvSpPr>
-          <p:cNvPr id="7" name="TextBox 6"/>
-          <p:cNvSpPr txBox="1"/>
-          <p:nvPr/>
-        </p:nvSpPr>
-        <p:spPr>
-          <a:xfrm>
-            <a:off x="914400" y="4434840"/>
-            <a:ext cx="10332720" cy="914400"/>
+              <a:t>56.9%</a:t>
+            </a:r>
+          </a:p>
+        </p:txBody>
+      </p:sp>
+      <p:sp>
+        <p:nvSpPr>
+          <p:cNvPr id="10" name="TextBox 9"/>
+          <p:cNvSpPr txBox="1"/>
+          <p:nvPr/>
+        </p:nvSpPr>
+        <p:spPr>
+          <a:xfrm>
+            <a:off x="1051560" y="4248912"/>
+            <a:ext cx="4572000" cy="422147"/>
           </a:xfrm>
           <a:prstGeom prst="rect">
             <a:avLst/>
@@ -12780,14 +13543,404 @@
                 <a:spcPct val="115000"/>
               </a:lnSpc>
             </a:pPr>
-            <a:r>
-              <a:rPr sz="2400" b="0">
+          </a:p>
+        </p:txBody>
+      </p:sp>
+      <p:sp>
+        <p:nvSpPr>
+          <p:cNvPr id="11" name="TextBox 10"/>
+          <p:cNvSpPr txBox="1"/>
+          <p:nvPr/>
+        </p:nvSpPr>
+        <p:spPr>
+          <a:xfrm>
+            <a:off x="1051560" y="4671060"/>
+            <a:ext cx="4572000" cy="422147"/>
+          </a:xfrm>
+          <a:prstGeom prst="rect">
+            <a:avLst/>
+          </a:prstGeom>
+          <a:noFill/>
+        </p:spPr>
+        <p:txBody>
+          <a:bodyPr wrap="square" anchor="t">
+            <a:spAutoFit/>
+          </a:bodyPr>
+          <a:lstStyle/>
+          <a:p>
+            <a:pPr algn="l">
+              <a:lnSpc>
+                <a:spcPct val="115000"/>
+              </a:lnSpc>
+            </a:pPr>
+            <a:r>
+              <a:rPr sz="1400" b="0">
                 <a:solidFill>
                   <a:srgbClr val="F8FAFC"/>
                 </a:solidFill>
                 <a:latin typeface="Microsoft YaHei"/>
               </a:rPr>
-              <a:t>查下来：一个标记位没设，所有结果每帧都算了、每帧都被扔了</a:t>
+              <a:t>这是提示词研究里最硬的一条</a:t>
+            </a:r>
+          </a:p>
+        </p:txBody>
+      </p:sp>
+      <p:sp>
+        <p:nvSpPr>
+          <p:cNvPr id="12" name="Rounded Rectangle 11"/>
+          <p:cNvSpPr/>
+          <p:nvPr/>
+        </p:nvSpPr>
+        <p:spPr>
+          <a:xfrm>
+            <a:off x="6309360" y="1783080"/>
+            <a:ext cx="5120640" cy="3566159"/>
+          </a:xfrm>
+          <a:prstGeom prst="roundRect">
+            <a:avLst>
+              <a:gd name="adj" fmla="val 6000"/>
+            </a:avLst>
+          </a:prstGeom>
+          <a:solidFill>
+            <a:srgbClr val="162038"/>
+          </a:solidFill>
+          <a:ln w="19050">
+            <a:solidFill>
+              <a:srgbClr val="94A3B8"/>
+            </a:solidFill>
+          </a:ln>
+          <a:effectLst/>
+        </p:spPr>
+        <p:style>
+          <a:lnRef idx="1">
+            <a:schemeClr val="accent1"/>
+          </a:lnRef>
+          <a:fillRef idx="3">
+            <a:schemeClr val="accent1"/>
+          </a:fillRef>
+          <a:effectRef idx="2">
+            <a:schemeClr val="accent1"/>
+          </a:effectRef>
+          <a:fontRef idx="minor">
+            <a:schemeClr val="lt1"/>
+          </a:fontRef>
+        </p:style>
+        <p:txBody>
+          <a:bodyPr rtlCol="0" anchor="ctr"/>
+          <a:lstStyle/>
+          <a:p>
+            <a:pPr algn="ctr"/>
+          </a:p>
+        </p:txBody>
+      </p:sp>
+      <p:sp>
+        <p:nvSpPr>
+          <p:cNvPr id="13" name="TextBox 12"/>
+          <p:cNvSpPr txBox="1"/>
+          <p:nvPr/>
+        </p:nvSpPr>
+        <p:spPr>
+          <a:xfrm>
+            <a:off x="6583680" y="1947672"/>
+            <a:ext cx="4572000" cy="457200"/>
+          </a:xfrm>
+          <a:prstGeom prst="rect">
+            <a:avLst/>
+          </a:prstGeom>
+          <a:noFill/>
+        </p:spPr>
+        <p:txBody>
+          <a:bodyPr wrap="square" anchor="t">
+            <a:spAutoFit/>
+          </a:bodyPr>
+          <a:lstStyle/>
+          <a:p>
+            <a:pPr algn="ctr">
+              <a:lnSpc>
+                <a:spcPct val="115000"/>
+              </a:lnSpc>
+            </a:pPr>
+            <a:r>
+              <a:rPr sz="2100" b="1">
+                <a:solidFill>
+                  <a:srgbClr val="94A3B8"/>
+                </a:solidFill>
+                <a:latin typeface="Microsoft YaHei"/>
+              </a:rPr>
+              <a:t>但今天已经不用你说了</a:t>
+            </a:r>
+          </a:p>
+        </p:txBody>
+      </p:sp>
+      <p:sp>
+        <p:nvSpPr>
+          <p:cNvPr id="14" name="TextBox 13"/>
+          <p:cNvSpPr txBox="1"/>
+          <p:nvPr/>
+        </p:nvSpPr>
+        <p:spPr>
+          <a:xfrm>
+            <a:off x="6583680" y="2560320"/>
+            <a:ext cx="4572000" cy="422147"/>
+          </a:xfrm>
+          <a:prstGeom prst="rect">
+            <a:avLst/>
+          </a:prstGeom>
+          <a:noFill/>
+        </p:spPr>
+        <p:txBody>
+          <a:bodyPr wrap="square" anchor="t">
+            <a:spAutoFit/>
+          </a:bodyPr>
+          <a:lstStyle/>
+          <a:p>
+            <a:pPr algn="l">
+              <a:lnSpc>
+                <a:spcPct val="115000"/>
+              </a:lnSpc>
+            </a:pPr>
+            <a:r>
+              <a:rPr sz="1400" b="0">
+                <a:solidFill>
+                  <a:srgbClr val="F8FAFC"/>
+                </a:solidFill>
+                <a:latin typeface="Microsoft YaHei"/>
+              </a:rPr>
+              <a:t>原论文就写明：</a:t>
+            </a:r>
+          </a:p>
+        </p:txBody>
+      </p:sp>
+      <p:sp>
+        <p:nvSpPr>
+          <p:cNvPr id="15" name="TextBox 14"/>
+          <p:cNvSpPr txBox="1"/>
+          <p:nvPr/>
+        </p:nvSpPr>
+        <p:spPr>
+          <a:xfrm>
+            <a:off x="6583680" y="2982467"/>
+            <a:ext cx="4572000" cy="422147"/>
+          </a:xfrm>
+          <a:prstGeom prst="rect">
+            <a:avLst/>
+          </a:prstGeom>
+          <a:noFill/>
+        </p:spPr>
+        <p:txBody>
+          <a:bodyPr wrap="square" anchor="t">
+            <a:spAutoFit/>
+          </a:bodyPr>
+          <a:lstStyle/>
+          <a:p>
+            <a:pPr algn="l">
+              <a:lnSpc>
+                <a:spcPct val="115000"/>
+              </a:lnSpc>
+            </a:pPr>
+            <a:r>
+              <a:rPr sz="1400" b="0">
+                <a:solidFill>
+                  <a:srgbClr val="F8FAFC"/>
+                </a:solidFill>
+                <a:latin typeface="Microsoft YaHei"/>
+              </a:rPr>
+              <a:t>小模型用了</a:t>
+            </a:r>
+            <a:r>
+              <a:rPr sz="1400" b="1">
+                <a:solidFill>
+                  <a:srgbClr val="F8FAFC"/>
+                </a:solidFill>
+                <a:latin typeface="Microsoft YaHei"/>
+              </a:rPr>
+              <a:t>反而更差</a:t>
+            </a:r>
+          </a:p>
+        </p:txBody>
+      </p:sp>
+      <p:sp>
+        <p:nvSpPr>
+          <p:cNvPr id="16" name="TextBox 15"/>
+          <p:cNvSpPr txBox="1"/>
+          <p:nvPr/>
+        </p:nvSpPr>
+        <p:spPr>
+          <a:xfrm>
+            <a:off x="6583680" y="3404615"/>
+            <a:ext cx="4572000" cy="422147"/>
+          </a:xfrm>
+          <a:prstGeom prst="rect">
+            <a:avLst/>
+          </a:prstGeom>
+          <a:noFill/>
+        </p:spPr>
+        <p:txBody>
+          <a:bodyPr wrap="square" anchor="t">
+            <a:spAutoFit/>
+          </a:bodyPr>
+          <a:lstStyle/>
+          <a:p>
+            <a:pPr algn="l">
+              <a:lnSpc>
+                <a:spcPct val="115000"/>
+              </a:lnSpc>
+            </a:pPr>
+          </a:p>
+        </p:txBody>
+      </p:sp>
+      <p:sp>
+        <p:nvSpPr>
+          <p:cNvPr id="17" name="TextBox 16"/>
+          <p:cNvSpPr txBox="1"/>
+          <p:nvPr/>
+        </p:nvSpPr>
+        <p:spPr>
+          <a:xfrm>
+            <a:off x="6583680" y="3826763"/>
+            <a:ext cx="4572000" cy="422147"/>
+          </a:xfrm>
+          <a:prstGeom prst="rect">
+            <a:avLst/>
+          </a:prstGeom>
+          <a:noFill/>
+        </p:spPr>
+        <p:txBody>
+          <a:bodyPr wrap="square" anchor="t">
+            <a:spAutoFit/>
+          </a:bodyPr>
+          <a:lstStyle/>
+          <a:p>
+            <a:pPr algn="l">
+              <a:lnSpc>
+                <a:spcPct val="115000"/>
+              </a:lnSpc>
+            </a:pPr>
+            <a:r>
+              <a:rPr sz="1400" b="0">
+                <a:solidFill>
+                  <a:srgbClr val="F8FAFC"/>
+                </a:solidFill>
+                <a:latin typeface="Microsoft YaHei"/>
+              </a:rPr>
+              <a:t>现在的主流模型</a:t>
+            </a:r>
+          </a:p>
+        </p:txBody>
+      </p:sp>
+      <p:sp>
+        <p:nvSpPr>
+          <p:cNvPr id="18" name="TextBox 17"/>
+          <p:cNvSpPr txBox="1"/>
+          <p:nvPr/>
+        </p:nvSpPr>
+        <p:spPr>
+          <a:xfrm>
+            <a:off x="6583680" y="4248912"/>
+            <a:ext cx="4572000" cy="422147"/>
+          </a:xfrm>
+          <a:prstGeom prst="rect">
+            <a:avLst/>
+          </a:prstGeom>
+          <a:noFill/>
+        </p:spPr>
+        <p:txBody>
+          <a:bodyPr wrap="square" anchor="t">
+            <a:spAutoFit/>
+          </a:bodyPr>
+          <a:lstStyle/>
+          <a:p>
+            <a:pPr algn="l">
+              <a:lnSpc>
+                <a:spcPct val="115000"/>
+              </a:lnSpc>
+            </a:pPr>
+            <a:r>
+              <a:rPr sz="1400" b="1">
+                <a:solidFill>
+                  <a:srgbClr val="F8FAFC"/>
+                </a:solidFill>
+                <a:latin typeface="Microsoft YaHei"/>
+              </a:rPr>
+              <a:t>已经把这一步内化了</a:t>
+            </a:r>
+          </a:p>
+        </p:txBody>
+      </p:sp>
+      <p:sp>
+        <p:nvSpPr>
+          <p:cNvPr id="19" name="TextBox 18"/>
+          <p:cNvSpPr txBox="1"/>
+          <p:nvPr/>
+        </p:nvSpPr>
+        <p:spPr>
+          <a:xfrm>
+            <a:off x="6583680" y="4671060"/>
+            <a:ext cx="4572000" cy="422147"/>
+          </a:xfrm>
+          <a:prstGeom prst="rect">
+            <a:avLst/>
+          </a:prstGeom>
+          <a:noFill/>
+        </p:spPr>
+        <p:txBody>
+          <a:bodyPr wrap="square" anchor="t">
+            <a:spAutoFit/>
+          </a:bodyPr>
+          <a:lstStyle/>
+          <a:p>
+            <a:pPr algn="l">
+              <a:lnSpc>
+                <a:spcPct val="115000"/>
+              </a:lnSpc>
+            </a:pPr>
+            <a:r>
+              <a:rPr sz="1400" b="0">
+                <a:solidFill>
+                  <a:srgbClr val="F8FAFC"/>
+                </a:solidFill>
+                <a:latin typeface="Microsoft YaHei"/>
+              </a:rPr>
+              <a:t>它自己会想</a:t>
+            </a:r>
+          </a:p>
+        </p:txBody>
+      </p:sp>
+      <p:sp>
+        <p:nvSpPr>
+          <p:cNvPr id="20" name="TextBox 19"/>
+          <p:cNvSpPr txBox="1"/>
+          <p:nvPr/>
+        </p:nvSpPr>
+        <p:spPr>
+          <a:xfrm>
+            <a:off x="777240" y="5550407"/>
+            <a:ext cx="10607040" cy="822960"/>
+          </a:xfrm>
+          <a:prstGeom prst="rect">
+            <a:avLst/>
+          </a:prstGeom>
+          <a:noFill/>
+        </p:spPr>
+        <p:txBody>
+          <a:bodyPr wrap="square" anchor="t">
+            <a:spAutoFit/>
+          </a:bodyPr>
+          <a:lstStyle/>
+          <a:p>
+            <a:pPr algn="ctr">
+              <a:lnSpc>
+                <a:spcPct val="115000"/>
+              </a:lnSpc>
+            </a:pPr>
+            <a:r>
+              <a:rPr sz="2100" b="1">
+                <a:solidFill>
+                  <a:srgbClr val="FDE047"/>
+                </a:solidFill>
+                <a:latin typeface="Microsoft YaHei"/>
+              </a:rPr>
+              <a:t>技巧会老化：按模型代际重新适配，不能照搬三年前的教程</a:t>
             </a:r>
           </a:p>
         </p:txBody>
@@ -12806,7 +13959,7 @@
     <p:bg>
       <p:bgPr>
         <a:solidFill>
-          <a:srgbClr val="0E1428"/>
+          <a:srgbClr val="0A1A1A"/>
         </a:solidFill>
         <a:effectLst/>
       </p:bgPr>
@@ -12826,147 +13979,16 @@
         </p:nvSpPr>
         <p:spPr>
           <a:xfrm>
-            <a:off x="777240" y="457200"/>
-            <a:ext cx="10607040" cy="868680"/>
-          </a:xfrm>
-          <a:prstGeom prst="rect">
-            <a:avLst/>
-          </a:prstGeom>
-          <a:noFill/>
-        </p:spPr>
-        <p:txBody>
-          <a:bodyPr wrap="square" anchor="t">
-            <a:spAutoFit/>
-          </a:bodyPr>
-          <a:lstStyle/>
-          <a:p>
-            <a:pPr algn="l">
-              <a:lnSpc>
-                <a:spcPct val="115000"/>
-              </a:lnSpc>
-            </a:pPr>
-            <a:r>
-              <a:rPr sz="3200" b="1">
-                <a:solidFill>
-                  <a:srgbClr val="F8FAFC"/>
-                </a:solidFill>
-                <a:latin typeface="Microsoft YaHei"/>
-              </a:rPr>
-              <a:t>2.3　从这件事抽出来的两句</a:t>
-            </a:r>
-          </a:p>
-        </p:txBody>
-      </p:sp>
-      <p:sp>
-        <p:nvSpPr>
-          <p:cNvPr id="3" name="Rectangle 2"/>
-          <p:cNvSpPr/>
-          <p:nvPr/>
-        </p:nvSpPr>
-        <p:spPr>
-          <a:xfrm>
-            <a:off x="0" y="1444752"/>
-            <a:ext cx="12191695" cy="27432"/>
-          </a:xfrm>
-          <a:prstGeom prst="rect">
-            <a:avLst/>
-          </a:prstGeom>
-          <a:solidFill>
-            <a:srgbClr val="F59E0B"/>
-          </a:solidFill>
-          <a:ln>
-            <a:noFill/>
-          </a:ln>
-          <a:effectLst/>
-        </p:spPr>
-        <p:style>
-          <a:lnRef idx="1">
-            <a:schemeClr val="accent1"/>
-          </a:lnRef>
-          <a:fillRef idx="3">
-            <a:schemeClr val="accent1"/>
-          </a:fillRef>
-          <a:effectRef idx="2">
-            <a:schemeClr val="accent1"/>
-          </a:effectRef>
-          <a:fontRef idx="minor">
-            <a:schemeClr val="lt1"/>
-          </a:fontRef>
-        </p:style>
-        <p:txBody>
-          <a:bodyPr rtlCol="0" anchor="ctr"/>
-          <a:lstStyle/>
-          <a:p>
-            <a:pPr algn="ctr"/>
-          </a:p>
-        </p:txBody>
-      </p:sp>
-      <p:sp>
-        <p:nvSpPr>
-          <p:cNvPr id="4" name="Rounded Rectangle 3"/>
-          <p:cNvSpPr/>
-          <p:nvPr/>
-        </p:nvSpPr>
-        <p:spPr>
-          <a:xfrm>
-            <a:off x="777240" y="1783080"/>
-            <a:ext cx="5120640" cy="3566159"/>
-          </a:xfrm>
-          <a:prstGeom prst="roundRect">
-            <a:avLst>
-              <a:gd name="adj" fmla="val 6000"/>
-            </a:avLst>
-          </a:prstGeom>
-          <a:solidFill>
-            <a:srgbClr val="162038"/>
-          </a:solidFill>
-          <a:ln w="19050">
-            <a:solidFill>
-              <a:srgbClr val="93C5FD"/>
-            </a:solidFill>
-          </a:ln>
-          <a:effectLst/>
-        </p:spPr>
-        <p:style>
-          <a:lnRef idx="1">
-            <a:schemeClr val="accent1"/>
-          </a:lnRef>
-          <a:fillRef idx="3">
-            <a:schemeClr val="accent1"/>
-          </a:fillRef>
-          <a:effectRef idx="2">
-            <a:schemeClr val="accent1"/>
-          </a:effectRef>
-          <a:fontRef idx="minor">
-            <a:schemeClr val="lt1"/>
-          </a:fontRef>
-        </p:style>
-        <p:txBody>
-          <a:bodyPr rtlCol="0" anchor="ctr"/>
-          <a:lstStyle/>
-          <a:p>
-            <a:pPr algn="ctr"/>
-          </a:p>
-        </p:txBody>
-      </p:sp>
-      <p:sp>
-        <p:nvSpPr>
-          <p:cNvPr id="5" name="TextBox 4"/>
-          <p:cNvSpPr txBox="1"/>
-          <p:nvPr/>
-        </p:nvSpPr>
-        <p:spPr>
-          <a:xfrm>
-            <a:off x="1051560" y="1947672"/>
-            <a:ext cx="4572000" cy="457200"/>
-          </a:xfrm>
-          <a:prstGeom prst="rect">
-            <a:avLst/>
-          </a:prstGeom>
-          <a:noFill/>
-        </p:spPr>
-        <p:txBody>
-          <a:bodyPr wrap="square" anchor="t">
+            <a:off x="914400" y="2286000"/>
+            <a:ext cx="10332720" cy="1828800"/>
+          </a:xfrm>
+          <a:prstGeom prst="rect">
+            <a:avLst/>
+          </a:prstGeom>
+          <a:noFill/>
+        </p:spPr>
+        <p:txBody>
+          <a:bodyPr wrap="square" anchor="ctr">
             <a:spAutoFit/>
           </a:bodyPr>
           <a:lstStyle/>
@@ -12977,272 +13999,15 @@
               </a:lnSpc>
             </a:pPr>
             <a:r>
-              <a:rPr sz="2100" b="1">
-                <a:solidFill>
-                  <a:srgbClr val="93C5FD"/>
-                </a:solidFill>
-                <a:latin typeface="Microsoft YaHei"/>
-              </a:rPr>
-              <a:t>协作没了，剩下指挥</a:t>
-            </a:r>
-          </a:p>
-        </p:txBody>
-      </p:sp>
-      <p:sp>
-        <p:nvSpPr>
-          <p:cNvPr id="6" name="TextBox 5"/>
-          <p:cNvSpPr txBox="1"/>
-          <p:nvPr/>
-        </p:nvSpPr>
-        <p:spPr>
-          <a:xfrm>
-            <a:off x="1051560" y="2560320"/>
-            <a:ext cx="4572000" cy="506577"/>
-          </a:xfrm>
-          <a:prstGeom prst="rect">
-            <a:avLst/>
-          </a:prstGeom>
-          <a:noFill/>
-        </p:spPr>
-        <p:txBody>
-          <a:bodyPr wrap="square" anchor="t">
-            <a:spAutoFit/>
-          </a:bodyPr>
-          <a:lstStyle/>
-          <a:p>
-            <a:pPr algn="l">
-              <a:lnSpc>
-                <a:spcPct val="115000"/>
-              </a:lnSpc>
-            </a:pPr>
-            <a:r>
-              <a:rPr sz="1600" b="0">
-                <a:solidFill>
-                  <a:srgbClr val="F8FAFC"/>
-                </a:solidFill>
-                <a:latin typeface="Microsoft YaHei"/>
-              </a:rPr>
-              <a:t>以前这活要四五个人</a:t>
-            </a:r>
-          </a:p>
-        </p:txBody>
-      </p:sp>
-      <p:sp>
-        <p:nvSpPr>
-          <p:cNvPr id="7" name="TextBox 6"/>
-          <p:cNvSpPr txBox="1"/>
-          <p:nvPr/>
-        </p:nvSpPr>
-        <p:spPr>
-          <a:xfrm>
-            <a:off x="1051560" y="3066897"/>
-            <a:ext cx="4572000" cy="506577"/>
-          </a:xfrm>
-          <a:prstGeom prst="rect">
-            <a:avLst/>
-          </a:prstGeom>
-          <a:noFill/>
-        </p:spPr>
-        <p:txBody>
-          <a:bodyPr wrap="square" anchor="t">
-            <a:spAutoFit/>
-          </a:bodyPr>
-          <a:lstStyle/>
-          <a:p>
-            <a:pPr algn="l">
-              <a:lnSpc>
-                <a:spcPct val="115000"/>
-              </a:lnSpc>
-            </a:pPr>
-            <a:r>
-              <a:rPr sz="1600" b="0">
-                <a:solidFill>
-                  <a:srgbClr val="F8FAFC"/>
-                </a:solidFill>
-                <a:latin typeface="Microsoft YaHei"/>
-              </a:rPr>
-              <a:t>加一个项目经理</a:t>
-            </a:r>
-          </a:p>
-        </p:txBody>
-      </p:sp>
-      <p:sp>
-        <p:nvSpPr>
-          <p:cNvPr id="8" name="TextBox 7"/>
-          <p:cNvSpPr txBox="1"/>
-          <p:nvPr/>
-        </p:nvSpPr>
-        <p:spPr>
-          <a:xfrm>
-            <a:off x="1051560" y="3573475"/>
-            <a:ext cx="4572000" cy="506577"/>
-          </a:xfrm>
-          <a:prstGeom prst="rect">
-            <a:avLst/>
-          </a:prstGeom>
-          <a:noFill/>
-        </p:spPr>
-        <p:txBody>
-          <a:bodyPr wrap="square" anchor="t">
-            <a:spAutoFit/>
-          </a:bodyPr>
-          <a:lstStyle/>
-          <a:p>
-            <a:pPr algn="l">
-              <a:lnSpc>
-                <a:spcPct val="115000"/>
-              </a:lnSpc>
-            </a:pPr>
-          </a:p>
-        </p:txBody>
-      </p:sp>
-      <p:sp>
-        <p:nvSpPr>
-          <p:cNvPr id="9" name="TextBox 8"/>
-          <p:cNvSpPr txBox="1"/>
-          <p:nvPr/>
-        </p:nvSpPr>
-        <p:spPr>
-          <a:xfrm>
-            <a:off x="1051560" y="4080052"/>
-            <a:ext cx="4572000" cy="506577"/>
-          </a:xfrm>
-          <a:prstGeom prst="rect">
-            <a:avLst/>
-          </a:prstGeom>
-          <a:noFill/>
-        </p:spPr>
-        <p:txBody>
-          <a:bodyPr wrap="square" anchor="t">
-            <a:spAutoFit/>
-          </a:bodyPr>
-          <a:lstStyle/>
-          <a:p>
-            <a:pPr algn="l">
-              <a:lnSpc>
-                <a:spcPct val="115000"/>
-              </a:lnSpc>
-            </a:pPr>
-            <a:r>
-              <a:rPr sz="1600" b="0">
-                <a:solidFill>
-                  <a:srgbClr val="F8FAFC"/>
-                </a:solidFill>
-                <a:latin typeface="Microsoft YaHei"/>
-              </a:rPr>
-              <a:t>现在是一个 AI</a:t>
-            </a:r>
-          </a:p>
-        </p:txBody>
-      </p:sp>
-      <p:sp>
-        <p:nvSpPr>
-          <p:cNvPr id="10" name="TextBox 9"/>
-          <p:cNvSpPr txBox="1"/>
-          <p:nvPr/>
-        </p:nvSpPr>
-        <p:spPr>
-          <a:xfrm>
-            <a:off x="1051560" y="4586630"/>
-            <a:ext cx="4572000" cy="506577"/>
-          </a:xfrm>
-          <a:prstGeom prst="rect">
-            <a:avLst/>
-          </a:prstGeom>
-          <a:noFill/>
-        </p:spPr>
-        <p:txBody>
-          <a:bodyPr wrap="square" anchor="t">
-            <a:spAutoFit/>
-          </a:bodyPr>
-          <a:lstStyle/>
-          <a:p>
-            <a:pPr algn="l">
-              <a:lnSpc>
-                <a:spcPct val="115000"/>
-              </a:lnSpc>
-            </a:pPr>
-            <a:r>
-              <a:rPr sz="1600" b="0">
-                <a:solidFill>
-                  <a:srgbClr val="F8FAFC"/>
-                </a:solidFill>
-                <a:latin typeface="Microsoft YaHei"/>
-              </a:rPr>
-              <a:t>加一个人的两个判断</a:t>
-            </a:r>
-          </a:p>
-        </p:txBody>
-      </p:sp>
-      <p:sp>
-        <p:nvSpPr>
-          <p:cNvPr id="11" name="Rounded Rectangle 10"/>
-          <p:cNvSpPr/>
-          <p:nvPr/>
-        </p:nvSpPr>
-        <p:spPr>
-          <a:xfrm>
-            <a:off x="6309360" y="1783080"/>
-            <a:ext cx="5120640" cy="3566159"/>
-          </a:xfrm>
-          <a:prstGeom prst="roundRect">
-            <a:avLst>
-              <a:gd name="adj" fmla="val 6000"/>
-            </a:avLst>
-          </a:prstGeom>
-          <a:solidFill>
-            <a:srgbClr val="162038"/>
-          </a:solidFill>
-          <a:ln w="19050">
-            <a:solidFill>
-              <a:srgbClr val="F59E0B"/>
-            </a:solidFill>
-          </a:ln>
-          <a:effectLst/>
-        </p:spPr>
-        <p:style>
-          <a:lnRef idx="1">
-            <a:schemeClr val="accent1"/>
-          </a:lnRef>
-          <a:fillRef idx="3">
-            <a:schemeClr val="accent1"/>
-          </a:fillRef>
-          <a:effectRef idx="2">
-            <a:schemeClr val="accent1"/>
-          </a:effectRef>
-          <a:fontRef idx="minor">
-            <a:schemeClr val="lt1"/>
-          </a:fontRef>
-        </p:style>
-        <p:txBody>
-          <a:bodyPr rtlCol="0" anchor="ctr"/>
-          <a:lstStyle/>
-          <a:p>
-            <a:pPr algn="ctr"/>
-          </a:p>
-        </p:txBody>
-      </p:sp>
-      <p:sp>
-        <p:nvSpPr>
-          <p:cNvPr id="12" name="TextBox 11"/>
-          <p:cNvSpPr txBox="1"/>
-          <p:nvPr/>
-        </p:nvSpPr>
-        <p:spPr>
-          <a:xfrm>
-            <a:off x="6583680" y="1947672"/>
-            <a:ext cx="4572000" cy="457200"/>
-          </a:xfrm>
-          <a:prstGeom prst="rect">
-            <a:avLst/>
-          </a:prstGeom>
-          <a:noFill/>
-        </p:spPr>
-        <p:txBody>
-          <a:bodyPr wrap="square" anchor="t">
-            <a:spAutoFit/>
-          </a:bodyPr>
-          <a:lstStyle/>
+              <a:rPr sz="4000" b="1">
+                <a:solidFill>
+                  <a:srgbClr val="FDE047"/>
+                </a:solidFill>
+                <a:latin typeface="Microsoft YaHei"/>
+              </a:rPr>
+              <a:t>管用的是把要求说清楚</a:t>
+            </a:r>
+          </a:p>
           <a:p>
             <a:pPr algn="ctr">
               <a:lnSpc>
@@ -13250,160 +14015,52 @@
               </a:lnSpc>
             </a:pPr>
             <a:r>
-              <a:rPr sz="2100" b="1">
-                <a:solidFill>
-                  <a:srgbClr val="F59E0B"/>
-                </a:solidFill>
-                <a:latin typeface="Microsoft YaHei"/>
-              </a:rPr>
-              <a:t>过程指标和结果打架，信结果</a:t>
-            </a:r>
-          </a:p>
-        </p:txBody>
-      </p:sp>
-      <p:sp>
-        <p:nvSpPr>
-          <p:cNvPr id="13" name="TextBox 12"/>
-          <p:cNvSpPr txBox="1"/>
-          <p:nvPr/>
-        </p:nvSpPr>
-        <p:spPr>
-          <a:xfrm>
-            <a:off x="6583680" y="2560320"/>
-            <a:ext cx="4572000" cy="506577"/>
-          </a:xfrm>
-          <a:prstGeom prst="rect">
-            <a:avLst/>
-          </a:prstGeom>
-          <a:noFill/>
-        </p:spPr>
-        <p:txBody>
-          <a:bodyPr wrap="square" anchor="t">
-            <a:spAutoFit/>
-          </a:bodyPr>
-          <a:lstStyle/>
-          <a:p>
-            <a:pPr algn="l">
-              <a:lnSpc>
-                <a:spcPct val="115000"/>
-              </a:lnSpc>
-            </a:pPr>
-            <a:r>
-              <a:rPr sz="1600" b="0">
-                <a:solidFill>
-                  <a:srgbClr val="F8FAFC"/>
-                </a:solidFill>
-                <a:latin typeface="Microsoft YaHei"/>
-              </a:rPr>
-              <a:t>AI 说「完成了」不算</a:t>
-            </a:r>
-          </a:p>
-        </p:txBody>
-      </p:sp>
-      <p:sp>
-        <p:nvSpPr>
-          <p:cNvPr id="14" name="TextBox 13"/>
-          <p:cNvSpPr txBox="1"/>
-          <p:nvPr/>
-        </p:nvSpPr>
-        <p:spPr>
-          <a:xfrm>
-            <a:off x="6583680" y="3066897"/>
-            <a:ext cx="4572000" cy="506577"/>
-          </a:xfrm>
-          <a:prstGeom prst="rect">
-            <a:avLst/>
-          </a:prstGeom>
-          <a:noFill/>
-        </p:spPr>
-        <p:txBody>
-          <a:bodyPr wrap="square" anchor="t">
-            <a:spAutoFit/>
-          </a:bodyPr>
-          <a:lstStyle/>
-          <a:p>
-            <a:pPr algn="l">
-              <a:lnSpc>
-                <a:spcPct val="115000"/>
-              </a:lnSpc>
-            </a:pPr>
-            <a:r>
-              <a:rPr sz="1600" b="0">
-                <a:solidFill>
-                  <a:srgbClr val="F8FAFC"/>
-                </a:solidFill>
-                <a:latin typeface="Microsoft YaHei"/>
-              </a:rPr>
-              <a:t>日志说「执行了」不算</a:t>
-            </a:r>
-          </a:p>
-        </p:txBody>
-      </p:sp>
-      <p:sp>
-        <p:nvSpPr>
-          <p:cNvPr id="15" name="TextBox 14"/>
-          <p:cNvSpPr txBox="1"/>
-          <p:nvPr/>
-        </p:nvSpPr>
-        <p:spPr>
-          <a:xfrm>
-            <a:off x="6583680" y="3573475"/>
-            <a:ext cx="4572000" cy="506577"/>
-          </a:xfrm>
-          <a:prstGeom prst="rect">
-            <a:avLst/>
-          </a:prstGeom>
-          <a:noFill/>
-        </p:spPr>
-        <p:txBody>
-          <a:bodyPr wrap="square" anchor="t">
-            <a:spAutoFit/>
-          </a:bodyPr>
-          <a:lstStyle/>
-          <a:p>
-            <a:pPr algn="l">
-              <a:lnSpc>
-                <a:spcPct val="115000"/>
-              </a:lnSpc>
-            </a:pPr>
-          </a:p>
-        </p:txBody>
-      </p:sp>
-      <p:sp>
-        <p:nvSpPr>
-          <p:cNvPr id="16" name="TextBox 15"/>
-          <p:cNvSpPr txBox="1"/>
-          <p:nvPr/>
-        </p:nvSpPr>
-        <p:spPr>
-          <a:xfrm>
-            <a:off x="6583680" y="4080052"/>
-            <a:ext cx="4572000" cy="506577"/>
-          </a:xfrm>
-          <a:prstGeom prst="rect">
-            <a:avLst/>
-          </a:prstGeom>
-          <a:noFill/>
-        </p:spPr>
-        <p:txBody>
-          <a:bodyPr wrap="square" anchor="t">
-            <a:spAutoFit/>
-          </a:bodyPr>
-          <a:lstStyle/>
-          <a:p>
-            <a:pPr algn="l">
-              <a:lnSpc>
-                <a:spcPct val="115000"/>
-              </a:lnSpc>
-            </a:pPr>
-            <a:r>
-              <a:rPr sz="1600" b="1">
-                <a:solidFill>
-                  <a:srgbClr val="F8FAFC"/>
-                </a:solidFill>
-                <a:latin typeface="Microsoft YaHei"/>
-              </a:rPr>
-              <a:t>屏幕上的画面算</a:t>
+              <a:rPr sz="4000" b="1">
+                <a:solidFill>
+                  <a:srgbClr val="FDE047"/>
+                </a:solidFill>
+                <a:latin typeface="Microsoft YaHei"/>
+              </a:rPr>
+              <a:t>不是加咒语</a:t>
+            </a:r>
+          </a:p>
+        </p:txBody>
+      </p:sp>
+      <p:sp>
+        <p:nvSpPr>
+          <p:cNvPr id="3" name="TextBox 2"/>
+          <p:cNvSpPr txBox="1"/>
+          <p:nvPr/>
+        </p:nvSpPr>
+        <p:spPr>
+          <a:xfrm>
+            <a:off x="914400" y="4480560"/>
+            <a:ext cx="10332720" cy="914400"/>
+          </a:xfrm>
+          <a:prstGeom prst="rect">
+            <a:avLst/>
+          </a:prstGeom>
+          <a:noFill/>
+        </p:spPr>
+        <p:txBody>
+          <a:bodyPr wrap="square" anchor="t">
+            <a:spAutoFit/>
+          </a:bodyPr>
+          <a:lstStyle/>
+          <a:p>
+            <a:pPr algn="ctr">
+              <a:lnSpc>
+                <a:spcPct val="115000"/>
+              </a:lnSpc>
+            </a:pPr>
+            <a:r>
+              <a:rPr sz="2000" b="0">
+                <a:solidFill>
+                  <a:srgbClr val="94A3B8"/>
+                </a:solidFill>
+                <a:latin typeface="Microsoft YaHei"/>
+              </a:rPr>
+              <a:t>那些咒语里最有名的一条，还专门被复现推翻过</a:t>
             </a:r>
           </a:p>
         </p:txBody>
@@ -13468,7 +14125,7 @@
                 </a:solidFill>
                 <a:latin typeface="Microsoft YaHei"/>
               </a:rPr>
-              <a:t>2.4　它记不住</a:t>
+              <a:t>2.3　上周的真事</a:t>
             </a:r>
           </a:p>
         </p:txBody>
@@ -13551,7 +14208,7 @@
                 </a:solidFill>
                 <a:latin typeface="Microsoft YaHei"/>
               </a:rPr>
-              <a:t>每次对话都是新的一天，它不记得上次</a:t>
+              <a:t>让 AI 把一个显卡的神经网络移植到另一家显卡上</a:t>
             </a:r>
           </a:p>
         </p:txBody>
@@ -13590,7 +14247,16 @@
                 </a:solidFill>
                 <a:latin typeface="Microsoft YaHei"/>
               </a:rPr>
-              <a:t>要么你替它记（笔记、文档、知识库）</a:t>
+              <a:t>AI 干了三天，写了三千行工作日志，周五说</a:t>
+            </a:r>
+            <a:r>
+              <a:rPr sz="2400" b="1">
+                <a:solidFill>
+                  <a:srgbClr val="F8FAFC"/>
+                </a:solidFill>
+                <a:latin typeface="Microsoft YaHei"/>
+              </a:rPr>
+              <a:t>「跑通了」</a:t>
             </a:r>
           </a:p>
         </p:txBody>
@@ -13629,7 +14295,16 @@
                 </a:solidFill>
                 <a:latin typeface="Microsoft YaHei"/>
               </a:rPr>
-              <a:t>要么每次重新教</a:t>
+              <a:t>周日凌晨我进游戏一看——</a:t>
+            </a:r>
+            <a:r>
+              <a:rPr sz="2400" b="1">
+                <a:solidFill>
+                  <a:srgbClr val="F8FAFC"/>
+                </a:solidFill>
+                <a:latin typeface="Microsoft YaHei"/>
+              </a:rPr>
+              <a:t>画面根本没变</a:t>
             </a:r>
           </a:p>
         </p:txBody>
@@ -13662,13 +14337,13 @@
               </a:lnSpc>
             </a:pPr>
             <a:r>
-              <a:rPr sz="2400" b="1">
+              <a:rPr sz="2400" b="0">
                 <a:solidFill>
                   <a:srgbClr val="F8FAFC"/>
                 </a:solidFill>
                 <a:latin typeface="Microsoft YaHei"/>
               </a:rPr>
-              <a:t>你第一句话怎么说，决定它调出哪一套</a:t>
+              <a:t>查下来：一个标记位没设，所有结果每帧都算了、每帧都被扔了</a:t>
             </a:r>
           </a:p>
         </p:txBody>
@@ -13687,7 +14362,7 @@
     <p:bg>
       <p:bgPr>
         <a:solidFill>
-          <a:srgbClr val="0A1A1A"/>
+          <a:srgbClr val="0E1428"/>
         </a:solidFill>
         <a:effectLst/>
       </p:bgPr>
@@ -13707,92 +14382,53 @@
         </p:nvSpPr>
         <p:spPr>
           <a:xfrm>
-            <a:off x="914400" y="1965960"/>
-            <a:ext cx="10332720" cy="502920"/>
-          </a:xfrm>
-          <a:prstGeom prst="rect">
-            <a:avLst/>
-          </a:prstGeom>
-          <a:noFill/>
-        </p:spPr>
-        <p:txBody>
-          <a:bodyPr wrap="square" anchor="t">
-            <a:spAutoFit/>
-          </a:bodyPr>
-          <a:lstStyle/>
-          <a:p>
-            <a:pPr algn="ctr">
-              <a:lnSpc>
-                <a:spcPct val="115000"/>
-              </a:lnSpc>
-            </a:pPr>
-            <a:r>
-              <a:rPr sz="2000" b="1">
-                <a:solidFill>
-                  <a:srgbClr val="F59E0B"/>
-                </a:solidFill>
-                <a:latin typeface="Microsoft YaHei"/>
-              </a:rPr>
-              <a:t>第三线</a:t>
-            </a:r>
-          </a:p>
-        </p:txBody>
-      </p:sp>
-      <p:sp>
-        <p:nvSpPr>
-          <p:cNvPr id="3" name="TextBox 2"/>
-          <p:cNvSpPr txBox="1"/>
-          <p:nvPr/>
-        </p:nvSpPr>
-        <p:spPr>
-          <a:xfrm>
-            <a:off x="914400" y="2560320"/>
-            <a:ext cx="10332720" cy="960120"/>
-          </a:xfrm>
-          <a:prstGeom prst="rect">
-            <a:avLst/>
-          </a:prstGeom>
-          <a:noFill/>
-        </p:spPr>
-        <p:txBody>
-          <a:bodyPr wrap="square" anchor="t">
-            <a:spAutoFit/>
-          </a:bodyPr>
-          <a:lstStyle/>
-          <a:p>
-            <a:pPr algn="ctr">
-              <a:lnSpc>
-                <a:spcPct val="115000"/>
-              </a:lnSpc>
-            </a:pPr>
-            <a:r>
-              <a:rPr sz="4000" b="1">
+            <a:off x="777240" y="457200"/>
+            <a:ext cx="10607040" cy="868680"/>
+          </a:xfrm>
+          <a:prstGeom prst="rect">
+            <a:avLst/>
+          </a:prstGeom>
+          <a:noFill/>
+        </p:spPr>
+        <p:txBody>
+          <a:bodyPr wrap="square" anchor="t">
+            <a:spAutoFit/>
+          </a:bodyPr>
+          <a:lstStyle/>
+          <a:p>
+            <a:pPr algn="l">
+              <a:lnSpc>
+                <a:spcPct val="115000"/>
+              </a:lnSpc>
+            </a:pPr>
+            <a:r>
+              <a:rPr sz="3200" b="1">
                 <a:solidFill>
                   <a:srgbClr val="F8FAFC"/>
                 </a:solidFill>
                 <a:latin typeface="Microsoft YaHei"/>
               </a:rPr>
-              <a:t>给它一个身体</a:t>
-            </a:r>
-          </a:p>
-        </p:txBody>
-      </p:sp>
-      <p:sp>
-        <p:nvSpPr>
-          <p:cNvPr id="4" name="Rectangle 3"/>
+              <a:t>2.3　从这件事抽出来的两句</a:t>
+            </a:r>
+          </a:p>
+        </p:txBody>
+      </p:sp>
+      <p:sp>
+        <p:nvSpPr>
+          <p:cNvPr id="3" name="Rectangle 2"/>
           <p:cNvSpPr/>
           <p:nvPr/>
         </p:nvSpPr>
         <p:spPr>
           <a:xfrm>
-            <a:off x="0" y="3794760"/>
-            <a:ext cx="12191695" cy="45720"/>
+            <a:off x="0" y="1444752"/>
+            <a:ext cx="12191695" cy="27432"/>
           </a:xfrm>
           <a:prstGeom prst="rect">
             <a:avLst/>
           </a:prstGeom>
           <a:solidFill>
-            <a:srgbClr val="5EEAD4"/>
+            <a:srgbClr val="F59E0B"/>
           </a:solidFill>
           <a:ln>
             <a:noFill/>
@@ -13823,14 +14459,62 @@
       </p:sp>
       <p:sp>
         <p:nvSpPr>
+          <p:cNvPr id="4" name="Rounded Rectangle 3"/>
+          <p:cNvSpPr/>
+          <p:nvPr/>
+        </p:nvSpPr>
+        <p:spPr>
+          <a:xfrm>
+            <a:off x="777240" y="1783080"/>
+            <a:ext cx="5120640" cy="3566159"/>
+          </a:xfrm>
+          <a:prstGeom prst="roundRect">
+            <a:avLst>
+              <a:gd name="adj" fmla="val 6000"/>
+            </a:avLst>
+          </a:prstGeom>
+          <a:solidFill>
+            <a:srgbClr val="162038"/>
+          </a:solidFill>
+          <a:ln w="19050">
+            <a:solidFill>
+              <a:srgbClr val="93C5FD"/>
+            </a:solidFill>
+          </a:ln>
+          <a:effectLst/>
+        </p:spPr>
+        <p:style>
+          <a:lnRef idx="1">
+            <a:schemeClr val="accent1"/>
+          </a:lnRef>
+          <a:fillRef idx="3">
+            <a:schemeClr val="accent1"/>
+          </a:fillRef>
+          <a:effectRef idx="2">
+            <a:schemeClr val="accent1"/>
+          </a:effectRef>
+          <a:fontRef idx="minor">
+            <a:schemeClr val="lt1"/>
+          </a:fontRef>
+        </p:style>
+        <p:txBody>
+          <a:bodyPr rtlCol="0" anchor="ctr"/>
+          <a:lstStyle/>
+          <a:p>
+            <a:pPr algn="ctr"/>
+          </a:p>
+        </p:txBody>
+      </p:sp>
+      <p:sp>
+        <p:nvSpPr>
           <p:cNvPr id="5" name="TextBox 4"/>
           <p:cNvSpPr txBox="1"/>
           <p:nvPr/>
         </p:nvSpPr>
         <p:spPr>
           <a:xfrm>
-            <a:off x="914400" y="4069080"/>
-            <a:ext cx="10332720" cy="640080"/>
+            <a:off x="1051560" y="1947672"/>
+            <a:ext cx="4572000" cy="457200"/>
           </a:xfrm>
           <a:prstGeom prst="rect">
             <a:avLst/>
@@ -13849,13 +14533,433 @@
               </a:lnSpc>
             </a:pPr>
             <a:r>
-              <a:rPr sz="2000" b="0">
-                <a:solidFill>
-                  <a:srgbClr val="94A3B8"/>
-                </a:solidFill>
-                <a:latin typeface="Microsoft YaHei"/>
-              </a:rPr>
-              <a:t>比大家想的远</a:t>
+              <a:rPr sz="2100" b="1">
+                <a:solidFill>
+                  <a:srgbClr val="93C5FD"/>
+                </a:solidFill>
+                <a:latin typeface="Microsoft YaHei"/>
+              </a:rPr>
+              <a:t>协作没了，剩下指挥</a:t>
+            </a:r>
+          </a:p>
+        </p:txBody>
+      </p:sp>
+      <p:sp>
+        <p:nvSpPr>
+          <p:cNvPr id="6" name="TextBox 5"/>
+          <p:cNvSpPr txBox="1"/>
+          <p:nvPr/>
+        </p:nvSpPr>
+        <p:spPr>
+          <a:xfrm>
+            <a:off x="1051560" y="2560320"/>
+            <a:ext cx="4572000" cy="506577"/>
+          </a:xfrm>
+          <a:prstGeom prst="rect">
+            <a:avLst/>
+          </a:prstGeom>
+          <a:noFill/>
+        </p:spPr>
+        <p:txBody>
+          <a:bodyPr wrap="square" anchor="t">
+            <a:spAutoFit/>
+          </a:bodyPr>
+          <a:lstStyle/>
+          <a:p>
+            <a:pPr algn="l">
+              <a:lnSpc>
+                <a:spcPct val="115000"/>
+              </a:lnSpc>
+            </a:pPr>
+            <a:r>
+              <a:rPr sz="1600" b="0">
+                <a:solidFill>
+                  <a:srgbClr val="F8FAFC"/>
+                </a:solidFill>
+                <a:latin typeface="Microsoft YaHei"/>
+              </a:rPr>
+              <a:t>以前这活要四五个人</a:t>
+            </a:r>
+          </a:p>
+        </p:txBody>
+      </p:sp>
+      <p:sp>
+        <p:nvSpPr>
+          <p:cNvPr id="7" name="TextBox 6"/>
+          <p:cNvSpPr txBox="1"/>
+          <p:nvPr/>
+        </p:nvSpPr>
+        <p:spPr>
+          <a:xfrm>
+            <a:off x="1051560" y="3066897"/>
+            <a:ext cx="4572000" cy="506577"/>
+          </a:xfrm>
+          <a:prstGeom prst="rect">
+            <a:avLst/>
+          </a:prstGeom>
+          <a:noFill/>
+        </p:spPr>
+        <p:txBody>
+          <a:bodyPr wrap="square" anchor="t">
+            <a:spAutoFit/>
+          </a:bodyPr>
+          <a:lstStyle/>
+          <a:p>
+            <a:pPr algn="l">
+              <a:lnSpc>
+                <a:spcPct val="115000"/>
+              </a:lnSpc>
+            </a:pPr>
+            <a:r>
+              <a:rPr sz="1600" b="0">
+                <a:solidFill>
+                  <a:srgbClr val="F8FAFC"/>
+                </a:solidFill>
+                <a:latin typeface="Microsoft YaHei"/>
+              </a:rPr>
+              <a:t>加一个项目经理</a:t>
+            </a:r>
+          </a:p>
+        </p:txBody>
+      </p:sp>
+      <p:sp>
+        <p:nvSpPr>
+          <p:cNvPr id="8" name="TextBox 7"/>
+          <p:cNvSpPr txBox="1"/>
+          <p:nvPr/>
+        </p:nvSpPr>
+        <p:spPr>
+          <a:xfrm>
+            <a:off x="1051560" y="3573475"/>
+            <a:ext cx="4572000" cy="506577"/>
+          </a:xfrm>
+          <a:prstGeom prst="rect">
+            <a:avLst/>
+          </a:prstGeom>
+          <a:noFill/>
+        </p:spPr>
+        <p:txBody>
+          <a:bodyPr wrap="square" anchor="t">
+            <a:spAutoFit/>
+          </a:bodyPr>
+          <a:lstStyle/>
+          <a:p>
+            <a:pPr algn="l">
+              <a:lnSpc>
+                <a:spcPct val="115000"/>
+              </a:lnSpc>
+            </a:pPr>
+          </a:p>
+        </p:txBody>
+      </p:sp>
+      <p:sp>
+        <p:nvSpPr>
+          <p:cNvPr id="9" name="TextBox 8"/>
+          <p:cNvSpPr txBox="1"/>
+          <p:nvPr/>
+        </p:nvSpPr>
+        <p:spPr>
+          <a:xfrm>
+            <a:off x="1051560" y="4080052"/>
+            <a:ext cx="4572000" cy="506577"/>
+          </a:xfrm>
+          <a:prstGeom prst="rect">
+            <a:avLst/>
+          </a:prstGeom>
+          <a:noFill/>
+        </p:spPr>
+        <p:txBody>
+          <a:bodyPr wrap="square" anchor="t">
+            <a:spAutoFit/>
+          </a:bodyPr>
+          <a:lstStyle/>
+          <a:p>
+            <a:pPr algn="l">
+              <a:lnSpc>
+                <a:spcPct val="115000"/>
+              </a:lnSpc>
+            </a:pPr>
+            <a:r>
+              <a:rPr sz="1600" b="0">
+                <a:solidFill>
+                  <a:srgbClr val="F8FAFC"/>
+                </a:solidFill>
+                <a:latin typeface="Microsoft YaHei"/>
+              </a:rPr>
+              <a:t>现在是一个 AI</a:t>
+            </a:r>
+          </a:p>
+        </p:txBody>
+      </p:sp>
+      <p:sp>
+        <p:nvSpPr>
+          <p:cNvPr id="10" name="TextBox 9"/>
+          <p:cNvSpPr txBox="1"/>
+          <p:nvPr/>
+        </p:nvSpPr>
+        <p:spPr>
+          <a:xfrm>
+            <a:off x="1051560" y="4586630"/>
+            <a:ext cx="4572000" cy="506577"/>
+          </a:xfrm>
+          <a:prstGeom prst="rect">
+            <a:avLst/>
+          </a:prstGeom>
+          <a:noFill/>
+        </p:spPr>
+        <p:txBody>
+          <a:bodyPr wrap="square" anchor="t">
+            <a:spAutoFit/>
+          </a:bodyPr>
+          <a:lstStyle/>
+          <a:p>
+            <a:pPr algn="l">
+              <a:lnSpc>
+                <a:spcPct val="115000"/>
+              </a:lnSpc>
+            </a:pPr>
+            <a:r>
+              <a:rPr sz="1600" b="0">
+                <a:solidFill>
+                  <a:srgbClr val="F8FAFC"/>
+                </a:solidFill>
+                <a:latin typeface="Microsoft YaHei"/>
+              </a:rPr>
+              <a:t>加一个人的两个判断</a:t>
+            </a:r>
+          </a:p>
+        </p:txBody>
+      </p:sp>
+      <p:sp>
+        <p:nvSpPr>
+          <p:cNvPr id="11" name="Rounded Rectangle 10"/>
+          <p:cNvSpPr/>
+          <p:nvPr/>
+        </p:nvSpPr>
+        <p:spPr>
+          <a:xfrm>
+            <a:off x="6309360" y="1783080"/>
+            <a:ext cx="5120640" cy="3566159"/>
+          </a:xfrm>
+          <a:prstGeom prst="roundRect">
+            <a:avLst>
+              <a:gd name="adj" fmla="val 6000"/>
+            </a:avLst>
+          </a:prstGeom>
+          <a:solidFill>
+            <a:srgbClr val="162038"/>
+          </a:solidFill>
+          <a:ln w="19050">
+            <a:solidFill>
+              <a:srgbClr val="F59E0B"/>
+            </a:solidFill>
+          </a:ln>
+          <a:effectLst/>
+        </p:spPr>
+        <p:style>
+          <a:lnRef idx="1">
+            <a:schemeClr val="accent1"/>
+          </a:lnRef>
+          <a:fillRef idx="3">
+            <a:schemeClr val="accent1"/>
+          </a:fillRef>
+          <a:effectRef idx="2">
+            <a:schemeClr val="accent1"/>
+          </a:effectRef>
+          <a:fontRef idx="minor">
+            <a:schemeClr val="lt1"/>
+          </a:fontRef>
+        </p:style>
+        <p:txBody>
+          <a:bodyPr rtlCol="0" anchor="ctr"/>
+          <a:lstStyle/>
+          <a:p>
+            <a:pPr algn="ctr"/>
+          </a:p>
+        </p:txBody>
+      </p:sp>
+      <p:sp>
+        <p:nvSpPr>
+          <p:cNvPr id="12" name="TextBox 11"/>
+          <p:cNvSpPr txBox="1"/>
+          <p:nvPr/>
+        </p:nvSpPr>
+        <p:spPr>
+          <a:xfrm>
+            <a:off x="6583680" y="1947672"/>
+            <a:ext cx="4572000" cy="457200"/>
+          </a:xfrm>
+          <a:prstGeom prst="rect">
+            <a:avLst/>
+          </a:prstGeom>
+          <a:noFill/>
+        </p:spPr>
+        <p:txBody>
+          <a:bodyPr wrap="square" anchor="t">
+            <a:spAutoFit/>
+          </a:bodyPr>
+          <a:lstStyle/>
+          <a:p>
+            <a:pPr algn="ctr">
+              <a:lnSpc>
+                <a:spcPct val="115000"/>
+              </a:lnSpc>
+            </a:pPr>
+            <a:r>
+              <a:rPr sz="2100" b="1">
+                <a:solidFill>
+                  <a:srgbClr val="F59E0B"/>
+                </a:solidFill>
+                <a:latin typeface="Microsoft YaHei"/>
+              </a:rPr>
+              <a:t>过程指标和结果打架，信结果</a:t>
+            </a:r>
+          </a:p>
+        </p:txBody>
+      </p:sp>
+      <p:sp>
+        <p:nvSpPr>
+          <p:cNvPr id="13" name="TextBox 12"/>
+          <p:cNvSpPr txBox="1"/>
+          <p:nvPr/>
+        </p:nvSpPr>
+        <p:spPr>
+          <a:xfrm>
+            <a:off x="6583680" y="2560320"/>
+            <a:ext cx="4572000" cy="506577"/>
+          </a:xfrm>
+          <a:prstGeom prst="rect">
+            <a:avLst/>
+          </a:prstGeom>
+          <a:noFill/>
+        </p:spPr>
+        <p:txBody>
+          <a:bodyPr wrap="square" anchor="t">
+            <a:spAutoFit/>
+          </a:bodyPr>
+          <a:lstStyle/>
+          <a:p>
+            <a:pPr algn="l">
+              <a:lnSpc>
+                <a:spcPct val="115000"/>
+              </a:lnSpc>
+            </a:pPr>
+            <a:r>
+              <a:rPr sz="1600" b="0">
+                <a:solidFill>
+                  <a:srgbClr val="F8FAFC"/>
+                </a:solidFill>
+                <a:latin typeface="Microsoft YaHei"/>
+              </a:rPr>
+              <a:t>AI 说「完成了」不算</a:t>
+            </a:r>
+          </a:p>
+        </p:txBody>
+      </p:sp>
+      <p:sp>
+        <p:nvSpPr>
+          <p:cNvPr id="14" name="TextBox 13"/>
+          <p:cNvSpPr txBox="1"/>
+          <p:nvPr/>
+        </p:nvSpPr>
+        <p:spPr>
+          <a:xfrm>
+            <a:off x="6583680" y="3066897"/>
+            <a:ext cx="4572000" cy="506577"/>
+          </a:xfrm>
+          <a:prstGeom prst="rect">
+            <a:avLst/>
+          </a:prstGeom>
+          <a:noFill/>
+        </p:spPr>
+        <p:txBody>
+          <a:bodyPr wrap="square" anchor="t">
+            <a:spAutoFit/>
+          </a:bodyPr>
+          <a:lstStyle/>
+          <a:p>
+            <a:pPr algn="l">
+              <a:lnSpc>
+                <a:spcPct val="115000"/>
+              </a:lnSpc>
+            </a:pPr>
+            <a:r>
+              <a:rPr sz="1600" b="0">
+                <a:solidFill>
+                  <a:srgbClr val="F8FAFC"/>
+                </a:solidFill>
+                <a:latin typeface="Microsoft YaHei"/>
+              </a:rPr>
+              <a:t>日志说「执行了」不算</a:t>
+            </a:r>
+          </a:p>
+        </p:txBody>
+      </p:sp>
+      <p:sp>
+        <p:nvSpPr>
+          <p:cNvPr id="15" name="TextBox 14"/>
+          <p:cNvSpPr txBox="1"/>
+          <p:nvPr/>
+        </p:nvSpPr>
+        <p:spPr>
+          <a:xfrm>
+            <a:off x="6583680" y="3573475"/>
+            <a:ext cx="4572000" cy="506577"/>
+          </a:xfrm>
+          <a:prstGeom prst="rect">
+            <a:avLst/>
+          </a:prstGeom>
+          <a:noFill/>
+        </p:spPr>
+        <p:txBody>
+          <a:bodyPr wrap="square" anchor="t">
+            <a:spAutoFit/>
+          </a:bodyPr>
+          <a:lstStyle/>
+          <a:p>
+            <a:pPr algn="l">
+              <a:lnSpc>
+                <a:spcPct val="115000"/>
+              </a:lnSpc>
+            </a:pPr>
+          </a:p>
+        </p:txBody>
+      </p:sp>
+      <p:sp>
+        <p:nvSpPr>
+          <p:cNvPr id="16" name="TextBox 15"/>
+          <p:cNvSpPr txBox="1"/>
+          <p:nvPr/>
+        </p:nvSpPr>
+        <p:spPr>
+          <a:xfrm>
+            <a:off x="6583680" y="4080052"/>
+            <a:ext cx="4572000" cy="506577"/>
+          </a:xfrm>
+          <a:prstGeom prst="rect">
+            <a:avLst/>
+          </a:prstGeom>
+          <a:noFill/>
+        </p:spPr>
+        <p:txBody>
+          <a:bodyPr wrap="square" anchor="t">
+            <a:spAutoFit/>
+          </a:bodyPr>
+          <a:lstStyle/>
+          <a:p>
+            <a:pPr algn="l">
+              <a:lnSpc>
+                <a:spcPct val="115000"/>
+              </a:lnSpc>
+            </a:pPr>
+            <a:r>
+              <a:rPr sz="1600" b="1">
+                <a:solidFill>
+                  <a:srgbClr val="F8FAFC"/>
+                </a:solidFill>
+                <a:latin typeface="Microsoft YaHei"/>
+              </a:rPr>
+              <a:t>屏幕上的画面算</a:t>
             </a:r>
           </a:p>
         </p:txBody>
@@ -13920,7 +15024,7 @@
                 </a:solidFill>
                 <a:latin typeface="Microsoft YaHei"/>
               </a:rPr>
-              <a:t>3.1　一个立场</a:t>
+              <a:t>2.4　它记不住</a:t>
             </a:r>
           </a:p>
         </p:txBody>
@@ -14003,16 +15107,7 @@
                 </a:solidFill>
                 <a:latin typeface="Microsoft YaHei"/>
               </a:rPr>
-              <a:t>现在机器人的路线是</a:t>
-            </a:r>
-            <a:r>
-              <a:rPr sz="2400" b="1">
-                <a:solidFill>
-                  <a:srgbClr val="F8FAFC"/>
-                </a:solidFill>
-                <a:latin typeface="Microsoft YaHei"/>
-              </a:rPr>
-              <a:t>先造身体再装脑子</a:t>
+              <a:t>每次对话都是新的一天，它不记得上次</a:t>
             </a:r>
           </a:p>
         </p:txBody>
@@ -14051,16 +15146,7 @@
                 </a:solidFill>
                 <a:latin typeface="Microsoft YaHei"/>
               </a:rPr>
-              <a:t>我认为顺序反了：</a:t>
-            </a:r>
-            <a:r>
-              <a:rPr sz="2400" b="1">
-                <a:solidFill>
-                  <a:srgbClr val="F8FAFC"/>
-                </a:solidFill>
-                <a:latin typeface="Microsoft YaHei"/>
-              </a:rPr>
-              <a:t>先有脑子，再由脑子决定要什么身体</a:t>
+              <a:t>要么你替它记（笔记、文档、知识库）</a:t>
             </a:r>
           </a:p>
         </p:txBody>
@@ -14099,7 +15185,46 @@
                 </a:solidFill>
                 <a:latin typeface="Microsoft YaHei"/>
               </a:rPr>
-              <a:t>进化用四十亿年让脑子和身体互相适应，工程想跳过这一步</a:t>
+              <a:t>要么每次重新教</a:t>
+            </a:r>
+          </a:p>
+        </p:txBody>
+      </p:sp>
+      <p:sp>
+        <p:nvSpPr>
+          <p:cNvPr id="7" name="TextBox 6"/>
+          <p:cNvSpPr txBox="1"/>
+          <p:nvPr/>
+        </p:nvSpPr>
+        <p:spPr>
+          <a:xfrm>
+            <a:off x="914400" y="4434840"/>
+            <a:ext cx="10332720" cy="914400"/>
+          </a:xfrm>
+          <a:prstGeom prst="rect">
+            <a:avLst/>
+          </a:prstGeom>
+          <a:noFill/>
+        </p:spPr>
+        <p:txBody>
+          <a:bodyPr wrap="square" anchor="t">
+            <a:spAutoFit/>
+          </a:bodyPr>
+          <a:lstStyle/>
+          <a:p>
+            <a:pPr algn="l">
+              <a:lnSpc>
+                <a:spcPct val="115000"/>
+              </a:lnSpc>
+            </a:pPr>
+            <a:r>
+              <a:rPr sz="2400" b="1">
+                <a:solidFill>
+                  <a:srgbClr val="F8FAFC"/>
+                </a:solidFill>
+                <a:latin typeface="Microsoft YaHei"/>
+              </a:rPr>
+              <a:t>你第一句话怎么说，决定它调出哪一套</a:t>
             </a:r>
           </a:p>
         </p:txBody>
@@ -14138,16 +15263,16 @@
         </p:nvSpPr>
         <p:spPr>
           <a:xfrm>
-            <a:off x="914400" y="2286000"/>
-            <a:ext cx="10332720" cy="1828800"/>
-          </a:xfrm>
-          <a:prstGeom prst="rect">
-            <a:avLst/>
-          </a:prstGeom>
-          <a:noFill/>
-        </p:spPr>
-        <p:txBody>
-          <a:bodyPr wrap="square" anchor="ctr">
+            <a:off x="914400" y="1965960"/>
+            <a:ext cx="10332720" cy="502920"/>
+          </a:xfrm>
+          <a:prstGeom prst="rect">
+            <a:avLst/>
+          </a:prstGeom>
+          <a:noFill/>
+        </p:spPr>
+        <p:txBody>
+          <a:bodyPr wrap="square" anchor="t">
             <a:spAutoFit/>
           </a:bodyPr>
           <a:lstStyle/>
@@ -14158,27 +15283,110 @@
               </a:lnSpc>
             </a:pPr>
             <a:r>
+              <a:rPr sz="2000" b="1">
+                <a:solidFill>
+                  <a:srgbClr val="F59E0B"/>
+                </a:solidFill>
+                <a:latin typeface="Microsoft YaHei"/>
+              </a:rPr>
+              <a:t>第三线</a:t>
+            </a:r>
+          </a:p>
+        </p:txBody>
+      </p:sp>
+      <p:sp>
+        <p:nvSpPr>
+          <p:cNvPr id="3" name="TextBox 2"/>
+          <p:cNvSpPr txBox="1"/>
+          <p:nvPr/>
+        </p:nvSpPr>
+        <p:spPr>
+          <a:xfrm>
+            <a:off x="914400" y="2560320"/>
+            <a:ext cx="10332720" cy="960120"/>
+          </a:xfrm>
+          <a:prstGeom prst="rect">
+            <a:avLst/>
+          </a:prstGeom>
+          <a:noFill/>
+        </p:spPr>
+        <p:txBody>
+          <a:bodyPr wrap="square" anchor="t">
+            <a:spAutoFit/>
+          </a:bodyPr>
+          <a:lstStyle/>
+          <a:p>
+            <a:pPr algn="ctr">
+              <a:lnSpc>
+                <a:spcPct val="115000"/>
+              </a:lnSpc>
+            </a:pPr>
+            <a:r>
               <a:rPr sz="4000" b="1">
                 <a:solidFill>
-                  <a:srgbClr val="5EEAD4"/>
-                </a:solidFill>
-                <a:latin typeface="Microsoft YaHei"/>
-              </a:rPr>
-              <a:t>莫拉维克悖论</a:t>
-            </a:r>
-          </a:p>
-        </p:txBody>
-      </p:sp>
-      <p:sp>
-        <p:nvSpPr>
-          <p:cNvPr id="3" name="TextBox 2"/>
-          <p:cNvSpPr txBox="1"/>
-          <p:nvPr/>
-        </p:nvSpPr>
-        <p:spPr>
-          <a:xfrm>
-            <a:off x="914400" y="4480560"/>
-            <a:ext cx="10332720" cy="914400"/>
+                  <a:srgbClr val="F8FAFC"/>
+                </a:solidFill>
+                <a:latin typeface="Microsoft YaHei"/>
+              </a:rPr>
+              <a:t>给它一个身体</a:t>
+            </a:r>
+          </a:p>
+        </p:txBody>
+      </p:sp>
+      <p:sp>
+        <p:nvSpPr>
+          <p:cNvPr id="4" name="Rectangle 3"/>
+          <p:cNvSpPr/>
+          <p:nvPr/>
+        </p:nvSpPr>
+        <p:spPr>
+          <a:xfrm>
+            <a:off x="0" y="3794760"/>
+            <a:ext cx="12191695" cy="45720"/>
+          </a:xfrm>
+          <a:prstGeom prst="rect">
+            <a:avLst/>
+          </a:prstGeom>
+          <a:solidFill>
+            <a:srgbClr val="5EEAD4"/>
+          </a:solidFill>
+          <a:ln>
+            <a:noFill/>
+          </a:ln>
+          <a:effectLst/>
+        </p:spPr>
+        <p:style>
+          <a:lnRef idx="1">
+            <a:schemeClr val="accent1"/>
+          </a:lnRef>
+          <a:fillRef idx="3">
+            <a:schemeClr val="accent1"/>
+          </a:fillRef>
+          <a:effectRef idx="2">
+            <a:schemeClr val="accent1"/>
+          </a:effectRef>
+          <a:fontRef idx="minor">
+            <a:schemeClr val="lt1"/>
+          </a:fontRef>
+        </p:style>
+        <p:txBody>
+          <a:bodyPr rtlCol="0" anchor="ctr"/>
+          <a:lstStyle/>
+          <a:p>
+            <a:pPr algn="ctr"/>
+          </a:p>
+        </p:txBody>
+      </p:sp>
+      <p:sp>
+        <p:nvSpPr>
+          <p:cNvPr id="5" name="TextBox 4"/>
+          <p:cNvSpPr txBox="1"/>
+          <p:nvPr/>
+        </p:nvSpPr>
+        <p:spPr>
+          <a:xfrm>
+            <a:off x="914400" y="4069080"/>
+            <a:ext cx="10332720" cy="640080"/>
           </a:xfrm>
           <a:prstGeom prst="rect">
             <a:avLst/>
@@ -14203,7 +15411,7 @@
                 </a:solidFill>
                 <a:latin typeface="Microsoft YaHei"/>
               </a:rPr>
-              <a:t>Hans Moravec，1988 年</a:t>
+              <a:t>比大家想的远</a:t>
             </a:r>
           </a:p>
         </p:txBody>
@@ -14268,7 +15476,7 @@
                 </a:solidFill>
                 <a:latin typeface="Microsoft YaHei"/>
               </a:rPr>
-              <a:t>为什么点鼠标比解物理题难</a:t>
+              <a:t>3.1　一个立场</a:t>
             </a:r>
           </a:p>
         </p:txBody>
@@ -14319,49 +15527,49 @@
       </p:sp>
       <p:sp>
         <p:nvSpPr>
-          <p:cNvPr id="4" name="Rounded Rectangle 3"/>
-          <p:cNvSpPr/>
-          <p:nvPr/>
-        </p:nvSpPr>
-        <p:spPr>
-          <a:xfrm>
-            <a:off x="777240" y="1783080"/>
-            <a:ext cx="5120640" cy="3300984"/>
-          </a:xfrm>
-          <a:prstGeom prst="roundRect">
-            <a:avLst>
-              <a:gd name="adj" fmla="val 6000"/>
-            </a:avLst>
-          </a:prstGeom>
-          <a:solidFill>
-            <a:srgbClr val="162038"/>
-          </a:solidFill>
-          <a:ln w="19050">
-            <a:solidFill>
-              <a:srgbClr val="94A3B8"/>
-            </a:solidFill>
-          </a:ln>
-          <a:effectLst/>
-        </p:spPr>
-        <p:style>
-          <a:lnRef idx="1">
-            <a:schemeClr val="accent1"/>
-          </a:lnRef>
-          <a:fillRef idx="3">
-            <a:schemeClr val="accent1"/>
-          </a:fillRef>
-          <a:effectRef idx="2">
-            <a:schemeClr val="accent1"/>
-          </a:effectRef>
-          <a:fontRef idx="minor">
-            <a:schemeClr val="lt1"/>
-          </a:fontRef>
-        </p:style>
-        <p:txBody>
-          <a:bodyPr rtlCol="0" anchor="ctr"/>
-          <a:lstStyle/>
-          <a:p>
-            <a:pPr algn="ctr"/>
+          <p:cNvPr id="4" name="TextBox 3"/>
+          <p:cNvSpPr txBox="1"/>
+          <p:nvPr/>
+        </p:nvSpPr>
+        <p:spPr>
+          <a:xfrm>
+            <a:off x="914400" y="1828800"/>
+            <a:ext cx="10332720" cy="914400"/>
+          </a:xfrm>
+          <a:prstGeom prst="rect">
+            <a:avLst/>
+          </a:prstGeom>
+          <a:noFill/>
+        </p:spPr>
+        <p:txBody>
+          <a:bodyPr wrap="square" anchor="t">
+            <a:spAutoFit/>
+          </a:bodyPr>
+          <a:lstStyle/>
+          <a:p>
+            <a:pPr algn="l">
+              <a:lnSpc>
+                <a:spcPct val="115000"/>
+              </a:lnSpc>
+            </a:pPr>
+            <a:r>
+              <a:rPr sz="2400" b="0">
+                <a:solidFill>
+                  <a:srgbClr val="F8FAFC"/>
+                </a:solidFill>
+                <a:latin typeface="Microsoft YaHei"/>
+              </a:rPr>
+              <a:t>现在机器人的路线是</a:t>
+            </a:r>
+            <a:r>
+              <a:rPr sz="2400" b="1">
+                <a:solidFill>
+                  <a:srgbClr val="F8FAFC"/>
+                </a:solidFill>
+                <a:latin typeface="Microsoft YaHei"/>
+              </a:rPr>
+              <a:t>先造身体再装脑子</a:t>
+            </a:r>
           </a:p>
         </p:txBody>
       </p:sp>
@@ -14373,33 +15581,42 @@
         </p:nvSpPr>
         <p:spPr>
           <a:xfrm>
-            <a:off x="1051560" y="1947672"/>
-            <a:ext cx="4572000" cy="457200"/>
-          </a:xfrm>
-          <a:prstGeom prst="rect">
-            <a:avLst/>
-          </a:prstGeom>
-          <a:noFill/>
-        </p:spPr>
-        <p:txBody>
-          <a:bodyPr wrap="square" anchor="t">
-            <a:spAutoFit/>
-          </a:bodyPr>
-          <a:lstStyle/>
-          <a:p>
-            <a:pPr algn="ctr">
-              <a:lnSpc>
-                <a:spcPct val="115000"/>
-              </a:lnSpc>
-            </a:pPr>
-            <a:r>
-              <a:rPr sz="2100" b="1">
-                <a:solidFill>
-                  <a:srgbClr val="94A3B8"/>
-                </a:solidFill>
-                <a:latin typeface="Microsoft YaHei"/>
-              </a:rPr>
-              <a:t>我们以为的难</a:t>
+            <a:off x="914400" y="2697480"/>
+            <a:ext cx="10332720" cy="914400"/>
+          </a:xfrm>
+          <a:prstGeom prst="rect">
+            <a:avLst/>
+          </a:prstGeom>
+          <a:noFill/>
+        </p:spPr>
+        <p:txBody>
+          <a:bodyPr wrap="square" anchor="t">
+            <a:spAutoFit/>
+          </a:bodyPr>
+          <a:lstStyle/>
+          <a:p>
+            <a:pPr algn="l">
+              <a:lnSpc>
+                <a:spcPct val="115000"/>
+              </a:lnSpc>
+            </a:pPr>
+            <a:r>
+              <a:rPr sz="2400" b="0">
+                <a:solidFill>
+                  <a:srgbClr val="F8FAFC"/>
+                </a:solidFill>
+                <a:latin typeface="Microsoft YaHei"/>
+              </a:rPr>
+              <a:t>我认为顺序反了：</a:t>
+            </a:r>
+            <a:r>
+              <a:rPr sz="2400" b="1">
+                <a:solidFill>
+                  <a:srgbClr val="F8FAFC"/>
+                </a:solidFill>
+                <a:latin typeface="Microsoft YaHei"/>
+              </a:rPr>
+              <a:t>先有脑子，再由脑子决定要什么身体</a:t>
             </a:r>
           </a:p>
         </p:txBody>
@@ -14412,8 +15629,8 @@
         </p:nvSpPr>
         <p:spPr>
           <a:xfrm>
-            <a:off x="1051560" y="2560320"/>
-            <a:ext cx="4572000" cy="566928"/>
+            <a:off x="914400" y="3566160"/>
+            <a:ext cx="10332720" cy="914400"/>
           </a:xfrm>
           <a:prstGeom prst="rect">
             <a:avLst/>
@@ -14432,412 +15649,13 @@
               </a:lnSpc>
             </a:pPr>
             <a:r>
-              <a:rPr sz="1800" b="0">
+              <a:rPr sz="2400" b="0">
                 <a:solidFill>
                   <a:srgbClr val="F8FAFC"/>
                 </a:solidFill>
                 <a:latin typeface="Microsoft YaHei"/>
               </a:rPr>
-              <a:t>下棋、证明定理</a:t>
-            </a:r>
-          </a:p>
-        </p:txBody>
-      </p:sp>
-      <p:sp>
-        <p:nvSpPr>
-          <p:cNvPr id="7" name="TextBox 6"/>
-          <p:cNvSpPr txBox="1"/>
-          <p:nvPr/>
-        </p:nvSpPr>
-        <p:spPr>
-          <a:xfrm>
-            <a:off x="1051560" y="3127248"/>
-            <a:ext cx="4572000" cy="566928"/>
-          </a:xfrm>
-          <a:prstGeom prst="rect">
-            <a:avLst/>
-          </a:prstGeom>
-          <a:noFill/>
-        </p:spPr>
-        <p:txBody>
-          <a:bodyPr wrap="square" anchor="t">
-            <a:spAutoFit/>
-          </a:bodyPr>
-          <a:lstStyle/>
-          <a:p>
-            <a:pPr algn="l">
-              <a:lnSpc>
-                <a:spcPct val="115000"/>
-              </a:lnSpc>
-            </a:pPr>
-            <a:r>
-              <a:rPr sz="1800" b="0">
-                <a:solidFill>
-                  <a:srgbClr val="F8FAFC"/>
-                </a:solidFill>
-                <a:latin typeface="Microsoft YaHei"/>
-              </a:rPr>
-              <a:t>解方程、写论文</a:t>
-            </a:r>
-          </a:p>
-        </p:txBody>
-      </p:sp>
-      <p:sp>
-        <p:nvSpPr>
-          <p:cNvPr id="8" name="TextBox 7"/>
-          <p:cNvSpPr txBox="1"/>
-          <p:nvPr/>
-        </p:nvSpPr>
-        <p:spPr>
-          <a:xfrm>
-            <a:off x="1051560" y="3694176"/>
-            <a:ext cx="4572000" cy="566928"/>
-          </a:xfrm>
-          <a:prstGeom prst="rect">
-            <a:avLst/>
-          </a:prstGeom>
-          <a:noFill/>
-        </p:spPr>
-        <p:txBody>
-          <a:bodyPr wrap="square" anchor="t">
-            <a:spAutoFit/>
-          </a:bodyPr>
-          <a:lstStyle/>
-          <a:p>
-            <a:pPr algn="l">
-              <a:lnSpc>
-                <a:spcPct val="115000"/>
-              </a:lnSpc>
-            </a:pPr>
-          </a:p>
-        </p:txBody>
-      </p:sp>
-      <p:sp>
-        <p:nvSpPr>
-          <p:cNvPr id="9" name="TextBox 8"/>
-          <p:cNvSpPr txBox="1"/>
-          <p:nvPr/>
-        </p:nvSpPr>
-        <p:spPr>
-          <a:xfrm>
-            <a:off x="1051560" y="4261104"/>
-            <a:ext cx="4572000" cy="566928"/>
-          </a:xfrm>
-          <a:prstGeom prst="rect">
-            <a:avLst/>
-          </a:prstGeom>
-          <a:noFill/>
-        </p:spPr>
-        <p:txBody>
-          <a:bodyPr wrap="square" anchor="t">
-            <a:spAutoFit/>
-          </a:bodyPr>
-          <a:lstStyle/>
-          <a:p>
-            <a:pPr algn="l">
-              <a:lnSpc>
-                <a:spcPct val="115000"/>
-              </a:lnSpc>
-            </a:pPr>
-            <a:r>
-              <a:rPr sz="1800" b="0">
-                <a:solidFill>
-                  <a:srgbClr val="F8FAFC"/>
-                </a:solidFill>
-                <a:latin typeface="Microsoft YaHei"/>
-              </a:rPr>
-              <a:t>→ 对 AI 反而</a:t>
-            </a:r>
-            <a:r>
-              <a:rPr sz="1800" b="1">
-                <a:solidFill>
-                  <a:srgbClr val="F8FAFC"/>
-                </a:solidFill>
-                <a:latin typeface="Microsoft YaHei"/>
-              </a:rPr>
-              <a:t>容易</a:t>
-            </a:r>
-          </a:p>
-        </p:txBody>
-      </p:sp>
-      <p:sp>
-        <p:nvSpPr>
-          <p:cNvPr id="10" name="Rounded Rectangle 9"/>
-          <p:cNvSpPr/>
-          <p:nvPr/>
-        </p:nvSpPr>
-        <p:spPr>
-          <a:xfrm>
-            <a:off x="6309360" y="1783080"/>
-            <a:ext cx="5120640" cy="3300984"/>
-          </a:xfrm>
-          <a:prstGeom prst="roundRect">
-            <a:avLst>
-              <a:gd name="adj" fmla="val 6000"/>
-            </a:avLst>
-          </a:prstGeom>
-          <a:solidFill>
-            <a:srgbClr val="162038"/>
-          </a:solidFill>
-          <a:ln w="19050">
-            <a:solidFill>
-              <a:srgbClr val="F87171"/>
-            </a:solidFill>
-          </a:ln>
-          <a:effectLst/>
-        </p:spPr>
-        <p:style>
-          <a:lnRef idx="1">
-            <a:schemeClr val="accent1"/>
-          </a:lnRef>
-          <a:fillRef idx="3">
-            <a:schemeClr val="accent1"/>
-          </a:fillRef>
-          <a:effectRef idx="2">
-            <a:schemeClr val="accent1"/>
-          </a:effectRef>
-          <a:fontRef idx="minor">
-            <a:schemeClr val="lt1"/>
-          </a:fontRef>
-        </p:style>
-        <p:txBody>
-          <a:bodyPr rtlCol="0" anchor="ctr"/>
-          <a:lstStyle/>
-          <a:p>
-            <a:pPr algn="ctr"/>
-          </a:p>
-        </p:txBody>
-      </p:sp>
-      <p:sp>
-        <p:nvSpPr>
-          <p:cNvPr id="11" name="TextBox 10"/>
-          <p:cNvSpPr txBox="1"/>
-          <p:nvPr/>
-        </p:nvSpPr>
-        <p:spPr>
-          <a:xfrm>
-            <a:off x="6583680" y="1947672"/>
-            <a:ext cx="4572000" cy="457200"/>
-          </a:xfrm>
-          <a:prstGeom prst="rect">
-            <a:avLst/>
-          </a:prstGeom>
-          <a:noFill/>
-        </p:spPr>
-        <p:txBody>
-          <a:bodyPr wrap="square" anchor="t">
-            <a:spAutoFit/>
-          </a:bodyPr>
-          <a:lstStyle/>
-          <a:p>
-            <a:pPr algn="ctr">
-              <a:lnSpc>
-                <a:spcPct val="115000"/>
-              </a:lnSpc>
-            </a:pPr>
-            <a:r>
-              <a:rPr sz="2100" b="1">
-                <a:solidFill>
-                  <a:srgbClr val="F87171"/>
-                </a:solidFill>
-                <a:latin typeface="Microsoft YaHei"/>
-              </a:rPr>
-              <a:t>我们以为的简单</a:t>
-            </a:r>
-          </a:p>
-        </p:txBody>
-      </p:sp>
-      <p:sp>
-        <p:nvSpPr>
-          <p:cNvPr id="12" name="TextBox 11"/>
-          <p:cNvSpPr txBox="1"/>
-          <p:nvPr/>
-        </p:nvSpPr>
-        <p:spPr>
-          <a:xfrm>
-            <a:off x="6583680" y="2560320"/>
-            <a:ext cx="4572000" cy="566928"/>
-          </a:xfrm>
-          <a:prstGeom prst="rect">
-            <a:avLst/>
-          </a:prstGeom>
-          <a:noFill/>
-        </p:spPr>
-        <p:txBody>
-          <a:bodyPr wrap="square" anchor="t">
-            <a:spAutoFit/>
-          </a:bodyPr>
-          <a:lstStyle/>
-          <a:p>
-            <a:pPr algn="l">
-              <a:lnSpc>
-                <a:spcPct val="115000"/>
-              </a:lnSpc>
-            </a:pPr>
-            <a:r>
-              <a:rPr sz="1800" b="0">
-                <a:solidFill>
-                  <a:srgbClr val="F8FAFC"/>
-                </a:solidFill>
-                <a:latin typeface="Microsoft YaHei"/>
-              </a:rPr>
-              <a:t>认出一张脸、走路不摔</a:t>
-            </a:r>
-          </a:p>
-        </p:txBody>
-      </p:sp>
-      <p:sp>
-        <p:nvSpPr>
-          <p:cNvPr id="13" name="TextBox 12"/>
-          <p:cNvSpPr txBox="1"/>
-          <p:nvPr/>
-        </p:nvSpPr>
-        <p:spPr>
-          <a:xfrm>
-            <a:off x="6583680" y="3127248"/>
-            <a:ext cx="4572000" cy="566928"/>
-          </a:xfrm>
-          <a:prstGeom prst="rect">
-            <a:avLst/>
-          </a:prstGeom>
-          <a:noFill/>
-        </p:spPr>
-        <p:txBody>
-          <a:bodyPr wrap="square" anchor="t">
-            <a:spAutoFit/>
-          </a:bodyPr>
-          <a:lstStyle/>
-          <a:p>
-            <a:pPr algn="l">
-              <a:lnSpc>
-                <a:spcPct val="115000"/>
-              </a:lnSpc>
-            </a:pPr>
-            <a:r>
-              <a:rPr sz="1800" b="0">
-                <a:solidFill>
-                  <a:srgbClr val="F8FAFC"/>
-                </a:solidFill>
-                <a:latin typeface="Microsoft YaHei"/>
-              </a:rPr>
-              <a:t>把杯子从桌上拿起来</a:t>
-            </a:r>
-          </a:p>
-        </p:txBody>
-      </p:sp>
-      <p:sp>
-        <p:nvSpPr>
-          <p:cNvPr id="14" name="TextBox 13"/>
-          <p:cNvSpPr txBox="1"/>
-          <p:nvPr/>
-        </p:nvSpPr>
-        <p:spPr>
-          <a:xfrm>
-            <a:off x="6583680" y="3694176"/>
-            <a:ext cx="4572000" cy="566928"/>
-          </a:xfrm>
-          <a:prstGeom prst="rect">
-            <a:avLst/>
-          </a:prstGeom>
-          <a:noFill/>
-        </p:spPr>
-        <p:txBody>
-          <a:bodyPr wrap="square" anchor="t">
-            <a:spAutoFit/>
-          </a:bodyPr>
-          <a:lstStyle/>
-          <a:p>
-            <a:pPr algn="l">
-              <a:lnSpc>
-                <a:spcPct val="115000"/>
-              </a:lnSpc>
-            </a:pPr>
-          </a:p>
-        </p:txBody>
-      </p:sp>
-      <p:sp>
-        <p:nvSpPr>
-          <p:cNvPr id="15" name="TextBox 14"/>
-          <p:cNvSpPr txBox="1"/>
-          <p:nvPr/>
-        </p:nvSpPr>
-        <p:spPr>
-          <a:xfrm>
-            <a:off x="6583680" y="4261104"/>
-            <a:ext cx="4572000" cy="566928"/>
-          </a:xfrm>
-          <a:prstGeom prst="rect">
-            <a:avLst/>
-          </a:prstGeom>
-          <a:noFill/>
-        </p:spPr>
-        <p:txBody>
-          <a:bodyPr wrap="square" anchor="t">
-            <a:spAutoFit/>
-          </a:bodyPr>
-          <a:lstStyle/>
-          <a:p>
-            <a:pPr algn="l">
-              <a:lnSpc>
-                <a:spcPct val="115000"/>
-              </a:lnSpc>
-            </a:pPr>
-            <a:r>
-              <a:rPr sz="1800" b="0">
-                <a:solidFill>
-                  <a:srgbClr val="F8FAFC"/>
-                </a:solidFill>
-                <a:latin typeface="Microsoft YaHei"/>
-              </a:rPr>
-              <a:t>→ 对 AI 反而</a:t>
-            </a:r>
-            <a:r>
-              <a:rPr sz="1800" b="1">
-                <a:solidFill>
-                  <a:srgbClr val="F8FAFC"/>
-                </a:solidFill>
-                <a:latin typeface="Microsoft YaHei"/>
-              </a:rPr>
-              <a:t>极难</a:t>
-            </a:r>
-          </a:p>
-        </p:txBody>
-      </p:sp>
-      <p:sp>
-        <p:nvSpPr>
-          <p:cNvPr id="16" name="TextBox 15"/>
-          <p:cNvSpPr txBox="1"/>
-          <p:nvPr/>
-        </p:nvSpPr>
-        <p:spPr>
-          <a:xfrm>
-            <a:off x="777240" y="5285232"/>
-            <a:ext cx="10607040" cy="822960"/>
-          </a:xfrm>
-          <a:prstGeom prst="rect">
-            <a:avLst/>
-          </a:prstGeom>
-          <a:noFill/>
-        </p:spPr>
-        <p:txBody>
-          <a:bodyPr wrap="square" anchor="t">
-            <a:spAutoFit/>
-          </a:bodyPr>
-          <a:lstStyle/>
-          <a:p>
-            <a:pPr algn="ctr">
-              <a:lnSpc>
-                <a:spcPct val="115000"/>
-              </a:lnSpc>
-            </a:pPr>
-            <a:r>
-              <a:rPr sz="2100" b="1">
-                <a:solidFill>
-                  <a:srgbClr val="FDE047"/>
-                </a:solidFill>
-                <a:latin typeface="Microsoft YaHei"/>
-              </a:rPr>
-              <a:t>莫拉维克的解释：感知和运动被自然选择磨了几亿年，久到沉进了硬件里</a:t>
+              <a:t>进化用四十亿年让脑子和身体互相适应，工程想跳过这一步</a:t>
             </a:r>
           </a:p>
         </p:txBody>
@@ -14856,7 +15674,7 @@
     <p:bg>
       <p:bgPr>
         <a:solidFill>
-          <a:srgbClr val="0E1428"/>
+          <a:srgbClr val="0A1A1A"/>
         </a:solidFill>
         <a:effectLst/>
       </p:bgPr>
@@ -14876,90 +15694,46 @@
         </p:nvSpPr>
         <p:spPr>
           <a:xfrm>
-            <a:off x="777240" y="457200"/>
-            <a:ext cx="10607040" cy="868680"/>
-          </a:xfrm>
-          <a:prstGeom prst="rect">
-            <a:avLst/>
-          </a:prstGeom>
-          <a:noFill/>
-        </p:spPr>
-        <p:txBody>
-          <a:bodyPr wrap="square" anchor="t">
-            <a:spAutoFit/>
-          </a:bodyPr>
-          <a:lstStyle/>
-          <a:p>
-            <a:pPr algn="l">
-              <a:lnSpc>
-                <a:spcPct val="115000"/>
-              </a:lnSpc>
-            </a:pPr>
-            <a:r>
-              <a:rPr sz="3200" b="1">
-                <a:solidFill>
-                  <a:srgbClr val="F8FAFC"/>
-                </a:solidFill>
-                <a:latin typeface="Microsoft YaHei"/>
-              </a:rPr>
-              <a:t>3.2　证据：让它操作电脑</a:t>
-            </a:r>
-          </a:p>
-        </p:txBody>
-      </p:sp>
-      <p:sp>
-        <p:nvSpPr>
-          <p:cNvPr id="3" name="Rectangle 2"/>
-          <p:cNvSpPr/>
-          <p:nvPr/>
-        </p:nvSpPr>
-        <p:spPr>
-          <a:xfrm>
-            <a:off x="0" y="1444752"/>
-            <a:ext cx="12191695" cy="27432"/>
-          </a:xfrm>
-          <a:prstGeom prst="rect">
-            <a:avLst/>
-          </a:prstGeom>
-          <a:solidFill>
-            <a:srgbClr val="F59E0B"/>
-          </a:solidFill>
-          <a:ln>
-            <a:noFill/>
-          </a:ln>
-          <a:effectLst/>
-        </p:spPr>
-        <p:style>
-          <a:lnRef idx="1">
-            <a:schemeClr val="accent1"/>
-          </a:lnRef>
-          <a:fillRef idx="3">
-            <a:schemeClr val="accent1"/>
-          </a:fillRef>
-          <a:effectRef idx="2">
-            <a:schemeClr val="accent1"/>
-          </a:effectRef>
-          <a:fontRef idx="minor">
-            <a:schemeClr val="lt1"/>
-          </a:fontRef>
-        </p:style>
-        <p:txBody>
-          <a:bodyPr rtlCol="0" anchor="ctr"/>
-          <a:lstStyle/>
-          <a:p>
-            <a:pPr algn="ctr"/>
-          </a:p>
-        </p:txBody>
-      </p:sp>
-      <p:sp>
-        <p:nvSpPr>
-          <p:cNvPr id="4" name="TextBox 3"/>
-          <p:cNvSpPr txBox="1"/>
-          <p:nvPr/>
-        </p:nvSpPr>
-        <p:spPr>
-          <a:xfrm>
-            <a:off x="914400" y="1828800"/>
+            <a:off x="914400" y="2286000"/>
+            <a:ext cx="10332720" cy="1828800"/>
+          </a:xfrm>
+          <a:prstGeom prst="rect">
+            <a:avLst/>
+          </a:prstGeom>
+          <a:noFill/>
+        </p:spPr>
+        <p:txBody>
+          <a:bodyPr wrap="square" anchor="ctr">
+            <a:spAutoFit/>
+          </a:bodyPr>
+          <a:lstStyle/>
+          <a:p>
+            <a:pPr algn="ctr">
+              <a:lnSpc>
+                <a:spcPct val="115000"/>
+              </a:lnSpc>
+            </a:pPr>
+            <a:r>
+              <a:rPr sz="4000" b="1">
+                <a:solidFill>
+                  <a:srgbClr val="5EEAD4"/>
+                </a:solidFill>
+                <a:latin typeface="Microsoft YaHei"/>
+              </a:rPr>
+              <a:t>莫拉维克悖论</a:t>
+            </a:r>
+          </a:p>
+        </p:txBody>
+      </p:sp>
+      <p:sp>
+        <p:nvSpPr>
+          <p:cNvPr id="3" name="TextBox 2"/>
+          <p:cNvSpPr txBox="1"/>
+          <p:nvPr/>
+        </p:nvSpPr>
+        <p:spPr>
+          <a:xfrm>
+            <a:off x="914400" y="4480560"/>
             <a:ext cx="10332720" cy="914400"/>
           </a:xfrm>
           <a:prstGeom prst="rect">
@@ -14973,58 +15747,19 @@
           </a:bodyPr>
           <a:lstStyle/>
           <a:p>
-            <a:pPr algn="l">
-              <a:lnSpc>
-                <a:spcPct val="115000"/>
-              </a:lnSpc>
-            </a:pPr>
-            <a:r>
-              <a:rPr sz="2400" b="0">
-                <a:solidFill>
-                  <a:srgbClr val="F8FAFC"/>
-                </a:solidFill>
-                <a:latin typeface="Microsoft YaHei"/>
-              </a:rPr>
-              <a:t>这是机器人的最简版：二维、传感器完美、错了能撤销</a:t>
-            </a:r>
-          </a:p>
-        </p:txBody>
-      </p:sp>
-      <p:sp>
-        <p:nvSpPr>
-          <p:cNvPr id="5" name="TextBox 4"/>
-          <p:cNvSpPr txBox="1"/>
-          <p:nvPr/>
-        </p:nvSpPr>
-        <p:spPr>
-          <a:xfrm>
-            <a:off x="914400" y="2697480"/>
-            <a:ext cx="10332720" cy="914400"/>
-          </a:xfrm>
-          <a:prstGeom prst="rect">
-            <a:avLst/>
-          </a:prstGeom>
-          <a:noFill/>
-        </p:spPr>
-        <p:txBody>
-          <a:bodyPr wrap="square" anchor="t">
-            <a:spAutoFit/>
-          </a:bodyPr>
-          <a:lstStyle/>
-          <a:p>
-            <a:pPr algn="l">
-              <a:lnSpc>
-                <a:spcPct val="115000"/>
-              </a:lnSpc>
-            </a:pPr>
-            <a:r>
-              <a:rPr sz="2400" b="0">
-                <a:solidFill>
-                  <a:srgbClr val="F8FAFC"/>
-                </a:solidFill>
-                <a:latin typeface="Microsoft YaHei"/>
-              </a:rPr>
-              <a:t>有个标准测试叫 OSWorld，让 AI 直接操作一台真电脑</a:t>
+            <a:pPr algn="ctr">
+              <a:lnSpc>
+                <a:spcPct val="115000"/>
+              </a:lnSpc>
+            </a:pPr>
+            <a:r>
+              <a:rPr sz="2000" b="0">
+                <a:solidFill>
+                  <a:srgbClr val="94A3B8"/>
+                </a:solidFill>
+                <a:latin typeface="Microsoft YaHei"/>
+              </a:rPr>
+              <a:t>Hans Moravec，1988 年</a:t>
             </a:r>
           </a:p>
         </p:txBody>
@@ -15276,7 +16011,7 @@
                 </a:solidFill>
                 <a:latin typeface="Microsoft YaHei"/>
               </a:rPr>
-              <a:t>3.2　换个难度就掉十三个点</a:t>
+              <a:t>为什么点鼠标比解物理题难</a:t>
             </a:r>
           </a:p>
         </p:txBody>
@@ -15333,8 +16068,8 @@
         </p:nvSpPr>
         <p:spPr>
           <a:xfrm>
-            <a:off x="777240" y="2148840"/>
-            <a:ext cx="5166359" cy="2514600"/>
+            <a:off x="777240" y="1783080"/>
+            <a:ext cx="5120640" cy="3300984"/>
           </a:xfrm>
           <a:prstGeom prst="roundRect">
             <a:avLst>
@@ -15346,7 +16081,7 @@
           </a:solidFill>
           <a:ln w="19050">
             <a:solidFill>
-              <a:srgbClr val="A3E635"/>
+              <a:srgbClr val="94A3B8"/>
             </a:solidFill>
           </a:ln>
           <a:effectLst/>
@@ -15381,8 +16116,8 @@
         </p:nvSpPr>
         <p:spPr>
           <a:xfrm>
-            <a:off x="868680" y="2532888"/>
-            <a:ext cx="4983479" cy="914400"/>
+            <a:off x="1051560" y="1947672"/>
+            <a:ext cx="4572000" cy="457200"/>
           </a:xfrm>
           <a:prstGeom prst="rect">
             <a:avLst/>
@@ -15401,13 +16136,13 @@
               </a:lnSpc>
             </a:pPr>
             <a:r>
-              <a:rPr sz="5400" b="1">
-                <a:solidFill>
-                  <a:srgbClr val="A3E635"/>
-                </a:solidFill>
-                <a:latin typeface="Microsoft YaHei"/>
-              </a:rPr>
-              <a:t>86%</a:t>
+              <a:rPr sz="2100" b="1">
+                <a:solidFill>
+                  <a:srgbClr val="94A3B8"/>
+                </a:solidFill>
+                <a:latin typeface="Microsoft YaHei"/>
+              </a:rPr>
+              <a:t>我们以为的难</a:t>
             </a:r>
           </a:p>
         </p:txBody>
@@ -15420,21 +16155,21 @@
         </p:nvSpPr>
         <p:spPr>
           <a:xfrm>
-            <a:off x="868680" y="3630168"/>
-            <a:ext cx="4983479" cy="868680"/>
-          </a:xfrm>
-          <a:prstGeom prst="rect">
-            <a:avLst/>
-          </a:prstGeom>
-          <a:noFill/>
-        </p:spPr>
-        <p:txBody>
-          <a:bodyPr wrap="square" anchor="t">
-            <a:spAutoFit/>
-          </a:bodyPr>
-          <a:lstStyle/>
-          <a:p>
-            <a:pPr algn="ctr">
+            <a:off x="1051560" y="2560320"/>
+            <a:ext cx="4572000" cy="566928"/>
+          </a:xfrm>
+          <a:prstGeom prst="rect">
+            <a:avLst/>
+          </a:prstGeom>
+          <a:noFill/>
+        </p:spPr>
+        <p:txBody>
+          <a:bodyPr wrap="square" anchor="t">
+            <a:spAutoFit/>
+          </a:bodyPr>
+          <a:lstStyle/>
+          <a:p>
+            <a:pPr algn="l">
               <a:lnSpc>
                 <a:spcPct val="115000"/>
               </a:lnSpc>
@@ -15442,15 +16177,38 @@
             <a:r>
               <a:rPr sz="1800" b="0">
                 <a:solidFill>
-                  <a:srgbClr val="94A3B8"/>
-                </a:solidFill>
-                <a:latin typeface="Microsoft YaHei"/>
-              </a:rPr>
-              <a:t>修正版</a:t>
-            </a:r>
-          </a:p>
-          <a:p>
-            <a:pPr algn="ctr">
+                  <a:srgbClr val="F8FAFC"/>
+                </a:solidFill>
+                <a:latin typeface="Microsoft YaHei"/>
+              </a:rPr>
+              <a:t>下棋、证明定理</a:t>
+            </a:r>
+          </a:p>
+        </p:txBody>
+      </p:sp>
+      <p:sp>
+        <p:nvSpPr>
+          <p:cNvPr id="7" name="TextBox 6"/>
+          <p:cNvSpPr txBox="1"/>
+          <p:nvPr/>
+        </p:nvSpPr>
+        <p:spPr>
+          <a:xfrm>
+            <a:off x="1051560" y="3127248"/>
+            <a:ext cx="4572000" cy="566928"/>
+          </a:xfrm>
+          <a:prstGeom prst="rect">
+            <a:avLst/>
+          </a:prstGeom>
+          <a:noFill/>
+        </p:spPr>
+        <p:txBody>
+          <a:bodyPr wrap="square" anchor="t">
+            <a:spAutoFit/>
+          </a:bodyPr>
+          <a:lstStyle/>
+          <a:p>
+            <a:pPr algn="l">
               <a:lnSpc>
                 <a:spcPct val="115000"/>
               </a:lnSpc>
@@ -15458,25 +16216,103 @@
             <a:r>
               <a:rPr sz="1800" b="0">
                 <a:solidFill>
-                  <a:srgbClr val="94A3B8"/>
-                </a:solidFill>
-                <a:latin typeface="Microsoft YaHei"/>
-              </a:rPr>
-              <a:t>人类基线约 72%</a:t>
-            </a:r>
-          </a:p>
-        </p:txBody>
-      </p:sp>
-      <p:sp>
-        <p:nvSpPr>
-          <p:cNvPr id="7" name="Rounded Rectangle 6"/>
+                  <a:srgbClr val="F8FAFC"/>
+                </a:solidFill>
+                <a:latin typeface="Microsoft YaHei"/>
+              </a:rPr>
+              <a:t>解方程、写论文</a:t>
+            </a:r>
+          </a:p>
+        </p:txBody>
+      </p:sp>
+      <p:sp>
+        <p:nvSpPr>
+          <p:cNvPr id="8" name="TextBox 7"/>
+          <p:cNvSpPr txBox="1"/>
+          <p:nvPr/>
+        </p:nvSpPr>
+        <p:spPr>
+          <a:xfrm>
+            <a:off x="1051560" y="3694176"/>
+            <a:ext cx="4572000" cy="566928"/>
+          </a:xfrm>
+          <a:prstGeom prst="rect">
+            <a:avLst/>
+          </a:prstGeom>
+          <a:noFill/>
+        </p:spPr>
+        <p:txBody>
+          <a:bodyPr wrap="square" anchor="t">
+            <a:spAutoFit/>
+          </a:bodyPr>
+          <a:lstStyle/>
+          <a:p>
+            <a:pPr algn="l">
+              <a:lnSpc>
+                <a:spcPct val="115000"/>
+              </a:lnSpc>
+            </a:pPr>
+          </a:p>
+        </p:txBody>
+      </p:sp>
+      <p:sp>
+        <p:nvSpPr>
+          <p:cNvPr id="9" name="TextBox 8"/>
+          <p:cNvSpPr txBox="1"/>
+          <p:nvPr/>
+        </p:nvSpPr>
+        <p:spPr>
+          <a:xfrm>
+            <a:off x="1051560" y="4261104"/>
+            <a:ext cx="4572000" cy="566928"/>
+          </a:xfrm>
+          <a:prstGeom prst="rect">
+            <a:avLst/>
+          </a:prstGeom>
+          <a:noFill/>
+        </p:spPr>
+        <p:txBody>
+          <a:bodyPr wrap="square" anchor="t">
+            <a:spAutoFit/>
+          </a:bodyPr>
+          <a:lstStyle/>
+          <a:p>
+            <a:pPr algn="l">
+              <a:lnSpc>
+                <a:spcPct val="115000"/>
+              </a:lnSpc>
+            </a:pPr>
+            <a:r>
+              <a:rPr sz="1800" b="0">
+                <a:solidFill>
+                  <a:srgbClr val="F8FAFC"/>
+                </a:solidFill>
+                <a:latin typeface="Microsoft YaHei"/>
+              </a:rPr>
+              <a:t>→ 对 AI 反而</a:t>
+            </a:r>
+            <a:r>
+              <a:rPr sz="1800" b="1">
+                <a:solidFill>
+                  <a:srgbClr val="F8FAFC"/>
+                </a:solidFill>
+                <a:latin typeface="Microsoft YaHei"/>
+              </a:rPr>
+              <a:t>容易</a:t>
+            </a:r>
+          </a:p>
+        </p:txBody>
+      </p:sp>
+      <p:sp>
+        <p:nvSpPr>
+          <p:cNvPr id="10" name="Rounded Rectangle 9"/>
           <p:cNvSpPr/>
           <p:nvPr/>
         </p:nvSpPr>
         <p:spPr>
           <a:xfrm>
-            <a:off x="6217919" y="2148840"/>
-            <a:ext cx="5166359" cy="2514600"/>
+            <a:off x="6309360" y="1783080"/>
+            <a:ext cx="5120640" cy="3300984"/>
           </a:xfrm>
           <a:prstGeom prst="roundRect">
             <a:avLst>
@@ -15517,14 +16353,14 @@
       </p:sp>
       <p:sp>
         <p:nvSpPr>
-          <p:cNvPr id="8" name="TextBox 7"/>
-          <p:cNvSpPr txBox="1"/>
-          <p:nvPr/>
-        </p:nvSpPr>
-        <p:spPr>
-          <a:xfrm>
-            <a:off x="6309359" y="2532888"/>
-            <a:ext cx="4983479" cy="914400"/>
+          <p:cNvPr id="11" name="TextBox 10"/>
+          <p:cNvSpPr txBox="1"/>
+          <p:nvPr/>
+        </p:nvSpPr>
+        <p:spPr>
+          <a:xfrm>
+            <a:off x="6583680" y="1947672"/>
+            <a:ext cx="4572000" cy="457200"/>
           </a:xfrm>
           <a:prstGeom prst="rect">
             <a:avLst/>
@@ -15543,27 +16379,183 @@
               </a:lnSpc>
             </a:pPr>
             <a:r>
-              <a:rPr sz="5400" b="1">
+              <a:rPr sz="2100" b="1">
                 <a:solidFill>
                   <a:srgbClr val="F87171"/>
                 </a:solidFill>
                 <a:latin typeface="Microsoft YaHei"/>
               </a:rPr>
-              <a:t>72.6%</a:t>
-            </a:r>
-          </a:p>
-        </p:txBody>
-      </p:sp>
-      <p:sp>
-        <p:nvSpPr>
-          <p:cNvPr id="9" name="TextBox 8"/>
-          <p:cNvSpPr txBox="1"/>
-          <p:nvPr/>
-        </p:nvSpPr>
-        <p:spPr>
-          <a:xfrm>
-            <a:off x="6309359" y="3630168"/>
-            <a:ext cx="4983479" cy="868680"/>
+              <a:t>我们以为的简单</a:t>
+            </a:r>
+          </a:p>
+        </p:txBody>
+      </p:sp>
+      <p:sp>
+        <p:nvSpPr>
+          <p:cNvPr id="12" name="TextBox 11"/>
+          <p:cNvSpPr txBox="1"/>
+          <p:nvPr/>
+        </p:nvSpPr>
+        <p:spPr>
+          <a:xfrm>
+            <a:off x="6583680" y="2560320"/>
+            <a:ext cx="4572000" cy="566928"/>
+          </a:xfrm>
+          <a:prstGeom prst="rect">
+            <a:avLst/>
+          </a:prstGeom>
+          <a:noFill/>
+        </p:spPr>
+        <p:txBody>
+          <a:bodyPr wrap="square" anchor="t">
+            <a:spAutoFit/>
+          </a:bodyPr>
+          <a:lstStyle/>
+          <a:p>
+            <a:pPr algn="l">
+              <a:lnSpc>
+                <a:spcPct val="115000"/>
+              </a:lnSpc>
+            </a:pPr>
+            <a:r>
+              <a:rPr sz="1800" b="0">
+                <a:solidFill>
+                  <a:srgbClr val="F8FAFC"/>
+                </a:solidFill>
+                <a:latin typeface="Microsoft YaHei"/>
+              </a:rPr>
+              <a:t>认出一张脸、走路不摔</a:t>
+            </a:r>
+          </a:p>
+        </p:txBody>
+      </p:sp>
+      <p:sp>
+        <p:nvSpPr>
+          <p:cNvPr id="13" name="TextBox 12"/>
+          <p:cNvSpPr txBox="1"/>
+          <p:nvPr/>
+        </p:nvSpPr>
+        <p:spPr>
+          <a:xfrm>
+            <a:off x="6583680" y="3127248"/>
+            <a:ext cx="4572000" cy="566928"/>
+          </a:xfrm>
+          <a:prstGeom prst="rect">
+            <a:avLst/>
+          </a:prstGeom>
+          <a:noFill/>
+        </p:spPr>
+        <p:txBody>
+          <a:bodyPr wrap="square" anchor="t">
+            <a:spAutoFit/>
+          </a:bodyPr>
+          <a:lstStyle/>
+          <a:p>
+            <a:pPr algn="l">
+              <a:lnSpc>
+                <a:spcPct val="115000"/>
+              </a:lnSpc>
+            </a:pPr>
+            <a:r>
+              <a:rPr sz="1800" b="0">
+                <a:solidFill>
+                  <a:srgbClr val="F8FAFC"/>
+                </a:solidFill>
+                <a:latin typeface="Microsoft YaHei"/>
+              </a:rPr>
+              <a:t>把杯子从桌上拿起来</a:t>
+            </a:r>
+          </a:p>
+        </p:txBody>
+      </p:sp>
+      <p:sp>
+        <p:nvSpPr>
+          <p:cNvPr id="14" name="TextBox 13"/>
+          <p:cNvSpPr txBox="1"/>
+          <p:nvPr/>
+        </p:nvSpPr>
+        <p:spPr>
+          <a:xfrm>
+            <a:off x="6583680" y="3694176"/>
+            <a:ext cx="4572000" cy="566928"/>
+          </a:xfrm>
+          <a:prstGeom prst="rect">
+            <a:avLst/>
+          </a:prstGeom>
+          <a:noFill/>
+        </p:spPr>
+        <p:txBody>
+          <a:bodyPr wrap="square" anchor="t">
+            <a:spAutoFit/>
+          </a:bodyPr>
+          <a:lstStyle/>
+          <a:p>
+            <a:pPr algn="l">
+              <a:lnSpc>
+                <a:spcPct val="115000"/>
+              </a:lnSpc>
+            </a:pPr>
+          </a:p>
+        </p:txBody>
+      </p:sp>
+      <p:sp>
+        <p:nvSpPr>
+          <p:cNvPr id="15" name="TextBox 14"/>
+          <p:cNvSpPr txBox="1"/>
+          <p:nvPr/>
+        </p:nvSpPr>
+        <p:spPr>
+          <a:xfrm>
+            <a:off x="6583680" y="4261104"/>
+            <a:ext cx="4572000" cy="566928"/>
+          </a:xfrm>
+          <a:prstGeom prst="rect">
+            <a:avLst/>
+          </a:prstGeom>
+          <a:noFill/>
+        </p:spPr>
+        <p:txBody>
+          <a:bodyPr wrap="square" anchor="t">
+            <a:spAutoFit/>
+          </a:bodyPr>
+          <a:lstStyle/>
+          <a:p>
+            <a:pPr algn="l">
+              <a:lnSpc>
+                <a:spcPct val="115000"/>
+              </a:lnSpc>
+            </a:pPr>
+            <a:r>
+              <a:rPr sz="1800" b="0">
+                <a:solidFill>
+                  <a:srgbClr val="F8FAFC"/>
+                </a:solidFill>
+                <a:latin typeface="Microsoft YaHei"/>
+              </a:rPr>
+              <a:t>→ 对 AI 反而</a:t>
+            </a:r>
+            <a:r>
+              <a:rPr sz="1800" b="1">
+                <a:solidFill>
+                  <a:srgbClr val="F8FAFC"/>
+                </a:solidFill>
+                <a:latin typeface="Microsoft YaHei"/>
+              </a:rPr>
+              <a:t>极难</a:t>
+            </a:r>
+          </a:p>
+        </p:txBody>
+      </p:sp>
+      <p:sp>
+        <p:nvSpPr>
+          <p:cNvPr id="16" name="TextBox 15"/>
+          <p:cNvSpPr txBox="1"/>
+          <p:nvPr/>
+        </p:nvSpPr>
+        <p:spPr>
+          <a:xfrm>
+            <a:off x="777240" y="5285232"/>
+            <a:ext cx="10607040" cy="822960"/>
           </a:xfrm>
           <a:prstGeom prst="rect">
             <a:avLst/>
@@ -15582,68 +16574,13 @@
               </a:lnSpc>
             </a:pPr>
             <a:r>
-              <a:rPr sz="1800" b="0">
-                <a:solidFill>
-                  <a:srgbClr val="94A3B8"/>
-                </a:solidFill>
-                <a:latin typeface="Microsoft YaHei"/>
-              </a:rPr>
-              <a:t>更难的版本</a:t>
-            </a:r>
-          </a:p>
-          <a:p>
-            <a:pPr algn="ctr">
-              <a:lnSpc>
-                <a:spcPct val="115000"/>
-              </a:lnSpc>
-            </a:pPr>
-            <a:r>
-              <a:rPr sz="1800" b="0">
-                <a:solidFill>
-                  <a:srgbClr val="94A3B8"/>
-                </a:solidFill>
-                <a:latin typeface="Microsoft YaHei"/>
-              </a:rPr>
-              <a:t>每题两百多步</a:t>
-            </a:r>
-          </a:p>
-        </p:txBody>
-      </p:sp>
-      <p:sp>
-        <p:nvSpPr>
-          <p:cNvPr id="10" name="TextBox 9"/>
-          <p:cNvSpPr txBox="1"/>
-          <p:nvPr/>
-        </p:nvSpPr>
-        <p:spPr>
-          <a:xfrm>
-            <a:off x="777240" y="4983479"/>
-            <a:ext cx="10607040" cy="914400"/>
-          </a:xfrm>
-          <a:prstGeom prst="rect">
-            <a:avLst/>
-          </a:prstGeom>
-          <a:noFill/>
-        </p:spPr>
-        <p:txBody>
-          <a:bodyPr wrap="square" anchor="t">
-            <a:spAutoFit/>
-          </a:bodyPr>
-          <a:lstStyle/>
-          <a:p>
-            <a:pPr algn="ctr">
-              <a:lnSpc>
-                <a:spcPct val="115000"/>
-              </a:lnSpc>
-            </a:pPr>
-            <a:r>
-              <a:rPr sz="2200" b="1">
+              <a:rPr sz="2100" b="1">
                 <a:solidFill>
                   <a:srgbClr val="FDE047"/>
                 </a:solidFill>
                 <a:latin typeface="Microsoft YaHei"/>
               </a:rPr>
-              <a:t>说明它还没真学会，是在题型里熟练</a:t>
+              <a:t>莫拉维克的解释：感知和运动被自然选择磨了几亿年，久到沉进了硬件里</a:t>
             </a:r>
           </a:p>
         </p:txBody>
@@ -15657,6 +16594,2651 @@
 </file>
 
 <file path=ppt/slides/slide41.xml><?xml version="1.0" encoding="utf-8"?>
+<p:sld xmlns:a="http://schemas.openxmlformats.org/drawingml/2006/main" xmlns:p="http://schemas.openxmlformats.org/presentationml/2006/main" xmlns:r="http://schemas.openxmlformats.org/officeDocument/2006/relationships">
+  <p:cSld>
+    <p:bg>
+      <p:bgPr>
+        <a:solidFill>
+          <a:srgbClr val="0E1428"/>
+        </a:solidFill>
+        <a:effectLst/>
+      </p:bgPr>
+    </p:bg>
+    <p:spTree>
+      <p:nvGrpSpPr>
+        <p:cNvPr id="1" name=""/>
+        <p:cNvGrpSpPr/>
+        <p:nvPr/>
+      </p:nvGrpSpPr>
+      <p:grpSpPr/>
+      <p:sp>
+        <p:nvSpPr>
+          <p:cNvPr id="2" name="TextBox 1"/>
+          <p:cNvSpPr txBox="1"/>
+          <p:nvPr/>
+        </p:nvSpPr>
+        <p:spPr>
+          <a:xfrm>
+            <a:off x="777240" y="457200"/>
+            <a:ext cx="10607040" cy="868680"/>
+          </a:xfrm>
+          <a:prstGeom prst="rect">
+            <a:avLst/>
+          </a:prstGeom>
+          <a:noFill/>
+        </p:spPr>
+        <p:txBody>
+          <a:bodyPr wrap="square" anchor="t">
+            <a:spAutoFit/>
+          </a:bodyPr>
+          <a:lstStyle/>
+          <a:p>
+            <a:pPr algn="l">
+              <a:lnSpc>
+                <a:spcPct val="115000"/>
+              </a:lnSpc>
+            </a:pPr>
+            <a:r>
+              <a:rPr sz="3200" b="1">
+                <a:solidFill>
+                  <a:srgbClr val="F8FAFC"/>
+                </a:solidFill>
+                <a:latin typeface="Microsoft YaHei"/>
+              </a:rPr>
+              <a:t>一个当场的例子：这份 PPT 是怎么做的</a:t>
+            </a:r>
+          </a:p>
+        </p:txBody>
+      </p:sp>
+      <p:sp>
+        <p:nvSpPr>
+          <p:cNvPr id="3" name="Rectangle 2"/>
+          <p:cNvSpPr/>
+          <p:nvPr/>
+        </p:nvSpPr>
+        <p:spPr>
+          <a:xfrm>
+            <a:off x="0" y="1444752"/>
+            <a:ext cx="12191695" cy="27432"/>
+          </a:xfrm>
+          <a:prstGeom prst="rect">
+            <a:avLst/>
+          </a:prstGeom>
+          <a:solidFill>
+            <a:srgbClr val="F59E0B"/>
+          </a:solidFill>
+          <a:ln>
+            <a:noFill/>
+          </a:ln>
+          <a:effectLst/>
+        </p:spPr>
+        <p:style>
+          <a:lnRef idx="1">
+            <a:schemeClr val="accent1"/>
+          </a:lnRef>
+          <a:fillRef idx="3">
+            <a:schemeClr val="accent1"/>
+          </a:fillRef>
+          <a:effectRef idx="2">
+            <a:schemeClr val="accent1"/>
+          </a:effectRef>
+          <a:fontRef idx="minor">
+            <a:schemeClr val="lt1"/>
+          </a:fontRef>
+        </p:style>
+        <p:txBody>
+          <a:bodyPr rtlCol="0" anchor="ctr"/>
+          <a:lstStyle/>
+          <a:p>
+            <a:pPr algn="ctr"/>
+          </a:p>
+        </p:txBody>
+      </p:sp>
+      <p:sp>
+        <p:nvSpPr>
+          <p:cNvPr id="4" name="Rounded Rectangle 3"/>
+          <p:cNvSpPr/>
+          <p:nvPr/>
+        </p:nvSpPr>
+        <p:spPr>
+          <a:xfrm>
+            <a:off x="777240" y="1783080"/>
+            <a:ext cx="5120640" cy="3566159"/>
+          </a:xfrm>
+          <a:prstGeom prst="roundRect">
+            <a:avLst>
+              <a:gd name="adj" fmla="val 6000"/>
+            </a:avLst>
+          </a:prstGeom>
+          <a:solidFill>
+            <a:srgbClr val="162038"/>
+          </a:solidFill>
+          <a:ln w="19050">
+            <a:solidFill>
+              <a:srgbClr val="94A3B8"/>
+            </a:solidFill>
+          </a:ln>
+          <a:effectLst/>
+        </p:spPr>
+        <p:style>
+          <a:lnRef idx="1">
+            <a:schemeClr val="accent1"/>
+          </a:lnRef>
+          <a:fillRef idx="3">
+            <a:schemeClr val="accent1"/>
+          </a:fillRef>
+          <a:effectRef idx="2">
+            <a:schemeClr val="accent1"/>
+          </a:effectRef>
+          <a:fontRef idx="minor">
+            <a:schemeClr val="lt1"/>
+          </a:fontRef>
+        </p:style>
+        <p:txBody>
+          <a:bodyPr rtlCol="0" anchor="ctr"/>
+          <a:lstStyle/>
+          <a:p>
+            <a:pPr algn="ctr"/>
+          </a:p>
+        </p:txBody>
+      </p:sp>
+      <p:sp>
+        <p:nvSpPr>
+          <p:cNvPr id="5" name="TextBox 4"/>
+          <p:cNvSpPr txBox="1"/>
+          <p:nvPr/>
+        </p:nvSpPr>
+        <p:spPr>
+          <a:xfrm>
+            <a:off x="1051560" y="1947672"/>
+            <a:ext cx="4572000" cy="457200"/>
+          </a:xfrm>
+          <a:prstGeom prst="rect">
+            <a:avLst/>
+          </a:prstGeom>
+          <a:noFill/>
+        </p:spPr>
+        <p:txBody>
+          <a:bodyPr wrap="square" anchor="t">
+            <a:spAutoFit/>
+          </a:bodyPr>
+          <a:lstStyle/>
+          <a:p>
+            <a:pPr algn="ctr">
+              <a:lnSpc>
+                <a:spcPct val="115000"/>
+              </a:lnSpc>
+            </a:pPr>
+            <a:r>
+              <a:rPr sz="2100" b="1">
+                <a:solidFill>
+                  <a:srgbClr val="94A3B8"/>
+                </a:solidFill>
+                <a:latin typeface="Microsoft YaHei"/>
+              </a:rPr>
+              <a:t>你们以为的做法</a:t>
+            </a:r>
+          </a:p>
+        </p:txBody>
+      </p:sp>
+      <p:sp>
+        <p:nvSpPr>
+          <p:cNvPr id="6" name="TextBox 5"/>
+          <p:cNvSpPr txBox="1"/>
+          <p:nvPr/>
+        </p:nvSpPr>
+        <p:spPr>
+          <a:xfrm>
+            <a:off x="1051560" y="2560320"/>
+            <a:ext cx="4572000" cy="506577"/>
+          </a:xfrm>
+          <a:prstGeom prst="rect">
+            <a:avLst/>
+          </a:prstGeom>
+          <a:noFill/>
+        </p:spPr>
+        <p:txBody>
+          <a:bodyPr wrap="square" anchor="t">
+            <a:spAutoFit/>
+          </a:bodyPr>
+          <a:lstStyle/>
+          <a:p>
+            <a:pPr algn="l">
+              <a:lnSpc>
+                <a:spcPct val="115000"/>
+              </a:lnSpc>
+            </a:pPr>
+            <a:r>
+              <a:rPr sz="1600" b="0">
+                <a:solidFill>
+                  <a:srgbClr val="F8FAFC"/>
+                </a:solidFill>
+                <a:latin typeface="Microsoft YaHei"/>
+              </a:rPr>
+              <a:t>让 AI 打开 PowerPoint</a:t>
+            </a:r>
+          </a:p>
+        </p:txBody>
+      </p:sp>
+      <p:sp>
+        <p:nvSpPr>
+          <p:cNvPr id="7" name="TextBox 6"/>
+          <p:cNvSpPr txBox="1"/>
+          <p:nvPr/>
+        </p:nvSpPr>
+        <p:spPr>
+          <a:xfrm>
+            <a:off x="1051560" y="3066897"/>
+            <a:ext cx="4572000" cy="506577"/>
+          </a:xfrm>
+          <a:prstGeom prst="rect">
+            <a:avLst/>
+          </a:prstGeom>
+          <a:noFill/>
+        </p:spPr>
+        <p:txBody>
+          <a:bodyPr wrap="square" anchor="t">
+            <a:spAutoFit/>
+          </a:bodyPr>
+          <a:lstStyle/>
+          <a:p>
+            <a:pPr algn="l">
+              <a:lnSpc>
+                <a:spcPct val="115000"/>
+              </a:lnSpc>
+            </a:pPr>
+            <a:r>
+              <a:rPr sz="1600" b="0">
+                <a:solidFill>
+                  <a:srgbClr val="F8FAFC"/>
+                </a:solidFill>
+                <a:latin typeface="Microsoft YaHei"/>
+              </a:rPr>
+              <a:t>帮我拖文本框、调字号</a:t>
+            </a:r>
+          </a:p>
+        </p:txBody>
+      </p:sp>
+      <p:sp>
+        <p:nvSpPr>
+          <p:cNvPr id="8" name="TextBox 7"/>
+          <p:cNvSpPr txBox="1"/>
+          <p:nvPr/>
+        </p:nvSpPr>
+        <p:spPr>
+          <a:xfrm>
+            <a:off x="1051560" y="3573475"/>
+            <a:ext cx="4572000" cy="506577"/>
+          </a:xfrm>
+          <a:prstGeom prst="rect">
+            <a:avLst/>
+          </a:prstGeom>
+          <a:noFill/>
+        </p:spPr>
+        <p:txBody>
+          <a:bodyPr wrap="square" anchor="t">
+            <a:spAutoFit/>
+          </a:bodyPr>
+          <a:lstStyle/>
+          <a:p>
+            <a:pPr algn="l">
+              <a:lnSpc>
+                <a:spcPct val="115000"/>
+              </a:lnSpc>
+            </a:pPr>
+          </a:p>
+        </p:txBody>
+      </p:sp>
+      <p:sp>
+        <p:nvSpPr>
+          <p:cNvPr id="9" name="TextBox 8"/>
+          <p:cNvSpPr txBox="1"/>
+          <p:nvPr/>
+        </p:nvSpPr>
+        <p:spPr>
+          <a:xfrm>
+            <a:off x="1051560" y="4080052"/>
+            <a:ext cx="4572000" cy="506577"/>
+          </a:xfrm>
+          <a:prstGeom prst="rect">
+            <a:avLst/>
+          </a:prstGeom>
+          <a:noFill/>
+        </p:spPr>
+        <p:txBody>
+          <a:bodyPr wrap="square" anchor="t">
+            <a:spAutoFit/>
+          </a:bodyPr>
+          <a:lstStyle/>
+          <a:p>
+            <a:pPr algn="l">
+              <a:lnSpc>
+                <a:spcPct val="115000"/>
+              </a:lnSpc>
+            </a:pPr>
+            <a:r>
+              <a:rPr sz="1600" b="0">
+                <a:solidFill>
+                  <a:srgbClr val="F8FAFC"/>
+                </a:solidFill>
+                <a:latin typeface="Microsoft YaHei"/>
+              </a:rPr>
+              <a:t>→ 这是让它</a:t>
+            </a:r>
+            <a:r>
+              <a:rPr sz="1600" b="1">
+                <a:solidFill>
+                  <a:srgbClr val="F8FAFC"/>
+                </a:solidFill>
+                <a:latin typeface="Microsoft YaHei"/>
+              </a:rPr>
+              <a:t>用鼠标</a:t>
+            </a:r>
+          </a:p>
+        </p:txBody>
+      </p:sp>
+      <p:sp>
+        <p:nvSpPr>
+          <p:cNvPr id="10" name="TextBox 9"/>
+          <p:cNvSpPr txBox="1"/>
+          <p:nvPr/>
+        </p:nvSpPr>
+        <p:spPr>
+          <a:xfrm>
+            <a:off x="1051560" y="4586630"/>
+            <a:ext cx="4572000" cy="506577"/>
+          </a:xfrm>
+          <a:prstGeom prst="rect">
+            <a:avLst/>
+          </a:prstGeom>
+          <a:noFill/>
+        </p:spPr>
+        <p:txBody>
+          <a:bodyPr wrap="square" anchor="t">
+            <a:spAutoFit/>
+          </a:bodyPr>
+          <a:lstStyle/>
+          <a:p>
+            <a:pPr algn="l">
+              <a:lnSpc>
+                <a:spcPct val="115000"/>
+              </a:lnSpc>
+            </a:pPr>
+            <a:r>
+              <a:rPr sz="1600" b="0">
+                <a:solidFill>
+                  <a:srgbClr val="F8FAFC"/>
+                </a:solidFill>
+                <a:latin typeface="Microsoft YaHei"/>
+              </a:rPr>
+              <a:t>→ 正是它最不擅长的事</a:t>
+            </a:r>
+          </a:p>
+        </p:txBody>
+      </p:sp>
+      <p:sp>
+        <p:nvSpPr>
+          <p:cNvPr id="11" name="Rounded Rectangle 10"/>
+          <p:cNvSpPr/>
+          <p:nvPr/>
+        </p:nvSpPr>
+        <p:spPr>
+          <a:xfrm>
+            <a:off x="6309360" y="1783080"/>
+            <a:ext cx="5120640" cy="3566159"/>
+          </a:xfrm>
+          <a:prstGeom prst="roundRect">
+            <a:avLst>
+              <a:gd name="adj" fmla="val 6000"/>
+            </a:avLst>
+          </a:prstGeom>
+          <a:solidFill>
+            <a:srgbClr val="162038"/>
+          </a:solidFill>
+          <a:ln w="19050">
+            <a:solidFill>
+              <a:srgbClr val="A3E635"/>
+            </a:solidFill>
+          </a:ln>
+          <a:effectLst/>
+        </p:spPr>
+        <p:style>
+          <a:lnRef idx="1">
+            <a:schemeClr val="accent1"/>
+          </a:lnRef>
+          <a:fillRef idx="3">
+            <a:schemeClr val="accent1"/>
+          </a:fillRef>
+          <a:effectRef idx="2">
+            <a:schemeClr val="accent1"/>
+          </a:effectRef>
+          <a:fontRef idx="minor">
+            <a:schemeClr val="lt1"/>
+          </a:fontRef>
+        </p:style>
+        <p:txBody>
+          <a:bodyPr rtlCol="0" anchor="ctr"/>
+          <a:lstStyle/>
+          <a:p>
+            <a:pPr algn="ctr"/>
+          </a:p>
+        </p:txBody>
+      </p:sp>
+      <p:sp>
+        <p:nvSpPr>
+          <p:cNvPr id="12" name="TextBox 11"/>
+          <p:cNvSpPr txBox="1"/>
+          <p:nvPr/>
+        </p:nvSpPr>
+        <p:spPr>
+          <a:xfrm>
+            <a:off x="6583680" y="1947672"/>
+            <a:ext cx="4572000" cy="457200"/>
+          </a:xfrm>
+          <a:prstGeom prst="rect">
+            <a:avLst/>
+          </a:prstGeom>
+          <a:noFill/>
+        </p:spPr>
+        <p:txBody>
+          <a:bodyPr wrap="square" anchor="t">
+            <a:spAutoFit/>
+          </a:bodyPr>
+          <a:lstStyle/>
+          <a:p>
+            <a:pPr algn="ctr">
+              <a:lnSpc>
+                <a:spcPct val="115000"/>
+              </a:lnSpc>
+            </a:pPr>
+            <a:r>
+              <a:rPr sz="2100" b="1">
+                <a:solidFill>
+                  <a:srgbClr val="A3E635"/>
+                </a:solidFill>
+                <a:latin typeface="Microsoft YaHei"/>
+              </a:rPr>
+              <a:t>实际的做法</a:t>
+            </a:r>
+          </a:p>
+        </p:txBody>
+      </p:sp>
+      <p:sp>
+        <p:nvSpPr>
+          <p:cNvPr id="13" name="TextBox 12"/>
+          <p:cNvSpPr txBox="1"/>
+          <p:nvPr/>
+        </p:nvSpPr>
+        <p:spPr>
+          <a:xfrm>
+            <a:off x="6583680" y="2560320"/>
+            <a:ext cx="4572000" cy="506577"/>
+          </a:xfrm>
+          <a:prstGeom prst="rect">
+            <a:avLst/>
+          </a:prstGeom>
+          <a:noFill/>
+        </p:spPr>
+        <p:txBody>
+          <a:bodyPr wrap="square" anchor="t">
+            <a:spAutoFit/>
+          </a:bodyPr>
+          <a:lstStyle/>
+          <a:p>
+            <a:pPr algn="l">
+              <a:lnSpc>
+                <a:spcPct val="115000"/>
+              </a:lnSpc>
+            </a:pPr>
+            <a:r>
+              <a:rPr sz="1600" b="0">
+                <a:solidFill>
+                  <a:srgbClr val="F8FAFC"/>
+                </a:solidFill>
+                <a:latin typeface="Microsoft YaHei"/>
+              </a:rPr>
+              <a:t>让 AI 写一个几百行的程序</a:t>
+            </a:r>
+          </a:p>
+        </p:txBody>
+      </p:sp>
+      <p:sp>
+        <p:nvSpPr>
+          <p:cNvPr id="14" name="TextBox 13"/>
+          <p:cNvSpPr txBox="1"/>
+          <p:nvPr/>
+        </p:nvSpPr>
+        <p:spPr>
+          <a:xfrm>
+            <a:off x="6583680" y="3066897"/>
+            <a:ext cx="4572000" cy="506577"/>
+          </a:xfrm>
+          <a:prstGeom prst="rect">
+            <a:avLst/>
+          </a:prstGeom>
+          <a:noFill/>
+        </p:spPr>
+        <p:txBody>
+          <a:bodyPr wrap="square" anchor="t">
+            <a:spAutoFit/>
+          </a:bodyPr>
+          <a:lstStyle/>
+          <a:p>
+            <a:pPr algn="l">
+              <a:lnSpc>
+                <a:spcPct val="115000"/>
+              </a:lnSpc>
+            </a:pPr>
+            <a:r>
+              <a:rPr sz="1600" b="0">
+                <a:solidFill>
+                  <a:srgbClr val="F8FAFC"/>
+                </a:solidFill>
+                <a:latin typeface="Microsoft YaHei"/>
+              </a:rPr>
+              <a:t>程序自己生成这个文件</a:t>
+            </a:r>
+          </a:p>
+        </p:txBody>
+      </p:sp>
+      <p:sp>
+        <p:nvSpPr>
+          <p:cNvPr id="15" name="TextBox 14"/>
+          <p:cNvSpPr txBox="1"/>
+          <p:nvPr/>
+        </p:nvSpPr>
+        <p:spPr>
+          <a:xfrm>
+            <a:off x="6583680" y="3573475"/>
+            <a:ext cx="4572000" cy="506577"/>
+          </a:xfrm>
+          <a:prstGeom prst="rect">
+            <a:avLst/>
+          </a:prstGeom>
+          <a:noFill/>
+        </p:spPr>
+        <p:txBody>
+          <a:bodyPr wrap="square" anchor="t">
+            <a:spAutoFit/>
+          </a:bodyPr>
+          <a:lstStyle/>
+          <a:p>
+            <a:pPr algn="l">
+              <a:lnSpc>
+                <a:spcPct val="115000"/>
+              </a:lnSpc>
+            </a:pPr>
+          </a:p>
+        </p:txBody>
+      </p:sp>
+      <p:sp>
+        <p:nvSpPr>
+          <p:cNvPr id="16" name="TextBox 15"/>
+          <p:cNvSpPr txBox="1"/>
+          <p:nvPr/>
+        </p:nvSpPr>
+        <p:spPr>
+          <a:xfrm>
+            <a:off x="6583680" y="4080052"/>
+            <a:ext cx="4572000" cy="506577"/>
+          </a:xfrm>
+          <a:prstGeom prst="rect">
+            <a:avLst/>
+          </a:prstGeom>
+          <a:noFill/>
+        </p:spPr>
+        <p:txBody>
+          <a:bodyPr wrap="square" anchor="t">
+            <a:spAutoFit/>
+          </a:bodyPr>
+          <a:lstStyle/>
+          <a:p>
+            <a:pPr algn="l">
+              <a:lnSpc>
+                <a:spcPct val="115000"/>
+              </a:lnSpc>
+            </a:pPr>
+            <a:r>
+              <a:rPr sz="1600" b="0">
+                <a:solidFill>
+                  <a:srgbClr val="F8FAFC"/>
+                </a:solidFill>
+                <a:latin typeface="Microsoft YaHei"/>
+              </a:rPr>
+              <a:t>→ 这是让它</a:t>
+            </a:r>
+            <a:r>
+              <a:rPr sz="1600" b="1">
+                <a:solidFill>
+                  <a:srgbClr val="F8FAFC"/>
+                </a:solidFill>
+                <a:latin typeface="Microsoft YaHei"/>
+              </a:rPr>
+              <a:t>写代码</a:t>
+            </a:r>
+          </a:p>
+        </p:txBody>
+      </p:sp>
+      <p:sp>
+        <p:nvSpPr>
+          <p:cNvPr id="17" name="TextBox 16"/>
+          <p:cNvSpPr txBox="1"/>
+          <p:nvPr/>
+        </p:nvSpPr>
+        <p:spPr>
+          <a:xfrm>
+            <a:off x="6583680" y="4586630"/>
+            <a:ext cx="4572000" cy="506577"/>
+          </a:xfrm>
+          <a:prstGeom prst="rect">
+            <a:avLst/>
+          </a:prstGeom>
+          <a:noFill/>
+        </p:spPr>
+        <p:txBody>
+          <a:bodyPr wrap="square" anchor="t">
+            <a:spAutoFit/>
+          </a:bodyPr>
+          <a:lstStyle/>
+          <a:p>
+            <a:pPr algn="l">
+              <a:lnSpc>
+                <a:spcPct val="115000"/>
+              </a:lnSpc>
+            </a:pPr>
+            <a:r>
+              <a:rPr sz="1600" b="0">
+                <a:solidFill>
+                  <a:srgbClr val="F8FAFC"/>
+                </a:solidFill>
+                <a:latin typeface="Microsoft YaHei"/>
+              </a:rPr>
+              <a:t>→ 正是它最擅长的事</a:t>
+            </a:r>
+          </a:p>
+        </p:txBody>
+      </p:sp>
+      <p:sp>
+        <p:nvSpPr>
+          <p:cNvPr id="18" name="TextBox 17"/>
+          <p:cNvSpPr txBox="1"/>
+          <p:nvPr/>
+        </p:nvSpPr>
+        <p:spPr>
+          <a:xfrm>
+            <a:off x="777240" y="5550407"/>
+            <a:ext cx="10607040" cy="822960"/>
+          </a:xfrm>
+          <a:prstGeom prst="rect">
+            <a:avLst/>
+          </a:prstGeom>
+          <a:noFill/>
+        </p:spPr>
+        <p:txBody>
+          <a:bodyPr wrap="square" anchor="t">
+            <a:spAutoFit/>
+          </a:bodyPr>
+          <a:lstStyle/>
+          <a:p>
+            <a:pPr algn="ctr">
+              <a:lnSpc>
+                <a:spcPct val="115000"/>
+              </a:lnSpc>
+            </a:pPr>
+            <a:r>
+              <a:rPr sz="2100" b="1">
+                <a:solidFill>
+                  <a:srgbClr val="FDE047"/>
+                </a:solidFill>
+                <a:latin typeface="Microsoft YaHei"/>
+              </a:rPr>
+              <a:t>你们现在看的这五十几页，就是这么来的：改一句话，重跑十秒，全部更新</a:t>
+            </a:r>
+          </a:p>
+        </p:txBody>
+      </p:sp>
+    </p:spTree>
+  </p:cSld>
+  <p:clrMapOvr>
+    <a:masterClrMapping/>
+  </p:clrMapOvr>
+</p:sld>
+</file>
+
+<file path=ppt/slides/slide42.xml><?xml version="1.0" encoding="utf-8"?>
+<p:sld xmlns:a="http://schemas.openxmlformats.org/drawingml/2006/main" xmlns:p="http://schemas.openxmlformats.org/presentationml/2006/main" xmlns:r="http://schemas.openxmlformats.org/officeDocument/2006/relationships">
+  <p:cSld>
+    <p:bg>
+      <p:bgPr>
+        <a:solidFill>
+          <a:srgbClr val="0E1428"/>
+        </a:solidFill>
+        <a:effectLst/>
+      </p:bgPr>
+    </p:bg>
+    <p:spTree>
+      <p:nvGrpSpPr>
+        <p:cNvPr id="1" name=""/>
+        <p:cNvGrpSpPr/>
+        <p:nvPr/>
+      </p:nvGrpSpPr>
+      <p:grpSpPr/>
+      <p:sp>
+        <p:nvSpPr>
+          <p:cNvPr id="2" name="TextBox 1"/>
+          <p:cNvSpPr txBox="1"/>
+          <p:nvPr/>
+        </p:nvSpPr>
+        <p:spPr>
+          <a:xfrm>
+            <a:off x="777240" y="457200"/>
+            <a:ext cx="10607040" cy="868680"/>
+          </a:xfrm>
+          <a:prstGeom prst="rect">
+            <a:avLst/>
+          </a:prstGeom>
+          <a:noFill/>
+        </p:spPr>
+        <p:txBody>
+          <a:bodyPr wrap="square" anchor="t">
+            <a:spAutoFit/>
+          </a:bodyPr>
+          <a:lstStyle/>
+          <a:p>
+            <a:pPr algn="l">
+              <a:lnSpc>
+                <a:spcPct val="115000"/>
+              </a:lnSpc>
+            </a:pPr>
+            <a:r>
+              <a:rPr sz="3200" b="1">
+                <a:solidFill>
+                  <a:srgbClr val="F8FAFC"/>
+                </a:solidFill>
+                <a:latin typeface="Microsoft YaHei"/>
+              </a:rPr>
+              <a:t>3.2　证据：让它操作电脑</a:t>
+            </a:r>
+          </a:p>
+        </p:txBody>
+      </p:sp>
+      <p:sp>
+        <p:nvSpPr>
+          <p:cNvPr id="3" name="Rectangle 2"/>
+          <p:cNvSpPr/>
+          <p:nvPr/>
+        </p:nvSpPr>
+        <p:spPr>
+          <a:xfrm>
+            <a:off x="0" y="1444752"/>
+            <a:ext cx="12191695" cy="27432"/>
+          </a:xfrm>
+          <a:prstGeom prst="rect">
+            <a:avLst/>
+          </a:prstGeom>
+          <a:solidFill>
+            <a:srgbClr val="F59E0B"/>
+          </a:solidFill>
+          <a:ln>
+            <a:noFill/>
+          </a:ln>
+          <a:effectLst/>
+        </p:spPr>
+        <p:style>
+          <a:lnRef idx="1">
+            <a:schemeClr val="accent1"/>
+          </a:lnRef>
+          <a:fillRef idx="3">
+            <a:schemeClr val="accent1"/>
+          </a:fillRef>
+          <a:effectRef idx="2">
+            <a:schemeClr val="accent1"/>
+          </a:effectRef>
+          <a:fontRef idx="minor">
+            <a:schemeClr val="lt1"/>
+          </a:fontRef>
+        </p:style>
+        <p:txBody>
+          <a:bodyPr rtlCol="0" anchor="ctr"/>
+          <a:lstStyle/>
+          <a:p>
+            <a:pPr algn="ctr"/>
+          </a:p>
+        </p:txBody>
+      </p:sp>
+      <p:sp>
+        <p:nvSpPr>
+          <p:cNvPr id="4" name="TextBox 3"/>
+          <p:cNvSpPr txBox="1"/>
+          <p:nvPr/>
+        </p:nvSpPr>
+        <p:spPr>
+          <a:xfrm>
+            <a:off x="914400" y="1828800"/>
+            <a:ext cx="10332720" cy="914400"/>
+          </a:xfrm>
+          <a:prstGeom prst="rect">
+            <a:avLst/>
+          </a:prstGeom>
+          <a:noFill/>
+        </p:spPr>
+        <p:txBody>
+          <a:bodyPr wrap="square" anchor="t">
+            <a:spAutoFit/>
+          </a:bodyPr>
+          <a:lstStyle/>
+          <a:p>
+            <a:pPr algn="l">
+              <a:lnSpc>
+                <a:spcPct val="115000"/>
+              </a:lnSpc>
+            </a:pPr>
+            <a:r>
+              <a:rPr sz="2400" b="0">
+                <a:solidFill>
+                  <a:srgbClr val="F8FAFC"/>
+                </a:solidFill>
+                <a:latin typeface="Microsoft YaHei"/>
+              </a:rPr>
+              <a:t>这是机器人的最简版：二维、传感器完美、错了能撤销</a:t>
+            </a:r>
+          </a:p>
+        </p:txBody>
+      </p:sp>
+      <p:sp>
+        <p:nvSpPr>
+          <p:cNvPr id="5" name="TextBox 4"/>
+          <p:cNvSpPr txBox="1"/>
+          <p:nvPr/>
+        </p:nvSpPr>
+        <p:spPr>
+          <a:xfrm>
+            <a:off x="914400" y="2697480"/>
+            <a:ext cx="10332720" cy="914400"/>
+          </a:xfrm>
+          <a:prstGeom prst="rect">
+            <a:avLst/>
+          </a:prstGeom>
+          <a:noFill/>
+        </p:spPr>
+        <p:txBody>
+          <a:bodyPr wrap="square" anchor="t">
+            <a:spAutoFit/>
+          </a:bodyPr>
+          <a:lstStyle/>
+          <a:p>
+            <a:pPr algn="l">
+              <a:lnSpc>
+                <a:spcPct val="115000"/>
+              </a:lnSpc>
+            </a:pPr>
+            <a:r>
+              <a:rPr sz="2400" b="0">
+                <a:solidFill>
+                  <a:srgbClr val="F8FAFC"/>
+                </a:solidFill>
+                <a:latin typeface="Microsoft YaHei"/>
+              </a:rPr>
+              <a:t>有个标准测试叫 OSWorld，让 AI 直接操作一台真电脑</a:t>
+            </a:r>
+          </a:p>
+        </p:txBody>
+      </p:sp>
+    </p:spTree>
+  </p:cSld>
+  <p:clrMapOvr>
+    <a:masterClrMapping/>
+  </p:clrMapOvr>
+</p:sld>
+</file>
+
+<file path=ppt/slides/slide43.xml><?xml version="1.0" encoding="utf-8"?>
+<p:sld xmlns:a="http://schemas.openxmlformats.org/drawingml/2006/main" xmlns:p="http://schemas.openxmlformats.org/presentationml/2006/main" xmlns:r="http://schemas.openxmlformats.org/officeDocument/2006/relationships">
+  <p:cSld>
+    <p:bg>
+      <p:bgPr>
+        <a:solidFill>
+          <a:srgbClr val="0E1428"/>
+        </a:solidFill>
+        <a:effectLst/>
+      </p:bgPr>
+    </p:bg>
+    <p:spTree>
+      <p:nvGrpSpPr>
+        <p:cNvPr id="1" name=""/>
+        <p:cNvGrpSpPr/>
+        <p:nvPr/>
+      </p:nvGrpSpPr>
+      <p:grpSpPr/>
+      <p:sp>
+        <p:nvSpPr>
+          <p:cNvPr id="2" name="TextBox 1"/>
+          <p:cNvSpPr txBox="1"/>
+          <p:nvPr/>
+        </p:nvSpPr>
+        <p:spPr>
+          <a:xfrm>
+            <a:off x="777240" y="457200"/>
+            <a:ext cx="10607040" cy="868680"/>
+          </a:xfrm>
+          <a:prstGeom prst="rect">
+            <a:avLst/>
+          </a:prstGeom>
+          <a:noFill/>
+        </p:spPr>
+        <p:txBody>
+          <a:bodyPr wrap="square" anchor="t">
+            <a:spAutoFit/>
+          </a:bodyPr>
+          <a:lstStyle/>
+          <a:p>
+            <a:pPr algn="l">
+              <a:lnSpc>
+                <a:spcPct val="115000"/>
+              </a:lnSpc>
+            </a:pPr>
+            <a:r>
+              <a:rPr sz="3200" b="1">
+                <a:solidFill>
+                  <a:srgbClr val="F8FAFC"/>
+                </a:solidFill>
+                <a:latin typeface="Microsoft YaHei"/>
+              </a:rPr>
+              <a:t>3.2　换个难度就掉十三个点</a:t>
+            </a:r>
+          </a:p>
+        </p:txBody>
+      </p:sp>
+      <p:sp>
+        <p:nvSpPr>
+          <p:cNvPr id="3" name="Rectangle 2"/>
+          <p:cNvSpPr/>
+          <p:nvPr/>
+        </p:nvSpPr>
+        <p:spPr>
+          <a:xfrm>
+            <a:off x="0" y="1444752"/>
+            <a:ext cx="12191695" cy="27432"/>
+          </a:xfrm>
+          <a:prstGeom prst="rect">
+            <a:avLst/>
+          </a:prstGeom>
+          <a:solidFill>
+            <a:srgbClr val="F59E0B"/>
+          </a:solidFill>
+          <a:ln>
+            <a:noFill/>
+          </a:ln>
+          <a:effectLst/>
+        </p:spPr>
+        <p:style>
+          <a:lnRef idx="1">
+            <a:schemeClr val="accent1"/>
+          </a:lnRef>
+          <a:fillRef idx="3">
+            <a:schemeClr val="accent1"/>
+          </a:fillRef>
+          <a:effectRef idx="2">
+            <a:schemeClr val="accent1"/>
+          </a:effectRef>
+          <a:fontRef idx="minor">
+            <a:schemeClr val="lt1"/>
+          </a:fontRef>
+        </p:style>
+        <p:txBody>
+          <a:bodyPr rtlCol="0" anchor="ctr"/>
+          <a:lstStyle/>
+          <a:p>
+            <a:pPr algn="ctr"/>
+          </a:p>
+        </p:txBody>
+      </p:sp>
+      <p:sp>
+        <p:nvSpPr>
+          <p:cNvPr id="4" name="Rounded Rectangle 3"/>
+          <p:cNvSpPr/>
+          <p:nvPr/>
+        </p:nvSpPr>
+        <p:spPr>
+          <a:xfrm>
+            <a:off x="777240" y="2148840"/>
+            <a:ext cx="5166359" cy="2514600"/>
+          </a:xfrm>
+          <a:prstGeom prst="roundRect">
+            <a:avLst>
+              <a:gd name="adj" fmla="val 6000"/>
+            </a:avLst>
+          </a:prstGeom>
+          <a:solidFill>
+            <a:srgbClr val="162038"/>
+          </a:solidFill>
+          <a:ln w="19050">
+            <a:solidFill>
+              <a:srgbClr val="A3E635"/>
+            </a:solidFill>
+          </a:ln>
+          <a:effectLst/>
+        </p:spPr>
+        <p:style>
+          <a:lnRef idx="1">
+            <a:schemeClr val="accent1"/>
+          </a:lnRef>
+          <a:fillRef idx="3">
+            <a:schemeClr val="accent1"/>
+          </a:fillRef>
+          <a:effectRef idx="2">
+            <a:schemeClr val="accent1"/>
+          </a:effectRef>
+          <a:fontRef idx="minor">
+            <a:schemeClr val="lt1"/>
+          </a:fontRef>
+        </p:style>
+        <p:txBody>
+          <a:bodyPr rtlCol="0" anchor="ctr"/>
+          <a:lstStyle/>
+          <a:p>
+            <a:pPr algn="ctr"/>
+          </a:p>
+        </p:txBody>
+      </p:sp>
+      <p:sp>
+        <p:nvSpPr>
+          <p:cNvPr id="5" name="TextBox 4"/>
+          <p:cNvSpPr txBox="1"/>
+          <p:nvPr/>
+        </p:nvSpPr>
+        <p:spPr>
+          <a:xfrm>
+            <a:off x="868680" y="2532888"/>
+            <a:ext cx="4983479" cy="914400"/>
+          </a:xfrm>
+          <a:prstGeom prst="rect">
+            <a:avLst/>
+          </a:prstGeom>
+          <a:noFill/>
+        </p:spPr>
+        <p:txBody>
+          <a:bodyPr wrap="square" anchor="t">
+            <a:spAutoFit/>
+          </a:bodyPr>
+          <a:lstStyle/>
+          <a:p>
+            <a:pPr algn="ctr">
+              <a:lnSpc>
+                <a:spcPct val="115000"/>
+              </a:lnSpc>
+            </a:pPr>
+            <a:r>
+              <a:rPr sz="5400" b="1">
+                <a:solidFill>
+                  <a:srgbClr val="A3E635"/>
+                </a:solidFill>
+                <a:latin typeface="Microsoft YaHei"/>
+              </a:rPr>
+              <a:t>86%</a:t>
+            </a:r>
+          </a:p>
+        </p:txBody>
+      </p:sp>
+      <p:sp>
+        <p:nvSpPr>
+          <p:cNvPr id="6" name="TextBox 5"/>
+          <p:cNvSpPr txBox="1"/>
+          <p:nvPr/>
+        </p:nvSpPr>
+        <p:spPr>
+          <a:xfrm>
+            <a:off x="868680" y="3630168"/>
+            <a:ext cx="4983479" cy="868680"/>
+          </a:xfrm>
+          <a:prstGeom prst="rect">
+            <a:avLst/>
+          </a:prstGeom>
+          <a:noFill/>
+        </p:spPr>
+        <p:txBody>
+          <a:bodyPr wrap="square" anchor="t">
+            <a:spAutoFit/>
+          </a:bodyPr>
+          <a:lstStyle/>
+          <a:p>
+            <a:pPr algn="ctr">
+              <a:lnSpc>
+                <a:spcPct val="115000"/>
+              </a:lnSpc>
+            </a:pPr>
+            <a:r>
+              <a:rPr sz="1800" b="0">
+                <a:solidFill>
+                  <a:srgbClr val="94A3B8"/>
+                </a:solidFill>
+                <a:latin typeface="Microsoft YaHei"/>
+              </a:rPr>
+              <a:t>修正版</a:t>
+            </a:r>
+          </a:p>
+          <a:p>
+            <a:pPr algn="ctr">
+              <a:lnSpc>
+                <a:spcPct val="115000"/>
+              </a:lnSpc>
+            </a:pPr>
+            <a:r>
+              <a:rPr sz="1800" b="0">
+                <a:solidFill>
+                  <a:srgbClr val="94A3B8"/>
+                </a:solidFill>
+                <a:latin typeface="Microsoft YaHei"/>
+              </a:rPr>
+              <a:t>人类基线约 72%</a:t>
+            </a:r>
+          </a:p>
+        </p:txBody>
+      </p:sp>
+      <p:sp>
+        <p:nvSpPr>
+          <p:cNvPr id="7" name="Rounded Rectangle 6"/>
+          <p:cNvSpPr/>
+          <p:nvPr/>
+        </p:nvSpPr>
+        <p:spPr>
+          <a:xfrm>
+            <a:off x="6217919" y="2148840"/>
+            <a:ext cx="5166359" cy="2514600"/>
+          </a:xfrm>
+          <a:prstGeom prst="roundRect">
+            <a:avLst>
+              <a:gd name="adj" fmla="val 6000"/>
+            </a:avLst>
+          </a:prstGeom>
+          <a:solidFill>
+            <a:srgbClr val="162038"/>
+          </a:solidFill>
+          <a:ln w="19050">
+            <a:solidFill>
+              <a:srgbClr val="F87171"/>
+            </a:solidFill>
+          </a:ln>
+          <a:effectLst/>
+        </p:spPr>
+        <p:style>
+          <a:lnRef idx="1">
+            <a:schemeClr val="accent1"/>
+          </a:lnRef>
+          <a:fillRef idx="3">
+            <a:schemeClr val="accent1"/>
+          </a:fillRef>
+          <a:effectRef idx="2">
+            <a:schemeClr val="accent1"/>
+          </a:effectRef>
+          <a:fontRef idx="minor">
+            <a:schemeClr val="lt1"/>
+          </a:fontRef>
+        </p:style>
+        <p:txBody>
+          <a:bodyPr rtlCol="0" anchor="ctr"/>
+          <a:lstStyle/>
+          <a:p>
+            <a:pPr algn="ctr"/>
+          </a:p>
+        </p:txBody>
+      </p:sp>
+      <p:sp>
+        <p:nvSpPr>
+          <p:cNvPr id="8" name="TextBox 7"/>
+          <p:cNvSpPr txBox="1"/>
+          <p:nvPr/>
+        </p:nvSpPr>
+        <p:spPr>
+          <a:xfrm>
+            <a:off x="6309359" y="2532888"/>
+            <a:ext cx="4983479" cy="914400"/>
+          </a:xfrm>
+          <a:prstGeom prst="rect">
+            <a:avLst/>
+          </a:prstGeom>
+          <a:noFill/>
+        </p:spPr>
+        <p:txBody>
+          <a:bodyPr wrap="square" anchor="t">
+            <a:spAutoFit/>
+          </a:bodyPr>
+          <a:lstStyle/>
+          <a:p>
+            <a:pPr algn="ctr">
+              <a:lnSpc>
+                <a:spcPct val="115000"/>
+              </a:lnSpc>
+            </a:pPr>
+            <a:r>
+              <a:rPr sz="5400" b="1">
+                <a:solidFill>
+                  <a:srgbClr val="F87171"/>
+                </a:solidFill>
+                <a:latin typeface="Microsoft YaHei"/>
+              </a:rPr>
+              <a:t>72.6%</a:t>
+            </a:r>
+          </a:p>
+        </p:txBody>
+      </p:sp>
+      <p:sp>
+        <p:nvSpPr>
+          <p:cNvPr id="9" name="TextBox 8"/>
+          <p:cNvSpPr txBox="1"/>
+          <p:nvPr/>
+        </p:nvSpPr>
+        <p:spPr>
+          <a:xfrm>
+            <a:off x="6309359" y="3630168"/>
+            <a:ext cx="4983479" cy="868680"/>
+          </a:xfrm>
+          <a:prstGeom prst="rect">
+            <a:avLst/>
+          </a:prstGeom>
+          <a:noFill/>
+        </p:spPr>
+        <p:txBody>
+          <a:bodyPr wrap="square" anchor="t">
+            <a:spAutoFit/>
+          </a:bodyPr>
+          <a:lstStyle/>
+          <a:p>
+            <a:pPr algn="ctr">
+              <a:lnSpc>
+                <a:spcPct val="115000"/>
+              </a:lnSpc>
+            </a:pPr>
+            <a:r>
+              <a:rPr sz="1800" b="0">
+                <a:solidFill>
+                  <a:srgbClr val="94A3B8"/>
+                </a:solidFill>
+                <a:latin typeface="Microsoft YaHei"/>
+              </a:rPr>
+              <a:t>更难的版本</a:t>
+            </a:r>
+          </a:p>
+          <a:p>
+            <a:pPr algn="ctr">
+              <a:lnSpc>
+                <a:spcPct val="115000"/>
+              </a:lnSpc>
+            </a:pPr>
+            <a:r>
+              <a:rPr sz="1800" b="0">
+                <a:solidFill>
+                  <a:srgbClr val="94A3B8"/>
+                </a:solidFill>
+                <a:latin typeface="Microsoft YaHei"/>
+              </a:rPr>
+              <a:t>每题两百多步</a:t>
+            </a:r>
+          </a:p>
+        </p:txBody>
+      </p:sp>
+      <p:sp>
+        <p:nvSpPr>
+          <p:cNvPr id="10" name="TextBox 9"/>
+          <p:cNvSpPr txBox="1"/>
+          <p:nvPr/>
+        </p:nvSpPr>
+        <p:spPr>
+          <a:xfrm>
+            <a:off x="777240" y="4983479"/>
+            <a:ext cx="10607040" cy="914400"/>
+          </a:xfrm>
+          <a:prstGeom prst="rect">
+            <a:avLst/>
+          </a:prstGeom>
+          <a:noFill/>
+        </p:spPr>
+        <p:txBody>
+          <a:bodyPr wrap="square" anchor="t">
+            <a:spAutoFit/>
+          </a:bodyPr>
+          <a:lstStyle/>
+          <a:p>
+            <a:pPr algn="ctr">
+              <a:lnSpc>
+                <a:spcPct val="115000"/>
+              </a:lnSpc>
+            </a:pPr>
+            <a:r>
+              <a:rPr sz="2200" b="1">
+                <a:solidFill>
+                  <a:srgbClr val="FDE047"/>
+                </a:solidFill>
+                <a:latin typeface="Microsoft YaHei"/>
+              </a:rPr>
+              <a:t>说明它还没真学会，是在题型里熟练</a:t>
+            </a:r>
+          </a:p>
+        </p:txBody>
+      </p:sp>
+    </p:spTree>
+  </p:cSld>
+  <p:clrMapOvr>
+    <a:masterClrMapping/>
+  </p:clrMapOvr>
+</p:sld>
+</file>
+
+<file path=ppt/slides/slide44.xml><?xml version="1.0" encoding="utf-8"?>
+<p:sld xmlns:a="http://schemas.openxmlformats.org/drawingml/2006/main" xmlns:p="http://schemas.openxmlformats.org/presentationml/2006/main" xmlns:r="http://schemas.openxmlformats.org/officeDocument/2006/relationships">
+  <p:cSld>
+    <p:bg>
+      <p:bgPr>
+        <a:solidFill>
+          <a:srgbClr val="0E1428"/>
+        </a:solidFill>
+        <a:effectLst/>
+      </p:bgPr>
+    </p:bg>
+    <p:spTree>
+      <p:nvGrpSpPr>
+        <p:cNvPr id="1" name=""/>
+        <p:cNvGrpSpPr/>
+        <p:nvPr/>
+      </p:nvGrpSpPr>
+      <p:grpSpPr/>
+      <p:sp>
+        <p:nvSpPr>
+          <p:cNvPr id="2" name="TextBox 1"/>
+          <p:cNvSpPr txBox="1"/>
+          <p:nvPr/>
+        </p:nvSpPr>
+        <p:spPr>
+          <a:xfrm>
+            <a:off x="777240" y="457200"/>
+            <a:ext cx="10607040" cy="868680"/>
+          </a:xfrm>
+          <a:prstGeom prst="rect">
+            <a:avLst/>
+          </a:prstGeom>
+          <a:noFill/>
+        </p:spPr>
+        <p:txBody>
+          <a:bodyPr wrap="square" anchor="t">
+            <a:spAutoFit/>
+          </a:bodyPr>
+          <a:lstStyle/>
+          <a:p>
+            <a:pPr algn="l">
+              <a:lnSpc>
+                <a:spcPct val="115000"/>
+              </a:lnSpc>
+            </a:pPr>
+            <a:r>
+              <a:rPr sz="3200" b="1">
+                <a:solidFill>
+                  <a:srgbClr val="F8FAFC"/>
+                </a:solidFill>
+                <a:latin typeface="Microsoft YaHei"/>
+              </a:rPr>
+              <a:t>同一年，同一批模型，另一件事</a:t>
+            </a:r>
+          </a:p>
+        </p:txBody>
+      </p:sp>
+      <p:sp>
+        <p:nvSpPr>
+          <p:cNvPr id="3" name="Rectangle 2"/>
+          <p:cNvSpPr/>
+          <p:nvPr/>
+        </p:nvSpPr>
+        <p:spPr>
+          <a:xfrm>
+            <a:off x="0" y="1444752"/>
+            <a:ext cx="12191695" cy="27432"/>
+          </a:xfrm>
+          <a:prstGeom prst="rect">
+            <a:avLst/>
+          </a:prstGeom>
+          <a:solidFill>
+            <a:srgbClr val="F59E0B"/>
+          </a:solidFill>
+          <a:ln>
+            <a:noFill/>
+          </a:ln>
+          <a:effectLst/>
+        </p:spPr>
+        <p:style>
+          <a:lnRef idx="1">
+            <a:schemeClr val="accent1"/>
+          </a:lnRef>
+          <a:fillRef idx="3">
+            <a:schemeClr val="accent1"/>
+          </a:fillRef>
+          <a:effectRef idx="2">
+            <a:schemeClr val="accent1"/>
+          </a:effectRef>
+          <a:fontRef idx="minor">
+            <a:schemeClr val="lt1"/>
+          </a:fontRef>
+        </p:style>
+        <p:txBody>
+          <a:bodyPr rtlCol="0" anchor="ctr"/>
+          <a:lstStyle/>
+          <a:p>
+            <a:pPr algn="ctr"/>
+          </a:p>
+        </p:txBody>
+      </p:sp>
+      <p:sp>
+        <p:nvSpPr>
+          <p:cNvPr id="4" name="TextBox 3"/>
+          <p:cNvSpPr txBox="1"/>
+          <p:nvPr/>
+        </p:nvSpPr>
+        <p:spPr>
+          <a:xfrm>
+            <a:off x="914400" y="1828800"/>
+            <a:ext cx="10332720" cy="914400"/>
+          </a:xfrm>
+          <a:prstGeom prst="rect">
+            <a:avLst/>
+          </a:prstGeom>
+          <a:noFill/>
+        </p:spPr>
+        <p:txBody>
+          <a:bodyPr wrap="square" anchor="t">
+            <a:spAutoFit/>
+          </a:bodyPr>
+          <a:lstStyle/>
+          <a:p>
+            <a:pPr algn="l">
+              <a:lnSpc>
+                <a:spcPct val="115000"/>
+              </a:lnSpc>
+            </a:pPr>
+            <a:r>
+              <a:rPr sz="2200" b="0">
+                <a:solidFill>
+                  <a:srgbClr val="F8FAFC"/>
+                </a:solidFill>
+                <a:latin typeface="Microsoft YaHei"/>
+              </a:rPr>
+              <a:t>2025 年 5 月，DeepMind 的 AlphaEvolve 找到一种算法</a:t>
+            </a:r>
+          </a:p>
+        </p:txBody>
+      </p:sp>
+      <p:sp>
+        <p:nvSpPr>
+          <p:cNvPr id="5" name="TextBox 4"/>
+          <p:cNvSpPr txBox="1"/>
+          <p:nvPr/>
+        </p:nvSpPr>
+        <p:spPr>
+          <a:xfrm>
+            <a:off x="914400" y="2697480"/>
+            <a:ext cx="10332720" cy="914400"/>
+          </a:xfrm>
+          <a:prstGeom prst="rect">
+            <a:avLst/>
+          </a:prstGeom>
+          <a:noFill/>
+        </p:spPr>
+        <p:txBody>
+          <a:bodyPr wrap="square" anchor="t">
+            <a:spAutoFit/>
+          </a:bodyPr>
+          <a:lstStyle/>
+          <a:p>
+            <a:pPr algn="l">
+              <a:lnSpc>
+                <a:spcPct val="115000"/>
+              </a:lnSpc>
+            </a:pPr>
+            <a:r>
+              <a:rPr sz="2200" b="0">
+                <a:solidFill>
+                  <a:srgbClr val="F8FAFC"/>
+                </a:solidFill>
+                <a:latin typeface="Microsoft YaHei"/>
+              </a:rPr>
+              <a:t>用 </a:t>
+            </a:r>
+            <a:r>
+              <a:rPr sz="2200" b="1">
+                <a:solidFill>
+                  <a:srgbClr val="F8FAFC"/>
+                </a:solidFill>
+                <a:latin typeface="Microsoft YaHei"/>
+              </a:rPr>
+              <a:t>48 次乘法</a:t>
+            </a:r>
+            <a:r>
+              <a:rPr sz="2200" b="0">
+                <a:solidFill>
+                  <a:srgbClr val="F8FAFC"/>
+                </a:solidFill>
+                <a:latin typeface="Microsoft YaHei"/>
+              </a:rPr>
+              <a:t>算两个 4×4 复数矩阵的乘积</a:t>
+            </a:r>
+          </a:p>
+        </p:txBody>
+      </p:sp>
+      <p:sp>
+        <p:nvSpPr>
+          <p:cNvPr id="6" name="TextBox 5"/>
+          <p:cNvSpPr txBox="1"/>
+          <p:nvPr/>
+        </p:nvSpPr>
+        <p:spPr>
+          <a:xfrm>
+            <a:off x="914400" y="3566160"/>
+            <a:ext cx="10332720" cy="914400"/>
+          </a:xfrm>
+          <a:prstGeom prst="rect">
+            <a:avLst/>
+          </a:prstGeom>
+          <a:noFill/>
+        </p:spPr>
+        <p:txBody>
+          <a:bodyPr wrap="square" anchor="t">
+            <a:spAutoFit/>
+          </a:bodyPr>
+          <a:lstStyle/>
+          <a:p>
+            <a:pPr algn="l">
+              <a:lnSpc>
+                <a:spcPct val="115000"/>
+              </a:lnSpc>
+            </a:pPr>
+            <a:r>
+              <a:rPr sz="2200" b="0">
+                <a:solidFill>
+                  <a:srgbClr val="F8FAFC"/>
+                </a:solidFill>
+                <a:latin typeface="Microsoft YaHei"/>
+              </a:rPr>
+              <a:t>比 1969 年 Strassen 的 49 次</a:t>
+            </a:r>
+            <a:r>
+              <a:rPr sz="2200" b="1">
+                <a:solidFill>
+                  <a:srgbClr val="F8FAFC"/>
+                </a:solidFill>
+                <a:latin typeface="Microsoft YaHei"/>
+              </a:rPr>
+              <a:t>少一次</a:t>
+            </a:r>
+            <a:r>
+              <a:rPr sz="2200" b="0">
+                <a:solidFill>
+                  <a:srgbClr val="F8FAFC"/>
+                </a:solidFill>
+                <a:latin typeface="Microsoft YaHei"/>
+              </a:rPr>
+              <a:t>——那个纪录保持了 </a:t>
+            </a:r>
+            <a:r>
+              <a:rPr sz="2200" b="1">
+                <a:solidFill>
+                  <a:srgbClr val="F8FAFC"/>
+                </a:solidFill>
+                <a:latin typeface="Microsoft YaHei"/>
+              </a:rPr>
+              <a:t>56 年</a:t>
+            </a:r>
+          </a:p>
+        </p:txBody>
+      </p:sp>
+    </p:spTree>
+  </p:cSld>
+  <p:clrMapOvr>
+    <a:masterClrMapping/>
+  </p:clrMapOvr>
+</p:sld>
+</file>
+
+<file path=ppt/slides/slide45.xml><?xml version="1.0" encoding="utf-8"?>
+<p:sld xmlns:a="http://schemas.openxmlformats.org/drawingml/2006/main" xmlns:p="http://schemas.openxmlformats.org/presentationml/2006/main" xmlns:r="http://schemas.openxmlformats.org/officeDocument/2006/relationships">
+  <p:cSld>
+    <p:bg>
+      <p:bgPr>
+        <a:solidFill>
+          <a:srgbClr val="0E1428"/>
+        </a:solidFill>
+        <a:effectLst/>
+      </p:bgPr>
+    </p:bg>
+    <p:spTree>
+      <p:nvGrpSpPr>
+        <p:cNvPr id="1" name=""/>
+        <p:cNvGrpSpPr/>
+        <p:nvPr/>
+      </p:nvGrpSpPr>
+      <p:grpSpPr/>
+      <p:sp>
+        <p:nvSpPr>
+          <p:cNvPr id="2" name="TextBox 1"/>
+          <p:cNvSpPr txBox="1"/>
+          <p:nvPr/>
+        </p:nvSpPr>
+        <p:spPr>
+          <a:xfrm>
+            <a:off x="777240" y="457200"/>
+            <a:ext cx="10607040" cy="868680"/>
+          </a:xfrm>
+          <a:prstGeom prst="rect">
+            <a:avLst/>
+          </a:prstGeom>
+          <a:noFill/>
+        </p:spPr>
+        <p:txBody>
+          <a:bodyPr wrap="square" anchor="t">
+            <a:spAutoFit/>
+          </a:bodyPr>
+          <a:lstStyle/>
+          <a:p>
+            <a:pPr algn="l">
+              <a:lnSpc>
+                <a:spcPct val="115000"/>
+              </a:lnSpc>
+            </a:pPr>
+            <a:r>
+              <a:rPr sz="3200" b="1">
+                <a:solidFill>
+                  <a:srgbClr val="F8FAFC"/>
+                </a:solidFill>
+                <a:latin typeface="Microsoft YaHei"/>
+              </a:rPr>
+              <a:t>这不是矛盾，是这一代 AI 的真实形状</a:t>
+            </a:r>
+          </a:p>
+        </p:txBody>
+      </p:sp>
+      <p:sp>
+        <p:nvSpPr>
+          <p:cNvPr id="3" name="Rectangle 2"/>
+          <p:cNvSpPr/>
+          <p:nvPr/>
+        </p:nvSpPr>
+        <p:spPr>
+          <a:xfrm>
+            <a:off x="0" y="1444752"/>
+            <a:ext cx="12191695" cy="27432"/>
+          </a:xfrm>
+          <a:prstGeom prst="rect">
+            <a:avLst/>
+          </a:prstGeom>
+          <a:solidFill>
+            <a:srgbClr val="F59E0B"/>
+          </a:solidFill>
+          <a:ln>
+            <a:noFill/>
+          </a:ln>
+          <a:effectLst/>
+        </p:spPr>
+        <p:style>
+          <a:lnRef idx="1">
+            <a:schemeClr val="accent1"/>
+          </a:lnRef>
+          <a:fillRef idx="3">
+            <a:schemeClr val="accent1"/>
+          </a:fillRef>
+          <a:effectRef idx="2">
+            <a:schemeClr val="accent1"/>
+          </a:effectRef>
+          <a:fontRef idx="minor">
+            <a:schemeClr val="lt1"/>
+          </a:fontRef>
+        </p:style>
+        <p:txBody>
+          <a:bodyPr rtlCol="0" anchor="ctr"/>
+          <a:lstStyle/>
+          <a:p>
+            <a:pPr algn="ctr"/>
+          </a:p>
+        </p:txBody>
+      </p:sp>
+      <p:sp>
+        <p:nvSpPr>
+          <p:cNvPr id="4" name="Rounded Rectangle 3"/>
+          <p:cNvSpPr/>
+          <p:nvPr/>
+        </p:nvSpPr>
+        <p:spPr>
+          <a:xfrm>
+            <a:off x="777240" y="1783080"/>
+            <a:ext cx="5120640" cy="3566159"/>
+          </a:xfrm>
+          <a:prstGeom prst="roundRect">
+            <a:avLst>
+              <a:gd name="adj" fmla="val 6000"/>
+            </a:avLst>
+          </a:prstGeom>
+          <a:solidFill>
+            <a:srgbClr val="162038"/>
+          </a:solidFill>
+          <a:ln w="19050">
+            <a:solidFill>
+              <a:srgbClr val="A3E635"/>
+            </a:solidFill>
+          </a:ln>
+          <a:effectLst/>
+        </p:spPr>
+        <p:style>
+          <a:lnRef idx="1">
+            <a:schemeClr val="accent1"/>
+          </a:lnRef>
+          <a:fillRef idx="3">
+            <a:schemeClr val="accent1"/>
+          </a:fillRef>
+          <a:effectRef idx="2">
+            <a:schemeClr val="accent1"/>
+          </a:effectRef>
+          <a:fontRef idx="minor">
+            <a:schemeClr val="lt1"/>
+          </a:fontRef>
+        </p:style>
+        <p:txBody>
+          <a:bodyPr rtlCol="0" anchor="ctr"/>
+          <a:lstStyle/>
+          <a:p>
+            <a:pPr algn="ctr"/>
+          </a:p>
+        </p:txBody>
+      </p:sp>
+      <p:sp>
+        <p:nvSpPr>
+          <p:cNvPr id="5" name="TextBox 4"/>
+          <p:cNvSpPr txBox="1"/>
+          <p:nvPr/>
+        </p:nvSpPr>
+        <p:spPr>
+          <a:xfrm>
+            <a:off x="1051560" y="1947672"/>
+            <a:ext cx="4572000" cy="457200"/>
+          </a:xfrm>
+          <a:prstGeom prst="rect">
+            <a:avLst/>
+          </a:prstGeom>
+          <a:noFill/>
+        </p:spPr>
+        <p:txBody>
+          <a:bodyPr wrap="square" anchor="t">
+            <a:spAutoFit/>
+          </a:bodyPr>
+          <a:lstStyle/>
+          <a:p>
+            <a:pPr algn="ctr">
+              <a:lnSpc>
+                <a:spcPct val="115000"/>
+              </a:lnSpc>
+            </a:pPr>
+            <a:r>
+              <a:rPr sz="2100" b="1">
+                <a:solidFill>
+                  <a:srgbClr val="A3E635"/>
+                </a:solidFill>
+                <a:latin typeface="Microsoft YaHei"/>
+              </a:rPr>
+              <a:t>它能做到的</a:t>
+            </a:r>
+          </a:p>
+        </p:txBody>
+      </p:sp>
+      <p:sp>
+        <p:nvSpPr>
+          <p:cNvPr id="6" name="TextBox 5"/>
+          <p:cNvSpPr txBox="1"/>
+          <p:nvPr/>
+        </p:nvSpPr>
+        <p:spPr>
+          <a:xfrm>
+            <a:off x="1051560" y="2560320"/>
+            <a:ext cx="4572000" cy="506577"/>
+          </a:xfrm>
+          <a:prstGeom prst="rect">
+            <a:avLst/>
+          </a:prstGeom>
+          <a:noFill/>
+        </p:spPr>
+        <p:txBody>
+          <a:bodyPr wrap="square" anchor="t">
+            <a:spAutoFit/>
+          </a:bodyPr>
+          <a:lstStyle/>
+          <a:p>
+            <a:pPr algn="l">
+              <a:lnSpc>
+                <a:spcPct val="115000"/>
+              </a:lnSpc>
+            </a:pPr>
+            <a:r>
+              <a:rPr sz="1600" b="0">
+                <a:solidFill>
+                  <a:srgbClr val="F8FAFC"/>
+                </a:solidFill>
+                <a:latin typeface="Microsoft YaHei"/>
+              </a:rPr>
+              <a:t>找到半个世纪没人找到的</a:t>
+            </a:r>
+          </a:p>
+        </p:txBody>
+      </p:sp>
+      <p:sp>
+        <p:nvSpPr>
+          <p:cNvPr id="7" name="TextBox 6"/>
+          <p:cNvSpPr txBox="1"/>
+          <p:nvPr/>
+        </p:nvSpPr>
+        <p:spPr>
+          <a:xfrm>
+            <a:off x="1051560" y="3066897"/>
+            <a:ext cx="4572000" cy="506577"/>
+          </a:xfrm>
+          <a:prstGeom prst="rect">
+            <a:avLst/>
+          </a:prstGeom>
+          <a:noFill/>
+        </p:spPr>
+        <p:txBody>
+          <a:bodyPr wrap="square" anchor="t">
+            <a:spAutoFit/>
+          </a:bodyPr>
+          <a:lstStyle/>
+          <a:p>
+            <a:pPr algn="l">
+              <a:lnSpc>
+                <a:spcPct val="115000"/>
+              </a:lnSpc>
+            </a:pPr>
+            <a:r>
+              <a:rPr sz="1600" b="0">
+                <a:solidFill>
+                  <a:srgbClr val="F8FAFC"/>
+                </a:solidFill>
+                <a:latin typeface="Microsoft YaHei"/>
+              </a:rPr>
+              <a:t>矩阵乘法构造</a:t>
+            </a:r>
+          </a:p>
+        </p:txBody>
+      </p:sp>
+      <p:sp>
+        <p:nvSpPr>
+          <p:cNvPr id="8" name="TextBox 7"/>
+          <p:cNvSpPr txBox="1"/>
+          <p:nvPr/>
+        </p:nvSpPr>
+        <p:spPr>
+          <a:xfrm>
+            <a:off x="1051560" y="3573475"/>
+            <a:ext cx="4572000" cy="506577"/>
+          </a:xfrm>
+          <a:prstGeom prst="rect">
+            <a:avLst/>
+          </a:prstGeom>
+          <a:noFill/>
+        </p:spPr>
+        <p:txBody>
+          <a:bodyPr wrap="square" anchor="t">
+            <a:spAutoFit/>
+          </a:bodyPr>
+          <a:lstStyle/>
+          <a:p>
+            <a:pPr algn="l">
+              <a:lnSpc>
+                <a:spcPct val="115000"/>
+              </a:lnSpc>
+            </a:pPr>
+          </a:p>
+        </p:txBody>
+      </p:sp>
+      <p:sp>
+        <p:nvSpPr>
+          <p:cNvPr id="9" name="TextBox 8"/>
+          <p:cNvSpPr txBox="1"/>
+          <p:nvPr/>
+        </p:nvSpPr>
+        <p:spPr>
+          <a:xfrm>
+            <a:off x="1051560" y="4080052"/>
+            <a:ext cx="4572000" cy="506577"/>
+          </a:xfrm>
+          <a:prstGeom prst="rect">
+            <a:avLst/>
+          </a:prstGeom>
+          <a:noFill/>
+        </p:spPr>
+        <p:txBody>
+          <a:bodyPr wrap="square" anchor="t">
+            <a:spAutoFit/>
+          </a:bodyPr>
+          <a:lstStyle/>
+          <a:p>
+            <a:pPr algn="l">
+              <a:lnSpc>
+                <a:spcPct val="115000"/>
+              </a:lnSpc>
+            </a:pPr>
+            <a:r>
+              <a:rPr sz="1600" b="0">
+                <a:solidFill>
+                  <a:srgbClr val="F8FAFC"/>
+                </a:solidFill>
+                <a:latin typeface="Microsoft YaHei"/>
+              </a:rPr>
+              <a:t>在 50 多个开放数学问题上</a:t>
+            </a:r>
+          </a:p>
+        </p:txBody>
+      </p:sp>
+      <p:sp>
+        <p:nvSpPr>
+          <p:cNvPr id="10" name="TextBox 9"/>
+          <p:cNvSpPr txBox="1"/>
+          <p:nvPr/>
+        </p:nvSpPr>
+        <p:spPr>
+          <a:xfrm>
+            <a:off x="1051560" y="4586630"/>
+            <a:ext cx="4572000" cy="506577"/>
+          </a:xfrm>
+          <a:prstGeom prst="rect">
+            <a:avLst/>
+          </a:prstGeom>
+          <a:noFill/>
+        </p:spPr>
+        <p:txBody>
+          <a:bodyPr wrap="square" anchor="t">
+            <a:spAutoFit/>
+          </a:bodyPr>
+          <a:lstStyle/>
+          <a:p>
+            <a:pPr algn="l">
+              <a:lnSpc>
+                <a:spcPct val="115000"/>
+              </a:lnSpc>
+            </a:pPr>
+            <a:r>
+              <a:rPr sz="1600" b="1">
+                <a:solidFill>
+                  <a:srgbClr val="F8FAFC"/>
+                </a:solidFill>
+                <a:latin typeface="Microsoft YaHei"/>
+              </a:rPr>
+              <a:t>约 20% 改进了已知最好解</a:t>
+            </a:r>
+          </a:p>
+        </p:txBody>
+      </p:sp>
+      <p:sp>
+        <p:nvSpPr>
+          <p:cNvPr id="11" name="Rounded Rectangle 10"/>
+          <p:cNvSpPr/>
+          <p:nvPr/>
+        </p:nvSpPr>
+        <p:spPr>
+          <a:xfrm>
+            <a:off x="6309360" y="1783080"/>
+            <a:ext cx="5120640" cy="3566159"/>
+          </a:xfrm>
+          <a:prstGeom prst="roundRect">
+            <a:avLst>
+              <a:gd name="adj" fmla="val 6000"/>
+            </a:avLst>
+          </a:prstGeom>
+          <a:solidFill>
+            <a:srgbClr val="162038"/>
+          </a:solidFill>
+          <a:ln w="19050">
+            <a:solidFill>
+              <a:srgbClr val="F87171"/>
+            </a:solidFill>
+          </a:ln>
+          <a:effectLst/>
+        </p:spPr>
+        <p:style>
+          <a:lnRef idx="1">
+            <a:schemeClr val="accent1"/>
+          </a:lnRef>
+          <a:fillRef idx="3">
+            <a:schemeClr val="accent1"/>
+          </a:fillRef>
+          <a:effectRef idx="2">
+            <a:schemeClr val="accent1"/>
+          </a:effectRef>
+          <a:fontRef idx="minor">
+            <a:schemeClr val="lt1"/>
+          </a:fontRef>
+        </p:style>
+        <p:txBody>
+          <a:bodyPr rtlCol="0" anchor="ctr"/>
+          <a:lstStyle/>
+          <a:p>
+            <a:pPr algn="ctr"/>
+          </a:p>
+        </p:txBody>
+      </p:sp>
+      <p:sp>
+        <p:nvSpPr>
+          <p:cNvPr id="12" name="TextBox 11"/>
+          <p:cNvSpPr txBox="1"/>
+          <p:nvPr/>
+        </p:nvSpPr>
+        <p:spPr>
+          <a:xfrm>
+            <a:off x="6583680" y="1947672"/>
+            <a:ext cx="4572000" cy="457200"/>
+          </a:xfrm>
+          <a:prstGeom prst="rect">
+            <a:avLst/>
+          </a:prstGeom>
+          <a:noFill/>
+        </p:spPr>
+        <p:txBody>
+          <a:bodyPr wrap="square" anchor="t">
+            <a:spAutoFit/>
+          </a:bodyPr>
+          <a:lstStyle/>
+          <a:p>
+            <a:pPr algn="ctr">
+              <a:lnSpc>
+                <a:spcPct val="115000"/>
+              </a:lnSpc>
+            </a:pPr>
+            <a:r>
+              <a:rPr sz="2100" b="1">
+                <a:solidFill>
+                  <a:srgbClr val="F87171"/>
+                </a:solidFill>
+                <a:latin typeface="Microsoft YaHei"/>
+              </a:rPr>
+              <a:t>它做不到的</a:t>
+            </a:r>
+          </a:p>
+        </p:txBody>
+      </p:sp>
+      <p:sp>
+        <p:nvSpPr>
+          <p:cNvPr id="13" name="TextBox 12"/>
+          <p:cNvSpPr txBox="1"/>
+          <p:nvPr/>
+        </p:nvSpPr>
+        <p:spPr>
+          <a:xfrm>
+            <a:off x="6583680" y="2560320"/>
+            <a:ext cx="4572000" cy="506577"/>
+          </a:xfrm>
+          <a:prstGeom prst="rect">
+            <a:avLst/>
+          </a:prstGeom>
+          <a:noFill/>
+        </p:spPr>
+        <p:txBody>
+          <a:bodyPr wrap="square" anchor="t">
+            <a:spAutoFit/>
+          </a:bodyPr>
+          <a:lstStyle/>
+          <a:p>
+            <a:pPr algn="l">
+              <a:lnSpc>
+                <a:spcPct val="115000"/>
+              </a:lnSpc>
+            </a:pPr>
+            <a:r>
+              <a:rPr sz="1600" b="0">
+                <a:solidFill>
+                  <a:srgbClr val="F8FAFC"/>
+                </a:solidFill>
+                <a:latin typeface="Microsoft YaHei"/>
+              </a:rPr>
+              <a:t>把鼠标准确移到</a:t>
+            </a:r>
+          </a:p>
+        </p:txBody>
+      </p:sp>
+      <p:sp>
+        <p:nvSpPr>
+          <p:cNvPr id="14" name="TextBox 13"/>
+          <p:cNvSpPr txBox="1"/>
+          <p:nvPr/>
+        </p:nvSpPr>
+        <p:spPr>
+          <a:xfrm>
+            <a:off x="6583680" y="3066897"/>
+            <a:ext cx="4572000" cy="506577"/>
+          </a:xfrm>
+          <a:prstGeom prst="rect">
+            <a:avLst/>
+          </a:prstGeom>
+          <a:noFill/>
+        </p:spPr>
+        <p:txBody>
+          <a:bodyPr wrap="square" anchor="t">
+            <a:spAutoFit/>
+          </a:bodyPr>
+          <a:lstStyle/>
+          <a:p>
+            <a:pPr algn="l">
+              <a:lnSpc>
+                <a:spcPct val="115000"/>
+              </a:lnSpc>
+            </a:pPr>
+            <a:r>
+              <a:rPr sz="1600" b="0">
+                <a:solidFill>
+                  <a:srgbClr val="F8FAFC"/>
+                </a:solidFill>
+                <a:latin typeface="Microsoft YaHei"/>
+              </a:rPr>
+              <a:t>屏幕上一个按钮上</a:t>
+            </a:r>
+          </a:p>
+        </p:txBody>
+      </p:sp>
+      <p:sp>
+        <p:nvSpPr>
+          <p:cNvPr id="15" name="TextBox 14"/>
+          <p:cNvSpPr txBox="1"/>
+          <p:nvPr/>
+        </p:nvSpPr>
+        <p:spPr>
+          <a:xfrm>
+            <a:off x="6583680" y="3573475"/>
+            <a:ext cx="4572000" cy="506577"/>
+          </a:xfrm>
+          <a:prstGeom prst="rect">
+            <a:avLst/>
+          </a:prstGeom>
+          <a:noFill/>
+        </p:spPr>
+        <p:txBody>
+          <a:bodyPr wrap="square" anchor="t">
+            <a:spAutoFit/>
+          </a:bodyPr>
+          <a:lstStyle/>
+          <a:p>
+            <a:pPr algn="l">
+              <a:lnSpc>
+                <a:spcPct val="115000"/>
+              </a:lnSpc>
+            </a:pPr>
+          </a:p>
+        </p:txBody>
+      </p:sp>
+      <p:sp>
+        <p:nvSpPr>
+          <p:cNvPr id="16" name="TextBox 15"/>
+          <p:cNvSpPr txBox="1"/>
+          <p:nvPr/>
+        </p:nvSpPr>
+        <p:spPr>
+          <a:xfrm>
+            <a:off x="6583680" y="4080052"/>
+            <a:ext cx="4572000" cy="506577"/>
+          </a:xfrm>
+          <a:prstGeom prst="rect">
+            <a:avLst/>
+          </a:prstGeom>
+          <a:noFill/>
+        </p:spPr>
+        <p:txBody>
+          <a:bodyPr wrap="square" anchor="t">
+            <a:spAutoFit/>
+          </a:bodyPr>
+          <a:lstStyle/>
+          <a:p>
+            <a:pPr algn="l">
+              <a:lnSpc>
+                <a:spcPct val="115000"/>
+              </a:lnSpc>
+            </a:pPr>
+            <a:r>
+              <a:rPr sz="1600" b="0">
+                <a:solidFill>
+                  <a:srgbClr val="F8FAFC"/>
+                </a:solidFill>
+                <a:latin typeface="Microsoft YaHei"/>
+              </a:rPr>
+              <a:t>一个人三十秒的排版操作</a:t>
+            </a:r>
+          </a:p>
+        </p:txBody>
+      </p:sp>
+      <p:sp>
+        <p:nvSpPr>
+          <p:cNvPr id="17" name="TextBox 16"/>
+          <p:cNvSpPr txBox="1"/>
+          <p:nvPr/>
+        </p:nvSpPr>
+        <p:spPr>
+          <a:xfrm>
+            <a:off x="6583680" y="4586630"/>
+            <a:ext cx="4572000" cy="506577"/>
+          </a:xfrm>
+          <a:prstGeom prst="rect">
+            <a:avLst/>
+          </a:prstGeom>
+          <a:noFill/>
+        </p:spPr>
+        <p:txBody>
+          <a:bodyPr wrap="square" anchor="t">
+            <a:spAutoFit/>
+          </a:bodyPr>
+          <a:lstStyle/>
+          <a:p>
+            <a:pPr algn="l">
+              <a:lnSpc>
+                <a:spcPct val="115000"/>
+              </a:lnSpc>
+            </a:pPr>
+            <a:r>
+              <a:rPr sz="1600" b="1">
+                <a:solidFill>
+                  <a:srgbClr val="F8FAFC"/>
+                </a:solidFill>
+                <a:latin typeface="Microsoft YaHei"/>
+              </a:rPr>
+              <a:t>它要花十二分钟</a:t>
+            </a:r>
+          </a:p>
+        </p:txBody>
+      </p:sp>
+      <p:sp>
+        <p:nvSpPr>
+          <p:cNvPr id="18" name="TextBox 17"/>
+          <p:cNvSpPr txBox="1"/>
+          <p:nvPr/>
+        </p:nvSpPr>
+        <p:spPr>
+          <a:xfrm>
+            <a:off x="777240" y="5550407"/>
+            <a:ext cx="10607040" cy="822960"/>
+          </a:xfrm>
+          <a:prstGeom prst="rect">
+            <a:avLst/>
+          </a:prstGeom>
+          <a:noFill/>
+        </p:spPr>
+        <p:txBody>
+          <a:bodyPr wrap="square" anchor="t">
+            <a:spAutoFit/>
+          </a:bodyPr>
+          <a:lstStyle/>
+          <a:p>
+            <a:pPr algn="ctr">
+              <a:lnSpc>
+                <a:spcPct val="115000"/>
+              </a:lnSpc>
+            </a:pPr>
+            <a:r>
+              <a:rPr sz="2100" b="1">
+                <a:solidFill>
+                  <a:srgbClr val="FDE047"/>
+                </a:solidFill>
+                <a:latin typeface="Microsoft YaHei"/>
+              </a:rPr>
+              <a:t>陶哲轩的说法：AI 的能力是尖刺状的——某些窄领域超人，同时会犯好笑的低级错误</a:t>
+            </a:r>
+          </a:p>
+        </p:txBody>
+      </p:sp>
+    </p:spTree>
+  </p:cSld>
+  <p:clrMapOvr>
+    <a:masterClrMapping/>
+  </p:clrMapOvr>
+</p:sld>
+</file>
+
+<file path=ppt/slides/slide46.xml><?xml version="1.0" encoding="utf-8"?>
+<p:sld xmlns:a="http://schemas.openxmlformats.org/drawingml/2006/main" xmlns:p="http://schemas.openxmlformats.org/presentationml/2006/main" xmlns:r="http://schemas.openxmlformats.org/officeDocument/2006/relationships">
+  <p:cSld>
+    <p:bg>
+      <p:bgPr>
+        <a:solidFill>
+          <a:srgbClr val="0E1428"/>
+        </a:solidFill>
+        <a:effectLst/>
+      </p:bgPr>
+    </p:bg>
+    <p:spTree>
+      <p:nvGrpSpPr>
+        <p:cNvPr id="1" name=""/>
+        <p:cNvGrpSpPr/>
+        <p:nvPr/>
+      </p:nvGrpSpPr>
+      <p:grpSpPr/>
+      <p:sp>
+        <p:nvSpPr>
+          <p:cNvPr id="2" name="TextBox 1"/>
+          <p:cNvSpPr txBox="1"/>
+          <p:nvPr/>
+        </p:nvSpPr>
+        <p:spPr>
+          <a:xfrm>
+            <a:off x="777240" y="457200"/>
+            <a:ext cx="10607040" cy="868680"/>
+          </a:xfrm>
+          <a:prstGeom prst="rect">
+            <a:avLst/>
+          </a:prstGeom>
+          <a:noFill/>
+        </p:spPr>
+        <p:txBody>
+          <a:bodyPr wrap="square" anchor="t">
+            <a:spAutoFit/>
+          </a:bodyPr>
+          <a:lstStyle/>
+          <a:p>
+            <a:pPr algn="l">
+              <a:lnSpc>
+                <a:spcPct val="115000"/>
+              </a:lnSpc>
+            </a:pPr>
+            <a:r>
+              <a:rPr sz="3200" b="1">
+                <a:solidFill>
+                  <a:srgbClr val="F8FAFC"/>
+                </a:solidFill>
+                <a:latin typeface="Microsoft YaHei"/>
+              </a:rPr>
+              <a:t>★ 而且「AI 解决了难题」这类标题要打折</a:t>
+            </a:r>
+          </a:p>
+        </p:txBody>
+      </p:sp>
+      <p:sp>
+        <p:nvSpPr>
+          <p:cNvPr id="3" name="Rectangle 2"/>
+          <p:cNvSpPr/>
+          <p:nvPr/>
+        </p:nvSpPr>
+        <p:spPr>
+          <a:xfrm>
+            <a:off x="0" y="1444752"/>
+            <a:ext cx="12191695" cy="27432"/>
+          </a:xfrm>
+          <a:prstGeom prst="rect">
+            <a:avLst/>
+          </a:prstGeom>
+          <a:solidFill>
+            <a:srgbClr val="F59E0B"/>
+          </a:solidFill>
+          <a:ln>
+            <a:noFill/>
+          </a:ln>
+          <a:effectLst/>
+        </p:spPr>
+        <p:style>
+          <a:lnRef idx="1">
+            <a:schemeClr val="accent1"/>
+          </a:lnRef>
+          <a:fillRef idx="3">
+            <a:schemeClr val="accent1"/>
+          </a:fillRef>
+          <a:effectRef idx="2">
+            <a:schemeClr val="accent1"/>
+          </a:effectRef>
+          <a:fontRef idx="minor">
+            <a:schemeClr val="lt1"/>
+          </a:fontRef>
+        </p:style>
+        <p:txBody>
+          <a:bodyPr rtlCol="0" anchor="ctr"/>
+          <a:lstStyle/>
+          <a:p>
+            <a:pPr algn="ctr"/>
+          </a:p>
+        </p:txBody>
+      </p:sp>
+      <p:sp>
+        <p:nvSpPr>
+          <p:cNvPr id="4" name="TextBox 3"/>
+          <p:cNvSpPr txBox="1"/>
+          <p:nvPr/>
+        </p:nvSpPr>
+        <p:spPr>
+          <a:xfrm>
+            <a:off x="914400" y="1828800"/>
+            <a:ext cx="10332720" cy="914400"/>
+          </a:xfrm>
+          <a:prstGeom prst="rect">
+            <a:avLst/>
+          </a:prstGeom>
+          <a:noFill/>
+        </p:spPr>
+        <p:txBody>
+          <a:bodyPr wrap="square" anchor="t">
+            <a:spAutoFit/>
+          </a:bodyPr>
+          <a:lstStyle/>
+          <a:p>
+            <a:pPr algn="l">
+              <a:lnSpc>
+                <a:spcPct val="115000"/>
+              </a:lnSpc>
+            </a:pPr>
+            <a:r>
+              <a:rPr sz="2100" b="0">
+                <a:solidFill>
+                  <a:srgbClr val="F8FAFC"/>
+                </a:solidFill>
+                <a:latin typeface="Microsoft YaHei"/>
+              </a:rPr>
+              <a:t>2025 年 10 月，OpenAI 高管发帖：GPT-5 </a:t>
+            </a:r>
+            <a:r>
+              <a:rPr sz="2100" b="1">
+                <a:solidFill>
+                  <a:srgbClr val="F8FAFC"/>
+                </a:solidFill>
+                <a:latin typeface="Microsoft YaHei"/>
+              </a:rPr>
+              <a:t>解决了 10 个未解的数学难题</a:t>
+            </a:r>
+          </a:p>
+        </p:txBody>
+      </p:sp>
+      <p:sp>
+        <p:nvSpPr>
+          <p:cNvPr id="5" name="TextBox 4"/>
+          <p:cNvSpPr txBox="1"/>
+          <p:nvPr/>
+        </p:nvSpPr>
+        <p:spPr>
+          <a:xfrm>
+            <a:off x="914400" y="2697480"/>
+            <a:ext cx="10332720" cy="914400"/>
+          </a:xfrm>
+          <a:prstGeom prst="rect">
+            <a:avLst/>
+          </a:prstGeom>
+          <a:noFill/>
+        </p:spPr>
+        <p:txBody>
+          <a:bodyPr wrap="square" anchor="t">
+            <a:spAutoFit/>
+          </a:bodyPr>
+          <a:lstStyle/>
+          <a:p>
+            <a:pPr algn="l">
+              <a:lnSpc>
+                <a:spcPct val="115000"/>
+              </a:lnSpc>
+            </a:pPr>
+            <a:r>
+              <a:rPr sz="2100" b="0">
+                <a:solidFill>
+                  <a:srgbClr val="F8FAFC"/>
+                </a:solidFill>
+                <a:latin typeface="Microsoft YaHei"/>
+              </a:rPr>
+              <a:t>十万阅读。维护那个问题库的数学家出来澄清——</a:t>
+            </a:r>
+          </a:p>
+        </p:txBody>
+      </p:sp>
+      <p:sp>
+        <p:nvSpPr>
+          <p:cNvPr id="6" name="TextBox 5"/>
+          <p:cNvSpPr txBox="1"/>
+          <p:nvPr/>
+        </p:nvSpPr>
+        <p:spPr>
+          <a:xfrm>
+            <a:off x="914400" y="3566160"/>
+            <a:ext cx="10332720" cy="914400"/>
+          </a:xfrm>
+          <a:prstGeom prst="rect">
+            <a:avLst/>
+          </a:prstGeom>
+          <a:noFill/>
+        </p:spPr>
+        <p:txBody>
+          <a:bodyPr wrap="square" anchor="t">
+            <a:spAutoFit/>
+          </a:bodyPr>
+          <a:lstStyle/>
+          <a:p>
+            <a:pPr algn="l">
+              <a:lnSpc>
+                <a:spcPct val="115000"/>
+              </a:lnSpc>
+            </a:pPr>
+            <a:r>
+              <a:rPr sz="2100" b="0">
+                <a:solidFill>
+                  <a:srgbClr val="F8FAFC"/>
+                </a:solidFill>
+                <a:latin typeface="Microsoft YaHei"/>
+              </a:rPr>
+              <a:t>标着「未解」的意思只是</a:t>
+            </a:r>
+            <a:r>
+              <a:rPr sz="2100" b="1">
+                <a:solidFill>
+                  <a:srgbClr val="F8FAFC"/>
+                </a:solidFill>
+                <a:latin typeface="Microsoft YaHei"/>
+              </a:rPr>
+              <a:t>「我本人不知道有论文解决了它」</a:t>
+            </a:r>
+          </a:p>
+        </p:txBody>
+      </p:sp>
+      <p:sp>
+        <p:nvSpPr>
+          <p:cNvPr id="7" name="TextBox 6"/>
+          <p:cNvSpPr txBox="1"/>
+          <p:nvPr/>
+        </p:nvSpPr>
+        <p:spPr>
+          <a:xfrm>
+            <a:off x="914400" y="4434840"/>
+            <a:ext cx="10332720" cy="914400"/>
+          </a:xfrm>
+          <a:prstGeom prst="rect">
+            <a:avLst/>
+          </a:prstGeom>
+          <a:noFill/>
+        </p:spPr>
+        <p:txBody>
+          <a:bodyPr wrap="square" anchor="t">
+            <a:spAutoFit/>
+          </a:bodyPr>
+          <a:lstStyle/>
+          <a:p>
+            <a:pPr algn="l">
+              <a:lnSpc>
+                <a:spcPct val="115000"/>
+              </a:lnSpc>
+            </a:pPr>
+            <a:r>
+              <a:rPr sz="2100" b="0">
+                <a:solidFill>
+                  <a:srgbClr val="F8FAFC"/>
+                </a:solidFill>
+                <a:latin typeface="Microsoft YaHei"/>
+              </a:rPr>
+              <a:t>GPT-5 做的是</a:t>
+            </a:r>
+            <a:r>
+              <a:rPr sz="2100" b="1">
+                <a:solidFill>
+                  <a:srgbClr val="F8FAFC"/>
+                </a:solidFill>
+                <a:latin typeface="Microsoft YaHei"/>
+              </a:rPr>
+              <a:t>找到了已发表的文献</a:t>
+            </a:r>
+            <a:r>
+              <a:rPr sz="2100" b="0">
+                <a:solidFill>
+                  <a:srgbClr val="F8FAFC"/>
+                </a:solidFill>
+                <a:latin typeface="Microsoft YaHei"/>
+              </a:rPr>
+              <a:t>：是检索，不是发现</a:t>
+            </a:r>
+          </a:p>
+        </p:txBody>
+      </p:sp>
+      <p:sp>
+        <p:nvSpPr>
+          <p:cNvPr id="8" name="TextBox 7"/>
+          <p:cNvSpPr txBox="1"/>
+          <p:nvPr/>
+        </p:nvSpPr>
+        <p:spPr>
+          <a:xfrm>
+            <a:off x="914400" y="5303520"/>
+            <a:ext cx="10332720" cy="914400"/>
+          </a:xfrm>
+          <a:prstGeom prst="rect">
+            <a:avLst/>
+          </a:prstGeom>
+          <a:noFill/>
+        </p:spPr>
+        <p:txBody>
+          <a:bodyPr wrap="square" anchor="t">
+            <a:spAutoFit/>
+          </a:bodyPr>
+          <a:lstStyle/>
+          <a:p>
+            <a:pPr algn="l">
+              <a:lnSpc>
+                <a:spcPct val="115000"/>
+              </a:lnSpc>
+            </a:pPr>
+            <a:r>
+              <a:rPr sz="2100" b="0">
+                <a:solidFill>
+                  <a:srgbClr val="F8FAFC"/>
+                </a:solidFill>
+                <a:latin typeface="Microsoft YaHei"/>
+              </a:rPr>
+              <a:t>另一家 AI 公司的负责人公开回了两个字：</a:t>
+            </a:r>
+            <a:r>
+              <a:rPr sz="2100" b="1">
+                <a:solidFill>
+                  <a:srgbClr val="F8FAFC"/>
+                </a:solidFill>
+                <a:latin typeface="Microsoft YaHei"/>
+              </a:rPr>
+              <a:t>「这很尴尬」</a:t>
+            </a:r>
+          </a:p>
+        </p:txBody>
+      </p:sp>
+    </p:spTree>
+  </p:cSld>
+  <p:clrMapOvr>
+    <a:masterClrMapping/>
+  </p:clrMapOvr>
+</p:sld>
+</file>
+
+<file path=ppt/slides/slide47.xml><?xml version="1.0" encoding="utf-8"?>
 <p:sld xmlns:a="http://schemas.openxmlformats.org/drawingml/2006/main" xmlns:p="http://schemas.openxmlformats.org/presentationml/2006/main" xmlns:r="http://schemas.openxmlformats.org/officeDocument/2006/relationships">
   <p:cSld>
     <p:bg>
@@ -15776,7 +19358,7 @@
 </p:sld>
 </file>
 
-<file path=ppt/slides/slide42.xml><?xml version="1.0" encoding="utf-8"?>
+<file path=ppt/slides/slide48.xml><?xml version="1.0" encoding="utf-8"?>
 <p:sld xmlns:a="http://schemas.openxmlformats.org/drawingml/2006/main" xmlns:p="http://schemas.openxmlformats.org/presentationml/2006/main" xmlns:r="http://schemas.openxmlformats.org/officeDocument/2006/relationships">
   <p:cSld>
     <p:bg>
@@ -16450,7 +20032,7 @@
 </p:sld>
 </file>
 
-<file path=ppt/slides/slide43.xml><?xml version="1.0" encoding="utf-8"?>
+<file path=ppt/slides/slide49.xml><?xml version="1.0" encoding="utf-8"?>
 <p:sld xmlns:a="http://schemas.openxmlformats.org/drawingml/2006/main" xmlns:p="http://schemas.openxmlformats.org/presentationml/2006/main" xmlns:r="http://schemas.openxmlformats.org/officeDocument/2006/relationships">
   <p:cSld>
     <p:bg>
@@ -16587,492 +20169,6 @@
           <a:lstStyle/>
           <a:p>
             <a:pPr algn="ctr"/>
-          </a:p>
-        </p:txBody>
-      </p:sp>
-    </p:spTree>
-  </p:cSld>
-  <p:clrMapOvr>
-    <a:masterClrMapping/>
-  </p:clrMapOvr>
-</p:sld>
-</file>
-
-<file path=ppt/slides/slide44.xml><?xml version="1.0" encoding="utf-8"?>
-<p:sld xmlns:a="http://schemas.openxmlformats.org/drawingml/2006/main" xmlns:p="http://schemas.openxmlformats.org/presentationml/2006/main" xmlns:r="http://schemas.openxmlformats.org/officeDocument/2006/relationships">
-  <p:cSld>
-    <p:bg>
-      <p:bgPr>
-        <a:solidFill>
-          <a:srgbClr val="0E1428"/>
-        </a:solidFill>
-        <a:effectLst/>
-      </p:bgPr>
-    </p:bg>
-    <p:spTree>
-      <p:nvGrpSpPr>
-        <p:cNvPr id="1" name=""/>
-        <p:cNvGrpSpPr/>
-        <p:nvPr/>
-      </p:nvGrpSpPr>
-      <p:grpSpPr/>
-      <p:sp>
-        <p:nvSpPr>
-          <p:cNvPr id="2" name="TextBox 1"/>
-          <p:cNvSpPr txBox="1"/>
-          <p:nvPr/>
-        </p:nvSpPr>
-        <p:spPr>
-          <a:xfrm>
-            <a:off x="777240" y="457200"/>
-            <a:ext cx="10607040" cy="868680"/>
-          </a:xfrm>
-          <a:prstGeom prst="rect">
-            <a:avLst/>
-          </a:prstGeom>
-          <a:noFill/>
-        </p:spPr>
-        <p:txBody>
-          <a:bodyPr wrap="square" anchor="t">
-            <a:spAutoFit/>
-          </a:bodyPr>
-          <a:lstStyle/>
-          <a:p>
-            <a:pPr algn="l">
-              <a:lnSpc>
-                <a:spcPct val="115000"/>
-              </a:lnSpc>
-            </a:pPr>
-            <a:r>
-              <a:rPr sz="3200" b="1">
-                <a:solidFill>
-                  <a:srgbClr val="F8FAFC"/>
-                </a:solidFill>
-                <a:latin typeface="Microsoft YaHei"/>
-              </a:rPr>
-              <a:t>如果只记三句</a:t>
-            </a:r>
-          </a:p>
-        </p:txBody>
-      </p:sp>
-      <p:sp>
-        <p:nvSpPr>
-          <p:cNvPr id="3" name="Rectangle 2"/>
-          <p:cNvSpPr/>
-          <p:nvPr/>
-        </p:nvSpPr>
-        <p:spPr>
-          <a:xfrm>
-            <a:off x="0" y="1444752"/>
-            <a:ext cx="12191695" cy="27432"/>
-          </a:xfrm>
-          <a:prstGeom prst="rect">
-            <a:avLst/>
-          </a:prstGeom>
-          <a:solidFill>
-            <a:srgbClr val="F59E0B"/>
-          </a:solidFill>
-          <a:ln>
-            <a:noFill/>
-          </a:ln>
-          <a:effectLst/>
-        </p:spPr>
-        <p:style>
-          <a:lnRef idx="1">
-            <a:schemeClr val="accent1"/>
-          </a:lnRef>
-          <a:fillRef idx="3">
-            <a:schemeClr val="accent1"/>
-          </a:fillRef>
-          <a:effectRef idx="2">
-            <a:schemeClr val="accent1"/>
-          </a:effectRef>
-          <a:fontRef idx="minor">
-            <a:schemeClr val="lt1"/>
-          </a:fontRef>
-        </p:style>
-        <p:txBody>
-          <a:bodyPr rtlCol="0" anchor="ctr"/>
-          <a:lstStyle/>
-          <a:p>
-            <a:pPr algn="ctr"/>
-          </a:p>
-        </p:txBody>
-      </p:sp>
-      <p:sp>
-        <p:nvSpPr>
-          <p:cNvPr id="4" name="TextBox 3"/>
-          <p:cNvSpPr txBox="1"/>
-          <p:nvPr/>
-        </p:nvSpPr>
-        <p:spPr>
-          <a:xfrm>
-            <a:off x="914400" y="1828800"/>
-            <a:ext cx="10332720" cy="914400"/>
-          </a:xfrm>
-          <a:prstGeom prst="rect">
-            <a:avLst/>
-          </a:prstGeom>
-          <a:noFill/>
-        </p:spPr>
-        <p:txBody>
-          <a:bodyPr wrap="square" anchor="t">
-            <a:spAutoFit/>
-          </a:bodyPr>
-          <a:lstStyle/>
-          <a:p>
-            <a:pPr algn="l">
-              <a:lnSpc>
-                <a:spcPct val="115000"/>
-              </a:lnSpc>
-            </a:pPr>
-            <a:r>
-              <a:rPr sz="2200" b="0">
-                <a:solidFill>
-                  <a:srgbClr val="F8FAFC"/>
-                </a:solidFill>
-                <a:latin typeface="Microsoft YaHei"/>
-              </a:rPr>
-              <a:t>1　它读过所有书，但</a:t>
-            </a:r>
-            <a:r>
-              <a:rPr sz="2200" b="1">
-                <a:solidFill>
-                  <a:srgbClr val="F8FAFC"/>
-                </a:solidFill>
-                <a:latin typeface="Microsoft YaHei"/>
-              </a:rPr>
-              <a:t>没出过门</a:t>
-            </a:r>
-            <a:r>
-              <a:rPr sz="2200" b="0">
-                <a:solidFill>
-                  <a:srgbClr val="F8FAFC"/>
-                </a:solidFill>
-                <a:latin typeface="Microsoft YaHei"/>
-              </a:rPr>
-              <a:t>，常识会错，编的东西是真诚的</a:t>
-            </a:r>
-          </a:p>
-        </p:txBody>
-      </p:sp>
-      <p:sp>
-        <p:nvSpPr>
-          <p:cNvPr id="5" name="TextBox 4"/>
-          <p:cNvSpPr txBox="1"/>
-          <p:nvPr/>
-        </p:nvSpPr>
-        <p:spPr>
-          <a:xfrm>
-            <a:off x="914400" y="2697480"/>
-            <a:ext cx="10332720" cy="914400"/>
-          </a:xfrm>
-          <a:prstGeom prst="rect">
-            <a:avLst/>
-          </a:prstGeom>
-          <a:noFill/>
-        </p:spPr>
-        <p:txBody>
-          <a:bodyPr wrap="square" anchor="t">
-            <a:spAutoFit/>
-          </a:bodyPr>
-          <a:lstStyle/>
-          <a:p>
-            <a:pPr algn="l">
-              <a:lnSpc>
-                <a:spcPct val="115000"/>
-              </a:lnSpc>
-            </a:pPr>
-            <a:r>
-              <a:rPr sz="2200" b="0">
-                <a:solidFill>
-                  <a:srgbClr val="F8FAFC"/>
-                </a:solidFill>
-                <a:latin typeface="Microsoft YaHei"/>
-              </a:rPr>
-              <a:t>2　它能自己干活了，但需要有人</a:t>
-            </a:r>
-            <a:r>
-              <a:rPr sz="2200" b="1">
-                <a:solidFill>
-                  <a:srgbClr val="F8FAFC"/>
-                </a:solidFill>
-                <a:latin typeface="Microsoft YaHei"/>
-              </a:rPr>
-              <a:t>说清楚要什么、并且看最终结果</a:t>
-            </a:r>
-          </a:p>
-        </p:txBody>
-      </p:sp>
-      <p:sp>
-        <p:nvSpPr>
-          <p:cNvPr id="6" name="TextBox 5"/>
-          <p:cNvSpPr txBox="1"/>
-          <p:nvPr/>
-        </p:nvSpPr>
-        <p:spPr>
-          <a:xfrm>
-            <a:off x="914400" y="3566160"/>
-            <a:ext cx="10332720" cy="914400"/>
-          </a:xfrm>
-          <a:prstGeom prst="rect">
-            <a:avLst/>
-          </a:prstGeom>
-          <a:noFill/>
-        </p:spPr>
-        <p:txBody>
-          <a:bodyPr wrap="square" anchor="t">
-            <a:spAutoFit/>
-          </a:bodyPr>
-          <a:lstStyle/>
-          <a:p>
-            <a:pPr algn="l">
-              <a:lnSpc>
-                <a:spcPct val="115000"/>
-              </a:lnSpc>
-            </a:pPr>
-            <a:r>
-              <a:rPr sz="2200" b="0">
-                <a:solidFill>
-                  <a:srgbClr val="F8FAFC"/>
-                </a:solidFill>
-                <a:latin typeface="Microsoft YaHei"/>
-              </a:rPr>
-              <a:t>3　教这件事没消失，只是</a:t>
-            </a:r>
-            <a:r>
-              <a:rPr sz="2200" b="1">
-                <a:solidFill>
-                  <a:srgbClr val="F8FAFC"/>
-                </a:solidFill>
-                <a:latin typeface="Microsoft YaHei"/>
-              </a:rPr>
-              <a:t>对象多了一个</a:t>
-            </a:r>
-          </a:p>
-        </p:txBody>
-      </p:sp>
-    </p:spTree>
-  </p:cSld>
-  <p:clrMapOvr>
-    <a:masterClrMapping/>
-  </p:clrMapOvr>
-</p:sld>
-</file>
-
-<file path=ppt/slides/slide45.xml><?xml version="1.0" encoding="utf-8"?>
-<p:sld xmlns:a="http://schemas.openxmlformats.org/drawingml/2006/main" xmlns:p="http://schemas.openxmlformats.org/presentationml/2006/main" xmlns:r="http://schemas.openxmlformats.org/officeDocument/2006/relationships">
-  <p:cSld>
-    <p:bg>
-      <p:bgPr>
-        <a:solidFill>
-          <a:srgbClr val="0A1A1A"/>
-        </a:solidFill>
-        <a:effectLst/>
-      </p:bgPr>
-    </p:bg>
-    <p:spTree>
-      <p:nvGrpSpPr>
-        <p:cNvPr id="1" name=""/>
-        <p:cNvGrpSpPr/>
-        <p:nvPr/>
-      </p:nvGrpSpPr>
-      <p:grpSpPr/>
-      <p:sp>
-        <p:nvSpPr>
-          <p:cNvPr id="2" name="TextBox 1"/>
-          <p:cNvSpPr txBox="1"/>
-          <p:nvPr/>
-        </p:nvSpPr>
-        <p:spPr>
-          <a:xfrm>
-            <a:off x="914400" y="2286000"/>
-            <a:ext cx="10332720" cy="1828800"/>
-          </a:xfrm>
-          <a:prstGeom prst="rect">
-            <a:avLst/>
-          </a:prstGeom>
-          <a:noFill/>
-        </p:spPr>
-        <p:txBody>
-          <a:bodyPr wrap="square" anchor="ctr">
-            <a:spAutoFit/>
-          </a:bodyPr>
-          <a:lstStyle/>
-          <a:p>
-            <a:pPr algn="ctr">
-              <a:lnSpc>
-                <a:spcPct val="115000"/>
-              </a:lnSpc>
-            </a:pPr>
-            <a:r>
-              <a:rPr sz="4000" b="1">
-                <a:solidFill>
-                  <a:srgbClr val="FDE047"/>
-                </a:solidFill>
-                <a:latin typeface="Microsoft YaHei"/>
-              </a:rPr>
-              <a:t>要判断它会不会</a:t>
-            </a:r>
-          </a:p>
-          <a:p>
-            <a:pPr algn="ctr">
-              <a:lnSpc>
-                <a:spcPct val="115000"/>
-              </a:lnSpc>
-            </a:pPr>
-            <a:r>
-              <a:rPr sz="4000" b="1">
-                <a:solidFill>
-                  <a:srgbClr val="FDE047"/>
-                </a:solidFill>
-                <a:latin typeface="Microsoft YaHei"/>
-              </a:rPr>
-              <a:t>得看它做出来的东西，不能只听它解释</a:t>
-            </a:r>
-          </a:p>
-        </p:txBody>
-      </p:sp>
-    </p:spTree>
-  </p:cSld>
-  <p:clrMapOvr>
-    <a:masterClrMapping/>
-  </p:clrMapOvr>
-</p:sld>
-</file>
-
-<file path=ppt/slides/slide46.xml><?xml version="1.0" encoding="utf-8"?>
-<p:sld xmlns:a="http://schemas.openxmlformats.org/drawingml/2006/main" xmlns:p="http://schemas.openxmlformats.org/presentationml/2006/main" xmlns:r="http://schemas.openxmlformats.org/officeDocument/2006/relationships">
-  <p:cSld>
-    <p:bg>
-      <p:bgPr>
-        <a:solidFill>
-          <a:srgbClr val="0A1A1A"/>
-        </a:solidFill>
-        <a:effectLst/>
-      </p:bgPr>
-    </p:bg>
-    <p:spTree>
-      <p:nvGrpSpPr>
-        <p:cNvPr id="1" name=""/>
-        <p:cNvGrpSpPr/>
-        <p:nvPr/>
-      </p:nvGrpSpPr>
-      <p:grpSpPr/>
-      <p:sp>
-        <p:nvSpPr>
-          <p:cNvPr id="2" name="TextBox 1"/>
-          <p:cNvSpPr txBox="1"/>
-          <p:nvPr/>
-        </p:nvSpPr>
-        <p:spPr>
-          <a:xfrm>
-            <a:off x="914400" y="2011680"/>
-            <a:ext cx="10332720" cy="914400"/>
-          </a:xfrm>
-          <a:prstGeom prst="rect">
-            <a:avLst/>
-          </a:prstGeom>
-          <a:noFill/>
-        </p:spPr>
-        <p:txBody>
-          <a:bodyPr wrap="square" anchor="t">
-            <a:spAutoFit/>
-          </a:bodyPr>
-          <a:lstStyle/>
-          <a:p>
-            <a:pPr algn="ctr">
-              <a:lnSpc>
-                <a:spcPct val="115000"/>
-              </a:lnSpc>
-            </a:pPr>
-            <a:r>
-              <a:rPr sz="4400" b="1">
-                <a:solidFill>
-                  <a:srgbClr val="F8FAFC"/>
-                </a:solidFill>
-                <a:latin typeface="Microsoft YaHei"/>
-              </a:rPr>
-              <a:t>谢谢</a:t>
-            </a:r>
-          </a:p>
-        </p:txBody>
-      </p:sp>
-      <p:sp>
-        <p:nvSpPr>
-          <p:cNvPr id="3" name="TextBox 2"/>
-          <p:cNvSpPr txBox="1"/>
-          <p:nvPr/>
-        </p:nvSpPr>
-        <p:spPr>
-          <a:xfrm>
-            <a:off x="914400" y="3291840"/>
-            <a:ext cx="10332720" cy="731520"/>
-          </a:xfrm>
-          <a:prstGeom prst="rect">
-            <a:avLst/>
-          </a:prstGeom>
-          <a:noFill/>
-        </p:spPr>
-        <p:txBody>
-          <a:bodyPr wrap="square" anchor="t">
-            <a:spAutoFit/>
-          </a:bodyPr>
-          <a:lstStyle/>
-          <a:p>
-            <a:pPr algn="ctr">
-              <a:lnSpc>
-                <a:spcPct val="115000"/>
-              </a:lnSpc>
-            </a:pPr>
-            <a:r>
-              <a:rPr sz="2400" b="0">
-                <a:solidFill>
-                  <a:srgbClr val="5EEAD4"/>
-                </a:solidFill>
-                <a:latin typeface="Microsoft YaHei"/>
-              </a:rPr>
-              <a:t>靳岩岩</a:t>
-            </a:r>
-          </a:p>
-        </p:txBody>
-      </p:sp>
-      <p:sp>
-        <p:nvSpPr>
-          <p:cNvPr id="4" name="TextBox 3"/>
-          <p:cNvSpPr txBox="1"/>
-          <p:nvPr/>
-        </p:nvSpPr>
-        <p:spPr>
-          <a:xfrm>
-            <a:off x="914400" y="4023360"/>
-            <a:ext cx="10332720" cy="731520"/>
-          </a:xfrm>
-          <a:prstGeom prst="rect">
-            <a:avLst/>
-          </a:prstGeom>
-          <a:noFill/>
-        </p:spPr>
-        <p:txBody>
-          <a:bodyPr wrap="square" anchor="t">
-            <a:spAutoFit/>
-          </a:bodyPr>
-          <a:lstStyle/>
-          <a:p>
-            <a:pPr algn="ctr">
-              <a:lnSpc>
-                <a:spcPct val="115000"/>
-              </a:lnSpc>
-            </a:pPr>
-            <a:r>
-              <a:rPr sz="1600" b="0">
-                <a:solidFill>
-                  <a:srgbClr val="94A3B8"/>
-                </a:solidFill>
-                <a:latin typeface="Microsoft YaHei"/>
-              </a:rPr>
-              <a:t>（此处放公众号二维码）</a:t>
-            </a:r>
           </a:p>
         </p:txBody>
       </p:sp>
@@ -17259,6 +20355,492 @@
                 <a:latin typeface="Microsoft YaHei"/>
               </a:rPr>
               <a:t>像背课文背到能接龙，区别是它背了整个图书馆</a:t>
+            </a:r>
+          </a:p>
+        </p:txBody>
+      </p:sp>
+    </p:spTree>
+  </p:cSld>
+  <p:clrMapOvr>
+    <a:masterClrMapping/>
+  </p:clrMapOvr>
+</p:sld>
+</file>
+
+<file path=ppt/slides/slide50.xml><?xml version="1.0" encoding="utf-8"?>
+<p:sld xmlns:a="http://schemas.openxmlformats.org/drawingml/2006/main" xmlns:p="http://schemas.openxmlformats.org/presentationml/2006/main" xmlns:r="http://schemas.openxmlformats.org/officeDocument/2006/relationships">
+  <p:cSld>
+    <p:bg>
+      <p:bgPr>
+        <a:solidFill>
+          <a:srgbClr val="0E1428"/>
+        </a:solidFill>
+        <a:effectLst/>
+      </p:bgPr>
+    </p:bg>
+    <p:spTree>
+      <p:nvGrpSpPr>
+        <p:cNvPr id="1" name=""/>
+        <p:cNvGrpSpPr/>
+        <p:nvPr/>
+      </p:nvGrpSpPr>
+      <p:grpSpPr/>
+      <p:sp>
+        <p:nvSpPr>
+          <p:cNvPr id="2" name="TextBox 1"/>
+          <p:cNvSpPr txBox="1"/>
+          <p:nvPr/>
+        </p:nvSpPr>
+        <p:spPr>
+          <a:xfrm>
+            <a:off x="777240" y="457200"/>
+            <a:ext cx="10607040" cy="868680"/>
+          </a:xfrm>
+          <a:prstGeom prst="rect">
+            <a:avLst/>
+          </a:prstGeom>
+          <a:noFill/>
+        </p:spPr>
+        <p:txBody>
+          <a:bodyPr wrap="square" anchor="t">
+            <a:spAutoFit/>
+          </a:bodyPr>
+          <a:lstStyle/>
+          <a:p>
+            <a:pPr algn="l">
+              <a:lnSpc>
+                <a:spcPct val="115000"/>
+              </a:lnSpc>
+            </a:pPr>
+            <a:r>
+              <a:rPr sz="3200" b="1">
+                <a:solidFill>
+                  <a:srgbClr val="F8FAFC"/>
+                </a:solidFill>
+                <a:latin typeface="Microsoft YaHei"/>
+              </a:rPr>
+              <a:t>如果只记三句</a:t>
+            </a:r>
+          </a:p>
+        </p:txBody>
+      </p:sp>
+      <p:sp>
+        <p:nvSpPr>
+          <p:cNvPr id="3" name="Rectangle 2"/>
+          <p:cNvSpPr/>
+          <p:nvPr/>
+        </p:nvSpPr>
+        <p:spPr>
+          <a:xfrm>
+            <a:off x="0" y="1444752"/>
+            <a:ext cx="12191695" cy="27432"/>
+          </a:xfrm>
+          <a:prstGeom prst="rect">
+            <a:avLst/>
+          </a:prstGeom>
+          <a:solidFill>
+            <a:srgbClr val="F59E0B"/>
+          </a:solidFill>
+          <a:ln>
+            <a:noFill/>
+          </a:ln>
+          <a:effectLst/>
+        </p:spPr>
+        <p:style>
+          <a:lnRef idx="1">
+            <a:schemeClr val="accent1"/>
+          </a:lnRef>
+          <a:fillRef idx="3">
+            <a:schemeClr val="accent1"/>
+          </a:fillRef>
+          <a:effectRef idx="2">
+            <a:schemeClr val="accent1"/>
+          </a:effectRef>
+          <a:fontRef idx="minor">
+            <a:schemeClr val="lt1"/>
+          </a:fontRef>
+        </p:style>
+        <p:txBody>
+          <a:bodyPr rtlCol="0" anchor="ctr"/>
+          <a:lstStyle/>
+          <a:p>
+            <a:pPr algn="ctr"/>
+          </a:p>
+        </p:txBody>
+      </p:sp>
+      <p:sp>
+        <p:nvSpPr>
+          <p:cNvPr id="4" name="TextBox 3"/>
+          <p:cNvSpPr txBox="1"/>
+          <p:nvPr/>
+        </p:nvSpPr>
+        <p:spPr>
+          <a:xfrm>
+            <a:off x="914400" y="1828800"/>
+            <a:ext cx="10332720" cy="914400"/>
+          </a:xfrm>
+          <a:prstGeom prst="rect">
+            <a:avLst/>
+          </a:prstGeom>
+          <a:noFill/>
+        </p:spPr>
+        <p:txBody>
+          <a:bodyPr wrap="square" anchor="t">
+            <a:spAutoFit/>
+          </a:bodyPr>
+          <a:lstStyle/>
+          <a:p>
+            <a:pPr algn="l">
+              <a:lnSpc>
+                <a:spcPct val="115000"/>
+              </a:lnSpc>
+            </a:pPr>
+            <a:r>
+              <a:rPr sz="2200" b="0">
+                <a:solidFill>
+                  <a:srgbClr val="F8FAFC"/>
+                </a:solidFill>
+                <a:latin typeface="Microsoft YaHei"/>
+              </a:rPr>
+              <a:t>1　它读过所有书，但</a:t>
+            </a:r>
+            <a:r>
+              <a:rPr sz="2200" b="1">
+                <a:solidFill>
+                  <a:srgbClr val="F8FAFC"/>
+                </a:solidFill>
+                <a:latin typeface="Microsoft YaHei"/>
+              </a:rPr>
+              <a:t>没出过门</a:t>
+            </a:r>
+            <a:r>
+              <a:rPr sz="2200" b="0">
+                <a:solidFill>
+                  <a:srgbClr val="F8FAFC"/>
+                </a:solidFill>
+                <a:latin typeface="Microsoft YaHei"/>
+              </a:rPr>
+              <a:t>，常识会错，编的东西是真诚的</a:t>
+            </a:r>
+          </a:p>
+        </p:txBody>
+      </p:sp>
+      <p:sp>
+        <p:nvSpPr>
+          <p:cNvPr id="5" name="TextBox 4"/>
+          <p:cNvSpPr txBox="1"/>
+          <p:nvPr/>
+        </p:nvSpPr>
+        <p:spPr>
+          <a:xfrm>
+            <a:off x="914400" y="2697480"/>
+            <a:ext cx="10332720" cy="914400"/>
+          </a:xfrm>
+          <a:prstGeom prst="rect">
+            <a:avLst/>
+          </a:prstGeom>
+          <a:noFill/>
+        </p:spPr>
+        <p:txBody>
+          <a:bodyPr wrap="square" anchor="t">
+            <a:spAutoFit/>
+          </a:bodyPr>
+          <a:lstStyle/>
+          <a:p>
+            <a:pPr algn="l">
+              <a:lnSpc>
+                <a:spcPct val="115000"/>
+              </a:lnSpc>
+            </a:pPr>
+            <a:r>
+              <a:rPr sz="2200" b="0">
+                <a:solidFill>
+                  <a:srgbClr val="F8FAFC"/>
+                </a:solidFill>
+                <a:latin typeface="Microsoft YaHei"/>
+              </a:rPr>
+              <a:t>2　它能自己干活了，但需要有人</a:t>
+            </a:r>
+            <a:r>
+              <a:rPr sz="2200" b="1">
+                <a:solidFill>
+                  <a:srgbClr val="F8FAFC"/>
+                </a:solidFill>
+                <a:latin typeface="Microsoft YaHei"/>
+              </a:rPr>
+              <a:t>说清楚要什么、并且看最终结果</a:t>
+            </a:r>
+          </a:p>
+        </p:txBody>
+      </p:sp>
+      <p:sp>
+        <p:nvSpPr>
+          <p:cNvPr id="6" name="TextBox 5"/>
+          <p:cNvSpPr txBox="1"/>
+          <p:nvPr/>
+        </p:nvSpPr>
+        <p:spPr>
+          <a:xfrm>
+            <a:off x="914400" y="3566160"/>
+            <a:ext cx="10332720" cy="914400"/>
+          </a:xfrm>
+          <a:prstGeom prst="rect">
+            <a:avLst/>
+          </a:prstGeom>
+          <a:noFill/>
+        </p:spPr>
+        <p:txBody>
+          <a:bodyPr wrap="square" anchor="t">
+            <a:spAutoFit/>
+          </a:bodyPr>
+          <a:lstStyle/>
+          <a:p>
+            <a:pPr algn="l">
+              <a:lnSpc>
+                <a:spcPct val="115000"/>
+              </a:lnSpc>
+            </a:pPr>
+            <a:r>
+              <a:rPr sz="2200" b="0">
+                <a:solidFill>
+                  <a:srgbClr val="F8FAFC"/>
+                </a:solidFill>
+                <a:latin typeface="Microsoft YaHei"/>
+              </a:rPr>
+              <a:t>3　教这件事没消失，只是</a:t>
+            </a:r>
+            <a:r>
+              <a:rPr sz="2200" b="1">
+                <a:solidFill>
+                  <a:srgbClr val="F8FAFC"/>
+                </a:solidFill>
+                <a:latin typeface="Microsoft YaHei"/>
+              </a:rPr>
+              <a:t>对象多了一个</a:t>
+            </a:r>
+          </a:p>
+        </p:txBody>
+      </p:sp>
+    </p:spTree>
+  </p:cSld>
+  <p:clrMapOvr>
+    <a:masterClrMapping/>
+  </p:clrMapOvr>
+</p:sld>
+</file>
+
+<file path=ppt/slides/slide51.xml><?xml version="1.0" encoding="utf-8"?>
+<p:sld xmlns:a="http://schemas.openxmlformats.org/drawingml/2006/main" xmlns:p="http://schemas.openxmlformats.org/presentationml/2006/main" xmlns:r="http://schemas.openxmlformats.org/officeDocument/2006/relationships">
+  <p:cSld>
+    <p:bg>
+      <p:bgPr>
+        <a:solidFill>
+          <a:srgbClr val="0A1A1A"/>
+        </a:solidFill>
+        <a:effectLst/>
+      </p:bgPr>
+    </p:bg>
+    <p:spTree>
+      <p:nvGrpSpPr>
+        <p:cNvPr id="1" name=""/>
+        <p:cNvGrpSpPr/>
+        <p:nvPr/>
+      </p:nvGrpSpPr>
+      <p:grpSpPr/>
+      <p:sp>
+        <p:nvSpPr>
+          <p:cNvPr id="2" name="TextBox 1"/>
+          <p:cNvSpPr txBox="1"/>
+          <p:nvPr/>
+        </p:nvSpPr>
+        <p:spPr>
+          <a:xfrm>
+            <a:off x="914400" y="2286000"/>
+            <a:ext cx="10332720" cy="1828800"/>
+          </a:xfrm>
+          <a:prstGeom prst="rect">
+            <a:avLst/>
+          </a:prstGeom>
+          <a:noFill/>
+        </p:spPr>
+        <p:txBody>
+          <a:bodyPr wrap="square" anchor="ctr">
+            <a:spAutoFit/>
+          </a:bodyPr>
+          <a:lstStyle/>
+          <a:p>
+            <a:pPr algn="ctr">
+              <a:lnSpc>
+                <a:spcPct val="115000"/>
+              </a:lnSpc>
+            </a:pPr>
+            <a:r>
+              <a:rPr sz="4000" b="1">
+                <a:solidFill>
+                  <a:srgbClr val="FDE047"/>
+                </a:solidFill>
+                <a:latin typeface="Microsoft YaHei"/>
+              </a:rPr>
+              <a:t>要判断它会不会</a:t>
+            </a:r>
+          </a:p>
+          <a:p>
+            <a:pPr algn="ctr">
+              <a:lnSpc>
+                <a:spcPct val="115000"/>
+              </a:lnSpc>
+            </a:pPr>
+            <a:r>
+              <a:rPr sz="4000" b="1">
+                <a:solidFill>
+                  <a:srgbClr val="FDE047"/>
+                </a:solidFill>
+                <a:latin typeface="Microsoft YaHei"/>
+              </a:rPr>
+              <a:t>得看它做出来的东西，不能只听它解释</a:t>
+            </a:r>
+          </a:p>
+        </p:txBody>
+      </p:sp>
+    </p:spTree>
+  </p:cSld>
+  <p:clrMapOvr>
+    <a:masterClrMapping/>
+  </p:clrMapOvr>
+</p:sld>
+</file>
+
+<file path=ppt/slides/slide52.xml><?xml version="1.0" encoding="utf-8"?>
+<p:sld xmlns:a="http://schemas.openxmlformats.org/drawingml/2006/main" xmlns:p="http://schemas.openxmlformats.org/presentationml/2006/main" xmlns:r="http://schemas.openxmlformats.org/officeDocument/2006/relationships">
+  <p:cSld>
+    <p:bg>
+      <p:bgPr>
+        <a:solidFill>
+          <a:srgbClr val="0A1A1A"/>
+        </a:solidFill>
+        <a:effectLst/>
+      </p:bgPr>
+    </p:bg>
+    <p:spTree>
+      <p:nvGrpSpPr>
+        <p:cNvPr id="1" name=""/>
+        <p:cNvGrpSpPr/>
+        <p:nvPr/>
+      </p:nvGrpSpPr>
+      <p:grpSpPr/>
+      <p:sp>
+        <p:nvSpPr>
+          <p:cNvPr id="2" name="TextBox 1"/>
+          <p:cNvSpPr txBox="1"/>
+          <p:nvPr/>
+        </p:nvSpPr>
+        <p:spPr>
+          <a:xfrm>
+            <a:off x="914400" y="2011680"/>
+            <a:ext cx="10332720" cy="914400"/>
+          </a:xfrm>
+          <a:prstGeom prst="rect">
+            <a:avLst/>
+          </a:prstGeom>
+          <a:noFill/>
+        </p:spPr>
+        <p:txBody>
+          <a:bodyPr wrap="square" anchor="t">
+            <a:spAutoFit/>
+          </a:bodyPr>
+          <a:lstStyle/>
+          <a:p>
+            <a:pPr algn="ctr">
+              <a:lnSpc>
+                <a:spcPct val="115000"/>
+              </a:lnSpc>
+            </a:pPr>
+            <a:r>
+              <a:rPr sz="4400" b="1">
+                <a:solidFill>
+                  <a:srgbClr val="F8FAFC"/>
+                </a:solidFill>
+                <a:latin typeface="Microsoft YaHei"/>
+              </a:rPr>
+              <a:t>谢谢</a:t>
+            </a:r>
+          </a:p>
+        </p:txBody>
+      </p:sp>
+      <p:sp>
+        <p:nvSpPr>
+          <p:cNvPr id="3" name="TextBox 2"/>
+          <p:cNvSpPr txBox="1"/>
+          <p:nvPr/>
+        </p:nvSpPr>
+        <p:spPr>
+          <a:xfrm>
+            <a:off x="914400" y="3291840"/>
+            <a:ext cx="10332720" cy="731520"/>
+          </a:xfrm>
+          <a:prstGeom prst="rect">
+            <a:avLst/>
+          </a:prstGeom>
+          <a:noFill/>
+        </p:spPr>
+        <p:txBody>
+          <a:bodyPr wrap="square" anchor="t">
+            <a:spAutoFit/>
+          </a:bodyPr>
+          <a:lstStyle/>
+          <a:p>
+            <a:pPr algn="ctr">
+              <a:lnSpc>
+                <a:spcPct val="115000"/>
+              </a:lnSpc>
+            </a:pPr>
+            <a:r>
+              <a:rPr sz="2400" b="0">
+                <a:solidFill>
+                  <a:srgbClr val="5EEAD4"/>
+                </a:solidFill>
+                <a:latin typeface="Microsoft YaHei"/>
+              </a:rPr>
+              <a:t>靳岩岩</a:t>
+            </a:r>
+          </a:p>
+        </p:txBody>
+      </p:sp>
+      <p:sp>
+        <p:nvSpPr>
+          <p:cNvPr id="4" name="TextBox 3"/>
+          <p:cNvSpPr txBox="1"/>
+          <p:nvPr/>
+        </p:nvSpPr>
+        <p:spPr>
+          <a:xfrm>
+            <a:off x="914400" y="4023360"/>
+            <a:ext cx="10332720" cy="731520"/>
+          </a:xfrm>
+          <a:prstGeom prst="rect">
+            <a:avLst/>
+          </a:prstGeom>
+          <a:noFill/>
+        </p:spPr>
+        <p:txBody>
+          <a:bodyPr wrap="square" anchor="t">
+            <a:spAutoFit/>
+          </a:bodyPr>
+          <a:lstStyle/>
+          <a:p>
+            <a:pPr algn="ctr">
+              <a:lnSpc>
+                <a:spcPct val="115000"/>
+              </a:lnSpc>
+            </a:pPr>
+            <a:r>
+              <a:rPr sz="2000" b="0">
+                <a:solidFill>
+                  <a:srgbClr val="94A3B8"/>
+                </a:solidFill>
+                <a:latin typeface="Microsoft YaHei"/>
+              </a:rPr>
+              <a:t>同名公众号</a:t>
             </a:r>
           </a:p>
         </p:txBody>

--- a/wechat/curriculum/智能通识课.pptx
+++ b/wechat/curriculum/智能通识课.pptx
@@ -55,8 +55,6 @@
     <p:sldId id="303" r:id="rId55"/>
     <p:sldId id="304" r:id="rId56"/>
     <p:sldId id="305" r:id="rId57"/>
-    <p:sldId id="306" r:id="rId58"/>
-    <p:sldId id="307" r:id="rId59"/>
   </p:sldIdLst>
   <p:sldSz cx="12191695" cy="6858000" type="screen4x3"/>
   <p:notesSz cx="6858000" cy="9144000"/>
@@ -2698,12 +2696,17 @@
           <a:lstStyle/>
           <a:p>
             <a:r>
-              <a:t>⚠️ 三个版本别混：OSWorld 原版 / OSWorld-Verified（现在的通用口径）/ OSWorld 2.0（另一套协议）。</a:t>
-            </a:r>
-          </a:p>
-          <a:p>
-            <a:r>
-              <a:t>86% 是 Verified，72.6% 是 2.0。</a:t>
+              <a:t>⚠️ 这是两套评测，不是同一套题调难度：86% 出自 OSWorld-Verified（现在的通用口径），72.6% 出自 OSWorld 2.0（另一套协议，108 题，每题平均 250 多步）。台上要说「两套评测」，别说成「同一套题换了难度」。</a:t>
+            </a:r>
+          </a:p>
+          <a:p>
+            <a:r>
+              <a:t>人类基线约 72.4% 来自原版 OSWorld。</a:t>
+            </a:r>
+          </a:p>
+          <a:p>
+            <a:r>
+              <a:t>要点：在常规任务上它表面已经超过人类，但任务一长就掉——**长流程是它的软肋**，这跟第二线那个 DLSS 故事是同一件事。</a:t>
             </a:r>
           </a:p>
         </p:txBody>
@@ -2773,12 +2776,32 @@
           <a:lstStyle/>
           <a:p>
             <a:r>
-              <a:t>少一次听上去微不足道，但这是全世界数学家找了半个世纪没找到的那一次。</a:t>
-            </a:r>
-          </a:p>
-          <a:p>
-            <a:r>
-              <a:t>⚠️ 说准：是复数矩阵这个特定设定，而且是「找到一个更好的构造」不是「证明了一个定理」。矩阵乘法的指数仍是开放问题。</a:t>
+              <a:t>这就是莫拉维克悖论的当代版本，别的都不用记。</a:t>
+            </a:r>
+          </a:p>
+          <a:p>
+            <a:r>
+              <a:t>具体是什么：AlphaEvolve 找到用 48 次乘法算两个 4×4 复数矩阵的方法，Strassen 1969 年的算法是 49 次。少一次，但那是全世界数学家找了半个世纪没找到的一次。</a:t>
+            </a:r>
+          </a:p>
+          <a:p>
+            <a:r>
+              <a:t>⚠️ 有人问细节再说数字，不主动报——老师对 48 和 49 没感觉，对「56 年」有感觉。</a:t>
+            </a:r>
+          </a:p>
+          <a:p>
+            <a:r>
+              <a:t>⚠️ 要说准：限定在复数矩阵这个设定，而且是「找到一个更好的构造」不是「证明了定理」。</a:t>
+            </a:r>
+          </a:p>
+          <a:p>
+            <a:r>
+              <a:t>⚠️ 成功率：那 50 多个问题里约 75% 只是复现已知最好解，两成才是改进。</a:t>
+            </a:r>
+          </a:p>
+          <a:p>
+            <a:r>
+              <a:t>陶哲轩指出它可靠的原因：LLM 只负责提出变异，验证器是人写的代码不会幻觉——AI 负责猜，人写的程序负责判。</a:t>
             </a:r>
           </a:p>
         </p:txBody>
@@ -2848,17 +2871,7 @@
           <a:lstStyle/>
           <a:p>
             <a:r>
-              <a:t>这就是莫拉维克悖论的当代版本。</a:t>
-            </a:r>
-          </a:p>
-          <a:p>
-            <a:r>
-              <a:t>⚠️ 顺带说成功率：那 50 多个问题里约 75% 只是复现了已知最好解，20% 才是真正改进。八成情况它做的是追平，不是超越。</a:t>
-            </a:r>
-          </a:p>
-          <a:p>
-            <a:r>
-              <a:t>⚠️ 陶哲轩还指出 AlphaEvolve 可靠的原因：LLM 只负责提出变异，验证器是人写的代码，不会产生幻觉。AI 负责猜，人写的程序负责判。</a:t>
+              <a:t>老师听到这里会放心：AI 在屏幕里很强，出屏幕很弱。</a:t>
             </a:r>
           </a:p>
         </p:txBody>
@@ -2928,17 +2941,12 @@
           <a:lstStyle/>
           <a:p>
             <a:r>
-              <a:t>OpenAI 研究员随后删帖道歉。回复「This is embarrassing」的是 DeepMind 的 Demis Hassabis。</a:t>
-            </a:r>
-          </a:p>
-          <a:p>
-            <a:r>
-              <a:t>给老师的一句：看到「AI 解决了 X」的标题，先问一句——**它是证明了，还是搜到了？**</a:t>
-            </a:r>
-          </a:p>
-          <a:p>
-            <a:r>
-              <a:t>时间紧可跳过这页。</a:t>
+              <a:t>老师日常备课，DeepSeek、豆包、Kimi 都够，不用追最新。</a:t>
+            </a:r>
+          </a:p>
+          <a:p>
+            <a:r>
+              <a:t>★ 看气氛：国产模型不防「AI 有想法」、防政治敏感词；美国模型反过来。不合适就跳。</a:t>
             </a:r>
           </a:p>
         </p:txBody>
@@ -3078,7 +3086,7 @@
           <a:lstStyle/>
           <a:p>
             <a:r>
-              <a:t>老师听到这里会放心：AI 在屏幕里很强，出屏幕很弱。</a:t>
+              <a:t>回到开场老师的那两三个回答，用讲过的机制各解释一句。</a:t>
             </a:r>
           </a:p>
         </p:txBody>
@@ -3104,151 +3112,6 @@
 </file>
 
 <file path=ppt/notesSlides/notesSlide41.xml><?xml version="1.0" encoding="utf-8"?>
-<p:notes xmlns:a="http://schemas.openxmlformats.org/drawingml/2006/main" xmlns:p="http://schemas.openxmlformats.org/presentationml/2006/main" xmlns:r="http://schemas.openxmlformats.org/officeDocument/2006/relationships">
-  <p:cSld>
-    <p:spTree>
-      <p:nvGrpSpPr>
-        <p:cNvPr id="1" name=""/>
-        <p:cNvGrpSpPr/>
-        <p:nvPr/>
-      </p:nvGrpSpPr>
-      <p:grpSpPr>
-        <a:xfrm>
-          <a:off x="0" y="0"/>
-          <a:ext cx="0" cy="0"/>
-          <a:chOff x="0" y="0"/>
-          <a:chExt cx="0" cy="0"/>
-        </a:xfrm>
-      </p:grpSpPr>
-      <p:sp>
-        <p:nvSpPr>
-          <p:cNvPr id="2" name="Slide Image Placeholder 1"/>
-          <p:cNvSpPr>
-            <a:spLocks noGrp="1"/>
-          </p:cNvSpPr>
-          <p:nvPr>
-            <p:ph type="sldImg" idx="2"/>
-          </p:nvPr>
-        </p:nvSpPr>
-        <p:spPr/>
-      </p:sp>
-      <p:sp>
-        <p:nvSpPr>
-          <p:cNvPr id="3" name="Notes Placeholder 2"/>
-          <p:cNvSpPr>
-            <a:spLocks noGrp="1"/>
-          </p:cNvSpPr>
-          <p:nvPr>
-            <p:ph type="body" idx="3" sz="quarter"/>
-          </p:nvPr>
-        </p:nvSpPr>
-        <p:spPr/>
-        <p:txBody>
-          <a:bodyPr/>
-          <a:lstStyle/>
-          <a:p>
-            <a:r>
-              <a:t>老师日常备课，DeepSeek、豆包、Kimi 都够，不用追最新。</a:t>
-            </a:r>
-          </a:p>
-          <a:p>
-            <a:r>
-              <a:t>★ 看气氛：国产模型不防「AI 有想法」、防政治敏感词；美国模型反过来。不合适就跳。</a:t>
-            </a:r>
-          </a:p>
-        </p:txBody>
-      </p:sp>
-      <p:sp>
-        <p:nvSpPr>
-          <p:cNvPr id="4" name="Slide Number Placeholder 3"/>
-          <p:cNvSpPr>
-            <a:spLocks noGrp="1"/>
-          </p:cNvSpPr>
-          <p:nvPr>
-            <p:ph type="sldNum" idx="5" sz="quarter"/>
-          </p:nvPr>
-        </p:nvSpPr>
-        <p:spPr/>
-      </p:sp>
-    </p:spTree>
-  </p:cSld>
-  <p:clrMapOvr>
-    <a:masterClrMapping/>
-  </p:clrMapOvr>
-</p:notes>
-</file>
-
-<file path=ppt/notesSlides/notesSlide42.xml><?xml version="1.0" encoding="utf-8"?>
-<p:notes xmlns:a="http://schemas.openxmlformats.org/drawingml/2006/main" xmlns:p="http://schemas.openxmlformats.org/presentationml/2006/main" xmlns:r="http://schemas.openxmlformats.org/officeDocument/2006/relationships">
-  <p:cSld>
-    <p:spTree>
-      <p:nvGrpSpPr>
-        <p:cNvPr id="1" name=""/>
-        <p:cNvGrpSpPr/>
-        <p:nvPr/>
-      </p:nvGrpSpPr>
-      <p:grpSpPr>
-        <a:xfrm>
-          <a:off x="0" y="0"/>
-          <a:ext cx="0" cy="0"/>
-          <a:chOff x="0" y="0"/>
-          <a:chExt cx="0" cy="0"/>
-        </a:xfrm>
-      </p:grpSpPr>
-      <p:sp>
-        <p:nvSpPr>
-          <p:cNvPr id="2" name="Slide Image Placeholder 1"/>
-          <p:cNvSpPr>
-            <a:spLocks noGrp="1"/>
-          </p:cNvSpPr>
-          <p:nvPr>
-            <p:ph type="sldImg" idx="2"/>
-          </p:nvPr>
-        </p:nvSpPr>
-        <p:spPr/>
-      </p:sp>
-      <p:sp>
-        <p:nvSpPr>
-          <p:cNvPr id="3" name="Notes Placeholder 2"/>
-          <p:cNvSpPr>
-            <a:spLocks noGrp="1"/>
-          </p:cNvSpPr>
-          <p:nvPr>
-            <p:ph type="body" idx="3" sz="quarter"/>
-          </p:nvPr>
-        </p:nvSpPr>
-        <p:spPr/>
-        <p:txBody>
-          <a:bodyPr/>
-          <a:lstStyle/>
-          <a:p>
-            <a:r>
-              <a:t>回到开场老师的那两三个回答，用讲过的机制各解释一句。</a:t>
-            </a:r>
-          </a:p>
-        </p:txBody>
-      </p:sp>
-      <p:sp>
-        <p:nvSpPr>
-          <p:cNvPr id="4" name="Slide Number Placeholder 3"/>
-          <p:cNvSpPr>
-            <a:spLocks noGrp="1"/>
-          </p:cNvSpPr>
-          <p:nvPr>
-            <p:ph type="sldNum" idx="5" sz="quarter"/>
-          </p:nvPr>
-        </p:nvSpPr>
-        <p:spPr/>
-      </p:sp>
-    </p:spTree>
-  </p:cSld>
-  <p:clrMapOvr>
-    <a:masterClrMapping/>
-  </p:clrMapOvr>
-</p:notes>
-</file>
-
-<file path=ppt/notesSlides/notesSlide43.xml><?xml version="1.0" encoding="utf-8"?>
 <p:notes xmlns:a="http://schemas.openxmlformats.org/drawingml/2006/main" xmlns:p="http://schemas.openxmlformats.org/presentationml/2006/main" xmlns:r="http://schemas.openxmlformats.org/officeDocument/2006/relationships">
   <p:cSld>
     <p:spTree>
@@ -6946,7 +6809,7 @@
         <p:spPr>
           <a:xfrm>
             <a:off x="777240" y="2148840"/>
-            <a:ext cx="3352800" cy="2514600"/>
+            <a:ext cx="3352800" cy="2286000"/>
           </a:xfrm>
           <a:prstGeom prst="roundRect">
             <a:avLst>
@@ -6993,8 +6856,8 @@
         </p:nvSpPr>
         <p:spPr>
           <a:xfrm>
-            <a:off x="868680" y="2532888"/>
-            <a:ext cx="3169919" cy="914400"/>
+            <a:off x="868680" y="2514600"/>
+            <a:ext cx="3169919" cy="960120"/>
           </a:xfrm>
           <a:prstGeom prst="rect">
             <a:avLst/>
@@ -7032,8 +6895,8 @@
         </p:nvSpPr>
         <p:spPr>
           <a:xfrm>
-            <a:off x="868680" y="3630168"/>
-            <a:ext cx="3169919" cy="868680"/>
+            <a:off x="868680" y="3520439"/>
+            <a:ext cx="3169919" cy="422910"/>
           </a:xfrm>
           <a:prstGeom prst="rect">
             <a:avLst/>
@@ -7072,7 +6935,7 @@
         <p:spPr>
           <a:xfrm>
             <a:off x="4404360" y="2148840"/>
-            <a:ext cx="3352800" cy="2514600"/>
+            <a:ext cx="3352800" cy="2286000"/>
           </a:xfrm>
           <a:prstGeom prst="roundRect">
             <a:avLst>
@@ -7119,8 +6982,8 @@
         </p:nvSpPr>
         <p:spPr>
           <a:xfrm>
-            <a:off x="4495799" y="2532888"/>
-            <a:ext cx="3169919" cy="914400"/>
+            <a:off x="4495799" y="2514600"/>
+            <a:ext cx="3169919" cy="960120"/>
           </a:xfrm>
           <a:prstGeom prst="rect">
             <a:avLst/>
@@ -7158,8 +7021,8 @@
         </p:nvSpPr>
         <p:spPr>
           <a:xfrm>
-            <a:off x="4495799" y="3630168"/>
-            <a:ext cx="3169919" cy="868680"/>
+            <a:off x="4495799" y="3520439"/>
+            <a:ext cx="3169919" cy="422910"/>
           </a:xfrm>
           <a:prstGeom prst="rect">
             <a:avLst/>
@@ -7198,7 +7061,7 @@
         <p:spPr>
           <a:xfrm>
             <a:off x="8031480" y="2148840"/>
-            <a:ext cx="3352800" cy="2514600"/>
+            <a:ext cx="3352800" cy="2286000"/>
           </a:xfrm>
           <a:prstGeom prst="roundRect">
             <a:avLst>
@@ -7245,8 +7108,8 @@
         </p:nvSpPr>
         <p:spPr>
           <a:xfrm>
-            <a:off x="8122920" y="2532888"/>
-            <a:ext cx="3169919" cy="914400"/>
+            <a:off x="8122920" y="2514600"/>
+            <a:ext cx="3169919" cy="960120"/>
           </a:xfrm>
           <a:prstGeom prst="rect">
             <a:avLst/>
@@ -7284,8 +7147,8 @@
         </p:nvSpPr>
         <p:spPr>
           <a:xfrm>
-            <a:off x="8122920" y="3630168"/>
-            <a:ext cx="3169919" cy="868680"/>
+            <a:off x="8122920" y="3520439"/>
+            <a:ext cx="3169919" cy="422910"/>
           </a:xfrm>
           <a:prstGeom prst="rect">
             <a:avLst/>
@@ -7323,7 +7186,7 @@
         </p:nvSpPr>
         <p:spPr>
           <a:xfrm>
-            <a:off x="777240" y="4983479"/>
+            <a:off x="777240" y="4709159"/>
             <a:ext cx="10607040" cy="914400"/>
           </a:xfrm>
           <a:prstGeom prst="rect">
@@ -7696,7 +7559,7 @@
         <p:spPr>
           <a:xfrm>
             <a:off x="777240" y="2148840"/>
-            <a:ext cx="3352800" cy="2514600"/>
+            <a:ext cx="3352800" cy="2286000"/>
           </a:xfrm>
           <a:prstGeom prst="roundRect">
             <a:avLst>
@@ -7743,8 +7606,8 @@
         </p:nvSpPr>
         <p:spPr>
           <a:xfrm>
-            <a:off x="868680" y="2532888"/>
-            <a:ext cx="3169919" cy="914400"/>
+            <a:off x="868680" y="2514600"/>
+            <a:ext cx="3169919" cy="960120"/>
           </a:xfrm>
           <a:prstGeom prst="rect">
             <a:avLst/>
@@ -7782,8 +7645,8 @@
         </p:nvSpPr>
         <p:spPr>
           <a:xfrm>
-            <a:off x="868680" y="3630168"/>
-            <a:ext cx="3169919" cy="868680"/>
+            <a:off x="868680" y="3520439"/>
+            <a:ext cx="3169919" cy="754380"/>
           </a:xfrm>
           <a:prstGeom prst="rect">
             <a:avLst/>
@@ -7838,7 +7701,7 @@
         <p:spPr>
           <a:xfrm>
             <a:off x="4404360" y="2148840"/>
-            <a:ext cx="3352800" cy="2514600"/>
+            <a:ext cx="3352800" cy="2286000"/>
           </a:xfrm>
           <a:prstGeom prst="roundRect">
             <a:avLst>
@@ -7885,8 +7748,8 @@
         </p:nvSpPr>
         <p:spPr>
           <a:xfrm>
-            <a:off x="4495799" y="2532888"/>
-            <a:ext cx="3169919" cy="914400"/>
+            <a:off x="4495799" y="2514600"/>
+            <a:ext cx="3169919" cy="960120"/>
           </a:xfrm>
           <a:prstGeom prst="rect">
             <a:avLst/>
@@ -7924,8 +7787,8 @@
         </p:nvSpPr>
         <p:spPr>
           <a:xfrm>
-            <a:off x="4495799" y="3630168"/>
-            <a:ext cx="3169919" cy="868680"/>
+            <a:off x="4495799" y="3520439"/>
+            <a:ext cx="3169919" cy="754380"/>
           </a:xfrm>
           <a:prstGeom prst="rect">
             <a:avLst/>
@@ -7980,7 +7843,7 @@
         <p:spPr>
           <a:xfrm>
             <a:off x="8031480" y="2148840"/>
-            <a:ext cx="3352800" cy="2514600"/>
+            <a:ext cx="3352800" cy="2286000"/>
           </a:xfrm>
           <a:prstGeom prst="roundRect">
             <a:avLst>
@@ -8027,8 +7890,8 @@
         </p:nvSpPr>
         <p:spPr>
           <a:xfrm>
-            <a:off x="8122920" y="2532888"/>
-            <a:ext cx="3169919" cy="914400"/>
+            <a:off x="8122920" y="2514600"/>
+            <a:ext cx="3169919" cy="960120"/>
           </a:xfrm>
           <a:prstGeom prst="rect">
             <a:avLst/>
@@ -8066,8 +7929,8 @@
         </p:nvSpPr>
         <p:spPr>
           <a:xfrm>
-            <a:off x="8122920" y="3630168"/>
-            <a:ext cx="3169919" cy="868680"/>
+            <a:off x="8122920" y="3520439"/>
+            <a:ext cx="3169919" cy="754380"/>
           </a:xfrm>
           <a:prstGeom prst="rect">
             <a:avLst/>
@@ -8121,7 +7984,7 @@
         </p:nvSpPr>
         <p:spPr>
           <a:xfrm>
-            <a:off x="777240" y="4983479"/>
+            <a:off x="777240" y="4709159"/>
             <a:ext cx="10607040" cy="914400"/>
           </a:xfrm>
           <a:prstGeom prst="rect">
@@ -8510,7 +8373,7 @@
         <p:spPr>
           <a:xfrm>
             <a:off x="777240" y="2148840"/>
-            <a:ext cx="5166359" cy="2514600"/>
+            <a:ext cx="5166359" cy="2286000"/>
           </a:xfrm>
           <a:prstGeom prst="roundRect">
             <a:avLst>
@@ -8557,8 +8420,8 @@
         </p:nvSpPr>
         <p:spPr>
           <a:xfrm>
-            <a:off x="868680" y="2532888"/>
-            <a:ext cx="4983479" cy="914400"/>
+            <a:off x="868680" y="2514600"/>
+            <a:ext cx="4983479" cy="960120"/>
           </a:xfrm>
           <a:prstGeom prst="rect">
             <a:avLst/>
@@ -8596,8 +8459,8 @@
         </p:nvSpPr>
         <p:spPr>
           <a:xfrm>
-            <a:off x="868680" y="3630168"/>
-            <a:ext cx="4983479" cy="868680"/>
+            <a:off x="868680" y="3520439"/>
+            <a:ext cx="4983479" cy="754380"/>
           </a:xfrm>
           <a:prstGeom prst="rect">
             <a:avLst/>
@@ -8652,7 +8515,7 @@
         <p:spPr>
           <a:xfrm>
             <a:off x="6217919" y="2148840"/>
-            <a:ext cx="5166359" cy="2514600"/>
+            <a:ext cx="5166359" cy="2286000"/>
           </a:xfrm>
           <a:prstGeom prst="roundRect">
             <a:avLst>
@@ -8699,8 +8562,8 @@
         </p:nvSpPr>
         <p:spPr>
           <a:xfrm>
-            <a:off x="6309359" y="2532888"/>
-            <a:ext cx="4983479" cy="914400"/>
+            <a:off x="6309359" y="2514600"/>
+            <a:ext cx="4983479" cy="960120"/>
           </a:xfrm>
           <a:prstGeom prst="rect">
             <a:avLst/>
@@ -8738,8 +8601,8 @@
         </p:nvSpPr>
         <p:spPr>
           <a:xfrm>
-            <a:off x="6309359" y="3630168"/>
-            <a:ext cx="4983479" cy="868680"/>
+            <a:off x="6309359" y="3520439"/>
+            <a:ext cx="4983479" cy="754380"/>
           </a:xfrm>
           <a:prstGeom prst="rect">
             <a:avLst/>
@@ -8793,7 +8656,7 @@
         </p:nvSpPr>
         <p:spPr>
           <a:xfrm>
-            <a:off x="777240" y="4983479"/>
+            <a:off x="777240" y="4709159"/>
             <a:ext cx="10607040" cy="914400"/>
           </a:xfrm>
           <a:prstGeom prst="rect">
@@ -17544,7 +17407,7 @@
                 </a:solidFill>
                 <a:latin typeface="Microsoft YaHei"/>
               </a:rPr>
-              <a:t>3.2　换个难度就掉十三个点</a:t>
+              <a:t>3.2　同样是操作电脑，题目复杂一个量级，成绩掉十三个点</a:t>
             </a:r>
           </a:p>
         </p:txBody>
@@ -17602,7 +17465,7 @@
         <p:spPr>
           <a:xfrm>
             <a:off x="777240" y="2148840"/>
-            <a:ext cx="5166359" cy="2514600"/>
+            <a:ext cx="5166359" cy="2612898"/>
           </a:xfrm>
           <a:prstGeom prst="roundRect">
             <a:avLst>
@@ -17649,8 +17512,8 @@
         </p:nvSpPr>
         <p:spPr>
           <a:xfrm>
-            <a:off x="868680" y="2532888"/>
-            <a:ext cx="4983479" cy="914400"/>
+            <a:off x="868680" y="2514600"/>
+            <a:ext cx="4983479" cy="960120"/>
           </a:xfrm>
           <a:prstGeom prst="rect">
             <a:avLst/>
@@ -17688,8 +17551,8 @@
         </p:nvSpPr>
         <p:spPr>
           <a:xfrm>
-            <a:off x="868680" y="3630168"/>
-            <a:ext cx="4983479" cy="868680"/>
+            <a:off x="868680" y="3520439"/>
+            <a:ext cx="4983479" cy="1085850"/>
           </a:xfrm>
           <a:prstGeom prst="rect">
             <a:avLst/>
@@ -17714,7 +17577,7 @@
                 </a:solidFill>
                 <a:latin typeface="Microsoft YaHei"/>
               </a:rPr>
-              <a:t>修正版</a:t>
+              <a:t>常规任务</a:t>
             </a:r>
           </a:p>
           <a:p>
@@ -17730,7 +17593,23 @@
                 </a:solidFill>
                 <a:latin typeface="Microsoft YaHei"/>
               </a:rPr>
-              <a:t>人类基线约 72%</a:t>
+              <a:t>每题不到三十步</a:t>
+            </a:r>
+          </a:p>
+          <a:p>
+            <a:pPr algn="ctr">
+              <a:lnSpc>
+                <a:spcPct val="115000"/>
+              </a:lnSpc>
+            </a:pPr>
+            <a:r>
+              <a:rPr sz="1800" b="0">
+                <a:solidFill>
+                  <a:srgbClr val="94A3B8"/>
+                </a:solidFill>
+                <a:latin typeface="Microsoft YaHei"/>
+              </a:rPr>
+              <a:t>（人类约 72%）</a:t>
             </a:r>
           </a:p>
         </p:txBody>
@@ -17744,7 +17623,7 @@
         <p:spPr>
           <a:xfrm>
             <a:off x="6217919" y="2148840"/>
-            <a:ext cx="5166359" cy="2514600"/>
+            <a:ext cx="5166359" cy="2612898"/>
           </a:xfrm>
           <a:prstGeom prst="roundRect">
             <a:avLst>
@@ -17791,8 +17670,8 @@
         </p:nvSpPr>
         <p:spPr>
           <a:xfrm>
-            <a:off x="6309359" y="2532888"/>
-            <a:ext cx="4983479" cy="914400"/>
+            <a:off x="6309359" y="2514600"/>
+            <a:ext cx="4983479" cy="960120"/>
           </a:xfrm>
           <a:prstGeom prst="rect">
             <a:avLst/>
@@ -17830,8 +17709,8 @@
         </p:nvSpPr>
         <p:spPr>
           <a:xfrm>
-            <a:off x="6309359" y="3630168"/>
-            <a:ext cx="4983479" cy="868680"/>
+            <a:off x="6309359" y="3520439"/>
+            <a:ext cx="4983479" cy="1085850"/>
           </a:xfrm>
           <a:prstGeom prst="rect">
             <a:avLst/>
@@ -17856,7 +17735,7 @@
                 </a:solidFill>
                 <a:latin typeface="Microsoft YaHei"/>
               </a:rPr>
-              <a:t>更难的版本</a:t>
+              <a:t>复杂任务</a:t>
             </a:r>
           </a:p>
           <a:p>
@@ -17885,7 +17764,7 @@
         </p:nvSpPr>
         <p:spPr>
           <a:xfrm>
-            <a:off x="777240" y="4983479"/>
+            <a:off x="777240" y="5036057"/>
             <a:ext cx="10607040" cy="914400"/>
           </a:xfrm>
           <a:prstGeom prst="rect">
@@ -17911,7 +17790,7 @@
                 </a:solidFill>
                 <a:latin typeface="Microsoft YaHei"/>
               </a:rPr>
-              <a:t>说明它还没真学会，是在题型里熟练</a:t>
+              <a:t>不是它变笨了，是长流程里每一步的小误差会累积</a:t>
             </a:r>
           </a:p>
         </p:txBody>
@@ -17976,7 +17855,7 @@
                 </a:solidFill>
                 <a:latin typeface="Microsoft YaHei"/>
               </a:rPr>
-              <a:t>同一年，同一批模型，另一件事</a:t>
+              <a:t>同一批模型，同一年，两件事</a:t>
             </a:r>
           </a:p>
         </p:txBody>
@@ -18027,250 +17906,27 @@
       </p:sp>
       <p:sp>
         <p:nvSpPr>
-          <p:cNvPr id="4" name="TextBox 3"/>
-          <p:cNvSpPr txBox="1"/>
-          <p:nvPr/>
-        </p:nvSpPr>
-        <p:spPr>
-          <a:xfrm>
-            <a:off x="914400" y="1828800"/>
-            <a:ext cx="10332720" cy="914400"/>
-          </a:xfrm>
-          <a:prstGeom prst="rect">
-            <a:avLst/>
-          </a:prstGeom>
-          <a:noFill/>
-        </p:spPr>
-        <p:txBody>
-          <a:bodyPr wrap="square" anchor="t">
-            <a:spAutoFit/>
-          </a:bodyPr>
-          <a:lstStyle/>
-          <a:p>
-            <a:pPr algn="l">
-              <a:lnSpc>
-                <a:spcPct val="115000"/>
-              </a:lnSpc>
-            </a:pPr>
-            <a:r>
-              <a:rPr sz="2200" b="0">
-                <a:solidFill>
-                  <a:srgbClr val="F8FAFC"/>
-                </a:solidFill>
-                <a:latin typeface="Microsoft YaHei"/>
-              </a:rPr>
-              <a:t>2025 年 5 月，DeepMind 的 AlphaEvolve 找到一种算法</a:t>
-            </a:r>
-          </a:p>
-        </p:txBody>
-      </p:sp>
-      <p:sp>
-        <p:nvSpPr>
-          <p:cNvPr id="5" name="TextBox 4"/>
-          <p:cNvSpPr txBox="1"/>
-          <p:nvPr/>
-        </p:nvSpPr>
-        <p:spPr>
-          <a:xfrm>
-            <a:off x="914400" y="2697480"/>
-            <a:ext cx="10332720" cy="914400"/>
-          </a:xfrm>
-          <a:prstGeom prst="rect">
-            <a:avLst/>
-          </a:prstGeom>
-          <a:noFill/>
-        </p:spPr>
-        <p:txBody>
-          <a:bodyPr wrap="square" anchor="t">
-            <a:spAutoFit/>
-          </a:bodyPr>
-          <a:lstStyle/>
-          <a:p>
-            <a:pPr algn="l">
-              <a:lnSpc>
-                <a:spcPct val="115000"/>
-              </a:lnSpc>
-            </a:pPr>
-            <a:r>
-              <a:rPr sz="2200" b="0">
-                <a:solidFill>
-                  <a:srgbClr val="F8FAFC"/>
-                </a:solidFill>
-                <a:latin typeface="Microsoft YaHei"/>
-              </a:rPr>
-              <a:t>用 </a:t>
-            </a:r>
-            <a:r>
-              <a:rPr sz="2200" b="1">
-                <a:solidFill>
-                  <a:srgbClr val="F8FAFC"/>
-                </a:solidFill>
-                <a:latin typeface="Microsoft YaHei"/>
-              </a:rPr>
-              <a:t>48 次乘法</a:t>
-            </a:r>
-            <a:r>
-              <a:rPr sz="2200" b="0">
-                <a:solidFill>
-                  <a:srgbClr val="F8FAFC"/>
-                </a:solidFill>
-                <a:latin typeface="Microsoft YaHei"/>
-              </a:rPr>
-              <a:t>算两个 4×4 复数矩阵的乘积</a:t>
-            </a:r>
-          </a:p>
-        </p:txBody>
-      </p:sp>
-      <p:sp>
-        <p:nvSpPr>
-          <p:cNvPr id="6" name="TextBox 5"/>
-          <p:cNvSpPr txBox="1"/>
-          <p:nvPr/>
-        </p:nvSpPr>
-        <p:spPr>
-          <a:xfrm>
-            <a:off x="914400" y="3566160"/>
-            <a:ext cx="10332720" cy="914400"/>
-          </a:xfrm>
-          <a:prstGeom prst="rect">
-            <a:avLst/>
-          </a:prstGeom>
-          <a:noFill/>
-        </p:spPr>
-        <p:txBody>
-          <a:bodyPr wrap="square" anchor="t">
-            <a:spAutoFit/>
-          </a:bodyPr>
-          <a:lstStyle/>
-          <a:p>
-            <a:pPr algn="l">
-              <a:lnSpc>
-                <a:spcPct val="115000"/>
-              </a:lnSpc>
-            </a:pPr>
-            <a:r>
-              <a:rPr sz="2200" b="0">
-                <a:solidFill>
-                  <a:srgbClr val="F8FAFC"/>
-                </a:solidFill>
-                <a:latin typeface="Microsoft YaHei"/>
-              </a:rPr>
-              <a:t>比 1969 年 Strassen 的 49 次</a:t>
-            </a:r>
-            <a:r>
-              <a:rPr sz="2200" b="1">
-                <a:solidFill>
-                  <a:srgbClr val="F8FAFC"/>
-                </a:solidFill>
-                <a:latin typeface="Microsoft YaHei"/>
-              </a:rPr>
-              <a:t>少一次</a:t>
-            </a:r>
-            <a:r>
-              <a:rPr sz="2200" b="0">
-                <a:solidFill>
-                  <a:srgbClr val="F8FAFC"/>
-                </a:solidFill>
-                <a:latin typeface="Microsoft YaHei"/>
-              </a:rPr>
-              <a:t>——那个纪录保持了 </a:t>
-            </a:r>
-            <a:r>
-              <a:rPr sz="2200" b="1">
-                <a:solidFill>
-                  <a:srgbClr val="F8FAFC"/>
-                </a:solidFill>
-                <a:latin typeface="Microsoft YaHei"/>
-              </a:rPr>
-              <a:t>56 年</a:t>
-            </a:r>
-          </a:p>
-        </p:txBody>
-      </p:sp>
-    </p:spTree>
-  </p:cSld>
-  <p:clrMapOvr>
-    <a:masterClrMapping/>
-  </p:clrMapOvr>
-</p:sld>
-</file>
-
-<file path=ppt/slides/slide45.xml><?xml version="1.0" encoding="utf-8"?>
-<p:sld xmlns:a="http://schemas.openxmlformats.org/drawingml/2006/main" xmlns:p="http://schemas.openxmlformats.org/presentationml/2006/main" xmlns:r="http://schemas.openxmlformats.org/officeDocument/2006/relationships">
-  <p:cSld>
-    <p:bg>
-      <p:bgPr>
-        <a:solidFill>
-          <a:srgbClr val="0E1428"/>
-        </a:solidFill>
-        <a:effectLst/>
-      </p:bgPr>
-    </p:bg>
-    <p:spTree>
-      <p:nvGrpSpPr>
-        <p:cNvPr id="1" name=""/>
-        <p:cNvGrpSpPr/>
-        <p:nvPr/>
-      </p:nvGrpSpPr>
-      <p:grpSpPr/>
-      <p:sp>
-        <p:nvSpPr>
-          <p:cNvPr id="2" name="TextBox 1"/>
-          <p:cNvSpPr txBox="1"/>
-          <p:nvPr/>
-        </p:nvSpPr>
-        <p:spPr>
-          <a:xfrm>
-            <a:off x="777240" y="457200"/>
-            <a:ext cx="10607040" cy="868680"/>
-          </a:xfrm>
-          <a:prstGeom prst="rect">
-            <a:avLst/>
-          </a:prstGeom>
-          <a:noFill/>
-        </p:spPr>
-        <p:txBody>
-          <a:bodyPr wrap="square" anchor="t">
-            <a:spAutoFit/>
-          </a:bodyPr>
-          <a:lstStyle/>
-          <a:p>
-            <a:pPr algn="l">
-              <a:lnSpc>
-                <a:spcPct val="115000"/>
-              </a:lnSpc>
-            </a:pPr>
-            <a:r>
-              <a:rPr sz="3200" b="1">
-                <a:solidFill>
-                  <a:srgbClr val="F8FAFC"/>
-                </a:solidFill>
-                <a:latin typeface="Microsoft YaHei"/>
-              </a:rPr>
-              <a:t>这不是矛盾，是这一代 AI 的真实形状</a:t>
-            </a:r>
-          </a:p>
-        </p:txBody>
-      </p:sp>
-      <p:sp>
-        <p:nvSpPr>
-          <p:cNvPr id="3" name="Rectangle 2"/>
+          <p:cNvPr id="4" name="Rounded Rectangle 3"/>
           <p:cNvSpPr/>
           <p:nvPr/>
         </p:nvSpPr>
         <p:spPr>
           <a:xfrm>
-            <a:off x="0" y="1444752"/>
-            <a:ext cx="12191695" cy="27432"/>
-          </a:xfrm>
-          <a:prstGeom prst="rect">
-            <a:avLst/>
+            <a:off x="777240" y="1783080"/>
+            <a:ext cx="5120640" cy="3566159"/>
+          </a:xfrm>
+          <a:prstGeom prst="roundRect">
+            <a:avLst>
+              <a:gd name="adj" fmla="val 6000"/>
+            </a:avLst>
           </a:prstGeom>
           <a:solidFill>
-            <a:srgbClr val="F59E0B"/>
+            <a:srgbClr val="162038"/>
           </a:solidFill>
-          <a:ln>
-            <a:noFill/>
+          <a:ln w="19050">
+            <a:solidFill>
+              <a:srgbClr val="A3E635"/>
+            </a:solidFill>
           </a:ln>
           <a:effectLst/>
         </p:spPr>
@@ -18298,13 +17954,346 @@
       </p:sp>
       <p:sp>
         <p:nvSpPr>
-          <p:cNvPr id="4" name="Rounded Rectangle 3"/>
+          <p:cNvPr id="5" name="TextBox 4"/>
+          <p:cNvSpPr txBox="1"/>
+          <p:nvPr/>
+        </p:nvSpPr>
+        <p:spPr>
+          <a:xfrm>
+            <a:off x="1051560" y="1947672"/>
+            <a:ext cx="4572000" cy="457200"/>
+          </a:xfrm>
+          <a:prstGeom prst="rect">
+            <a:avLst/>
+          </a:prstGeom>
+          <a:noFill/>
+        </p:spPr>
+        <p:txBody>
+          <a:bodyPr wrap="square" anchor="t">
+            <a:spAutoFit/>
+          </a:bodyPr>
+          <a:lstStyle/>
+          <a:p>
+            <a:pPr algn="ctr">
+              <a:lnSpc>
+                <a:spcPct val="115000"/>
+              </a:lnSpc>
+            </a:pPr>
+            <a:r>
+              <a:rPr sz="2100" b="1">
+                <a:solidFill>
+                  <a:srgbClr val="A3E635"/>
+                </a:solidFill>
+                <a:latin typeface="Microsoft YaHei"/>
+              </a:rPr>
+              <a:t>数学家找了 56 年的一个改进</a:t>
+            </a:r>
+          </a:p>
+        </p:txBody>
+      </p:sp>
+      <p:sp>
+        <p:nvSpPr>
+          <p:cNvPr id="6" name="TextBox 5"/>
+          <p:cNvSpPr txBox="1"/>
+          <p:nvPr/>
+        </p:nvSpPr>
+        <p:spPr>
+          <a:xfrm>
+            <a:off x="1051560" y="2560320"/>
+            <a:ext cx="4572000" cy="316610"/>
+          </a:xfrm>
+          <a:prstGeom prst="rect">
+            <a:avLst/>
+          </a:prstGeom>
+          <a:noFill/>
+        </p:spPr>
+        <p:txBody>
+          <a:bodyPr wrap="square" anchor="t">
+            <a:spAutoFit/>
+          </a:bodyPr>
+          <a:lstStyle/>
+          <a:p>
+            <a:pPr algn="l">
+              <a:lnSpc>
+                <a:spcPct val="115000"/>
+              </a:lnSpc>
+            </a:pPr>
+            <a:r>
+              <a:rPr sz="1400" b="0">
+                <a:solidFill>
+                  <a:srgbClr val="F8FAFC"/>
+                </a:solidFill>
+                <a:latin typeface="Microsoft YaHei"/>
+              </a:rPr>
+              <a:t>1969 年有人算出一种</a:t>
+            </a:r>
+          </a:p>
+        </p:txBody>
+      </p:sp>
+      <p:sp>
+        <p:nvSpPr>
+          <p:cNvPr id="7" name="TextBox 6"/>
+          <p:cNvSpPr txBox="1"/>
+          <p:nvPr/>
+        </p:nvSpPr>
+        <p:spPr>
+          <a:xfrm>
+            <a:off x="1051560" y="2876931"/>
+            <a:ext cx="4572000" cy="316610"/>
+          </a:xfrm>
+          <a:prstGeom prst="rect">
+            <a:avLst/>
+          </a:prstGeom>
+          <a:noFill/>
+        </p:spPr>
+        <p:txBody>
+          <a:bodyPr wrap="square" anchor="t">
+            <a:spAutoFit/>
+          </a:bodyPr>
+          <a:lstStyle/>
+          <a:p>
+            <a:pPr algn="l">
+              <a:lnSpc>
+                <a:spcPct val="115000"/>
+              </a:lnSpc>
+            </a:pPr>
+            <a:r>
+              <a:rPr sz="1400" b="0">
+                <a:solidFill>
+                  <a:srgbClr val="F8FAFC"/>
+                </a:solidFill>
+                <a:latin typeface="Microsoft YaHei"/>
+              </a:rPr>
+              <a:t>更快的矩阵乘法，此后没人超过</a:t>
+            </a:r>
+          </a:p>
+        </p:txBody>
+      </p:sp>
+      <p:sp>
+        <p:nvSpPr>
+          <p:cNvPr id="8" name="TextBox 7"/>
+          <p:cNvSpPr txBox="1"/>
+          <p:nvPr/>
+        </p:nvSpPr>
+        <p:spPr>
+          <a:xfrm>
+            <a:off x="1051560" y="3193541"/>
+            <a:ext cx="4572000" cy="316610"/>
+          </a:xfrm>
+          <a:prstGeom prst="rect">
+            <a:avLst/>
+          </a:prstGeom>
+          <a:noFill/>
+        </p:spPr>
+        <p:txBody>
+          <a:bodyPr wrap="square" anchor="t">
+            <a:spAutoFit/>
+          </a:bodyPr>
+          <a:lstStyle/>
+          <a:p>
+            <a:pPr algn="l">
+              <a:lnSpc>
+                <a:spcPct val="115000"/>
+              </a:lnSpc>
+            </a:pPr>
+          </a:p>
+        </p:txBody>
+      </p:sp>
+      <p:sp>
+        <p:nvSpPr>
+          <p:cNvPr id="9" name="TextBox 8"/>
+          <p:cNvSpPr txBox="1"/>
+          <p:nvPr/>
+        </p:nvSpPr>
+        <p:spPr>
+          <a:xfrm>
+            <a:off x="1051560" y="3510152"/>
+            <a:ext cx="4572000" cy="316610"/>
+          </a:xfrm>
+          <a:prstGeom prst="rect">
+            <a:avLst/>
+          </a:prstGeom>
+          <a:noFill/>
+        </p:spPr>
+        <p:txBody>
+          <a:bodyPr wrap="square" anchor="t">
+            <a:spAutoFit/>
+          </a:bodyPr>
+          <a:lstStyle/>
+          <a:p>
+            <a:pPr algn="l">
+              <a:lnSpc>
+                <a:spcPct val="115000"/>
+              </a:lnSpc>
+            </a:pPr>
+            <a:r>
+              <a:rPr sz="1400" b="0">
+                <a:solidFill>
+                  <a:srgbClr val="F8FAFC"/>
+                </a:solidFill>
+                <a:latin typeface="Microsoft YaHei"/>
+              </a:rPr>
+              <a:t>2025 年 5 月，谷歌的 AI</a:t>
+            </a:r>
+          </a:p>
+        </p:txBody>
+      </p:sp>
+      <p:sp>
+        <p:nvSpPr>
+          <p:cNvPr id="10" name="TextBox 9"/>
+          <p:cNvSpPr txBox="1"/>
+          <p:nvPr/>
+        </p:nvSpPr>
+        <p:spPr>
+          <a:xfrm>
+            <a:off x="1051560" y="3826763"/>
+            <a:ext cx="4572000" cy="316610"/>
+          </a:xfrm>
+          <a:prstGeom prst="rect">
+            <a:avLst/>
+          </a:prstGeom>
+          <a:noFill/>
+        </p:spPr>
+        <p:txBody>
+          <a:bodyPr wrap="square" anchor="t">
+            <a:spAutoFit/>
+          </a:bodyPr>
+          <a:lstStyle/>
+          <a:p>
+            <a:pPr algn="l">
+              <a:lnSpc>
+                <a:spcPct val="115000"/>
+              </a:lnSpc>
+            </a:pPr>
+            <a:r>
+              <a:rPr sz="1400" b="1">
+                <a:solidFill>
+                  <a:srgbClr val="F8FAFC"/>
+                </a:solidFill>
+                <a:latin typeface="Microsoft YaHei"/>
+              </a:rPr>
+              <a:t>找到了更快的那一个</a:t>
+            </a:r>
+          </a:p>
+        </p:txBody>
+      </p:sp>
+      <p:sp>
+        <p:nvSpPr>
+          <p:cNvPr id="11" name="TextBox 10"/>
+          <p:cNvSpPr txBox="1"/>
+          <p:nvPr/>
+        </p:nvSpPr>
+        <p:spPr>
+          <a:xfrm>
+            <a:off x="1051560" y="4143375"/>
+            <a:ext cx="4572000" cy="316610"/>
+          </a:xfrm>
+          <a:prstGeom prst="rect">
+            <a:avLst/>
+          </a:prstGeom>
+          <a:noFill/>
+        </p:spPr>
+        <p:txBody>
+          <a:bodyPr wrap="square" anchor="t">
+            <a:spAutoFit/>
+          </a:bodyPr>
+          <a:lstStyle/>
+          <a:p>
+            <a:pPr algn="l">
+              <a:lnSpc>
+                <a:spcPct val="115000"/>
+              </a:lnSpc>
+            </a:pPr>
+          </a:p>
+        </p:txBody>
+      </p:sp>
+      <p:sp>
+        <p:nvSpPr>
+          <p:cNvPr id="12" name="TextBox 11"/>
+          <p:cNvSpPr txBox="1"/>
+          <p:nvPr/>
+        </p:nvSpPr>
+        <p:spPr>
+          <a:xfrm>
+            <a:off x="1051560" y="4459986"/>
+            <a:ext cx="4572000" cy="316610"/>
+          </a:xfrm>
+          <a:prstGeom prst="rect">
+            <a:avLst/>
+          </a:prstGeom>
+          <a:noFill/>
+        </p:spPr>
+        <p:txBody>
+          <a:bodyPr wrap="square" anchor="t">
+            <a:spAutoFit/>
+          </a:bodyPr>
+          <a:lstStyle/>
+          <a:p>
+            <a:pPr algn="l">
+              <a:lnSpc>
+                <a:spcPct val="115000"/>
+              </a:lnSpc>
+            </a:pPr>
+            <a:r>
+              <a:rPr sz="1400" b="0">
+                <a:solidFill>
+                  <a:srgbClr val="F8FAFC"/>
+                </a:solidFill>
+                <a:latin typeface="Microsoft YaHei"/>
+              </a:rPr>
+              <a:t>（这类开放数学问题它试了 50 多个，</a:t>
+            </a:r>
+          </a:p>
+        </p:txBody>
+      </p:sp>
+      <p:sp>
+        <p:nvSpPr>
+          <p:cNvPr id="13" name="TextBox 12"/>
+          <p:cNvSpPr txBox="1"/>
+          <p:nvPr/>
+        </p:nvSpPr>
+        <p:spPr>
+          <a:xfrm>
+            <a:off x="1051560" y="4776596"/>
+            <a:ext cx="4572000" cy="316610"/>
+          </a:xfrm>
+          <a:prstGeom prst="rect">
+            <a:avLst/>
+          </a:prstGeom>
+          <a:noFill/>
+        </p:spPr>
+        <p:txBody>
+          <a:bodyPr wrap="square" anchor="t">
+            <a:spAutoFit/>
+          </a:bodyPr>
+          <a:lstStyle/>
+          <a:p>
+            <a:pPr algn="l">
+              <a:lnSpc>
+                <a:spcPct val="115000"/>
+              </a:lnSpc>
+            </a:pPr>
+            <a:r>
+              <a:rPr sz="1400" b="0">
+                <a:solidFill>
+                  <a:srgbClr val="F8FAFC"/>
+                </a:solidFill>
+                <a:latin typeface="Microsoft YaHei"/>
+              </a:rPr>
+              <a:t>约两成真正改进了已知最好解）</a:t>
+            </a:r>
+          </a:p>
+        </p:txBody>
+      </p:sp>
+      <p:sp>
+        <p:nvSpPr>
+          <p:cNvPr id="14" name="Rounded Rectangle 13"/>
           <p:cNvSpPr/>
           <p:nvPr/>
         </p:nvSpPr>
         <p:spPr>
           <a:xfrm>
-            <a:off x="777240" y="1783080"/>
+            <a:off x="6309360" y="1783080"/>
             <a:ext cx="5120640" cy="3566159"/>
           </a:xfrm>
           <a:prstGeom prst="roundRect">
@@ -18317,7 +18306,7 @@
           </a:solidFill>
           <a:ln w="19050">
             <a:solidFill>
-              <a:srgbClr val="A3E635"/>
+              <a:srgbClr val="F87171"/>
             </a:solidFill>
           </a:ln>
           <a:effectLst/>
@@ -18346,280 +18335,7 @@
       </p:sp>
       <p:sp>
         <p:nvSpPr>
-          <p:cNvPr id="5" name="TextBox 4"/>
-          <p:cNvSpPr txBox="1"/>
-          <p:nvPr/>
-        </p:nvSpPr>
-        <p:spPr>
-          <a:xfrm>
-            <a:off x="1051560" y="1947672"/>
-            <a:ext cx="4572000" cy="457200"/>
-          </a:xfrm>
-          <a:prstGeom prst="rect">
-            <a:avLst/>
-          </a:prstGeom>
-          <a:noFill/>
-        </p:spPr>
-        <p:txBody>
-          <a:bodyPr wrap="square" anchor="t">
-            <a:spAutoFit/>
-          </a:bodyPr>
-          <a:lstStyle/>
-          <a:p>
-            <a:pPr algn="ctr">
-              <a:lnSpc>
-                <a:spcPct val="115000"/>
-              </a:lnSpc>
-            </a:pPr>
-            <a:r>
-              <a:rPr sz="2100" b="1">
-                <a:solidFill>
-                  <a:srgbClr val="A3E635"/>
-                </a:solidFill>
-                <a:latin typeface="Microsoft YaHei"/>
-              </a:rPr>
-              <a:t>它能做到的</a:t>
-            </a:r>
-          </a:p>
-        </p:txBody>
-      </p:sp>
-      <p:sp>
-        <p:nvSpPr>
-          <p:cNvPr id="6" name="TextBox 5"/>
-          <p:cNvSpPr txBox="1"/>
-          <p:nvPr/>
-        </p:nvSpPr>
-        <p:spPr>
-          <a:xfrm>
-            <a:off x="1051560" y="2560320"/>
-            <a:ext cx="4572000" cy="506577"/>
-          </a:xfrm>
-          <a:prstGeom prst="rect">
-            <a:avLst/>
-          </a:prstGeom>
-          <a:noFill/>
-        </p:spPr>
-        <p:txBody>
-          <a:bodyPr wrap="square" anchor="t">
-            <a:spAutoFit/>
-          </a:bodyPr>
-          <a:lstStyle/>
-          <a:p>
-            <a:pPr algn="l">
-              <a:lnSpc>
-                <a:spcPct val="115000"/>
-              </a:lnSpc>
-            </a:pPr>
-            <a:r>
-              <a:rPr sz="1600" b="0">
-                <a:solidFill>
-                  <a:srgbClr val="F8FAFC"/>
-                </a:solidFill>
-                <a:latin typeface="Microsoft YaHei"/>
-              </a:rPr>
-              <a:t>找到半个世纪没人找到的</a:t>
-            </a:r>
-          </a:p>
-        </p:txBody>
-      </p:sp>
-      <p:sp>
-        <p:nvSpPr>
-          <p:cNvPr id="7" name="TextBox 6"/>
-          <p:cNvSpPr txBox="1"/>
-          <p:nvPr/>
-        </p:nvSpPr>
-        <p:spPr>
-          <a:xfrm>
-            <a:off x="1051560" y="3066897"/>
-            <a:ext cx="4572000" cy="506577"/>
-          </a:xfrm>
-          <a:prstGeom prst="rect">
-            <a:avLst/>
-          </a:prstGeom>
-          <a:noFill/>
-        </p:spPr>
-        <p:txBody>
-          <a:bodyPr wrap="square" anchor="t">
-            <a:spAutoFit/>
-          </a:bodyPr>
-          <a:lstStyle/>
-          <a:p>
-            <a:pPr algn="l">
-              <a:lnSpc>
-                <a:spcPct val="115000"/>
-              </a:lnSpc>
-            </a:pPr>
-            <a:r>
-              <a:rPr sz="1600" b="0">
-                <a:solidFill>
-                  <a:srgbClr val="F8FAFC"/>
-                </a:solidFill>
-                <a:latin typeface="Microsoft YaHei"/>
-              </a:rPr>
-              <a:t>矩阵乘法构造</a:t>
-            </a:r>
-          </a:p>
-        </p:txBody>
-      </p:sp>
-      <p:sp>
-        <p:nvSpPr>
-          <p:cNvPr id="8" name="TextBox 7"/>
-          <p:cNvSpPr txBox="1"/>
-          <p:nvPr/>
-        </p:nvSpPr>
-        <p:spPr>
-          <a:xfrm>
-            <a:off x="1051560" y="3573475"/>
-            <a:ext cx="4572000" cy="506577"/>
-          </a:xfrm>
-          <a:prstGeom prst="rect">
-            <a:avLst/>
-          </a:prstGeom>
-          <a:noFill/>
-        </p:spPr>
-        <p:txBody>
-          <a:bodyPr wrap="square" anchor="t">
-            <a:spAutoFit/>
-          </a:bodyPr>
-          <a:lstStyle/>
-          <a:p>
-            <a:pPr algn="l">
-              <a:lnSpc>
-                <a:spcPct val="115000"/>
-              </a:lnSpc>
-            </a:pPr>
-          </a:p>
-        </p:txBody>
-      </p:sp>
-      <p:sp>
-        <p:nvSpPr>
-          <p:cNvPr id="9" name="TextBox 8"/>
-          <p:cNvSpPr txBox="1"/>
-          <p:nvPr/>
-        </p:nvSpPr>
-        <p:spPr>
-          <a:xfrm>
-            <a:off x="1051560" y="4080052"/>
-            <a:ext cx="4572000" cy="506577"/>
-          </a:xfrm>
-          <a:prstGeom prst="rect">
-            <a:avLst/>
-          </a:prstGeom>
-          <a:noFill/>
-        </p:spPr>
-        <p:txBody>
-          <a:bodyPr wrap="square" anchor="t">
-            <a:spAutoFit/>
-          </a:bodyPr>
-          <a:lstStyle/>
-          <a:p>
-            <a:pPr algn="l">
-              <a:lnSpc>
-                <a:spcPct val="115000"/>
-              </a:lnSpc>
-            </a:pPr>
-            <a:r>
-              <a:rPr sz="1600" b="0">
-                <a:solidFill>
-                  <a:srgbClr val="F8FAFC"/>
-                </a:solidFill>
-                <a:latin typeface="Microsoft YaHei"/>
-              </a:rPr>
-              <a:t>在 50 多个开放数学问题上</a:t>
-            </a:r>
-          </a:p>
-        </p:txBody>
-      </p:sp>
-      <p:sp>
-        <p:nvSpPr>
-          <p:cNvPr id="10" name="TextBox 9"/>
-          <p:cNvSpPr txBox="1"/>
-          <p:nvPr/>
-        </p:nvSpPr>
-        <p:spPr>
-          <a:xfrm>
-            <a:off x="1051560" y="4586630"/>
-            <a:ext cx="4572000" cy="506577"/>
-          </a:xfrm>
-          <a:prstGeom prst="rect">
-            <a:avLst/>
-          </a:prstGeom>
-          <a:noFill/>
-        </p:spPr>
-        <p:txBody>
-          <a:bodyPr wrap="square" anchor="t">
-            <a:spAutoFit/>
-          </a:bodyPr>
-          <a:lstStyle/>
-          <a:p>
-            <a:pPr algn="l">
-              <a:lnSpc>
-                <a:spcPct val="115000"/>
-              </a:lnSpc>
-            </a:pPr>
-            <a:r>
-              <a:rPr sz="1600" b="1">
-                <a:solidFill>
-                  <a:srgbClr val="F8FAFC"/>
-                </a:solidFill>
-                <a:latin typeface="Microsoft YaHei"/>
-              </a:rPr>
-              <a:t>约 20% 改进了已知最好解</a:t>
-            </a:r>
-          </a:p>
-        </p:txBody>
-      </p:sp>
-      <p:sp>
-        <p:nvSpPr>
-          <p:cNvPr id="11" name="Rounded Rectangle 10"/>
-          <p:cNvSpPr/>
-          <p:nvPr/>
-        </p:nvSpPr>
-        <p:spPr>
-          <a:xfrm>
-            <a:off x="6309360" y="1783080"/>
-            <a:ext cx="5120640" cy="3566159"/>
-          </a:xfrm>
-          <a:prstGeom prst="roundRect">
-            <a:avLst>
-              <a:gd name="adj" fmla="val 6000"/>
-            </a:avLst>
-          </a:prstGeom>
-          <a:solidFill>
-            <a:srgbClr val="162038"/>
-          </a:solidFill>
-          <a:ln w="19050">
-            <a:solidFill>
-              <a:srgbClr val="F87171"/>
-            </a:solidFill>
-          </a:ln>
-          <a:effectLst/>
-        </p:spPr>
-        <p:style>
-          <a:lnRef idx="1">
-            <a:schemeClr val="accent1"/>
-          </a:lnRef>
-          <a:fillRef idx="3">
-            <a:schemeClr val="accent1"/>
-          </a:fillRef>
-          <a:effectRef idx="2">
-            <a:schemeClr val="accent1"/>
-          </a:effectRef>
-          <a:fontRef idx="minor">
-            <a:schemeClr val="lt1"/>
-          </a:fontRef>
-        </p:style>
-        <p:txBody>
-          <a:bodyPr rtlCol="0" anchor="ctr"/>
-          <a:lstStyle/>
-          <a:p>
-            <a:pPr algn="ctr"/>
-          </a:p>
-        </p:txBody>
-      </p:sp>
-      <p:sp>
-        <p:nvSpPr>
-          <p:cNvPr id="12" name="TextBox 11"/>
+          <p:cNvPr id="15" name="TextBox 14"/>
           <p:cNvSpPr txBox="1"/>
           <p:nvPr/>
         </p:nvSpPr>
@@ -18651,21 +18367,21 @@
                 </a:solidFill>
                 <a:latin typeface="Microsoft YaHei"/>
               </a:rPr>
-              <a:t>它做不到的</a:t>
-            </a:r>
-          </a:p>
-        </p:txBody>
-      </p:sp>
-      <p:sp>
-        <p:nvSpPr>
-          <p:cNvPr id="13" name="TextBox 12"/>
+              <a:t>把鼠标移到一个按钮上</a:t>
+            </a:r>
+          </a:p>
+        </p:txBody>
+      </p:sp>
+      <p:sp>
+        <p:nvSpPr>
+          <p:cNvPr id="16" name="TextBox 15"/>
           <p:cNvSpPr txBox="1"/>
           <p:nvPr/>
         </p:nvSpPr>
         <p:spPr>
           <a:xfrm>
             <a:off x="6583680" y="2560320"/>
-            <a:ext cx="4572000" cy="506577"/>
+            <a:ext cx="4572000" cy="316610"/>
           </a:xfrm>
           <a:prstGeom prst="rect">
             <a:avLst/>
@@ -18684,27 +18400,27 @@
               </a:lnSpc>
             </a:pPr>
             <a:r>
-              <a:rPr sz="1600" b="0">
+              <a:rPr sz="1400" b="0">
                 <a:solidFill>
                   <a:srgbClr val="F8FAFC"/>
                 </a:solidFill>
                 <a:latin typeface="Microsoft YaHei"/>
               </a:rPr>
-              <a:t>把鼠标准确移到</a:t>
-            </a:r>
-          </a:p>
-        </p:txBody>
-      </p:sp>
-      <p:sp>
-        <p:nvSpPr>
-          <p:cNvPr id="14" name="TextBox 13"/>
-          <p:cNvSpPr txBox="1"/>
-          <p:nvPr/>
-        </p:nvSpPr>
-        <p:spPr>
-          <a:xfrm>
-            <a:off x="6583680" y="3066897"/>
-            <a:ext cx="4572000" cy="506577"/>
+              <a:t>它可能点偏</a:t>
+            </a:r>
+          </a:p>
+        </p:txBody>
+      </p:sp>
+      <p:sp>
+        <p:nvSpPr>
+          <p:cNvPr id="17" name="TextBox 16"/>
+          <p:cNvSpPr txBox="1"/>
+          <p:nvPr/>
+        </p:nvSpPr>
+        <p:spPr>
+          <a:xfrm>
+            <a:off x="6583680" y="2876931"/>
+            <a:ext cx="4572000" cy="316610"/>
           </a:xfrm>
           <a:prstGeom prst="rect">
             <a:avLst/>
@@ -18722,28 +18438,58 @@
                 <a:spcPct val="115000"/>
               </a:lnSpc>
             </a:pPr>
-            <a:r>
-              <a:rPr sz="1600" b="0">
+          </a:p>
+        </p:txBody>
+      </p:sp>
+      <p:sp>
+        <p:nvSpPr>
+          <p:cNvPr id="18" name="TextBox 17"/>
+          <p:cNvSpPr txBox="1"/>
+          <p:nvPr/>
+        </p:nvSpPr>
+        <p:spPr>
+          <a:xfrm>
+            <a:off x="6583680" y="3193541"/>
+            <a:ext cx="4572000" cy="316610"/>
+          </a:xfrm>
+          <a:prstGeom prst="rect">
+            <a:avLst/>
+          </a:prstGeom>
+          <a:noFill/>
+        </p:spPr>
+        <p:txBody>
+          <a:bodyPr wrap="square" anchor="t">
+            <a:spAutoFit/>
+          </a:bodyPr>
+          <a:lstStyle/>
+          <a:p>
+            <a:pPr algn="l">
+              <a:lnSpc>
+                <a:spcPct val="115000"/>
+              </a:lnSpc>
+            </a:pPr>
+            <a:r>
+              <a:rPr sz="1400" b="0">
                 <a:solidFill>
                   <a:srgbClr val="F8FAFC"/>
                 </a:solidFill>
                 <a:latin typeface="Microsoft YaHei"/>
               </a:rPr>
-              <a:t>屏幕上一个按钮上</a:t>
-            </a:r>
-          </a:p>
-        </p:txBody>
-      </p:sp>
-      <p:sp>
-        <p:nvSpPr>
-          <p:cNvPr id="15" name="TextBox 14"/>
-          <p:cNvSpPr txBox="1"/>
-          <p:nvPr/>
-        </p:nvSpPr>
-        <p:spPr>
-          <a:xfrm>
-            <a:off x="6583680" y="3573475"/>
-            <a:ext cx="4572000" cy="506577"/>
+              <a:t>一个人三十秒能做完的</a:t>
+            </a:r>
+          </a:p>
+        </p:txBody>
+      </p:sp>
+      <p:sp>
+        <p:nvSpPr>
+          <p:cNvPr id="19" name="TextBox 18"/>
+          <p:cNvSpPr txBox="1"/>
+          <p:nvPr/>
+        </p:nvSpPr>
+        <p:spPr>
+          <a:xfrm>
+            <a:off x="6583680" y="3510152"/>
+            <a:ext cx="4572000" cy="316610"/>
           </a:xfrm>
           <a:prstGeom prst="rect">
             <a:avLst/>
@@ -18761,19 +18507,28 @@
                 <a:spcPct val="115000"/>
               </a:lnSpc>
             </a:pPr>
-          </a:p>
-        </p:txBody>
-      </p:sp>
-      <p:sp>
-        <p:nvSpPr>
-          <p:cNvPr id="16" name="TextBox 15"/>
-          <p:cNvSpPr txBox="1"/>
-          <p:nvPr/>
-        </p:nvSpPr>
-        <p:spPr>
-          <a:xfrm>
-            <a:off x="6583680" y="4080052"/>
-            <a:ext cx="4572000" cy="506577"/>
+            <a:r>
+              <a:rPr sz="1400" b="0">
+                <a:solidFill>
+                  <a:srgbClr val="F8FAFC"/>
+                </a:solidFill>
+                <a:latin typeface="Microsoft YaHei"/>
+              </a:rPr>
+              <a:t>排版操作</a:t>
+            </a:r>
+          </a:p>
+        </p:txBody>
+      </p:sp>
+      <p:sp>
+        <p:nvSpPr>
+          <p:cNvPr id="20" name="TextBox 19"/>
+          <p:cNvSpPr txBox="1"/>
+          <p:nvPr/>
+        </p:nvSpPr>
+        <p:spPr>
+          <a:xfrm>
+            <a:off x="6583680" y="3826763"/>
+            <a:ext cx="4572000" cy="316610"/>
           </a:xfrm>
           <a:prstGeom prst="rect">
             <a:avLst/>
@@ -18791,52 +18546,43 @@
                 <a:spcPct val="115000"/>
               </a:lnSpc>
             </a:pPr>
-            <a:r>
-              <a:rPr sz="1600" b="0">
+          </a:p>
+        </p:txBody>
+      </p:sp>
+      <p:sp>
+        <p:nvSpPr>
+          <p:cNvPr id="21" name="TextBox 20"/>
+          <p:cNvSpPr txBox="1"/>
+          <p:nvPr/>
+        </p:nvSpPr>
+        <p:spPr>
+          <a:xfrm>
+            <a:off x="6583680" y="4143375"/>
+            <a:ext cx="4572000" cy="316610"/>
+          </a:xfrm>
+          <a:prstGeom prst="rect">
+            <a:avLst/>
+          </a:prstGeom>
+          <a:noFill/>
+        </p:spPr>
+        <p:txBody>
+          <a:bodyPr wrap="square" anchor="t">
+            <a:spAutoFit/>
+          </a:bodyPr>
+          <a:lstStyle/>
+          <a:p>
+            <a:pPr algn="l">
+              <a:lnSpc>
+                <a:spcPct val="115000"/>
+              </a:lnSpc>
+            </a:pPr>
+            <a:r>
+              <a:rPr sz="1400" b="1">
                 <a:solidFill>
                   <a:srgbClr val="F8FAFC"/>
                 </a:solidFill>
                 <a:latin typeface="Microsoft YaHei"/>
               </a:rPr>
-              <a:t>一个人三十秒的排版操作</a:t>
-            </a:r>
-          </a:p>
-        </p:txBody>
-      </p:sp>
-      <p:sp>
-        <p:nvSpPr>
-          <p:cNvPr id="17" name="TextBox 16"/>
-          <p:cNvSpPr txBox="1"/>
-          <p:nvPr/>
-        </p:nvSpPr>
-        <p:spPr>
-          <a:xfrm>
-            <a:off x="6583680" y="4586630"/>
-            <a:ext cx="4572000" cy="506577"/>
-          </a:xfrm>
-          <a:prstGeom prst="rect">
-            <a:avLst/>
-          </a:prstGeom>
-          <a:noFill/>
-        </p:spPr>
-        <p:txBody>
-          <a:bodyPr wrap="square" anchor="t">
-            <a:spAutoFit/>
-          </a:bodyPr>
-          <a:lstStyle/>
-          <a:p>
-            <a:pPr algn="l">
-              <a:lnSpc>
-                <a:spcPct val="115000"/>
-              </a:lnSpc>
-            </a:pPr>
-            <a:r>
-              <a:rPr sz="1600" b="1">
-                <a:solidFill>
-                  <a:srgbClr val="F8FAFC"/>
-                </a:solidFill>
-                <a:latin typeface="Microsoft YaHei"/>
-              </a:rPr>
               <a:t>它要花十二分钟</a:t>
             </a:r>
           </a:p>
@@ -18844,7 +18590,7 @@
       </p:sp>
       <p:sp>
         <p:nvSpPr>
-          <p:cNvPr id="18" name="TextBox 17"/>
+          <p:cNvPr id="22" name="TextBox 21"/>
           <p:cNvSpPr txBox="1"/>
           <p:nvPr/>
         </p:nvSpPr>
@@ -18889,356 +18635,7 @@
 </p:sld>
 </file>
 
-<file path=ppt/slides/slide46.xml><?xml version="1.0" encoding="utf-8"?>
-<p:sld xmlns:a="http://schemas.openxmlformats.org/drawingml/2006/main" xmlns:p="http://schemas.openxmlformats.org/presentationml/2006/main" xmlns:r="http://schemas.openxmlformats.org/officeDocument/2006/relationships">
-  <p:cSld>
-    <p:bg>
-      <p:bgPr>
-        <a:solidFill>
-          <a:srgbClr val="0E1428"/>
-        </a:solidFill>
-        <a:effectLst/>
-      </p:bgPr>
-    </p:bg>
-    <p:spTree>
-      <p:nvGrpSpPr>
-        <p:cNvPr id="1" name=""/>
-        <p:cNvGrpSpPr/>
-        <p:nvPr/>
-      </p:nvGrpSpPr>
-      <p:grpSpPr/>
-      <p:sp>
-        <p:nvSpPr>
-          <p:cNvPr id="2" name="TextBox 1"/>
-          <p:cNvSpPr txBox="1"/>
-          <p:nvPr/>
-        </p:nvSpPr>
-        <p:spPr>
-          <a:xfrm>
-            <a:off x="777240" y="457200"/>
-            <a:ext cx="10607040" cy="868680"/>
-          </a:xfrm>
-          <a:prstGeom prst="rect">
-            <a:avLst/>
-          </a:prstGeom>
-          <a:noFill/>
-        </p:spPr>
-        <p:txBody>
-          <a:bodyPr wrap="square" anchor="t">
-            <a:spAutoFit/>
-          </a:bodyPr>
-          <a:lstStyle/>
-          <a:p>
-            <a:pPr algn="l">
-              <a:lnSpc>
-                <a:spcPct val="115000"/>
-              </a:lnSpc>
-            </a:pPr>
-            <a:r>
-              <a:rPr sz="3200" b="1">
-                <a:solidFill>
-                  <a:srgbClr val="F8FAFC"/>
-                </a:solidFill>
-                <a:latin typeface="Microsoft YaHei"/>
-              </a:rPr>
-              <a:t>★ 而且「AI 解决了难题」这类标题要打折</a:t>
-            </a:r>
-          </a:p>
-        </p:txBody>
-      </p:sp>
-      <p:sp>
-        <p:nvSpPr>
-          <p:cNvPr id="3" name="Rectangle 2"/>
-          <p:cNvSpPr/>
-          <p:nvPr/>
-        </p:nvSpPr>
-        <p:spPr>
-          <a:xfrm>
-            <a:off x="0" y="1444752"/>
-            <a:ext cx="12191695" cy="27432"/>
-          </a:xfrm>
-          <a:prstGeom prst="rect">
-            <a:avLst/>
-          </a:prstGeom>
-          <a:solidFill>
-            <a:srgbClr val="F59E0B"/>
-          </a:solidFill>
-          <a:ln>
-            <a:noFill/>
-          </a:ln>
-          <a:effectLst/>
-        </p:spPr>
-        <p:style>
-          <a:lnRef idx="1">
-            <a:schemeClr val="accent1"/>
-          </a:lnRef>
-          <a:fillRef idx="3">
-            <a:schemeClr val="accent1"/>
-          </a:fillRef>
-          <a:effectRef idx="2">
-            <a:schemeClr val="accent1"/>
-          </a:effectRef>
-          <a:fontRef idx="minor">
-            <a:schemeClr val="lt1"/>
-          </a:fontRef>
-        </p:style>
-        <p:txBody>
-          <a:bodyPr rtlCol="0" anchor="ctr"/>
-          <a:lstStyle/>
-          <a:p>
-            <a:pPr algn="ctr"/>
-          </a:p>
-        </p:txBody>
-      </p:sp>
-      <p:sp>
-        <p:nvSpPr>
-          <p:cNvPr id="4" name="TextBox 3"/>
-          <p:cNvSpPr txBox="1"/>
-          <p:nvPr/>
-        </p:nvSpPr>
-        <p:spPr>
-          <a:xfrm>
-            <a:off x="914400" y="1828800"/>
-            <a:ext cx="10332720" cy="914400"/>
-          </a:xfrm>
-          <a:prstGeom prst="rect">
-            <a:avLst/>
-          </a:prstGeom>
-          <a:noFill/>
-        </p:spPr>
-        <p:txBody>
-          <a:bodyPr wrap="square" anchor="t">
-            <a:spAutoFit/>
-          </a:bodyPr>
-          <a:lstStyle/>
-          <a:p>
-            <a:pPr algn="l">
-              <a:lnSpc>
-                <a:spcPct val="115000"/>
-              </a:lnSpc>
-            </a:pPr>
-            <a:r>
-              <a:rPr sz="2100" b="0">
-                <a:solidFill>
-                  <a:srgbClr val="F8FAFC"/>
-                </a:solidFill>
-                <a:latin typeface="Microsoft YaHei"/>
-              </a:rPr>
-              <a:t>2025 年 10 月，OpenAI 高管发帖：GPT-5 </a:t>
-            </a:r>
-            <a:r>
-              <a:rPr sz="2100" b="1">
-                <a:solidFill>
-                  <a:srgbClr val="F8FAFC"/>
-                </a:solidFill>
-                <a:latin typeface="Microsoft YaHei"/>
-              </a:rPr>
-              <a:t>解决了 10 个未解的数学难题</a:t>
-            </a:r>
-          </a:p>
-        </p:txBody>
-      </p:sp>
-      <p:sp>
-        <p:nvSpPr>
-          <p:cNvPr id="5" name="TextBox 4"/>
-          <p:cNvSpPr txBox="1"/>
-          <p:nvPr/>
-        </p:nvSpPr>
-        <p:spPr>
-          <a:xfrm>
-            <a:off x="914400" y="2697480"/>
-            <a:ext cx="10332720" cy="914400"/>
-          </a:xfrm>
-          <a:prstGeom prst="rect">
-            <a:avLst/>
-          </a:prstGeom>
-          <a:noFill/>
-        </p:spPr>
-        <p:txBody>
-          <a:bodyPr wrap="square" anchor="t">
-            <a:spAutoFit/>
-          </a:bodyPr>
-          <a:lstStyle/>
-          <a:p>
-            <a:pPr algn="l">
-              <a:lnSpc>
-                <a:spcPct val="115000"/>
-              </a:lnSpc>
-            </a:pPr>
-            <a:r>
-              <a:rPr sz="2100" b="0">
-                <a:solidFill>
-                  <a:srgbClr val="F8FAFC"/>
-                </a:solidFill>
-                <a:latin typeface="Microsoft YaHei"/>
-              </a:rPr>
-              <a:t>十万阅读。维护那个问题库的数学家出来澄清——</a:t>
-            </a:r>
-          </a:p>
-        </p:txBody>
-      </p:sp>
-      <p:sp>
-        <p:nvSpPr>
-          <p:cNvPr id="6" name="TextBox 5"/>
-          <p:cNvSpPr txBox="1"/>
-          <p:nvPr/>
-        </p:nvSpPr>
-        <p:spPr>
-          <a:xfrm>
-            <a:off x="914400" y="3566160"/>
-            <a:ext cx="10332720" cy="914400"/>
-          </a:xfrm>
-          <a:prstGeom prst="rect">
-            <a:avLst/>
-          </a:prstGeom>
-          <a:noFill/>
-        </p:spPr>
-        <p:txBody>
-          <a:bodyPr wrap="square" anchor="t">
-            <a:spAutoFit/>
-          </a:bodyPr>
-          <a:lstStyle/>
-          <a:p>
-            <a:pPr algn="l">
-              <a:lnSpc>
-                <a:spcPct val="115000"/>
-              </a:lnSpc>
-            </a:pPr>
-            <a:r>
-              <a:rPr sz="2100" b="0">
-                <a:solidFill>
-                  <a:srgbClr val="F8FAFC"/>
-                </a:solidFill>
-                <a:latin typeface="Microsoft YaHei"/>
-              </a:rPr>
-              <a:t>标着「未解」的意思只是</a:t>
-            </a:r>
-            <a:r>
-              <a:rPr sz="2100" b="1">
-                <a:solidFill>
-                  <a:srgbClr val="F8FAFC"/>
-                </a:solidFill>
-                <a:latin typeface="Microsoft YaHei"/>
-              </a:rPr>
-              <a:t>「我本人不知道有论文解决了它」</a:t>
-            </a:r>
-          </a:p>
-        </p:txBody>
-      </p:sp>
-      <p:sp>
-        <p:nvSpPr>
-          <p:cNvPr id="7" name="TextBox 6"/>
-          <p:cNvSpPr txBox="1"/>
-          <p:nvPr/>
-        </p:nvSpPr>
-        <p:spPr>
-          <a:xfrm>
-            <a:off x="914400" y="4434840"/>
-            <a:ext cx="10332720" cy="914400"/>
-          </a:xfrm>
-          <a:prstGeom prst="rect">
-            <a:avLst/>
-          </a:prstGeom>
-          <a:noFill/>
-        </p:spPr>
-        <p:txBody>
-          <a:bodyPr wrap="square" anchor="t">
-            <a:spAutoFit/>
-          </a:bodyPr>
-          <a:lstStyle/>
-          <a:p>
-            <a:pPr algn="l">
-              <a:lnSpc>
-                <a:spcPct val="115000"/>
-              </a:lnSpc>
-            </a:pPr>
-            <a:r>
-              <a:rPr sz="2100" b="0">
-                <a:solidFill>
-                  <a:srgbClr val="F8FAFC"/>
-                </a:solidFill>
-                <a:latin typeface="Microsoft YaHei"/>
-              </a:rPr>
-              <a:t>GPT-5 做的是</a:t>
-            </a:r>
-            <a:r>
-              <a:rPr sz="2100" b="1">
-                <a:solidFill>
-                  <a:srgbClr val="F8FAFC"/>
-                </a:solidFill>
-                <a:latin typeface="Microsoft YaHei"/>
-              </a:rPr>
-              <a:t>找到了已发表的文献</a:t>
-            </a:r>
-            <a:r>
-              <a:rPr sz="2100" b="0">
-                <a:solidFill>
-                  <a:srgbClr val="F8FAFC"/>
-                </a:solidFill>
-                <a:latin typeface="Microsoft YaHei"/>
-              </a:rPr>
-              <a:t>：是检索，不是发现</a:t>
-            </a:r>
-          </a:p>
-        </p:txBody>
-      </p:sp>
-      <p:sp>
-        <p:nvSpPr>
-          <p:cNvPr id="8" name="TextBox 7"/>
-          <p:cNvSpPr txBox="1"/>
-          <p:nvPr/>
-        </p:nvSpPr>
-        <p:spPr>
-          <a:xfrm>
-            <a:off x="914400" y="5303520"/>
-            <a:ext cx="10332720" cy="914400"/>
-          </a:xfrm>
-          <a:prstGeom prst="rect">
-            <a:avLst/>
-          </a:prstGeom>
-          <a:noFill/>
-        </p:spPr>
-        <p:txBody>
-          <a:bodyPr wrap="square" anchor="t">
-            <a:spAutoFit/>
-          </a:bodyPr>
-          <a:lstStyle/>
-          <a:p>
-            <a:pPr algn="l">
-              <a:lnSpc>
-                <a:spcPct val="115000"/>
-              </a:lnSpc>
-            </a:pPr>
-            <a:r>
-              <a:rPr sz="2100" b="0">
-                <a:solidFill>
-                  <a:srgbClr val="F8FAFC"/>
-                </a:solidFill>
-                <a:latin typeface="Microsoft YaHei"/>
-              </a:rPr>
-              <a:t>另一家 AI 公司的负责人公开回了两个字：</a:t>
-            </a:r>
-            <a:r>
-              <a:rPr sz="2100" b="1">
-                <a:solidFill>
-                  <a:srgbClr val="F8FAFC"/>
-                </a:solidFill>
-                <a:latin typeface="Microsoft YaHei"/>
-              </a:rPr>
-              <a:t>「这很尴尬」</a:t>
-            </a:r>
-          </a:p>
-        </p:txBody>
-      </p:sp>
-    </p:spTree>
-  </p:cSld>
-  <p:clrMapOvr>
-    <a:masterClrMapping/>
-  </p:clrMapOvr>
-</p:sld>
-</file>
-
-<file path=ppt/slides/slide47.xml><?xml version="1.0" encoding="utf-8"?>
+<file path=ppt/slides/slide45.xml><?xml version="1.0" encoding="utf-8"?>
 <p:sld xmlns:a="http://schemas.openxmlformats.org/drawingml/2006/main" xmlns:p="http://schemas.openxmlformats.org/presentationml/2006/main" xmlns:r="http://schemas.openxmlformats.org/officeDocument/2006/relationships">
   <p:cSld>
     <p:bg>
@@ -19358,7 +18755,7 @@
 </p:sld>
 </file>
 
-<file path=ppt/slides/slide48.xml><?xml version="1.0" encoding="utf-8"?>
+<file path=ppt/slides/slide46.xml><?xml version="1.0" encoding="utf-8"?>
 <p:sld xmlns:a="http://schemas.openxmlformats.org/drawingml/2006/main" xmlns:p="http://schemas.openxmlformats.org/presentationml/2006/main" xmlns:r="http://schemas.openxmlformats.org/officeDocument/2006/relationships">
   <p:cSld>
     <p:bg>
@@ -20032,6 +19429,425 @@
 </p:sld>
 </file>
 
+<file path=ppt/slides/slide47.xml><?xml version="1.0" encoding="utf-8"?>
+<p:sld xmlns:a="http://schemas.openxmlformats.org/drawingml/2006/main" xmlns:p="http://schemas.openxmlformats.org/presentationml/2006/main" xmlns:r="http://schemas.openxmlformats.org/officeDocument/2006/relationships">
+  <p:cSld>
+    <p:bg>
+      <p:bgPr>
+        <a:solidFill>
+          <a:srgbClr val="0A1A1A"/>
+        </a:solidFill>
+        <a:effectLst/>
+      </p:bgPr>
+    </p:bg>
+    <p:spTree>
+      <p:nvGrpSpPr>
+        <p:cNvPr id="1" name=""/>
+        <p:cNvGrpSpPr/>
+        <p:nvPr/>
+      </p:nvGrpSpPr>
+      <p:grpSpPr/>
+      <p:sp>
+        <p:nvSpPr>
+          <p:cNvPr id="2" name="TextBox 1"/>
+          <p:cNvSpPr txBox="1"/>
+          <p:nvPr/>
+        </p:nvSpPr>
+        <p:spPr>
+          <a:xfrm>
+            <a:off x="914400" y="1965960"/>
+            <a:ext cx="10332720" cy="502920"/>
+          </a:xfrm>
+          <a:prstGeom prst="rect">
+            <a:avLst/>
+          </a:prstGeom>
+          <a:noFill/>
+        </p:spPr>
+        <p:txBody>
+          <a:bodyPr wrap="square" anchor="t">
+            <a:spAutoFit/>
+          </a:bodyPr>
+          <a:lstStyle/>
+          <a:p>
+            <a:pPr algn="ctr">
+              <a:lnSpc>
+                <a:spcPct val="115000"/>
+              </a:lnSpc>
+            </a:pPr>
+            <a:r>
+              <a:rPr sz="2000" b="1">
+                <a:solidFill>
+                  <a:srgbClr val="F59E0B"/>
+                </a:solidFill>
+                <a:latin typeface="Microsoft YaHei"/>
+              </a:rPr>
+              <a:t>收尾</a:t>
+            </a:r>
+          </a:p>
+        </p:txBody>
+      </p:sp>
+      <p:sp>
+        <p:nvSpPr>
+          <p:cNvPr id="3" name="TextBox 2"/>
+          <p:cNvSpPr txBox="1"/>
+          <p:nvPr/>
+        </p:nvSpPr>
+        <p:spPr>
+          <a:xfrm>
+            <a:off x="914400" y="2560320"/>
+            <a:ext cx="10332720" cy="960120"/>
+          </a:xfrm>
+          <a:prstGeom prst="rect">
+            <a:avLst/>
+          </a:prstGeom>
+          <a:noFill/>
+        </p:spPr>
+        <p:txBody>
+          <a:bodyPr wrap="square" anchor="t">
+            <a:spAutoFit/>
+          </a:bodyPr>
+          <a:lstStyle/>
+          <a:p>
+            <a:pPr algn="ctr">
+              <a:lnSpc>
+                <a:spcPct val="115000"/>
+              </a:lnSpc>
+            </a:pPr>
+            <a:r>
+              <a:rPr sz="4000" b="1">
+                <a:solidFill>
+                  <a:srgbClr val="F8FAFC"/>
+                </a:solidFill>
+                <a:latin typeface="Microsoft YaHei"/>
+              </a:rPr>
+              <a:t>三句话</a:t>
+            </a:r>
+          </a:p>
+        </p:txBody>
+      </p:sp>
+      <p:sp>
+        <p:nvSpPr>
+          <p:cNvPr id="4" name="Rectangle 3"/>
+          <p:cNvSpPr/>
+          <p:nvPr/>
+        </p:nvSpPr>
+        <p:spPr>
+          <a:xfrm>
+            <a:off x="0" y="3794760"/>
+            <a:ext cx="12191695" cy="45720"/>
+          </a:xfrm>
+          <a:prstGeom prst="rect">
+            <a:avLst/>
+          </a:prstGeom>
+          <a:solidFill>
+            <a:srgbClr val="5EEAD4"/>
+          </a:solidFill>
+          <a:ln>
+            <a:noFill/>
+          </a:ln>
+          <a:effectLst/>
+        </p:spPr>
+        <p:style>
+          <a:lnRef idx="1">
+            <a:schemeClr val="accent1"/>
+          </a:lnRef>
+          <a:fillRef idx="3">
+            <a:schemeClr val="accent1"/>
+          </a:fillRef>
+          <a:effectRef idx="2">
+            <a:schemeClr val="accent1"/>
+          </a:effectRef>
+          <a:fontRef idx="minor">
+            <a:schemeClr val="lt1"/>
+          </a:fontRef>
+        </p:style>
+        <p:txBody>
+          <a:bodyPr rtlCol="0" anchor="ctr"/>
+          <a:lstStyle/>
+          <a:p>
+            <a:pPr algn="ctr"/>
+          </a:p>
+        </p:txBody>
+      </p:sp>
+    </p:spTree>
+  </p:cSld>
+  <p:clrMapOvr>
+    <a:masterClrMapping/>
+  </p:clrMapOvr>
+</p:sld>
+</file>
+
+<file path=ppt/slides/slide48.xml><?xml version="1.0" encoding="utf-8"?>
+<p:sld xmlns:a="http://schemas.openxmlformats.org/drawingml/2006/main" xmlns:p="http://schemas.openxmlformats.org/presentationml/2006/main" xmlns:r="http://schemas.openxmlformats.org/officeDocument/2006/relationships">
+  <p:cSld>
+    <p:bg>
+      <p:bgPr>
+        <a:solidFill>
+          <a:srgbClr val="0E1428"/>
+        </a:solidFill>
+        <a:effectLst/>
+      </p:bgPr>
+    </p:bg>
+    <p:spTree>
+      <p:nvGrpSpPr>
+        <p:cNvPr id="1" name=""/>
+        <p:cNvGrpSpPr/>
+        <p:nvPr/>
+      </p:nvGrpSpPr>
+      <p:grpSpPr/>
+      <p:sp>
+        <p:nvSpPr>
+          <p:cNvPr id="2" name="TextBox 1"/>
+          <p:cNvSpPr txBox="1"/>
+          <p:nvPr/>
+        </p:nvSpPr>
+        <p:spPr>
+          <a:xfrm>
+            <a:off x="777240" y="457200"/>
+            <a:ext cx="10607040" cy="868680"/>
+          </a:xfrm>
+          <a:prstGeom prst="rect">
+            <a:avLst/>
+          </a:prstGeom>
+          <a:noFill/>
+        </p:spPr>
+        <p:txBody>
+          <a:bodyPr wrap="square" anchor="t">
+            <a:spAutoFit/>
+          </a:bodyPr>
+          <a:lstStyle/>
+          <a:p>
+            <a:pPr algn="l">
+              <a:lnSpc>
+                <a:spcPct val="115000"/>
+              </a:lnSpc>
+            </a:pPr>
+            <a:r>
+              <a:rPr sz="3200" b="1">
+                <a:solidFill>
+                  <a:srgbClr val="F8FAFC"/>
+                </a:solidFill>
+                <a:latin typeface="Microsoft YaHei"/>
+              </a:rPr>
+              <a:t>如果只记三句</a:t>
+            </a:r>
+          </a:p>
+        </p:txBody>
+      </p:sp>
+      <p:sp>
+        <p:nvSpPr>
+          <p:cNvPr id="3" name="Rectangle 2"/>
+          <p:cNvSpPr/>
+          <p:nvPr/>
+        </p:nvSpPr>
+        <p:spPr>
+          <a:xfrm>
+            <a:off x="0" y="1444752"/>
+            <a:ext cx="12191695" cy="27432"/>
+          </a:xfrm>
+          <a:prstGeom prst="rect">
+            <a:avLst/>
+          </a:prstGeom>
+          <a:solidFill>
+            <a:srgbClr val="F59E0B"/>
+          </a:solidFill>
+          <a:ln>
+            <a:noFill/>
+          </a:ln>
+          <a:effectLst/>
+        </p:spPr>
+        <p:style>
+          <a:lnRef idx="1">
+            <a:schemeClr val="accent1"/>
+          </a:lnRef>
+          <a:fillRef idx="3">
+            <a:schemeClr val="accent1"/>
+          </a:fillRef>
+          <a:effectRef idx="2">
+            <a:schemeClr val="accent1"/>
+          </a:effectRef>
+          <a:fontRef idx="minor">
+            <a:schemeClr val="lt1"/>
+          </a:fontRef>
+        </p:style>
+        <p:txBody>
+          <a:bodyPr rtlCol="0" anchor="ctr"/>
+          <a:lstStyle/>
+          <a:p>
+            <a:pPr algn="ctr"/>
+          </a:p>
+        </p:txBody>
+      </p:sp>
+      <p:sp>
+        <p:nvSpPr>
+          <p:cNvPr id="4" name="TextBox 3"/>
+          <p:cNvSpPr txBox="1"/>
+          <p:nvPr/>
+        </p:nvSpPr>
+        <p:spPr>
+          <a:xfrm>
+            <a:off x="914400" y="1828800"/>
+            <a:ext cx="10332720" cy="914400"/>
+          </a:xfrm>
+          <a:prstGeom prst="rect">
+            <a:avLst/>
+          </a:prstGeom>
+          <a:noFill/>
+        </p:spPr>
+        <p:txBody>
+          <a:bodyPr wrap="square" anchor="t">
+            <a:spAutoFit/>
+          </a:bodyPr>
+          <a:lstStyle/>
+          <a:p>
+            <a:pPr algn="l">
+              <a:lnSpc>
+                <a:spcPct val="115000"/>
+              </a:lnSpc>
+            </a:pPr>
+            <a:r>
+              <a:rPr sz="2200" b="0">
+                <a:solidFill>
+                  <a:srgbClr val="F8FAFC"/>
+                </a:solidFill>
+                <a:latin typeface="Microsoft YaHei"/>
+              </a:rPr>
+              <a:t>1　它读过所有书，但</a:t>
+            </a:r>
+            <a:r>
+              <a:rPr sz="2200" b="1">
+                <a:solidFill>
+                  <a:srgbClr val="F8FAFC"/>
+                </a:solidFill>
+                <a:latin typeface="Microsoft YaHei"/>
+              </a:rPr>
+              <a:t>没出过门</a:t>
+            </a:r>
+            <a:r>
+              <a:rPr sz="2200" b="0">
+                <a:solidFill>
+                  <a:srgbClr val="F8FAFC"/>
+                </a:solidFill>
+                <a:latin typeface="Microsoft YaHei"/>
+              </a:rPr>
+              <a:t>，常识会错，编的东西是真诚的</a:t>
+            </a:r>
+          </a:p>
+        </p:txBody>
+      </p:sp>
+      <p:sp>
+        <p:nvSpPr>
+          <p:cNvPr id="5" name="TextBox 4"/>
+          <p:cNvSpPr txBox="1"/>
+          <p:nvPr/>
+        </p:nvSpPr>
+        <p:spPr>
+          <a:xfrm>
+            <a:off x="914400" y="2697480"/>
+            <a:ext cx="10332720" cy="914400"/>
+          </a:xfrm>
+          <a:prstGeom prst="rect">
+            <a:avLst/>
+          </a:prstGeom>
+          <a:noFill/>
+        </p:spPr>
+        <p:txBody>
+          <a:bodyPr wrap="square" anchor="t">
+            <a:spAutoFit/>
+          </a:bodyPr>
+          <a:lstStyle/>
+          <a:p>
+            <a:pPr algn="l">
+              <a:lnSpc>
+                <a:spcPct val="115000"/>
+              </a:lnSpc>
+            </a:pPr>
+            <a:r>
+              <a:rPr sz="2200" b="0">
+                <a:solidFill>
+                  <a:srgbClr val="F8FAFC"/>
+                </a:solidFill>
+                <a:latin typeface="Microsoft YaHei"/>
+              </a:rPr>
+              <a:t>2　它能自己干活了，但需要有人</a:t>
+            </a:r>
+            <a:r>
+              <a:rPr sz="2200" b="1">
+                <a:solidFill>
+                  <a:srgbClr val="F8FAFC"/>
+                </a:solidFill>
+                <a:latin typeface="Microsoft YaHei"/>
+              </a:rPr>
+              <a:t>说清楚要什么、并且看最终结果</a:t>
+            </a:r>
+          </a:p>
+        </p:txBody>
+      </p:sp>
+      <p:sp>
+        <p:nvSpPr>
+          <p:cNvPr id="6" name="TextBox 5"/>
+          <p:cNvSpPr txBox="1"/>
+          <p:nvPr/>
+        </p:nvSpPr>
+        <p:spPr>
+          <a:xfrm>
+            <a:off x="914400" y="3566160"/>
+            <a:ext cx="10332720" cy="914400"/>
+          </a:xfrm>
+          <a:prstGeom prst="rect">
+            <a:avLst/>
+          </a:prstGeom>
+          <a:noFill/>
+        </p:spPr>
+        <p:txBody>
+          <a:bodyPr wrap="square" anchor="t">
+            <a:spAutoFit/>
+          </a:bodyPr>
+          <a:lstStyle/>
+          <a:p>
+            <a:pPr algn="l">
+              <a:lnSpc>
+                <a:spcPct val="115000"/>
+              </a:lnSpc>
+            </a:pPr>
+            <a:r>
+              <a:rPr sz="2200" b="0">
+                <a:solidFill>
+                  <a:srgbClr val="F8FAFC"/>
+                </a:solidFill>
+                <a:latin typeface="Microsoft YaHei"/>
+              </a:rPr>
+              <a:t>3　它</a:t>
+            </a:r>
+            <a:r>
+              <a:rPr sz="2200" b="1">
+                <a:solidFill>
+                  <a:srgbClr val="F8FAFC"/>
+                </a:solidFill>
+                <a:latin typeface="Microsoft YaHei"/>
+              </a:rPr>
+              <a:t>记不住昨天</a:t>
+            </a:r>
+            <a:r>
+              <a:rPr sz="2200" b="0">
+                <a:solidFill>
+                  <a:srgbClr val="F8FAFC"/>
+                </a:solidFill>
+                <a:latin typeface="Microsoft YaHei"/>
+              </a:rPr>
+              <a:t>，每次开新窗口都是第一次见你</a:t>
+            </a:r>
+          </a:p>
+        </p:txBody>
+      </p:sp>
+    </p:spTree>
+  </p:cSld>
+  <p:clrMapOvr>
+    <a:masterClrMapping/>
+  </p:clrMapOvr>
+</p:sld>
+</file>
+
 <file path=ppt/slides/slide49.xml><?xml version="1.0" encoding="utf-8"?>
 <p:sld xmlns:a="http://schemas.openxmlformats.org/drawingml/2006/main" xmlns:p="http://schemas.openxmlformats.org/presentationml/2006/main" xmlns:r="http://schemas.openxmlformats.org/officeDocument/2006/relationships">
   <p:cSld>
@@ -20058,16 +19874,16 @@
         </p:nvSpPr>
         <p:spPr>
           <a:xfrm>
-            <a:off x="914400" y="1965960"/>
-            <a:ext cx="10332720" cy="502920"/>
-          </a:xfrm>
-          <a:prstGeom prst="rect">
-            <a:avLst/>
-          </a:prstGeom>
-          <a:noFill/>
-        </p:spPr>
-        <p:txBody>
-          <a:bodyPr wrap="square" anchor="t">
+            <a:off x="914400" y="2286000"/>
+            <a:ext cx="10332720" cy="1828800"/>
+          </a:xfrm>
+          <a:prstGeom prst="rect">
+            <a:avLst/>
+          </a:prstGeom>
+          <a:noFill/>
+        </p:spPr>
+        <p:txBody>
+          <a:bodyPr wrap="square" anchor="ctr">
             <a:spAutoFit/>
           </a:bodyPr>
           <a:lstStyle/>
@@ -20078,38 +19894,15 @@
               </a:lnSpc>
             </a:pPr>
             <a:r>
-              <a:rPr sz="2000" b="1">
-                <a:solidFill>
-                  <a:srgbClr val="F59E0B"/>
-                </a:solidFill>
-                <a:latin typeface="Microsoft YaHei"/>
-              </a:rPr>
-              <a:t>收尾</a:t>
-            </a:r>
-          </a:p>
-        </p:txBody>
-      </p:sp>
-      <p:sp>
-        <p:nvSpPr>
-          <p:cNvPr id="3" name="TextBox 2"/>
-          <p:cNvSpPr txBox="1"/>
-          <p:nvPr/>
-        </p:nvSpPr>
-        <p:spPr>
-          <a:xfrm>
-            <a:off x="914400" y="2560320"/>
-            <a:ext cx="10332720" cy="960120"/>
-          </a:xfrm>
-          <a:prstGeom prst="rect">
-            <a:avLst/>
-          </a:prstGeom>
-          <a:noFill/>
-        </p:spPr>
-        <p:txBody>
-          <a:bodyPr wrap="square" anchor="t">
-            <a:spAutoFit/>
-          </a:bodyPr>
-          <a:lstStyle/>
+              <a:rPr sz="4000" b="1">
+                <a:solidFill>
+                  <a:srgbClr val="FDE047"/>
+                </a:solidFill>
+                <a:latin typeface="Microsoft YaHei"/>
+              </a:rPr>
+              <a:t>要判断它会不会</a:t>
+            </a:r>
+          </a:p>
           <a:p>
             <a:pPr algn="ctr">
               <a:lnSpc>
@@ -20119,56 +19912,12 @@
             <a:r>
               <a:rPr sz="4000" b="1">
                 <a:solidFill>
-                  <a:srgbClr val="F8FAFC"/>
-                </a:solidFill>
-                <a:latin typeface="Microsoft YaHei"/>
-              </a:rPr>
-              <a:t>三句话</a:t>
-            </a:r>
-          </a:p>
-        </p:txBody>
-      </p:sp>
-      <p:sp>
-        <p:nvSpPr>
-          <p:cNvPr id="4" name="Rectangle 3"/>
-          <p:cNvSpPr/>
-          <p:nvPr/>
-        </p:nvSpPr>
-        <p:spPr>
-          <a:xfrm>
-            <a:off x="0" y="3794760"/>
-            <a:ext cx="12191695" cy="45720"/>
-          </a:xfrm>
-          <a:prstGeom prst="rect">
-            <a:avLst/>
-          </a:prstGeom>
-          <a:solidFill>
-            <a:srgbClr val="5EEAD4"/>
-          </a:solidFill>
-          <a:ln>
-            <a:noFill/>
-          </a:ln>
-          <a:effectLst/>
-        </p:spPr>
-        <p:style>
-          <a:lnRef idx="1">
-            <a:schemeClr val="accent1"/>
-          </a:lnRef>
-          <a:fillRef idx="3">
-            <a:schemeClr val="accent1"/>
-          </a:fillRef>
-          <a:effectRef idx="2">
-            <a:schemeClr val="accent1"/>
-          </a:effectRef>
-          <a:fontRef idx="minor">
-            <a:schemeClr val="lt1"/>
-          </a:fontRef>
-        </p:style>
-        <p:txBody>
-          <a:bodyPr rtlCol="0" anchor="ctr"/>
-          <a:lstStyle/>
-          <a:p>
-            <a:pPr algn="ctr"/>
+                  <a:srgbClr val="FDE047"/>
+                </a:solidFill>
+                <a:latin typeface="Microsoft YaHei"/>
+              </a:rPr>
+              <a:t>得看它做出来的东西，不能只听它解释</a:t>
+            </a:r>
           </a:p>
         </p:txBody>
       </p:sp>
@@ -20368,349 +20117,6 @@
 </file>
 
 <file path=ppt/slides/slide50.xml><?xml version="1.0" encoding="utf-8"?>
-<p:sld xmlns:a="http://schemas.openxmlformats.org/drawingml/2006/main" xmlns:p="http://schemas.openxmlformats.org/presentationml/2006/main" xmlns:r="http://schemas.openxmlformats.org/officeDocument/2006/relationships">
-  <p:cSld>
-    <p:bg>
-      <p:bgPr>
-        <a:solidFill>
-          <a:srgbClr val="0E1428"/>
-        </a:solidFill>
-        <a:effectLst/>
-      </p:bgPr>
-    </p:bg>
-    <p:spTree>
-      <p:nvGrpSpPr>
-        <p:cNvPr id="1" name=""/>
-        <p:cNvGrpSpPr/>
-        <p:nvPr/>
-      </p:nvGrpSpPr>
-      <p:grpSpPr/>
-      <p:sp>
-        <p:nvSpPr>
-          <p:cNvPr id="2" name="TextBox 1"/>
-          <p:cNvSpPr txBox="1"/>
-          <p:nvPr/>
-        </p:nvSpPr>
-        <p:spPr>
-          <a:xfrm>
-            <a:off x="777240" y="457200"/>
-            <a:ext cx="10607040" cy="868680"/>
-          </a:xfrm>
-          <a:prstGeom prst="rect">
-            <a:avLst/>
-          </a:prstGeom>
-          <a:noFill/>
-        </p:spPr>
-        <p:txBody>
-          <a:bodyPr wrap="square" anchor="t">
-            <a:spAutoFit/>
-          </a:bodyPr>
-          <a:lstStyle/>
-          <a:p>
-            <a:pPr algn="l">
-              <a:lnSpc>
-                <a:spcPct val="115000"/>
-              </a:lnSpc>
-            </a:pPr>
-            <a:r>
-              <a:rPr sz="3200" b="1">
-                <a:solidFill>
-                  <a:srgbClr val="F8FAFC"/>
-                </a:solidFill>
-                <a:latin typeface="Microsoft YaHei"/>
-              </a:rPr>
-              <a:t>如果只记三句</a:t>
-            </a:r>
-          </a:p>
-        </p:txBody>
-      </p:sp>
-      <p:sp>
-        <p:nvSpPr>
-          <p:cNvPr id="3" name="Rectangle 2"/>
-          <p:cNvSpPr/>
-          <p:nvPr/>
-        </p:nvSpPr>
-        <p:spPr>
-          <a:xfrm>
-            <a:off x="0" y="1444752"/>
-            <a:ext cx="12191695" cy="27432"/>
-          </a:xfrm>
-          <a:prstGeom prst="rect">
-            <a:avLst/>
-          </a:prstGeom>
-          <a:solidFill>
-            <a:srgbClr val="F59E0B"/>
-          </a:solidFill>
-          <a:ln>
-            <a:noFill/>
-          </a:ln>
-          <a:effectLst/>
-        </p:spPr>
-        <p:style>
-          <a:lnRef idx="1">
-            <a:schemeClr val="accent1"/>
-          </a:lnRef>
-          <a:fillRef idx="3">
-            <a:schemeClr val="accent1"/>
-          </a:fillRef>
-          <a:effectRef idx="2">
-            <a:schemeClr val="accent1"/>
-          </a:effectRef>
-          <a:fontRef idx="minor">
-            <a:schemeClr val="lt1"/>
-          </a:fontRef>
-        </p:style>
-        <p:txBody>
-          <a:bodyPr rtlCol="0" anchor="ctr"/>
-          <a:lstStyle/>
-          <a:p>
-            <a:pPr algn="ctr"/>
-          </a:p>
-        </p:txBody>
-      </p:sp>
-      <p:sp>
-        <p:nvSpPr>
-          <p:cNvPr id="4" name="TextBox 3"/>
-          <p:cNvSpPr txBox="1"/>
-          <p:nvPr/>
-        </p:nvSpPr>
-        <p:spPr>
-          <a:xfrm>
-            <a:off x="914400" y="1828800"/>
-            <a:ext cx="10332720" cy="914400"/>
-          </a:xfrm>
-          <a:prstGeom prst="rect">
-            <a:avLst/>
-          </a:prstGeom>
-          <a:noFill/>
-        </p:spPr>
-        <p:txBody>
-          <a:bodyPr wrap="square" anchor="t">
-            <a:spAutoFit/>
-          </a:bodyPr>
-          <a:lstStyle/>
-          <a:p>
-            <a:pPr algn="l">
-              <a:lnSpc>
-                <a:spcPct val="115000"/>
-              </a:lnSpc>
-            </a:pPr>
-            <a:r>
-              <a:rPr sz="2200" b="0">
-                <a:solidFill>
-                  <a:srgbClr val="F8FAFC"/>
-                </a:solidFill>
-                <a:latin typeface="Microsoft YaHei"/>
-              </a:rPr>
-              <a:t>1　它读过所有书，但</a:t>
-            </a:r>
-            <a:r>
-              <a:rPr sz="2200" b="1">
-                <a:solidFill>
-                  <a:srgbClr val="F8FAFC"/>
-                </a:solidFill>
-                <a:latin typeface="Microsoft YaHei"/>
-              </a:rPr>
-              <a:t>没出过门</a:t>
-            </a:r>
-            <a:r>
-              <a:rPr sz="2200" b="0">
-                <a:solidFill>
-                  <a:srgbClr val="F8FAFC"/>
-                </a:solidFill>
-                <a:latin typeface="Microsoft YaHei"/>
-              </a:rPr>
-              <a:t>，常识会错，编的东西是真诚的</a:t>
-            </a:r>
-          </a:p>
-        </p:txBody>
-      </p:sp>
-      <p:sp>
-        <p:nvSpPr>
-          <p:cNvPr id="5" name="TextBox 4"/>
-          <p:cNvSpPr txBox="1"/>
-          <p:nvPr/>
-        </p:nvSpPr>
-        <p:spPr>
-          <a:xfrm>
-            <a:off x="914400" y="2697480"/>
-            <a:ext cx="10332720" cy="914400"/>
-          </a:xfrm>
-          <a:prstGeom prst="rect">
-            <a:avLst/>
-          </a:prstGeom>
-          <a:noFill/>
-        </p:spPr>
-        <p:txBody>
-          <a:bodyPr wrap="square" anchor="t">
-            <a:spAutoFit/>
-          </a:bodyPr>
-          <a:lstStyle/>
-          <a:p>
-            <a:pPr algn="l">
-              <a:lnSpc>
-                <a:spcPct val="115000"/>
-              </a:lnSpc>
-            </a:pPr>
-            <a:r>
-              <a:rPr sz="2200" b="0">
-                <a:solidFill>
-                  <a:srgbClr val="F8FAFC"/>
-                </a:solidFill>
-                <a:latin typeface="Microsoft YaHei"/>
-              </a:rPr>
-              <a:t>2　它能自己干活了，但需要有人</a:t>
-            </a:r>
-            <a:r>
-              <a:rPr sz="2200" b="1">
-                <a:solidFill>
-                  <a:srgbClr val="F8FAFC"/>
-                </a:solidFill>
-                <a:latin typeface="Microsoft YaHei"/>
-              </a:rPr>
-              <a:t>说清楚要什么、并且看最终结果</a:t>
-            </a:r>
-          </a:p>
-        </p:txBody>
-      </p:sp>
-      <p:sp>
-        <p:nvSpPr>
-          <p:cNvPr id="6" name="TextBox 5"/>
-          <p:cNvSpPr txBox="1"/>
-          <p:nvPr/>
-        </p:nvSpPr>
-        <p:spPr>
-          <a:xfrm>
-            <a:off x="914400" y="3566160"/>
-            <a:ext cx="10332720" cy="914400"/>
-          </a:xfrm>
-          <a:prstGeom prst="rect">
-            <a:avLst/>
-          </a:prstGeom>
-          <a:noFill/>
-        </p:spPr>
-        <p:txBody>
-          <a:bodyPr wrap="square" anchor="t">
-            <a:spAutoFit/>
-          </a:bodyPr>
-          <a:lstStyle/>
-          <a:p>
-            <a:pPr algn="l">
-              <a:lnSpc>
-                <a:spcPct val="115000"/>
-              </a:lnSpc>
-            </a:pPr>
-            <a:r>
-              <a:rPr sz="2200" b="0">
-                <a:solidFill>
-                  <a:srgbClr val="F8FAFC"/>
-                </a:solidFill>
-                <a:latin typeface="Microsoft YaHei"/>
-              </a:rPr>
-              <a:t>3　教这件事没消失，只是</a:t>
-            </a:r>
-            <a:r>
-              <a:rPr sz="2200" b="1">
-                <a:solidFill>
-                  <a:srgbClr val="F8FAFC"/>
-                </a:solidFill>
-                <a:latin typeface="Microsoft YaHei"/>
-              </a:rPr>
-              <a:t>对象多了一个</a:t>
-            </a:r>
-          </a:p>
-        </p:txBody>
-      </p:sp>
-    </p:spTree>
-  </p:cSld>
-  <p:clrMapOvr>
-    <a:masterClrMapping/>
-  </p:clrMapOvr>
-</p:sld>
-</file>
-
-<file path=ppt/slides/slide51.xml><?xml version="1.0" encoding="utf-8"?>
-<p:sld xmlns:a="http://schemas.openxmlformats.org/drawingml/2006/main" xmlns:p="http://schemas.openxmlformats.org/presentationml/2006/main" xmlns:r="http://schemas.openxmlformats.org/officeDocument/2006/relationships">
-  <p:cSld>
-    <p:bg>
-      <p:bgPr>
-        <a:solidFill>
-          <a:srgbClr val="0A1A1A"/>
-        </a:solidFill>
-        <a:effectLst/>
-      </p:bgPr>
-    </p:bg>
-    <p:spTree>
-      <p:nvGrpSpPr>
-        <p:cNvPr id="1" name=""/>
-        <p:cNvGrpSpPr/>
-        <p:nvPr/>
-      </p:nvGrpSpPr>
-      <p:grpSpPr/>
-      <p:sp>
-        <p:nvSpPr>
-          <p:cNvPr id="2" name="TextBox 1"/>
-          <p:cNvSpPr txBox="1"/>
-          <p:nvPr/>
-        </p:nvSpPr>
-        <p:spPr>
-          <a:xfrm>
-            <a:off x="914400" y="2286000"/>
-            <a:ext cx="10332720" cy="1828800"/>
-          </a:xfrm>
-          <a:prstGeom prst="rect">
-            <a:avLst/>
-          </a:prstGeom>
-          <a:noFill/>
-        </p:spPr>
-        <p:txBody>
-          <a:bodyPr wrap="square" anchor="ctr">
-            <a:spAutoFit/>
-          </a:bodyPr>
-          <a:lstStyle/>
-          <a:p>
-            <a:pPr algn="ctr">
-              <a:lnSpc>
-                <a:spcPct val="115000"/>
-              </a:lnSpc>
-            </a:pPr>
-            <a:r>
-              <a:rPr sz="4000" b="1">
-                <a:solidFill>
-                  <a:srgbClr val="FDE047"/>
-                </a:solidFill>
-                <a:latin typeface="Microsoft YaHei"/>
-              </a:rPr>
-              <a:t>要判断它会不会</a:t>
-            </a:r>
-          </a:p>
-          <a:p>
-            <a:pPr algn="ctr">
-              <a:lnSpc>
-                <a:spcPct val="115000"/>
-              </a:lnSpc>
-            </a:pPr>
-            <a:r>
-              <a:rPr sz="4000" b="1">
-                <a:solidFill>
-                  <a:srgbClr val="FDE047"/>
-                </a:solidFill>
-                <a:latin typeface="Microsoft YaHei"/>
-              </a:rPr>
-              <a:t>得看它做出来的东西，不能只听它解释</a:t>
-            </a:r>
-          </a:p>
-        </p:txBody>
-      </p:sp>
-    </p:spTree>
-  </p:cSld>
-  <p:clrMapOvr>
-    <a:masterClrMapping/>
-  </p:clrMapOvr>
-</p:sld>
-</file>
-
-<file path=ppt/slides/slide52.xml><?xml version="1.0" encoding="utf-8"?>
 <p:sld xmlns:a="http://schemas.openxmlformats.org/drawingml/2006/main" xmlns:p="http://schemas.openxmlformats.org/presentationml/2006/main" xmlns:r="http://schemas.openxmlformats.org/officeDocument/2006/relationships">
   <p:cSld>
     <p:bg>
